--- a/static/ppts/G6_Sci_T1_Scientific_Method.pptx
+++ b/static/ppts/G6_Sci_T1_Scientific_Method.pptx
@@ -10,10 +10,9 @@
     <p:sldId id="258" r:id="rId4"/>
     <p:sldId id="259" r:id="rId5"/>
     <p:sldId id="260" r:id="rId6"/>
-    <p:sldId id="261" r:id="rId7"/>
   </p:sldIdLst>
   <p:notesMasterIdLst>
-    <p:notesMasterId r:id="rId8"/>
+    <p:notesMasterId r:id="rId7"/>
   </p:notesMasterIdLst>
   <p:sldSz cx="9144000" cy="5143500"/>
   <p:notesSz cx="5143500" cy="9144000"/>
@@ -901,94 +900,6 @@
 </p:notes>
 </file>
 
-<file path=ppt/notesSlides/notesSlide6.xml><?xml version="1.0" encoding="utf-8"?>
-<p:notes xmlns:a="http://schemas.openxmlformats.org/drawingml/2006/main" xmlns:r="http://schemas.openxmlformats.org/officeDocument/2006/relationships" xmlns:p="http://schemas.openxmlformats.org/presentationml/2006/main">
-  <p:cSld>
-    <p:spTree>
-      <p:nvGrpSpPr>
-        <p:cNvPr id="1" name=""/>
-        <p:cNvGrpSpPr/>
-        <p:nvPr/>
-      </p:nvGrpSpPr>
-      <p:grpSpPr>
-        <a:xfrm>
-          <a:off x="0" y="0"/>
-          <a:ext cx="0" cy="0"/>
-          <a:chOff x="0" y="0"/>
-          <a:chExt cx="0" cy="0"/>
-        </a:xfrm>
-      </p:grpSpPr>
-      <p:sp>
-        <p:nvSpPr>
-          <p:cNvPr id="2" name="Slide Image Placeholder 1"/>
-          <p:cNvSpPr>
-            <a:spLocks noGrp="1" noRot="1" noChangeAspect="1"/>
-          </p:cNvSpPr>
-          <p:nvPr>
-            <p:ph type="sldImg"/>
-          </p:nvPr>
-        </p:nvSpPr>
-        <p:spPr/>
-      </p:sp>
-      <p:sp>
-        <p:nvSpPr>
-          <p:cNvPr id="3" name="Notes Placeholder 2"/>
-          <p:cNvSpPr>
-            <a:spLocks noGrp="1"/>
-          </p:cNvSpPr>
-          <p:nvPr>
-            <p:ph type="body" idx="1"/>
-          </p:nvPr>
-        </p:nvSpPr>
-        <p:spPr/>
-        <p:txBody>
-          <a:bodyPr/>
-          <a:lstStyle/>
-          <a:p>
-            <a:r>
-              <a:rPr lang="en-US" dirty="0"/>
-              <a:t/>
-            </a:r>
-            <a:endParaRPr lang="en-US" dirty="0"/>
-          </a:p>
-        </p:txBody>
-      </p:sp>
-      <p:sp>
-        <p:nvSpPr>
-          <p:cNvPr id="4" name="Slide Number Placeholder 3"/>
-          <p:cNvSpPr>
-            <a:spLocks noGrp="1"/>
-          </p:cNvSpPr>
-          <p:nvPr>
-            <p:ph type="sldNum" sz="quarter" idx="10"/>
-          </p:nvPr>
-        </p:nvSpPr>
-        <p:spPr/>
-        <p:txBody>
-          <a:bodyPr/>
-          <a:lstStyle/>
-          <a:p>
-            <a:fld id="{F7021451-1387-4CA6-816F-3879F97B5CBC}" type="slidenum">
-              <a:rPr lang="en-US"/>
-              <a:t>6</a:t>
-            </a:fld>
-            <a:endParaRPr lang="en-US"/>
-          </a:p>
-        </p:txBody>
-      </p:sp>
-    </p:spTree>
-    <p:extLst>
-      <p:ext uri="{BB962C8B-B14F-4D97-AF65-F5344CB8AC3E}">
-        <p14:creationId xmlns:p14="http://schemas.microsoft.com/office/powerpoint/2010/main" val="1024086991"/>
-      </p:ext>
-    </p:extLst>
-  </p:cSld>
-  <p:clrMapOvr>
-    <a:masterClrMapping/>
-  </p:clrMapOvr>
-</p:notes>
-</file>
-
 <file path=ppt/slideLayouts/slideLayout1.xml><?xml version="1.0" encoding="utf-8"?>
 <p:sldLayout xmlns:a="http://schemas.openxmlformats.org/drawingml/2006/main" xmlns:r="http://schemas.openxmlformats.org/officeDocument/2006/relationships" xmlns:p="http://schemas.openxmlformats.org/presentationml/2006/main" preserve="1">
   <p:cSld name="DEFAULT">
@@ -1302,7 +1213,7 @@
     <p:bg>
       <p:bgPr>
         <a:solidFill>
-          <a:srgbClr val="1A7A6F"/>
+          <a:srgbClr val="1B2A4A"/>
         </a:solidFill>
       </p:bgPr>
     </p:bg>
@@ -1322,14 +1233,34 @@
       </p:grpSpPr>
       <p:sp>
         <p:nvSpPr>
-          <p:cNvPr id="2" name="Text 0"/>
-          <p:cNvSpPr/>
-          <p:nvPr/>
-        </p:nvSpPr>
-        <p:spPr>
-          <a:xfrm>
-            <a:off x="731520" y="1371600"/>
-            <a:ext cx="7680960" cy="1371600"/>
+          <p:cNvPr id="2" name="Shape 0"/>
+          <p:cNvSpPr/>
+          <p:nvPr/>
+        </p:nvSpPr>
+        <p:spPr>
+          <a:xfrm>
+            <a:off x="0" y="0"/>
+            <a:ext cx="109728" cy="5143500"/>
+          </a:xfrm>
+          <a:prstGeom prst="rect">
+            <a:avLst/>
+          </a:prstGeom>
+          <a:solidFill>
+            <a:srgbClr val="2A9D8F"/>
+          </a:solidFill>
+          <a:ln/>
+        </p:spPr>
+      </p:sp>
+      <p:sp>
+        <p:nvSpPr>
+          <p:cNvPr id="3" name="Text 1"/>
+          <p:cNvSpPr/>
+          <p:nvPr/>
+        </p:nvSpPr>
+        <p:spPr>
+          <a:xfrm>
+            <a:off x="731520" y="1280160"/>
+            <a:ext cx="7772400" cy="1371600"/>
           </a:xfrm>
           <a:prstGeom prst="rect">
             <a:avLst/>
@@ -1345,30 +1276,69 @@
               <a:buNone/>
             </a:pPr>
             <a:r>
-              <a:rPr lang="en-US" sz="4000" b="1" dirty="0">
+              <a:rPr lang="en-US" sz="3600" b="1" dirty="0">
                 <a:solidFill>
                   <a:srgbClr val="FFFFFF"/>
+                </a:solidFill>
+                <a:latin typeface="Georgia" pitchFamily="34" charset="0"/>
+                <a:ea typeface="Georgia" pitchFamily="34" charset="-122"/>
+                <a:cs typeface="Georgia" pitchFamily="34" charset="-120"/>
+              </a:rPr>
+              <a:t>The Scientific Method</a:t>
+            </a:r>
+            <a:endParaRPr lang="en-US" sz="3600" dirty="0"/>
+          </a:p>
+        </p:txBody>
+      </p:sp>
+      <p:sp>
+        <p:nvSpPr>
+          <p:cNvPr id="4" name="Text 2"/>
+          <p:cNvSpPr/>
+          <p:nvPr/>
+        </p:nvSpPr>
+        <p:spPr>
+          <a:xfrm>
+            <a:off x="731520" y="2743200"/>
+            <a:ext cx="7772400" cy="548640"/>
+          </a:xfrm>
+          <a:prstGeom prst="rect">
+            <a:avLst/>
+          </a:prstGeom>
+          <a:noFill/>
+          <a:ln/>
+        </p:spPr>
+        <p:txBody>
+          <a:bodyPr wrap="square" rtlCol="0" anchor="ctr"/>
+          <a:lstStyle/>
+          <a:p>
+            <a:pPr indent="0" marL="0">
+              <a:buNone/>
+            </a:pPr>
+            <a:r>
+              <a:rPr lang="en-US" sz="1600" dirty="0">
+                <a:solidFill>
+                  <a:srgbClr val="9B9690"/>
                 </a:solidFill>
                 <a:latin typeface="Calibri" pitchFamily="34" charset="0"/>
                 <a:ea typeface="Calibri" pitchFamily="34" charset="-122"/>
                 <a:cs typeface="Calibri" pitchFamily="34" charset="-120"/>
               </a:rPr>
-              <a:t>The Scientific Method</a:t>
-            </a:r>
-            <a:endParaRPr lang="en-US" sz="4000" dirty="0"/>
-          </a:p>
-        </p:txBody>
-      </p:sp>
-      <p:sp>
-        <p:nvSpPr>
-          <p:cNvPr id="3" name="Text 1"/>
-          <p:cNvSpPr/>
-          <p:nvPr/>
-        </p:nvSpPr>
-        <p:spPr>
-          <a:xfrm>
-            <a:off x="731520" y="2926080"/>
-            <a:ext cx="7680960" cy="548640"/>
+              <a:t>G6 Science · Scientific Skills</a:t>
+            </a:r>
+            <a:endParaRPr lang="en-US" sz="1600" dirty="0"/>
+          </a:p>
+        </p:txBody>
+      </p:sp>
+      <p:sp>
+        <p:nvSpPr>
+          <p:cNvPr id="5" name="Text 3"/>
+          <p:cNvSpPr/>
+          <p:nvPr/>
+        </p:nvSpPr>
+        <p:spPr>
+          <a:xfrm>
+            <a:off x="731520" y="4389120"/>
+            <a:ext cx="7772400" cy="457200"/>
           </a:xfrm>
           <a:prstGeom prst="rect">
             <a:avLst/>
@@ -1384,17 +1354,17 @@
               <a:buNone/>
             </a:pPr>
             <a:r>
-              <a:rPr lang="en-US" sz="1600" i="1" dirty="0">
-                <a:solidFill>
-                  <a:srgbClr val="FFFFFF"/>
+              <a:rPr lang="en-US" sz="1000" dirty="0">
+                <a:solidFill>
+                  <a:srgbClr val="6B6660"/>
                 </a:solidFill>
                 <a:latin typeface="Calibri" pitchFamily="34" charset="0"/>
                 <a:ea typeface="Calibri" pitchFamily="34" charset="-122"/>
                 <a:cs typeface="Calibri" pitchFamily="34" charset="-120"/>
               </a:rPr>
-              <a:t>Grade 6 Science · Mr Zocchi</a:t>
-            </a:r>
-            <a:endParaRPr lang="en-US" sz="1600" dirty="0"/>
+              <a:t>Mr Zocchi · mrzocchi.com</a:t>
+            </a:r>
+            <a:endParaRPr lang="en-US" sz="1000" dirty="0"/>
           </a:p>
         </p:txBody>
       </p:sp>
@@ -1409,6 +1379,13 @@
 <file path=ppt/slides/slide2.xml><?xml version="1.0" encoding="utf-8"?>
 <p:sld xmlns:a="http://schemas.openxmlformats.org/drawingml/2006/main" xmlns:r="http://schemas.openxmlformats.org/officeDocument/2006/relationships" xmlns:p="http://schemas.openxmlformats.org/presentationml/2006/main">
   <p:cSld name="Slide 2">
+    <p:bg>
+      <p:bgPr>
+        <a:solidFill>
+          <a:srgbClr val="FFFFFF"/>
+        </a:solidFill>
+      </p:bgPr>
+    </p:bg>
     <p:spTree>
       <p:nvGrpSpPr>
         <p:cNvPr id="1" name=""/>
@@ -1432,13 +1409,13 @@
         <p:spPr>
           <a:xfrm>
             <a:off x="0" y="0"/>
-            <a:ext cx="9144000" cy="548640"/>
-          </a:xfrm>
-          <a:prstGeom prst="rect">
-            <a:avLst/>
-          </a:prstGeom>
-          <a:solidFill>
-            <a:srgbClr val="1A7A6F"/>
+            <a:ext cx="9144000" cy="54864"/>
+          </a:xfrm>
+          <a:prstGeom prst="rect">
+            <a:avLst/>
+          </a:prstGeom>
+          <a:solidFill>
+            <a:srgbClr val="2A9D8F"/>
           </a:solidFill>
           <a:ln/>
         </p:spPr>
@@ -1451,8 +1428,8 @@
         </p:nvSpPr>
         <p:spPr>
           <a:xfrm>
-            <a:off x="457200" y="45720"/>
-            <a:ext cx="8229600" cy="457200"/>
+            <a:off x="548640" y="274320"/>
+            <a:ext cx="8046720" cy="640080"/>
           </a:xfrm>
           <a:prstGeom prst="rect">
             <a:avLst/>
@@ -1461,125 +1438,186 @@
           <a:ln/>
         </p:spPr>
         <p:txBody>
-          <a:bodyPr wrap="square" rtlCol="0" anchor="ctr"/>
+          <a:bodyPr wrap="square" lIns="0" tIns="0" rIns="0" bIns="0" rtlCol="0" anchor="ctr"/>
           <a:lstStyle/>
           <a:p>
             <a:pPr indent="0" marL="0">
               <a:buNone/>
             </a:pPr>
             <a:r>
-              <a:rPr lang="en-US" sz="1800" b="1" dirty="0">
-                <a:solidFill>
-                  <a:srgbClr val="FFFFFF"/>
+              <a:rPr lang="en-US" sz="2600" b="1" dirty="0">
+                <a:solidFill>
+                  <a:srgbClr val="1B2A4A"/>
+                </a:solidFill>
+                <a:latin typeface="Georgia" pitchFamily="34" charset="0"/>
+                <a:ea typeface="Georgia" pitchFamily="34" charset="-122"/>
+                <a:cs typeface="Georgia" pitchFamily="34" charset="-120"/>
+              </a:rPr>
+              <a:t>What is the Scientific Method?</a:t>
+            </a:r>
+            <a:endParaRPr lang="en-US" sz="2600" dirty="0"/>
+          </a:p>
+        </p:txBody>
+      </p:sp>
+      <p:sp>
+        <p:nvSpPr>
+          <p:cNvPr id="4" name="Text 2"/>
+          <p:cNvSpPr/>
+          <p:nvPr/>
+        </p:nvSpPr>
+        <p:spPr>
+          <a:xfrm>
+            <a:off x="548640" y="1097280"/>
+            <a:ext cx="8046720" cy="3474720"/>
+          </a:xfrm>
+          <a:prstGeom prst="rect">
+            <a:avLst/>
+          </a:prstGeom>
+          <a:noFill/>
+          <a:ln/>
+        </p:spPr>
+        <p:txBody>
+          <a:bodyPr wrap="square" rtlCol="0" anchor="t"/>
+          <a:lstStyle/>
+          <a:p>
+            <a:pPr marL="342900" indent="-342900">
+              <a:spcAft>
+                <a:spcPts val="800"/>
+              </a:spcAft>
+              <a:buSzPct val="100000"/>
+              <a:buChar char="•"/>
+            </a:pPr>
+            <a:r>
+              <a:rPr lang="en-US" sz="1500" dirty="0">
+                <a:solidFill>
+                  <a:srgbClr val="3D3A36"/>
                 </a:solidFill>
                 <a:latin typeface="Calibri" pitchFamily="34" charset="0"/>
                 <a:ea typeface="Calibri" pitchFamily="34" charset="-122"/>
                 <a:cs typeface="Calibri" pitchFamily="34" charset="-120"/>
               </a:rPr>
-              <a:t>What is science?</a:t>
-            </a:r>
-            <a:endParaRPr lang="en-US" sz="1800" dirty="0"/>
-          </a:p>
-        </p:txBody>
-      </p:sp>
-      <p:sp>
-        <p:nvSpPr>
-          <p:cNvPr id="4" name="Text 2"/>
-          <p:cNvSpPr/>
-          <p:nvPr/>
-        </p:nvSpPr>
-        <p:spPr>
-          <a:xfrm>
-            <a:off x="731520" y="1097280"/>
-            <a:ext cx="7680960" cy="3200400"/>
-          </a:xfrm>
-          <a:prstGeom prst="rect">
-            <a:avLst/>
-          </a:prstGeom>
-          <a:noFill/>
-          <a:ln/>
-        </p:spPr>
-        <p:txBody>
-          <a:bodyPr wrap="square" rtlCol="0" anchor="ctr"/>
-          <a:lstStyle/>
-          <a:p>
-            <a:pPr indent="0" marL="0">
-              <a:buNone/>
-            </a:pPr>
-            <a:r>
-              <a:rPr lang="en-US" sz="1600" dirty="0">
-                <a:solidFill>
-                  <a:srgbClr val="363636"/>
+              <a:t>A step-by-step process scientists use to investigate questions</a:t>
+            </a:r>
+            <a:endParaRPr lang="en-US" sz="1500" dirty="0"/>
+          </a:p>
+          <a:p>
+            <a:pPr marL="342900" indent="-342900">
+              <a:spcAft>
+                <a:spcPts val="800"/>
+              </a:spcAft>
+              <a:buSzPct val="100000"/>
+              <a:buChar char="•"/>
+            </a:pPr>
+            <a:r>
+              <a:rPr lang="en-US" sz="1500" dirty="0">
+                <a:solidFill>
+                  <a:srgbClr val="3D3A36"/>
                 </a:solidFill>
                 <a:latin typeface="Calibri" pitchFamily="34" charset="0"/>
                 <a:ea typeface="Calibri" pitchFamily="34" charset="-122"/>
                 <a:cs typeface="Calibri" pitchFamily="34" charset="-120"/>
               </a:rPr>
-              <a:t>Content for: What is science?</a:t>
-            </a:r>
-            <a:endParaRPr lang="en-US" sz="1600" dirty="0"/>
-          </a:p>
-          <a:p>
-            <a:pPr indent="0" marL="0">
-              <a:buNone/>
-            </a:pPr>
-            <a:endParaRPr lang="en-US" sz="1600" dirty="0"/>
-          </a:p>
-          <a:p>
-            <a:pPr indent="0" marL="0">
-              <a:buNone/>
-            </a:pPr>
-            <a:r>
-              <a:rPr lang="en-US" sz="1600" dirty="0">
-                <a:solidFill>
-                  <a:srgbClr val="363636"/>
+              <a:t>It helps us test ideas fairly and draw reliable conclusions</a:t>
+            </a:r>
+            <a:endParaRPr lang="en-US" sz="1500" dirty="0"/>
+          </a:p>
+          <a:p>
+            <a:pPr marL="342900" indent="-342900">
+              <a:spcAft>
+                <a:spcPts val="800"/>
+              </a:spcAft>
+              <a:buSzPct val="100000"/>
+              <a:buChar char="•"/>
+            </a:pPr>
+            <a:r>
+              <a:rPr lang="en-US" sz="1500" dirty="0">
+                <a:solidFill>
+                  <a:srgbClr val="3D3A36"/>
                 </a:solidFill>
                 <a:latin typeface="Calibri" pitchFamily="34" charset="0"/>
                 <a:ea typeface="Calibri" pitchFamily="34" charset="-122"/>
                 <a:cs typeface="Calibri" pitchFamily="34" charset="-120"/>
               </a:rPr>
-              <a:t>Key points will be covered in class.</a:t>
-            </a:r>
-            <a:endParaRPr lang="en-US" sz="1600" dirty="0"/>
-          </a:p>
-        </p:txBody>
-      </p:sp>
-      <p:sp>
-        <p:nvSpPr>
-          <p:cNvPr id="5" name="Text 3"/>
-          <p:cNvSpPr/>
-          <p:nvPr/>
-        </p:nvSpPr>
-        <p:spPr>
-          <a:xfrm>
-            <a:off x="7772400" y="4663440"/>
-            <a:ext cx="1097280" cy="365760"/>
-          </a:xfrm>
-          <a:prstGeom prst="rect">
-            <a:avLst/>
-          </a:prstGeom>
-          <a:noFill/>
-          <a:ln/>
-        </p:spPr>
-        <p:txBody>
-          <a:bodyPr wrap="square" rtlCol="0" anchor="ctr"/>
-          <a:lstStyle/>
-          <a:p>
-            <a:pPr algn="r" indent="0" marL="0">
-              <a:buNone/>
-            </a:pPr>
-            <a:r>
-              <a:rPr lang="en-US" sz="1000" dirty="0">
-                <a:solidFill>
-                  <a:srgbClr val="999999"/>
+              <a:t>The steps: Question → Research → Hypothesis → Experiment → Analyse → Conclude</a:t>
+            </a:r>
+            <a:endParaRPr lang="en-US" sz="1500" dirty="0"/>
+          </a:p>
+          <a:p>
+            <a:pPr marL="342900" indent="-342900">
+              <a:spcAft>
+                <a:spcPts val="800"/>
+              </a:spcAft>
+              <a:buSzPct val="100000"/>
+              <a:buChar char="•"/>
+            </a:pPr>
+            <a:r>
+              <a:rPr lang="en-US" sz="1500" dirty="0">
+                <a:solidFill>
+                  <a:srgbClr val="3D3A36"/>
                 </a:solidFill>
                 <a:latin typeface="Calibri" pitchFamily="34" charset="0"/>
                 <a:ea typeface="Calibri" pitchFamily="34" charset="-122"/>
                 <a:cs typeface="Calibri" pitchFamily="34" charset="-120"/>
               </a:rPr>
-              <a:t>2 / 6</a:t>
-            </a:r>
-            <a:endParaRPr lang="en-US" sz="1000" dirty="0"/>
+              <a:t>Not always linear — scientists often repeat steps</a:t>
+            </a:r>
+            <a:endParaRPr lang="en-US" sz="1500" dirty="0"/>
+          </a:p>
+        </p:txBody>
+      </p:sp>
+      <p:sp>
+        <p:nvSpPr>
+          <p:cNvPr id="5" name="Shape 3"/>
+          <p:cNvSpPr/>
+          <p:nvPr/>
+        </p:nvSpPr>
+        <p:spPr>
+          <a:xfrm>
+            <a:off x="548640" y="4754880"/>
+            <a:ext cx="8046720" cy="9144"/>
+          </a:xfrm>
+          <a:prstGeom prst="rect">
+            <a:avLst/>
+          </a:prstGeom>
+          <a:solidFill>
+            <a:srgbClr val="F3F1EE"/>
+          </a:solidFill>
+          <a:ln/>
+        </p:spPr>
+      </p:sp>
+      <p:sp>
+        <p:nvSpPr>
+          <p:cNvPr id="6" name="Text 4"/>
+          <p:cNvSpPr/>
+          <p:nvPr/>
+        </p:nvSpPr>
+        <p:spPr>
+          <a:xfrm>
+            <a:off x="548640" y="4800600"/>
+            <a:ext cx="3657600" cy="274320"/>
+          </a:xfrm>
+          <a:prstGeom prst="rect">
+            <a:avLst/>
+          </a:prstGeom>
+          <a:noFill/>
+          <a:ln/>
+        </p:spPr>
+        <p:txBody>
+          <a:bodyPr wrap="square" rtlCol="0" anchor="ctr"/>
+          <a:lstStyle/>
+          <a:p>
+            <a:pPr indent="0" marL="0">
+              <a:buNone/>
+            </a:pPr>
+            <a:r>
+              <a:rPr lang="en-US" sz="800" dirty="0">
+                <a:solidFill>
+                  <a:srgbClr val="9B9690"/>
+                </a:solidFill>
+              </a:rPr>
+              <a:t>mrzocchi.com</a:t>
+            </a:r>
+            <a:endParaRPr lang="en-US" sz="800" dirty="0"/>
           </a:p>
         </p:txBody>
       </p:sp>
@@ -1594,6 +1632,13 @@
 <file path=ppt/slides/slide3.xml><?xml version="1.0" encoding="utf-8"?>
 <p:sld xmlns:a="http://schemas.openxmlformats.org/drawingml/2006/main" xmlns:r="http://schemas.openxmlformats.org/officeDocument/2006/relationships" xmlns:p="http://schemas.openxmlformats.org/presentationml/2006/main">
   <p:cSld name="Slide 3">
+    <p:bg>
+      <p:bgPr>
+        <a:solidFill>
+          <a:srgbClr val="FFFFFF"/>
+        </a:solidFill>
+      </p:bgPr>
+    </p:bg>
     <p:spTree>
       <p:nvGrpSpPr>
         <p:cNvPr id="1" name=""/>
@@ -1617,13 +1662,13 @@
         <p:spPr>
           <a:xfrm>
             <a:off x="0" y="0"/>
-            <a:ext cx="9144000" cy="548640"/>
-          </a:xfrm>
-          <a:prstGeom prst="rect">
-            <a:avLst/>
-          </a:prstGeom>
-          <a:solidFill>
-            <a:srgbClr val="1A7A6F"/>
+            <a:ext cx="9144000" cy="54864"/>
+          </a:xfrm>
+          <a:prstGeom prst="rect">
+            <a:avLst/>
+          </a:prstGeom>
+          <a:solidFill>
+            <a:srgbClr val="2A9D8F"/>
           </a:solidFill>
           <a:ln/>
         </p:spPr>
@@ -1636,8 +1681,8 @@
         </p:nvSpPr>
         <p:spPr>
           <a:xfrm>
-            <a:off x="457200" y="45720"/>
-            <a:ext cx="8229600" cy="457200"/>
+            <a:off x="548640" y="274320"/>
+            <a:ext cx="8046720" cy="640080"/>
           </a:xfrm>
           <a:prstGeom prst="rect">
             <a:avLst/>
@@ -1646,125 +1691,249 @@
           <a:ln/>
         </p:spPr>
         <p:txBody>
-          <a:bodyPr wrap="square" rtlCol="0" anchor="ctr"/>
+          <a:bodyPr wrap="square" lIns="0" tIns="0" rIns="0" bIns="0" rtlCol="0" anchor="ctr"/>
           <a:lstStyle/>
           <a:p>
             <a:pPr indent="0" marL="0">
               <a:buNone/>
             </a:pPr>
             <a:r>
-              <a:rPr lang="en-US" sz="1800" b="1" dirty="0">
-                <a:solidFill>
-                  <a:srgbClr val="FFFFFF"/>
+              <a:rPr lang="en-US" sz="2600" b="1" dirty="0">
+                <a:solidFill>
+                  <a:srgbClr val="1B2A4A"/>
+                </a:solidFill>
+                <a:latin typeface="Georgia" pitchFamily="34" charset="0"/>
+                <a:ea typeface="Georgia" pitchFamily="34" charset="-122"/>
+                <a:cs typeface="Georgia" pitchFamily="34" charset="-120"/>
+              </a:rPr>
+              <a:t>The Steps in Detail</a:t>
+            </a:r>
+            <a:endParaRPr lang="en-US" sz="2600" dirty="0"/>
+          </a:p>
+        </p:txBody>
+      </p:sp>
+      <p:sp>
+        <p:nvSpPr>
+          <p:cNvPr id="4" name="Text 2"/>
+          <p:cNvSpPr/>
+          <p:nvPr/>
+        </p:nvSpPr>
+        <p:spPr>
+          <a:xfrm>
+            <a:off x="548640" y="1097280"/>
+            <a:ext cx="8046720" cy="3474720"/>
+          </a:xfrm>
+          <a:prstGeom prst="rect">
+            <a:avLst/>
+          </a:prstGeom>
+          <a:noFill/>
+          <a:ln/>
+        </p:spPr>
+        <p:txBody>
+          <a:bodyPr wrap="square" rtlCol="0" anchor="t"/>
+          <a:lstStyle/>
+          <a:p>
+            <a:pPr marL="342900" indent="-342900">
+              <a:spcAft>
+                <a:spcPts val="800"/>
+              </a:spcAft>
+              <a:buSzPct val="100000"/>
+              <a:buChar char="•"/>
+            </a:pPr>
+            <a:r>
+              <a:rPr lang="en-US" sz="1500" dirty="0">
+                <a:solidFill>
+                  <a:srgbClr val="3D3A36"/>
                 </a:solidFill>
                 <a:latin typeface="Calibri" pitchFamily="34" charset="0"/>
                 <a:ea typeface="Calibri" pitchFamily="34" charset="-122"/>
                 <a:cs typeface="Calibri" pitchFamily="34" charset="-120"/>
               </a:rPr>
-              <a:t>Steps of the method</a:t>
-            </a:r>
-            <a:endParaRPr lang="en-US" sz="1800" dirty="0"/>
-          </a:p>
-        </p:txBody>
-      </p:sp>
-      <p:sp>
-        <p:nvSpPr>
-          <p:cNvPr id="4" name="Text 2"/>
-          <p:cNvSpPr/>
-          <p:nvPr/>
-        </p:nvSpPr>
-        <p:spPr>
-          <a:xfrm>
-            <a:off x="731520" y="1097280"/>
-            <a:ext cx="7680960" cy="3200400"/>
-          </a:xfrm>
-          <a:prstGeom prst="rect">
-            <a:avLst/>
-          </a:prstGeom>
-          <a:noFill/>
-          <a:ln/>
-        </p:spPr>
-        <p:txBody>
-          <a:bodyPr wrap="square" rtlCol="0" anchor="ctr"/>
-          <a:lstStyle/>
-          <a:p>
-            <a:pPr indent="0" marL="0">
-              <a:buNone/>
-            </a:pPr>
-            <a:r>
-              <a:rPr lang="en-US" sz="1600" dirty="0">
-                <a:solidFill>
-                  <a:srgbClr val="363636"/>
+              <a:t>1. ASK A QUESTION — observe something and wonder why</a:t>
+            </a:r>
+            <a:endParaRPr lang="en-US" sz="1500" dirty="0"/>
+          </a:p>
+          <a:p>
+            <a:pPr marL="342900" indent="-342900">
+              <a:spcAft>
+                <a:spcPts val="800"/>
+              </a:spcAft>
+              <a:buSzPct val="100000"/>
+              <a:buChar char="•"/>
+            </a:pPr>
+            <a:r>
+              <a:rPr lang="en-US" sz="1500" dirty="0">
+                <a:solidFill>
+                  <a:srgbClr val="3D3A36"/>
                 </a:solidFill>
                 <a:latin typeface="Calibri" pitchFamily="34" charset="0"/>
                 <a:ea typeface="Calibri" pitchFamily="34" charset="-122"/>
                 <a:cs typeface="Calibri" pitchFamily="34" charset="-120"/>
               </a:rPr>
-              <a:t>Content for: Steps of the method</a:t>
-            </a:r>
-            <a:endParaRPr lang="en-US" sz="1600" dirty="0"/>
-          </a:p>
-          <a:p>
-            <a:pPr indent="0" marL="0">
-              <a:buNone/>
-            </a:pPr>
-            <a:endParaRPr lang="en-US" sz="1600" dirty="0"/>
-          </a:p>
-          <a:p>
-            <a:pPr indent="0" marL="0">
-              <a:buNone/>
-            </a:pPr>
-            <a:r>
-              <a:rPr lang="en-US" sz="1600" dirty="0">
-                <a:solidFill>
-                  <a:srgbClr val="363636"/>
+              <a:t>2. RESEARCH — find out what is already known</a:t>
+            </a:r>
+            <a:endParaRPr lang="en-US" sz="1500" dirty="0"/>
+          </a:p>
+          <a:p>
+            <a:pPr marL="342900" indent="-342900">
+              <a:spcAft>
+                <a:spcPts val="800"/>
+              </a:spcAft>
+              <a:buSzPct val="100000"/>
+              <a:buChar char="•"/>
+            </a:pPr>
+            <a:r>
+              <a:rPr lang="en-US" sz="1500" dirty="0">
+                <a:solidFill>
+                  <a:srgbClr val="3D3A36"/>
                 </a:solidFill>
                 <a:latin typeface="Calibri" pitchFamily="34" charset="0"/>
                 <a:ea typeface="Calibri" pitchFamily="34" charset="-122"/>
                 <a:cs typeface="Calibri" pitchFamily="34" charset="-120"/>
               </a:rPr>
-              <a:t>Key points will be covered in class.</a:t>
-            </a:r>
-            <a:endParaRPr lang="en-US" sz="1600" dirty="0"/>
-          </a:p>
-        </p:txBody>
-      </p:sp>
-      <p:sp>
-        <p:nvSpPr>
-          <p:cNvPr id="5" name="Text 3"/>
-          <p:cNvSpPr/>
-          <p:nvPr/>
-        </p:nvSpPr>
-        <p:spPr>
-          <a:xfrm>
-            <a:off x="7772400" y="4663440"/>
-            <a:ext cx="1097280" cy="365760"/>
-          </a:xfrm>
-          <a:prstGeom prst="rect">
-            <a:avLst/>
-          </a:prstGeom>
-          <a:noFill/>
-          <a:ln/>
-        </p:spPr>
-        <p:txBody>
-          <a:bodyPr wrap="square" rtlCol="0" anchor="ctr"/>
-          <a:lstStyle/>
-          <a:p>
-            <a:pPr algn="r" indent="0" marL="0">
-              <a:buNone/>
-            </a:pPr>
-            <a:r>
-              <a:rPr lang="en-US" sz="1000" dirty="0">
-                <a:solidFill>
-                  <a:srgbClr val="999999"/>
+              <a:t>3. HYPOTHESIS — make a testable prediction (If... then... because...)</a:t>
+            </a:r>
+            <a:endParaRPr lang="en-US" sz="1500" dirty="0"/>
+          </a:p>
+          <a:p>
+            <a:pPr marL="342900" indent="-342900">
+              <a:spcAft>
+                <a:spcPts val="800"/>
+              </a:spcAft>
+              <a:buSzPct val="100000"/>
+              <a:buChar char="•"/>
+            </a:pPr>
+            <a:r>
+              <a:rPr lang="en-US" sz="1500" dirty="0">
+                <a:solidFill>
+                  <a:srgbClr val="3D3A36"/>
                 </a:solidFill>
                 <a:latin typeface="Calibri" pitchFamily="34" charset="0"/>
                 <a:ea typeface="Calibri" pitchFamily="34" charset="-122"/>
                 <a:cs typeface="Calibri" pitchFamily="34" charset="-120"/>
               </a:rPr>
-              <a:t>3 / 6</a:t>
-            </a:r>
-            <a:endParaRPr lang="en-US" sz="1000" dirty="0"/>
+              <a:t>4. EXPERIMENT — design a fair test with one variable changed</a:t>
+            </a:r>
+            <a:endParaRPr lang="en-US" sz="1500" dirty="0"/>
+          </a:p>
+          <a:p>
+            <a:pPr marL="342900" indent="-342900">
+              <a:spcAft>
+                <a:spcPts val="800"/>
+              </a:spcAft>
+              <a:buSzPct val="100000"/>
+              <a:buChar char="•"/>
+            </a:pPr>
+            <a:r>
+              <a:rPr lang="en-US" sz="1500" dirty="0">
+                <a:solidFill>
+                  <a:srgbClr val="3D3A36"/>
+                </a:solidFill>
+                <a:latin typeface="Calibri" pitchFamily="34" charset="0"/>
+                <a:ea typeface="Calibri" pitchFamily="34" charset="-122"/>
+                <a:cs typeface="Calibri" pitchFamily="34" charset="-120"/>
+              </a:rPr>
+              <a:t>5. COLLECT DATA — record measurements and observations</a:t>
+            </a:r>
+            <a:endParaRPr lang="en-US" sz="1500" dirty="0"/>
+          </a:p>
+          <a:p>
+            <a:pPr marL="342900" indent="-342900">
+              <a:spcAft>
+                <a:spcPts val="800"/>
+              </a:spcAft>
+              <a:buSzPct val="100000"/>
+              <a:buChar char="•"/>
+            </a:pPr>
+            <a:r>
+              <a:rPr lang="en-US" sz="1500" dirty="0">
+                <a:solidFill>
+                  <a:srgbClr val="3D3A36"/>
+                </a:solidFill>
+                <a:latin typeface="Calibri" pitchFamily="34" charset="0"/>
+                <a:ea typeface="Calibri" pitchFamily="34" charset="-122"/>
+                <a:cs typeface="Calibri" pitchFamily="34" charset="-120"/>
+              </a:rPr>
+              <a:t>6. ANALYSE — look for patterns in your data</a:t>
+            </a:r>
+            <a:endParaRPr lang="en-US" sz="1500" dirty="0"/>
+          </a:p>
+          <a:p>
+            <a:pPr marL="342900" indent="-342900">
+              <a:spcAft>
+                <a:spcPts val="800"/>
+              </a:spcAft>
+              <a:buSzPct val="100000"/>
+              <a:buChar char="•"/>
+            </a:pPr>
+            <a:r>
+              <a:rPr lang="en-US" sz="1500" dirty="0">
+                <a:solidFill>
+                  <a:srgbClr val="3D3A36"/>
+                </a:solidFill>
+                <a:latin typeface="Calibri" pitchFamily="34" charset="0"/>
+                <a:ea typeface="Calibri" pitchFamily="34" charset="-122"/>
+                <a:cs typeface="Calibri" pitchFamily="34" charset="-120"/>
+              </a:rPr>
+              <a:t>7. CONCLUDE — does your data support your hypothesis?</a:t>
+            </a:r>
+            <a:endParaRPr lang="en-US" sz="1500" dirty="0"/>
+          </a:p>
+        </p:txBody>
+      </p:sp>
+      <p:sp>
+        <p:nvSpPr>
+          <p:cNvPr id="5" name="Shape 3"/>
+          <p:cNvSpPr/>
+          <p:nvPr/>
+        </p:nvSpPr>
+        <p:spPr>
+          <a:xfrm>
+            <a:off x="548640" y="4754880"/>
+            <a:ext cx="8046720" cy="9144"/>
+          </a:xfrm>
+          <a:prstGeom prst="rect">
+            <a:avLst/>
+          </a:prstGeom>
+          <a:solidFill>
+            <a:srgbClr val="F3F1EE"/>
+          </a:solidFill>
+          <a:ln/>
+        </p:spPr>
+      </p:sp>
+      <p:sp>
+        <p:nvSpPr>
+          <p:cNvPr id="6" name="Text 4"/>
+          <p:cNvSpPr/>
+          <p:nvPr/>
+        </p:nvSpPr>
+        <p:spPr>
+          <a:xfrm>
+            <a:off x="548640" y="4800600"/>
+            <a:ext cx="3657600" cy="274320"/>
+          </a:xfrm>
+          <a:prstGeom prst="rect">
+            <a:avLst/>
+          </a:prstGeom>
+          <a:noFill/>
+          <a:ln/>
+        </p:spPr>
+        <p:txBody>
+          <a:bodyPr wrap="square" rtlCol="0" anchor="ctr"/>
+          <a:lstStyle/>
+          <a:p>
+            <a:pPr indent="0" marL="0">
+              <a:buNone/>
+            </a:pPr>
+            <a:r>
+              <a:rPr lang="en-US" sz="800" dirty="0">
+                <a:solidFill>
+                  <a:srgbClr val="9B9690"/>
+                </a:solidFill>
+              </a:rPr>
+              <a:t>mrzocchi.com</a:t>
+            </a:r>
+            <a:endParaRPr lang="en-US" sz="800" dirty="0"/>
           </a:p>
         </p:txBody>
       </p:sp>
@@ -1779,6 +1948,13 @@
 <file path=ppt/slides/slide4.xml><?xml version="1.0" encoding="utf-8"?>
 <p:sld xmlns:a="http://schemas.openxmlformats.org/drawingml/2006/main" xmlns:r="http://schemas.openxmlformats.org/officeDocument/2006/relationships" xmlns:p="http://schemas.openxmlformats.org/presentationml/2006/main">
   <p:cSld name="Slide 4">
+    <p:bg>
+      <p:bgPr>
+        <a:solidFill>
+          <a:srgbClr val="FAF8F5"/>
+        </a:solidFill>
+      </p:bgPr>
+    </p:bg>
     <p:spTree>
       <p:nvGrpSpPr>
         <p:cNvPr id="1" name=""/>
@@ -1802,13 +1978,13 @@
         <p:spPr>
           <a:xfrm>
             <a:off x="0" y="0"/>
-            <a:ext cx="9144000" cy="548640"/>
-          </a:xfrm>
-          <a:prstGeom prst="rect">
-            <a:avLst/>
-          </a:prstGeom>
-          <a:solidFill>
-            <a:srgbClr val="1A7A6F"/>
+            <a:ext cx="9144000" cy="54864"/>
+          </a:xfrm>
+          <a:prstGeom prst="rect">
+            <a:avLst/>
+          </a:prstGeom>
+          <a:solidFill>
+            <a:srgbClr val="2A9D8F"/>
           </a:solidFill>
           <a:ln/>
         </p:spPr>
@@ -1821,8 +1997,94 @@
         </p:nvSpPr>
         <p:spPr>
           <a:xfrm>
-            <a:off x="457200" y="45720"/>
-            <a:ext cx="8229600" cy="457200"/>
+            <a:off x="548640" y="274320"/>
+            <a:ext cx="8046720" cy="640080"/>
+          </a:xfrm>
+          <a:prstGeom prst="rect">
+            <a:avLst/>
+          </a:prstGeom>
+          <a:noFill/>
+          <a:ln/>
+        </p:spPr>
+        <p:txBody>
+          <a:bodyPr wrap="square" lIns="0" tIns="0" rIns="0" bIns="0" rtlCol="0" anchor="ctr"/>
+          <a:lstStyle/>
+          <a:p>
+            <a:pPr indent="0" marL="0">
+              <a:buNone/>
+            </a:pPr>
+            <a:r>
+              <a:rPr lang="en-US" sz="2600" b="1" dirty="0">
+                <a:solidFill>
+                  <a:srgbClr val="1B2A4A"/>
+                </a:solidFill>
+                <a:latin typeface="Georgia" pitchFamily="34" charset="0"/>
+                <a:ea typeface="Georgia" pitchFamily="34" charset="-122"/>
+                <a:cs typeface="Georgia" pitchFamily="34" charset="-120"/>
+              </a:rPr>
+              <a:t>Key Terms</a:t>
+            </a:r>
+            <a:endParaRPr lang="en-US" sz="2600" dirty="0"/>
+          </a:p>
+        </p:txBody>
+      </p:sp>
+      <p:sp>
+        <p:nvSpPr>
+          <p:cNvPr id="4" name="Shape 2"/>
+          <p:cNvSpPr/>
+          <p:nvPr/>
+        </p:nvSpPr>
+        <p:spPr>
+          <a:xfrm>
+            <a:off x="548640" y="1097280"/>
+            <a:ext cx="3749040" cy="594360"/>
+          </a:xfrm>
+          <a:prstGeom prst="rect">
+            <a:avLst/>
+          </a:prstGeom>
+          <a:solidFill>
+            <a:srgbClr val="FFFFFF"/>
+          </a:solidFill>
+          <a:ln/>
+          <a:effectLst>
+            <a:outerShdw sx="100000" sy="100000" kx="0" ky="0" algn="bl" rotWithShape="0" blurRad="50800" dist="25400" dir="8100000">
+              <a:srgbClr val="000000">
+                <a:alpha val="10000"/>
+              </a:srgbClr>
+            </a:outerShdw>
+          </a:effectLst>
+        </p:spPr>
+      </p:sp>
+      <p:sp>
+        <p:nvSpPr>
+          <p:cNvPr id="5" name="Shape 3"/>
+          <p:cNvSpPr/>
+          <p:nvPr/>
+        </p:nvSpPr>
+        <p:spPr>
+          <a:xfrm>
+            <a:off x="548640" y="1097280"/>
+            <a:ext cx="54864" cy="594360"/>
+          </a:xfrm>
+          <a:prstGeom prst="rect">
+            <a:avLst/>
+          </a:prstGeom>
+          <a:solidFill>
+            <a:srgbClr val="2A9D8F"/>
+          </a:solidFill>
+          <a:ln/>
+        </p:spPr>
+      </p:sp>
+      <p:sp>
+        <p:nvSpPr>
+          <p:cNvPr id="6" name="Text 4"/>
+          <p:cNvSpPr/>
+          <p:nvPr/>
+        </p:nvSpPr>
+        <p:spPr>
+          <a:xfrm>
+            <a:off x="685800" y="1143000"/>
+            <a:ext cx="3520440" cy="502920"/>
           </a:xfrm>
           <a:prstGeom prst="rect">
             <a:avLst/>
@@ -1838,30 +2100,88 @@
               <a:buNone/>
             </a:pPr>
             <a:r>
-              <a:rPr lang="en-US" sz="1800" b="1" dirty="0">
-                <a:solidFill>
-                  <a:srgbClr val="FFFFFF"/>
-                </a:solidFill>
-                <a:latin typeface="Calibri" pitchFamily="34" charset="0"/>
-                <a:ea typeface="Calibri" pitchFamily="34" charset="-122"/>
-                <a:cs typeface="Calibri" pitchFamily="34" charset="-120"/>
-              </a:rPr>
-              <a:t>Observation vs inference</a:t>
-            </a:r>
-            <a:endParaRPr lang="en-US" sz="1800" dirty="0"/>
-          </a:p>
-        </p:txBody>
-      </p:sp>
-      <p:sp>
-        <p:nvSpPr>
-          <p:cNvPr id="4" name="Text 2"/>
-          <p:cNvSpPr/>
-          <p:nvPr/>
-        </p:nvSpPr>
-        <p:spPr>
-          <a:xfrm>
-            <a:off x="731520" y="1097280"/>
-            <a:ext cx="7680960" cy="3200400"/>
+              <a:rPr lang="en-US" sz="1200" b="1" dirty="0">
+                <a:solidFill>
+                  <a:srgbClr val="1B2A4A"/>
+                </a:solidFill>
+              </a:rPr>
+              <a:t>Hypothesis</a:t>
+            </a:r>
+            <a:endParaRPr lang="en-US" sz="1200" dirty="0"/>
+          </a:p>
+          <a:p>
+            <a:pPr indent="0" marL="0">
+              <a:buNone/>
+            </a:pPr>
+            <a:r>
+              <a:rPr lang="en-US" sz="1000" dirty="0">
+                <a:solidFill>
+                  <a:srgbClr val="6B6660"/>
+                </a:solidFill>
+              </a:rPr>
+              <a:t>A testable prediction based on observations</a:t>
+            </a:r>
+            <a:endParaRPr lang="en-US" sz="1200" dirty="0"/>
+          </a:p>
+        </p:txBody>
+      </p:sp>
+      <p:sp>
+        <p:nvSpPr>
+          <p:cNvPr id="7" name="Shape 5"/>
+          <p:cNvSpPr/>
+          <p:nvPr/>
+        </p:nvSpPr>
+        <p:spPr>
+          <a:xfrm>
+            <a:off x="4480560" y="1097280"/>
+            <a:ext cx="3749040" cy="594360"/>
+          </a:xfrm>
+          <a:prstGeom prst="rect">
+            <a:avLst/>
+          </a:prstGeom>
+          <a:solidFill>
+            <a:srgbClr val="FFFFFF"/>
+          </a:solidFill>
+          <a:ln/>
+          <a:effectLst>
+            <a:outerShdw sx="100000" sy="100000" kx="0" ky="0" algn="bl" rotWithShape="0" blurRad="50800" dist="25400" dir="8100000">
+              <a:srgbClr val="000000">
+                <a:alpha val="10000"/>
+              </a:srgbClr>
+            </a:outerShdw>
+          </a:effectLst>
+        </p:spPr>
+      </p:sp>
+      <p:sp>
+        <p:nvSpPr>
+          <p:cNvPr id="8" name="Shape 6"/>
+          <p:cNvSpPr/>
+          <p:nvPr/>
+        </p:nvSpPr>
+        <p:spPr>
+          <a:xfrm>
+            <a:off x="4480560" y="1097280"/>
+            <a:ext cx="54864" cy="594360"/>
+          </a:xfrm>
+          <a:prstGeom prst="rect">
+            <a:avLst/>
+          </a:prstGeom>
+          <a:solidFill>
+            <a:srgbClr val="2A9D8F"/>
+          </a:solidFill>
+          <a:ln/>
+        </p:spPr>
+      </p:sp>
+      <p:sp>
+        <p:nvSpPr>
+          <p:cNvPr id="9" name="Text 7"/>
+          <p:cNvSpPr/>
+          <p:nvPr/>
+        </p:nvSpPr>
+        <p:spPr>
+          <a:xfrm>
+            <a:off x="4617720" y="1143000"/>
+            <a:ext cx="3520440" cy="502920"/>
           </a:xfrm>
           <a:prstGeom prst="rect">
             <a:avLst/>
@@ -1877,53 +2197,185 @@
               <a:buNone/>
             </a:pPr>
             <a:r>
-              <a:rPr lang="en-US" sz="1600" dirty="0">
-                <a:solidFill>
-                  <a:srgbClr val="363636"/>
-                </a:solidFill>
-                <a:latin typeface="Calibri" pitchFamily="34" charset="0"/>
-                <a:ea typeface="Calibri" pitchFamily="34" charset="-122"/>
-                <a:cs typeface="Calibri" pitchFamily="34" charset="-120"/>
-              </a:rPr>
-              <a:t>Content for: Observation vs inference</a:t>
-            </a:r>
-            <a:endParaRPr lang="en-US" sz="1600" dirty="0"/>
+              <a:rPr lang="en-US" sz="1200" b="1" dirty="0">
+                <a:solidFill>
+                  <a:srgbClr val="1B2A4A"/>
+                </a:solidFill>
+              </a:rPr>
+              <a:t>Variable</a:t>
+            </a:r>
+            <a:endParaRPr lang="en-US" sz="1200" dirty="0"/>
           </a:p>
           <a:p>
             <a:pPr indent="0" marL="0">
               <a:buNone/>
             </a:pPr>
-            <a:endParaRPr lang="en-US" sz="1600" dirty="0"/>
-          </a:p>
+            <a:r>
+              <a:rPr lang="en-US" sz="1000" dirty="0">
+                <a:solidFill>
+                  <a:srgbClr val="6B6660"/>
+                </a:solidFill>
+              </a:rPr>
+              <a:t>Something that can change in an experiment</a:t>
+            </a:r>
+            <a:endParaRPr lang="en-US" sz="1200" dirty="0"/>
+          </a:p>
+        </p:txBody>
+      </p:sp>
+      <p:sp>
+        <p:nvSpPr>
+          <p:cNvPr id="10" name="Shape 8"/>
+          <p:cNvSpPr/>
+          <p:nvPr/>
+        </p:nvSpPr>
+        <p:spPr>
+          <a:xfrm>
+            <a:off x="548640" y="1828800"/>
+            <a:ext cx="3749040" cy="594360"/>
+          </a:xfrm>
+          <a:prstGeom prst="rect">
+            <a:avLst/>
+          </a:prstGeom>
+          <a:solidFill>
+            <a:srgbClr val="FFFFFF"/>
+          </a:solidFill>
+          <a:ln/>
+          <a:effectLst>
+            <a:outerShdw sx="100000" sy="100000" kx="0" ky="0" algn="bl" rotWithShape="0" blurRad="50800" dist="25400" dir="8100000">
+              <a:srgbClr val="000000">
+                <a:alpha val="10000"/>
+              </a:srgbClr>
+            </a:outerShdw>
+          </a:effectLst>
+        </p:spPr>
+      </p:sp>
+      <p:sp>
+        <p:nvSpPr>
+          <p:cNvPr id="11" name="Shape 9"/>
+          <p:cNvSpPr/>
+          <p:nvPr/>
+        </p:nvSpPr>
+        <p:spPr>
+          <a:xfrm>
+            <a:off x="548640" y="1828800"/>
+            <a:ext cx="54864" cy="594360"/>
+          </a:xfrm>
+          <a:prstGeom prst="rect">
+            <a:avLst/>
+          </a:prstGeom>
+          <a:solidFill>
+            <a:srgbClr val="2A9D8F"/>
+          </a:solidFill>
+          <a:ln/>
+        </p:spPr>
+      </p:sp>
+      <p:sp>
+        <p:nvSpPr>
+          <p:cNvPr id="12" name="Text 10"/>
+          <p:cNvSpPr/>
+          <p:nvPr/>
+        </p:nvSpPr>
+        <p:spPr>
+          <a:xfrm>
+            <a:off x="685800" y="1874520"/>
+            <a:ext cx="3520440" cy="502920"/>
+          </a:xfrm>
+          <a:prstGeom prst="rect">
+            <a:avLst/>
+          </a:prstGeom>
+          <a:noFill/>
+          <a:ln/>
+        </p:spPr>
+        <p:txBody>
+          <a:bodyPr wrap="square" rtlCol="0" anchor="ctr"/>
+          <a:lstStyle/>
           <a:p>
             <a:pPr indent="0" marL="0">
               <a:buNone/>
             </a:pPr>
             <a:r>
-              <a:rPr lang="en-US" sz="1600" dirty="0">
-                <a:solidFill>
-                  <a:srgbClr val="363636"/>
-                </a:solidFill>
-                <a:latin typeface="Calibri" pitchFamily="34" charset="0"/>
-                <a:ea typeface="Calibri" pitchFamily="34" charset="-122"/>
-                <a:cs typeface="Calibri" pitchFamily="34" charset="-120"/>
-              </a:rPr>
-              <a:t>Key points will be covered in class.</a:t>
-            </a:r>
-            <a:endParaRPr lang="en-US" sz="1600" dirty="0"/>
-          </a:p>
-        </p:txBody>
-      </p:sp>
-      <p:sp>
-        <p:nvSpPr>
-          <p:cNvPr id="5" name="Text 3"/>
-          <p:cNvSpPr/>
-          <p:nvPr/>
-        </p:nvSpPr>
-        <p:spPr>
-          <a:xfrm>
-            <a:off x="7772400" y="4663440"/>
-            <a:ext cx="1097280" cy="365760"/>
+              <a:rPr lang="en-US" sz="1200" b="1" dirty="0">
+                <a:solidFill>
+                  <a:srgbClr val="1B2A4A"/>
+                </a:solidFill>
+              </a:rPr>
+              <a:t>Fair test</a:t>
+            </a:r>
+            <a:endParaRPr lang="en-US" sz="1200" dirty="0"/>
+          </a:p>
+          <a:p>
+            <a:pPr indent="0" marL="0">
+              <a:buNone/>
+            </a:pPr>
+            <a:r>
+              <a:rPr lang="en-US" sz="1000" dirty="0">
+                <a:solidFill>
+                  <a:srgbClr val="6B6660"/>
+                </a:solidFill>
+              </a:rPr>
+              <a:t>Only ONE variable changes, all others stay the same</a:t>
+            </a:r>
+            <a:endParaRPr lang="en-US" sz="1200" dirty="0"/>
+          </a:p>
+        </p:txBody>
+      </p:sp>
+      <p:sp>
+        <p:nvSpPr>
+          <p:cNvPr id="13" name="Shape 11"/>
+          <p:cNvSpPr/>
+          <p:nvPr/>
+        </p:nvSpPr>
+        <p:spPr>
+          <a:xfrm>
+            <a:off x="4480560" y="1828800"/>
+            <a:ext cx="3749040" cy="594360"/>
+          </a:xfrm>
+          <a:prstGeom prst="rect">
+            <a:avLst/>
+          </a:prstGeom>
+          <a:solidFill>
+            <a:srgbClr val="FFFFFF"/>
+          </a:solidFill>
+          <a:ln/>
+          <a:effectLst>
+            <a:outerShdw sx="100000" sy="100000" kx="0" ky="0" algn="bl" rotWithShape="0" blurRad="50800" dist="25400" dir="8100000">
+              <a:srgbClr val="000000">
+                <a:alpha val="10000"/>
+              </a:srgbClr>
+            </a:outerShdw>
+          </a:effectLst>
+        </p:spPr>
+      </p:sp>
+      <p:sp>
+        <p:nvSpPr>
+          <p:cNvPr id="14" name="Shape 12"/>
+          <p:cNvSpPr/>
+          <p:nvPr/>
+        </p:nvSpPr>
+        <p:spPr>
+          <a:xfrm>
+            <a:off x="4480560" y="1828800"/>
+            <a:ext cx="54864" cy="594360"/>
+          </a:xfrm>
+          <a:prstGeom prst="rect">
+            <a:avLst/>
+          </a:prstGeom>
+          <a:solidFill>
+            <a:srgbClr val="2A9D8F"/>
+          </a:solidFill>
+          <a:ln/>
+        </p:spPr>
+      </p:sp>
+      <p:sp>
+        <p:nvSpPr>
+          <p:cNvPr id="15" name="Text 13"/>
+          <p:cNvSpPr/>
+          <p:nvPr/>
+        </p:nvSpPr>
+        <p:spPr>
+          <a:xfrm>
+            <a:off x="4617720" y="1874520"/>
+            <a:ext cx="3520440" cy="502920"/>
           </a:xfrm>
           <a:prstGeom prst="rect">
             <a:avLst/>
@@ -1935,21 +2387,262 @@
           <a:bodyPr wrap="square" rtlCol="0" anchor="ctr"/>
           <a:lstStyle/>
           <a:p>
-            <a:pPr algn="r" indent="0" marL="0">
+            <a:pPr indent="0" marL="0">
               <a:buNone/>
             </a:pPr>
             <a:r>
+              <a:rPr lang="en-US" sz="1200" b="1" dirty="0">
+                <a:solidFill>
+                  <a:srgbClr val="1B2A4A"/>
+                </a:solidFill>
+              </a:rPr>
+              <a:t>Data</a:t>
+            </a:r>
+            <a:endParaRPr lang="en-US" sz="1200" dirty="0"/>
+          </a:p>
+          <a:p>
+            <a:pPr indent="0" marL="0">
+              <a:buNone/>
+            </a:pPr>
+            <a:r>
               <a:rPr lang="en-US" sz="1000" dirty="0">
                 <a:solidFill>
-                  <a:srgbClr val="999999"/>
-                </a:solidFill>
-                <a:latin typeface="Calibri" pitchFamily="34" charset="0"/>
-                <a:ea typeface="Calibri" pitchFamily="34" charset="-122"/>
-                <a:cs typeface="Calibri" pitchFamily="34" charset="-120"/>
-              </a:rPr>
-              <a:t>4 / 6</a:t>
-            </a:r>
-            <a:endParaRPr lang="en-US" sz="1000" dirty="0"/>
+                  <a:srgbClr val="6B6660"/>
+                </a:solidFill>
+              </a:rPr>
+              <a:t>Information collected during an experiment</a:t>
+            </a:r>
+            <a:endParaRPr lang="en-US" sz="1200" dirty="0"/>
+          </a:p>
+        </p:txBody>
+      </p:sp>
+      <p:sp>
+        <p:nvSpPr>
+          <p:cNvPr id="16" name="Shape 14"/>
+          <p:cNvSpPr/>
+          <p:nvPr/>
+        </p:nvSpPr>
+        <p:spPr>
+          <a:xfrm>
+            <a:off x="548640" y="2560320"/>
+            <a:ext cx="3749040" cy="594360"/>
+          </a:xfrm>
+          <a:prstGeom prst="rect">
+            <a:avLst/>
+          </a:prstGeom>
+          <a:solidFill>
+            <a:srgbClr val="FFFFFF"/>
+          </a:solidFill>
+          <a:ln/>
+          <a:effectLst>
+            <a:outerShdw sx="100000" sy="100000" kx="0" ky="0" algn="bl" rotWithShape="0" blurRad="50800" dist="25400" dir="8100000">
+              <a:srgbClr val="000000">
+                <a:alpha val="10000"/>
+              </a:srgbClr>
+            </a:outerShdw>
+          </a:effectLst>
+        </p:spPr>
+      </p:sp>
+      <p:sp>
+        <p:nvSpPr>
+          <p:cNvPr id="17" name="Shape 15"/>
+          <p:cNvSpPr/>
+          <p:nvPr/>
+        </p:nvSpPr>
+        <p:spPr>
+          <a:xfrm>
+            <a:off x="548640" y="2560320"/>
+            <a:ext cx="54864" cy="594360"/>
+          </a:xfrm>
+          <a:prstGeom prst="rect">
+            <a:avLst/>
+          </a:prstGeom>
+          <a:solidFill>
+            <a:srgbClr val="2A9D8F"/>
+          </a:solidFill>
+          <a:ln/>
+        </p:spPr>
+      </p:sp>
+      <p:sp>
+        <p:nvSpPr>
+          <p:cNvPr id="18" name="Text 16"/>
+          <p:cNvSpPr/>
+          <p:nvPr/>
+        </p:nvSpPr>
+        <p:spPr>
+          <a:xfrm>
+            <a:off x="685800" y="2606040"/>
+            <a:ext cx="3520440" cy="502920"/>
+          </a:xfrm>
+          <a:prstGeom prst="rect">
+            <a:avLst/>
+          </a:prstGeom>
+          <a:noFill/>
+          <a:ln/>
+        </p:spPr>
+        <p:txBody>
+          <a:bodyPr wrap="square" rtlCol="0" anchor="ctr"/>
+          <a:lstStyle/>
+          <a:p>
+            <a:pPr indent="0" marL="0">
+              <a:buNone/>
+            </a:pPr>
+            <a:r>
+              <a:rPr lang="en-US" sz="1200" b="1" dirty="0">
+                <a:solidFill>
+                  <a:srgbClr val="1B2A4A"/>
+                </a:solidFill>
+              </a:rPr>
+              <a:t>Conclusion</a:t>
+            </a:r>
+            <a:endParaRPr lang="en-US" sz="1200" dirty="0"/>
+          </a:p>
+          <a:p>
+            <a:pPr indent="0" marL="0">
+              <a:buNone/>
+            </a:pPr>
+            <a:r>
+              <a:rPr lang="en-US" sz="1000" dirty="0">
+                <a:solidFill>
+                  <a:srgbClr val="6B6660"/>
+                </a:solidFill>
+              </a:rPr>
+              <a:t>A summary of what the results show</a:t>
+            </a:r>
+            <a:endParaRPr lang="en-US" sz="1200" dirty="0"/>
+          </a:p>
+        </p:txBody>
+      </p:sp>
+      <p:sp>
+        <p:nvSpPr>
+          <p:cNvPr id="19" name="Shape 17"/>
+          <p:cNvSpPr/>
+          <p:nvPr/>
+        </p:nvSpPr>
+        <p:spPr>
+          <a:xfrm>
+            <a:off x="4480560" y="2560320"/>
+            <a:ext cx="3749040" cy="594360"/>
+          </a:xfrm>
+          <a:prstGeom prst="rect">
+            <a:avLst/>
+          </a:prstGeom>
+          <a:solidFill>
+            <a:srgbClr val="FFFFFF"/>
+          </a:solidFill>
+          <a:ln/>
+          <a:effectLst>
+            <a:outerShdw sx="100000" sy="100000" kx="0" ky="0" algn="bl" rotWithShape="0" blurRad="50800" dist="25400" dir="8100000">
+              <a:srgbClr val="000000">
+                <a:alpha val="10000"/>
+              </a:srgbClr>
+            </a:outerShdw>
+          </a:effectLst>
+        </p:spPr>
+      </p:sp>
+      <p:sp>
+        <p:nvSpPr>
+          <p:cNvPr id="20" name="Shape 18"/>
+          <p:cNvSpPr/>
+          <p:nvPr/>
+        </p:nvSpPr>
+        <p:spPr>
+          <a:xfrm>
+            <a:off x="4480560" y="2560320"/>
+            <a:ext cx="54864" cy="594360"/>
+          </a:xfrm>
+          <a:prstGeom prst="rect">
+            <a:avLst/>
+          </a:prstGeom>
+          <a:solidFill>
+            <a:srgbClr val="2A9D8F"/>
+          </a:solidFill>
+          <a:ln/>
+        </p:spPr>
+      </p:sp>
+      <p:sp>
+        <p:nvSpPr>
+          <p:cNvPr id="21" name="Text 19"/>
+          <p:cNvSpPr/>
+          <p:nvPr/>
+        </p:nvSpPr>
+        <p:spPr>
+          <a:xfrm>
+            <a:off x="4617720" y="2606040"/>
+            <a:ext cx="3520440" cy="502920"/>
+          </a:xfrm>
+          <a:prstGeom prst="rect">
+            <a:avLst/>
+          </a:prstGeom>
+          <a:noFill/>
+          <a:ln/>
+        </p:spPr>
+        <p:txBody>
+          <a:bodyPr wrap="square" rtlCol="0" anchor="ctr"/>
+          <a:lstStyle/>
+          <a:p>
+            <a:pPr indent="0" marL="0">
+              <a:buNone/>
+            </a:pPr>
+            <a:r>
+              <a:rPr lang="en-US" sz="1200" b="1" dirty="0">
+                <a:solidFill>
+                  <a:srgbClr val="1B2A4A"/>
+                </a:solidFill>
+              </a:rPr>
+              <a:t>Peer review</a:t>
+            </a:r>
+            <a:endParaRPr lang="en-US" sz="1200" dirty="0"/>
+          </a:p>
+          <a:p>
+            <a:pPr indent="0" marL="0">
+              <a:buNone/>
+            </a:pPr>
+            <a:r>
+              <a:rPr lang="en-US" sz="1000" dirty="0">
+                <a:solidFill>
+                  <a:srgbClr val="6B6660"/>
+                </a:solidFill>
+              </a:rPr>
+              <a:t>Other scientists check and evaluate your work</a:t>
+            </a:r>
+            <a:endParaRPr lang="en-US" sz="1200" dirty="0"/>
+          </a:p>
+        </p:txBody>
+      </p:sp>
+      <p:sp>
+        <p:nvSpPr>
+          <p:cNvPr id="22" name="Text 20"/>
+          <p:cNvSpPr/>
+          <p:nvPr/>
+        </p:nvSpPr>
+        <p:spPr>
+          <a:xfrm>
+            <a:off x="548640" y="4800600"/>
+            <a:ext cx="3657600" cy="274320"/>
+          </a:xfrm>
+          <a:prstGeom prst="rect">
+            <a:avLst/>
+          </a:prstGeom>
+          <a:noFill/>
+          <a:ln/>
+        </p:spPr>
+        <p:txBody>
+          <a:bodyPr wrap="square" rtlCol="0" anchor="ctr"/>
+          <a:lstStyle/>
+          <a:p>
+            <a:pPr indent="0" marL="0">
+              <a:buNone/>
+            </a:pPr>
+            <a:r>
+              <a:rPr lang="en-US" sz="800" dirty="0">
+                <a:solidFill>
+                  <a:srgbClr val="9B9690"/>
+                </a:solidFill>
+              </a:rPr>
+              <a:t>mrzocchi.com</a:t>
+            </a:r>
+            <a:endParaRPr lang="en-US" sz="800" dirty="0"/>
           </a:p>
         </p:txBody>
       </p:sp>
@@ -1964,6 +2657,13 @@
 <file path=ppt/slides/slide5.xml><?xml version="1.0" encoding="utf-8"?>
 <p:sld xmlns:a="http://schemas.openxmlformats.org/drawingml/2006/main" xmlns:r="http://schemas.openxmlformats.org/officeDocument/2006/relationships" xmlns:p="http://schemas.openxmlformats.org/presentationml/2006/main">
   <p:cSld name="Slide 5">
+    <p:bg>
+      <p:bgPr>
+        <a:solidFill>
+          <a:srgbClr val="1B2A4A"/>
+        </a:solidFill>
+      </p:bgPr>
+    </p:bg>
     <p:spTree>
       <p:nvGrpSpPr>
         <p:cNvPr id="1" name=""/>
@@ -1987,13 +2687,13 @@
         <p:spPr>
           <a:xfrm>
             <a:off x="0" y="0"/>
-            <a:ext cx="9144000" cy="548640"/>
-          </a:xfrm>
-          <a:prstGeom prst="rect">
-            <a:avLst/>
-          </a:prstGeom>
-          <a:solidFill>
-            <a:srgbClr val="1A7A6F"/>
+            <a:ext cx="9144000" cy="54864"/>
+          </a:xfrm>
+          <a:prstGeom prst="rect">
+            <a:avLst/>
+          </a:prstGeom>
+          <a:solidFill>
+            <a:srgbClr val="2A9D8F"/>
           </a:solidFill>
           <a:ln/>
         </p:spPr>
@@ -2006,8 +2706,8 @@
         </p:nvSpPr>
         <p:spPr>
           <a:xfrm>
-            <a:off x="457200" y="45720"/>
-            <a:ext cx="8229600" cy="457200"/>
+            <a:off x="548640" y="457200"/>
+            <a:ext cx="8046720" cy="640080"/>
           </a:xfrm>
           <a:prstGeom prst="rect">
             <a:avLst/>
@@ -2023,176 +2723,136 @@
               <a:buNone/>
             </a:pPr>
             <a:r>
-              <a:rPr lang="en-US" sz="1800" b="1" dirty="0">
+              <a:rPr lang="en-US" sz="2800" b="1" dirty="0">
                 <a:solidFill>
                   <a:srgbClr val="FFFFFF"/>
+                </a:solidFill>
+                <a:latin typeface="Georgia" pitchFamily="34" charset="0"/>
+                <a:ea typeface="Georgia" pitchFamily="34" charset="-122"/>
+                <a:cs typeface="Georgia" pitchFamily="34" charset="-120"/>
+              </a:rPr>
+              <a:t>Key Takeaways</a:t>
+            </a:r>
+            <a:endParaRPr lang="en-US" sz="2800" dirty="0"/>
+          </a:p>
+        </p:txBody>
+      </p:sp>
+      <p:sp>
+        <p:nvSpPr>
+          <p:cNvPr id="4" name="Text 2"/>
+          <p:cNvSpPr/>
+          <p:nvPr/>
+        </p:nvSpPr>
+        <p:spPr>
+          <a:xfrm>
+            <a:off x="731520" y="1371600"/>
+            <a:ext cx="7680960" cy="3200400"/>
+          </a:xfrm>
+          <a:prstGeom prst="rect">
+            <a:avLst/>
+          </a:prstGeom>
+          <a:noFill/>
+          <a:ln/>
+        </p:spPr>
+        <p:txBody>
+          <a:bodyPr wrap="square" rtlCol="0" anchor="t"/>
+          <a:lstStyle/>
+          <a:p>
+            <a:pPr marL="342900" indent="-342900">
+              <a:spcAft>
+                <a:spcPts val="1000"/>
+              </a:spcAft>
+              <a:buSzPct val="100000"/>
+              <a:buChar char="•"/>
+            </a:pPr>
+            <a:r>
+              <a:rPr lang="en-US" sz="1600" dirty="0">
+                <a:solidFill>
+                  <a:srgbClr val="CADCFC"/>
                 </a:solidFill>
                 <a:latin typeface="Calibri" pitchFamily="34" charset="0"/>
                 <a:ea typeface="Calibri" pitchFamily="34" charset="-122"/>
                 <a:cs typeface="Calibri" pitchFamily="34" charset="-120"/>
               </a:rPr>
-              <a:t>Qualitative vs quantitative</a:t>
-            </a:r>
-            <a:endParaRPr lang="en-US" sz="1800" dirty="0"/>
-          </a:p>
-        </p:txBody>
-      </p:sp>
-      <p:sp>
-        <p:nvSpPr>
-          <p:cNvPr id="4" name="Text 2"/>
-          <p:cNvSpPr/>
-          <p:nvPr/>
-        </p:nvSpPr>
-        <p:spPr>
-          <a:xfrm>
-            <a:off x="731520" y="1097280"/>
-            <a:ext cx="7680960" cy="3200400"/>
-          </a:xfrm>
-          <a:prstGeom prst="rect">
-            <a:avLst/>
-          </a:prstGeom>
-          <a:noFill/>
-          <a:ln/>
-        </p:spPr>
-        <p:txBody>
-          <a:bodyPr wrap="square" rtlCol="0" anchor="ctr"/>
-          <a:lstStyle/>
-          <a:p>
-            <a:pPr indent="0" marL="0">
-              <a:buNone/>
+              <a:t>The scientific method makes investigations fair and repeatable</a:t>
+            </a:r>
+            <a:endParaRPr lang="en-US" sz="1600" dirty="0"/>
+          </a:p>
+          <a:p>
+            <a:pPr marL="342900" indent="-342900">
+              <a:spcAft>
+                <a:spcPts val="1000"/>
+              </a:spcAft>
+              <a:buSzPct val="100000"/>
+              <a:buChar char="•"/>
             </a:pPr>
             <a:r>
               <a:rPr lang="en-US" sz="1600" dirty="0">
                 <a:solidFill>
-                  <a:srgbClr val="363636"/>
+                  <a:srgbClr val="CADCFC"/>
                 </a:solidFill>
                 <a:latin typeface="Calibri" pitchFamily="34" charset="0"/>
                 <a:ea typeface="Calibri" pitchFamily="34" charset="-122"/>
                 <a:cs typeface="Calibri" pitchFamily="34" charset="-120"/>
               </a:rPr>
-              <a:t>Content for: Qualitative vs quantitative</a:t>
+              <a:t>A good hypothesis uses 'If... then... because...' format</a:t>
             </a:r>
             <a:endParaRPr lang="en-US" sz="1600" dirty="0"/>
           </a:p>
           <a:p>
-            <a:pPr indent="0" marL="0">
-              <a:buNone/>
-            </a:pPr>
-            <a:endParaRPr lang="en-US" sz="1600" dirty="0"/>
-          </a:p>
-          <a:p>
-            <a:pPr indent="0" marL="0">
-              <a:buNone/>
+            <a:pPr marL="342900" indent="-342900">
+              <a:spcAft>
+                <a:spcPts val="1000"/>
+              </a:spcAft>
+              <a:buSzPct val="100000"/>
+              <a:buChar char="•"/>
             </a:pPr>
             <a:r>
               <a:rPr lang="en-US" sz="1600" dirty="0">
                 <a:solidFill>
-                  <a:srgbClr val="363636"/>
+                  <a:srgbClr val="CADCFC"/>
                 </a:solidFill>
                 <a:latin typeface="Calibri" pitchFamily="34" charset="0"/>
                 <a:ea typeface="Calibri" pitchFamily="34" charset="-122"/>
                 <a:cs typeface="Calibri" pitchFamily="34" charset="-120"/>
               </a:rPr>
-              <a:t>Key points will be covered in class.</a:t>
+              <a:t>Only change ONE variable at a time</a:t>
             </a:r>
             <a:endParaRPr lang="en-US" sz="1600" dirty="0"/>
           </a:p>
-        </p:txBody>
-      </p:sp>
-      <p:sp>
-        <p:nvSpPr>
-          <p:cNvPr id="5" name="Text 3"/>
-          <p:cNvSpPr/>
-          <p:nvPr/>
-        </p:nvSpPr>
-        <p:spPr>
-          <a:xfrm>
-            <a:off x="7772400" y="4663440"/>
-            <a:ext cx="1097280" cy="365760"/>
-          </a:xfrm>
-          <a:prstGeom prst="rect">
-            <a:avLst/>
-          </a:prstGeom>
-          <a:noFill/>
-          <a:ln/>
-        </p:spPr>
-        <p:txBody>
-          <a:bodyPr wrap="square" rtlCol="0" anchor="ctr"/>
-          <a:lstStyle/>
-          <a:p>
-            <a:pPr algn="r" indent="0" marL="0">
-              <a:buNone/>
-            </a:pPr>
-            <a:r>
-              <a:rPr lang="en-US" sz="1000" dirty="0">
-                <a:solidFill>
-                  <a:srgbClr val="999999"/>
+          <a:p>
+            <a:pPr marL="342900" indent="-342900">
+              <a:spcAft>
+                <a:spcPts val="1000"/>
+              </a:spcAft>
+              <a:buSzPct val="100000"/>
+              <a:buChar char="•"/>
+            </a:pPr>
+            <a:r>
+              <a:rPr lang="en-US" sz="1600" dirty="0">
+                <a:solidFill>
+                  <a:srgbClr val="CADCFC"/>
                 </a:solidFill>
                 <a:latin typeface="Calibri" pitchFamily="34" charset="0"/>
                 <a:ea typeface="Calibri" pitchFamily="34" charset="-122"/>
                 <a:cs typeface="Calibri" pitchFamily="34" charset="-120"/>
               </a:rPr>
-              <a:t>5 / 6</a:t>
-            </a:r>
-            <a:endParaRPr lang="en-US" sz="1000" dirty="0"/>
-          </a:p>
-        </p:txBody>
-      </p:sp>
-    </p:spTree>
-  </p:cSld>
-  <p:clrMapOvr>
-    <a:masterClrMapping/>
-  </p:clrMapOvr>
-</p:sld>
-</file>
-
-<file path=ppt/slides/slide6.xml><?xml version="1.0" encoding="utf-8"?>
-<p:sld xmlns:a="http://schemas.openxmlformats.org/drawingml/2006/main" xmlns:r="http://schemas.openxmlformats.org/officeDocument/2006/relationships" xmlns:p="http://schemas.openxmlformats.org/presentationml/2006/main">
-  <p:cSld name="Slide 6">
-    <p:spTree>
-      <p:nvGrpSpPr>
-        <p:cNvPr id="1" name=""/>
-        <p:cNvGrpSpPr/>
-        <p:nvPr/>
-      </p:nvGrpSpPr>
-      <p:grpSpPr>
-        <a:xfrm>
-          <a:off x="0" y="0"/>
-          <a:ext cx="0" cy="0"/>
-          <a:chOff x="0" y="0"/>
-          <a:chExt cx="0" cy="0"/>
-        </a:xfrm>
-      </p:grpSpPr>
-      <p:sp>
-        <p:nvSpPr>
-          <p:cNvPr id="2" name="Shape 0"/>
-          <p:cNvSpPr/>
-          <p:nvPr/>
-        </p:nvSpPr>
-        <p:spPr>
-          <a:xfrm>
-            <a:off x="0" y="0"/>
-            <a:ext cx="9144000" cy="548640"/>
-          </a:xfrm>
-          <a:prstGeom prst="rect">
-            <a:avLst/>
-          </a:prstGeom>
-          <a:solidFill>
-            <a:srgbClr val="1A7A6F"/>
-          </a:solidFill>
-          <a:ln/>
-        </p:spPr>
-      </p:sp>
-      <p:sp>
-        <p:nvSpPr>
-          <p:cNvPr id="3" name="Text 1"/>
-          <p:cNvSpPr/>
-          <p:nvPr/>
-        </p:nvSpPr>
-        <p:spPr>
-          <a:xfrm>
-            <a:off x="457200" y="45720"/>
-            <a:ext cx="8229600" cy="457200"/>
+              <a:t>Your conclusion must be based on evidence, not opinion</a:t>
+            </a:r>
+            <a:endParaRPr lang="en-US" sz="1600" dirty="0"/>
+          </a:p>
+        </p:txBody>
+      </p:sp>
+      <p:sp>
+        <p:nvSpPr>
+          <p:cNvPr id="5" name="Text 3"/>
+          <p:cNvSpPr/>
+          <p:nvPr/>
+        </p:nvSpPr>
+        <p:spPr>
+          <a:xfrm>
+            <a:off x="548640" y="4572000"/>
+            <a:ext cx="3657600" cy="274320"/>
           </a:xfrm>
           <a:prstGeom prst="rect">
             <a:avLst/>
@@ -2208,116 +2868,12 @@
               <a:buNone/>
             </a:pPr>
             <a:r>
-              <a:rPr lang="en-US" sz="1800" b="1" dirty="0">
-                <a:solidFill>
-                  <a:srgbClr val="FFFFFF"/>
-                </a:solidFill>
-                <a:latin typeface="Calibri" pitchFamily="34" charset="0"/>
-                <a:ea typeface="Calibri" pitchFamily="34" charset="-122"/>
-                <a:cs typeface="Calibri" pitchFamily="34" charset="-120"/>
-              </a:rPr>
-              <a:t>Practice examples</a:t>
-            </a:r>
-            <a:endParaRPr lang="en-US" sz="1800" dirty="0"/>
-          </a:p>
-        </p:txBody>
-      </p:sp>
-      <p:sp>
-        <p:nvSpPr>
-          <p:cNvPr id="4" name="Text 2"/>
-          <p:cNvSpPr/>
-          <p:nvPr/>
-        </p:nvSpPr>
-        <p:spPr>
-          <a:xfrm>
-            <a:off x="731520" y="1097280"/>
-            <a:ext cx="7680960" cy="3200400"/>
-          </a:xfrm>
-          <a:prstGeom prst="rect">
-            <a:avLst/>
-          </a:prstGeom>
-          <a:noFill/>
-          <a:ln/>
-        </p:spPr>
-        <p:txBody>
-          <a:bodyPr wrap="square" rtlCol="0" anchor="ctr"/>
-          <a:lstStyle/>
-          <a:p>
-            <a:pPr indent="0" marL="0">
-              <a:buNone/>
-            </a:pPr>
-            <a:r>
-              <a:rPr lang="en-US" sz="1600" dirty="0">
-                <a:solidFill>
-                  <a:srgbClr val="363636"/>
-                </a:solidFill>
-                <a:latin typeface="Calibri" pitchFamily="34" charset="0"/>
-                <a:ea typeface="Calibri" pitchFamily="34" charset="-122"/>
-                <a:cs typeface="Calibri" pitchFamily="34" charset="-120"/>
-              </a:rPr>
-              <a:t>Content for: Practice examples</a:t>
-            </a:r>
-            <a:endParaRPr lang="en-US" sz="1600" dirty="0"/>
-          </a:p>
-          <a:p>
-            <a:pPr indent="0" marL="0">
-              <a:buNone/>
-            </a:pPr>
-            <a:endParaRPr lang="en-US" sz="1600" dirty="0"/>
-          </a:p>
-          <a:p>
-            <a:pPr indent="0" marL="0">
-              <a:buNone/>
-            </a:pPr>
-            <a:r>
-              <a:rPr lang="en-US" sz="1600" dirty="0">
-                <a:solidFill>
-                  <a:srgbClr val="363636"/>
-                </a:solidFill>
-                <a:latin typeface="Calibri" pitchFamily="34" charset="0"/>
-                <a:ea typeface="Calibri" pitchFamily="34" charset="-122"/>
-                <a:cs typeface="Calibri" pitchFamily="34" charset="-120"/>
-              </a:rPr>
-              <a:t>Key points will be covered in class.</a:t>
-            </a:r>
-            <a:endParaRPr lang="en-US" sz="1600" dirty="0"/>
-          </a:p>
-        </p:txBody>
-      </p:sp>
-      <p:sp>
-        <p:nvSpPr>
-          <p:cNvPr id="5" name="Text 3"/>
-          <p:cNvSpPr/>
-          <p:nvPr/>
-        </p:nvSpPr>
-        <p:spPr>
-          <a:xfrm>
-            <a:off x="7772400" y="4663440"/>
-            <a:ext cx="1097280" cy="365760"/>
-          </a:xfrm>
-          <a:prstGeom prst="rect">
-            <a:avLst/>
-          </a:prstGeom>
-          <a:noFill/>
-          <a:ln/>
-        </p:spPr>
-        <p:txBody>
-          <a:bodyPr wrap="square" rtlCol="0" anchor="ctr"/>
-          <a:lstStyle/>
-          <a:p>
-            <a:pPr algn="r" indent="0" marL="0">
-              <a:buNone/>
-            </a:pPr>
-            <a:r>
               <a:rPr lang="en-US" sz="1000" dirty="0">
                 <a:solidFill>
-                  <a:srgbClr val="999999"/>
-                </a:solidFill>
-                <a:latin typeface="Calibri" pitchFamily="34" charset="0"/>
-                <a:ea typeface="Calibri" pitchFamily="34" charset="-122"/>
-                <a:cs typeface="Calibri" pitchFamily="34" charset="-120"/>
-              </a:rPr>
-              <a:t>6 / 6</a:t>
+                  <a:srgbClr val="6B6660"/>
+                </a:solidFill>
+              </a:rPr>
+              <a:t>mrzocchi.com</a:t>
             </a:r>
             <a:endParaRPr lang="en-US" sz="1000" dirty="0"/>
           </a:p>

--- a/static/ppts/G6_Sci_T1_Scientific_Method.pptx
+++ b/static/ppts/G6_Sci_T1_Scientific_Method.pptx
@@ -10,9 +10,10 @@
     <p:sldId id="258" r:id="rId4"/>
     <p:sldId id="259" r:id="rId5"/>
     <p:sldId id="260" r:id="rId6"/>
+    <p:sldId id="261" r:id="rId7"/>
   </p:sldIdLst>
   <p:notesMasterIdLst>
-    <p:notesMasterId r:id="rId7"/>
+    <p:notesMasterId r:id="rId8"/>
   </p:notesMasterIdLst>
   <p:sldSz cx="9144000" cy="5143500"/>
   <p:notesSz cx="5143500" cy="9144000"/>
@@ -900,6 +901,94 @@
 </p:notes>
 </file>
 
+<file path=ppt/notesSlides/notesSlide6.xml><?xml version="1.0" encoding="utf-8"?>
+<p:notes xmlns:a="http://schemas.openxmlformats.org/drawingml/2006/main" xmlns:r="http://schemas.openxmlformats.org/officeDocument/2006/relationships" xmlns:p="http://schemas.openxmlformats.org/presentationml/2006/main">
+  <p:cSld>
+    <p:spTree>
+      <p:nvGrpSpPr>
+        <p:cNvPr id="1" name=""/>
+        <p:cNvGrpSpPr/>
+        <p:nvPr/>
+      </p:nvGrpSpPr>
+      <p:grpSpPr>
+        <a:xfrm>
+          <a:off x="0" y="0"/>
+          <a:ext cx="0" cy="0"/>
+          <a:chOff x="0" y="0"/>
+          <a:chExt cx="0" cy="0"/>
+        </a:xfrm>
+      </p:grpSpPr>
+      <p:sp>
+        <p:nvSpPr>
+          <p:cNvPr id="2" name="Slide Image Placeholder 1"/>
+          <p:cNvSpPr>
+            <a:spLocks noGrp="1" noRot="1" noChangeAspect="1"/>
+          </p:cNvSpPr>
+          <p:nvPr>
+            <p:ph type="sldImg"/>
+          </p:nvPr>
+        </p:nvSpPr>
+        <p:spPr/>
+      </p:sp>
+      <p:sp>
+        <p:nvSpPr>
+          <p:cNvPr id="3" name="Notes Placeholder 2"/>
+          <p:cNvSpPr>
+            <a:spLocks noGrp="1"/>
+          </p:cNvSpPr>
+          <p:nvPr>
+            <p:ph type="body" idx="1"/>
+          </p:nvPr>
+        </p:nvSpPr>
+        <p:spPr/>
+        <p:txBody>
+          <a:bodyPr/>
+          <a:lstStyle/>
+          <a:p>
+            <a:r>
+              <a:rPr lang="en-US" dirty="0"/>
+              <a:t/>
+            </a:r>
+            <a:endParaRPr lang="en-US" dirty="0"/>
+          </a:p>
+        </p:txBody>
+      </p:sp>
+      <p:sp>
+        <p:nvSpPr>
+          <p:cNvPr id="4" name="Slide Number Placeholder 3"/>
+          <p:cNvSpPr>
+            <a:spLocks noGrp="1"/>
+          </p:cNvSpPr>
+          <p:nvPr>
+            <p:ph type="sldNum" sz="quarter" idx="10"/>
+          </p:nvPr>
+        </p:nvSpPr>
+        <p:spPr/>
+        <p:txBody>
+          <a:bodyPr/>
+          <a:lstStyle/>
+          <a:p>
+            <a:fld id="{F7021451-1387-4CA6-816F-3879F97B5CBC}" type="slidenum">
+              <a:rPr lang="en-US"/>
+              <a:t>6</a:t>
+            </a:fld>
+            <a:endParaRPr lang="en-US"/>
+          </a:p>
+        </p:txBody>
+      </p:sp>
+    </p:spTree>
+    <p:extLst>
+      <p:ext uri="{BB962C8B-B14F-4D97-AF65-F5344CB8AC3E}">
+        <p14:creationId xmlns:p14="http://schemas.microsoft.com/office/powerpoint/2010/main" val="1024086991"/>
+      </p:ext>
+    </p:extLst>
+  </p:cSld>
+  <p:clrMapOvr>
+    <a:masterClrMapping/>
+  </p:clrMapOvr>
+</p:notes>
+</file>
+
 <file path=ppt/slideLayouts/slideLayout1.xml><?xml version="1.0" encoding="utf-8"?>
 <p:sldLayout xmlns:a="http://schemas.openxmlformats.org/drawingml/2006/main" xmlns:r="http://schemas.openxmlformats.org/officeDocument/2006/relationships" xmlns:p="http://schemas.openxmlformats.org/presentationml/2006/main" preserve="1">
   <p:cSld name="DEFAULT">
@@ -1259,7 +1348,7 @@
         </p:nvSpPr>
         <p:spPr>
           <a:xfrm>
-            <a:off x="731520" y="1280160"/>
+            <a:off x="731520" y="1097280"/>
             <a:ext cx="7772400" cy="1371600"/>
           </a:xfrm>
           <a:prstGeom prst="rect">
@@ -1276,7 +1365,7 @@
               <a:buNone/>
             </a:pPr>
             <a:r>
-              <a:rPr lang="en-US" sz="3600" b="1" dirty="0">
+              <a:rPr lang="en-US" sz="4000" b="1" dirty="0">
                 <a:solidFill>
                   <a:srgbClr val="FFFFFF"/>
                 </a:solidFill>
@@ -1286,7 +1375,7 @@
               </a:rPr>
               <a:t>The Scientific Method</a:t>
             </a:r>
-            <a:endParaRPr lang="en-US" sz="3600" dirty="0"/>
+            <a:endParaRPr lang="en-US" sz="4000" dirty="0"/>
           </a:p>
         </p:txBody>
       </p:sp>
@@ -1298,7 +1387,7 @@
         </p:nvSpPr>
         <p:spPr>
           <a:xfrm>
-            <a:off x="731520" y="2743200"/>
+            <a:off x="731520" y="2560320"/>
             <a:ext cx="7772400" cy="548640"/>
           </a:xfrm>
           <a:prstGeom prst="rect">
@@ -1317,13 +1406,13 @@
             <a:r>
               <a:rPr lang="en-US" sz="1600" dirty="0">
                 <a:solidFill>
-                  <a:srgbClr val="9B9690"/>
+                  <a:srgbClr val="E9C46A"/>
                 </a:solidFill>
                 <a:latin typeface="Calibri" pitchFamily="34" charset="0"/>
                 <a:ea typeface="Calibri" pitchFamily="34" charset="-122"/>
                 <a:cs typeface="Calibri" pitchFamily="34" charset="-120"/>
               </a:rPr>
-              <a:t>G6 Science · Scientific Skills</a:t>
+              <a:t>Grade 6 Science · Mr Zocchi</a:t>
             </a:r>
             <a:endParaRPr lang="en-US" sz="1600" dirty="0"/>
           </a:p>
@@ -1331,14 +1420,36 @@
       </p:sp>
       <p:sp>
         <p:nvSpPr>
-          <p:cNvPr id="5" name="Text 3"/>
-          <p:cNvSpPr/>
-          <p:nvPr/>
-        </p:nvSpPr>
-        <p:spPr>
-          <a:xfrm>
-            <a:off x="731520" y="4389120"/>
-            <a:ext cx="7772400" cy="457200"/>
+          <p:cNvPr id="5" name="Shape 3"/>
+          <p:cNvSpPr/>
+          <p:nvPr/>
+        </p:nvSpPr>
+        <p:spPr>
+          <a:xfrm>
+            <a:off x="731520" y="3474720"/>
+            <a:ext cx="2011680" cy="411480"/>
+          </a:xfrm>
+          <a:prstGeom prst="roundRect">
+            <a:avLst>
+              <a:gd name="adj" fmla="val 17778"/>
+            </a:avLst>
+          </a:prstGeom>
+          <a:solidFill>
+            <a:srgbClr val="2A9D8F"/>
+          </a:solidFill>
+          <a:ln/>
+        </p:spPr>
+      </p:sp>
+      <p:sp>
+        <p:nvSpPr>
+          <p:cNvPr id="6" name="Text 4"/>
+          <p:cNvSpPr/>
+          <p:nvPr/>
+        </p:nvSpPr>
+        <p:spPr>
+          <a:xfrm>
+            <a:off x="731520" y="3474720"/>
+            <a:ext cx="2011680" cy="411480"/>
           </a:xfrm>
           <a:prstGeom prst="rect">
             <a:avLst/>
@@ -1350,21 +1461,21 @@
           <a:bodyPr wrap="square" rtlCol="0" anchor="ctr"/>
           <a:lstStyle/>
           <a:p>
-            <a:pPr indent="0" marL="0">
+            <a:pPr algn="ctr" indent="0" marL="0">
               <a:buNone/>
             </a:pPr>
             <a:r>
-              <a:rPr lang="en-US" sz="1000" dirty="0">
-                <a:solidFill>
-                  <a:srgbClr val="6B6660"/>
+              <a:rPr lang="en-US" sz="1200" b="1" dirty="0">
+                <a:solidFill>
+                  <a:srgbClr val="FFFFFF"/>
                 </a:solidFill>
                 <a:latin typeface="Calibri" pitchFamily="34" charset="0"/>
                 <a:ea typeface="Calibri" pitchFamily="34" charset="-122"/>
                 <a:cs typeface="Calibri" pitchFamily="34" charset="-120"/>
               </a:rPr>
-              <a:t>Mr Zocchi · mrzocchi.com</a:t>
-            </a:r>
-            <a:endParaRPr lang="en-US" sz="1000" dirty="0"/>
+              <a:t>Term 1 · Scientific Skills</a:t>
+            </a:r>
+            <a:endParaRPr lang="en-US" sz="1200" dirty="0"/>
           </a:p>
         </p:txBody>
       </p:sp>
@@ -1382,7 +1493,7 @@
     <p:bg>
       <p:bgPr>
         <a:solidFill>
-          <a:srgbClr val="FFFFFF"/>
+          <a:srgbClr val="FAF8F5"/>
         </a:solidFill>
       </p:bgPr>
     </p:bg>
@@ -1428,8 +1539,8 @@
         </p:nvSpPr>
         <p:spPr>
           <a:xfrm>
-            <a:off x="548640" y="274320"/>
-            <a:ext cx="8046720" cy="640080"/>
+            <a:off x="7772400" y="4709160"/>
+            <a:ext cx="1097280" cy="320040"/>
           </a:xfrm>
           <a:prstGeom prst="rect">
             <a:avLst/>
@@ -1438,14 +1549,105 @@
           <a:ln/>
         </p:spPr>
         <p:txBody>
-          <a:bodyPr wrap="square" lIns="0" tIns="0" rIns="0" bIns="0" rtlCol="0" anchor="ctr"/>
+          <a:bodyPr wrap="square" rtlCol="0" anchor="ctr"/>
+          <a:lstStyle/>
+          <a:p>
+            <a:pPr algn="r" indent="0" marL="0">
+              <a:buNone/>
+            </a:pPr>
+            <a:r>
+              <a:rPr lang="en-US" sz="900" dirty="0">
+                <a:solidFill>
+                  <a:srgbClr val="6B6660"/>
+                </a:solidFill>
+                <a:latin typeface="Calibri" pitchFamily="34" charset="0"/>
+                <a:ea typeface="Calibri" pitchFamily="34" charset="-122"/>
+                <a:cs typeface="Calibri" pitchFamily="34" charset="-120"/>
+              </a:rPr>
+              <a:t>2 / 6</a:t>
+            </a:r>
+            <a:endParaRPr lang="en-US" sz="900" dirty="0"/>
+          </a:p>
+        </p:txBody>
+      </p:sp>
+      <p:sp>
+        <p:nvSpPr>
+          <p:cNvPr id="4" name="Shape 2"/>
+          <p:cNvSpPr/>
+          <p:nvPr/>
+        </p:nvSpPr>
+        <p:spPr>
+          <a:xfrm>
+            <a:off x="1371600" y="914400"/>
+            <a:ext cx="6400800" cy="3200400"/>
+          </a:xfrm>
+          <a:prstGeom prst="rect">
+            <a:avLst/>
+          </a:prstGeom>
+          <a:solidFill>
+            <a:srgbClr val="FFFFFF"/>
+          </a:solidFill>
+          <a:ln w="12700">
+            <a:solidFill>
+              <a:srgbClr val="E5E2DC"/>
+            </a:solidFill>
+            <a:prstDash val="solid"/>
+          </a:ln>
+          <a:effectLst>
+            <a:outerShdw sx="100000" sy="100000" kx="0" ky="0" algn="bl" rotWithShape="0" blurRad="50800" dist="25400" dir="8100000">
+              <a:srgbClr val="000000">
+                <a:alpha val="10000"/>
+              </a:srgbClr>
+            </a:outerShdw>
+          </a:effectLst>
+        </p:spPr>
+      </p:sp>
+      <p:sp>
+        <p:nvSpPr>
+          <p:cNvPr id="5" name="Shape 3"/>
+          <p:cNvSpPr/>
+          <p:nvPr/>
+        </p:nvSpPr>
+        <p:spPr>
+          <a:xfrm>
+            <a:off x="1371600" y="914400"/>
+            <a:ext cx="91440" cy="3200400"/>
+          </a:xfrm>
+          <a:prstGeom prst="rect">
+            <a:avLst/>
+          </a:prstGeom>
+          <a:solidFill>
+            <a:srgbClr val="2A9D8F"/>
+          </a:solidFill>
+          <a:ln/>
+        </p:spPr>
+      </p:sp>
+      <p:sp>
+        <p:nvSpPr>
+          <p:cNvPr id="6" name="Text 4"/>
+          <p:cNvSpPr/>
+          <p:nvPr/>
+        </p:nvSpPr>
+        <p:spPr>
+          <a:xfrm>
+            <a:off x="1828800" y="1097280"/>
+            <a:ext cx="5669280" cy="640080"/>
+          </a:xfrm>
+          <a:prstGeom prst="rect">
+            <a:avLst/>
+          </a:prstGeom>
+          <a:noFill/>
+          <a:ln/>
+        </p:spPr>
+        <p:txBody>
+          <a:bodyPr wrap="square" rtlCol="0" anchor="ctr"/>
           <a:lstStyle/>
           <a:p>
             <a:pPr indent="0" marL="0">
               <a:buNone/>
             </a:pPr>
             <a:r>
-              <a:rPr lang="en-US" sz="2600" b="1" dirty="0">
+              <a:rPr lang="en-US" sz="2400" b="1" dirty="0">
                 <a:solidFill>
                   <a:srgbClr val="1B2A4A"/>
                 </a:solidFill>
@@ -1455,20 +1657,20 @@
               </a:rPr>
               <a:t>What is the Scientific Method?</a:t>
             </a:r>
-            <a:endParaRPr lang="en-US" sz="2600" dirty="0"/>
-          </a:p>
-        </p:txBody>
-      </p:sp>
-      <p:sp>
-        <p:nvSpPr>
-          <p:cNvPr id="4" name="Text 2"/>
-          <p:cNvSpPr/>
-          <p:nvPr/>
-        </p:nvSpPr>
-        <p:spPr>
-          <a:xfrm>
-            <a:off x="548640" y="1097280"/>
-            <a:ext cx="8046720" cy="3474720"/>
+            <a:endParaRPr lang="en-US" sz="2400" dirty="0"/>
+          </a:p>
+        </p:txBody>
+      </p:sp>
+      <p:sp>
+        <p:nvSpPr>
+          <p:cNvPr id="7" name="Text 5"/>
+          <p:cNvSpPr/>
+          <p:nvPr/>
+        </p:nvSpPr>
+        <p:spPr>
+          <a:xfrm>
+            <a:off x="1828800" y="1828800"/>
+            <a:ext cx="5669280" cy="2011680"/>
           </a:xfrm>
           <a:prstGeom prst="rect">
             <a:avLst/>
@@ -1480,12 +1682,11 @@
           <a:bodyPr wrap="square" rtlCol="0" anchor="t"/>
           <a:lstStyle/>
           <a:p>
-            <a:pPr marL="342900" indent="-342900">
-              <a:spcAft>
-                <a:spcPts val="800"/>
-              </a:spcAft>
-              <a:buSzPct val="100000"/>
-              <a:buChar char="•"/>
+            <a:pPr indent="0" marL="0">
+              <a:lnSpc>
+                <a:spcPct val="130000"/>
+              </a:lnSpc>
+              <a:buNone/>
             </a:pPr>
             <a:r>
               <a:rPr lang="en-US" sz="1500" dirty="0">
@@ -1496,128 +1697,9 @@
                 <a:ea typeface="Calibri" pitchFamily="34" charset="-122"/>
                 <a:cs typeface="Calibri" pitchFamily="34" charset="-120"/>
               </a:rPr>
-              <a:t>A step-by-step process scientists use to investigate questions</a:t>
+              <a:t>The scientific method is a step-by-step process scientists use to answer questions about the natural world. It involves making observations, forming hypotheses, testing through experiments, and drawing conclusions based on evidence.</a:t>
             </a:r>
             <a:endParaRPr lang="en-US" sz="1500" dirty="0"/>
-          </a:p>
-          <a:p>
-            <a:pPr marL="342900" indent="-342900">
-              <a:spcAft>
-                <a:spcPts val="800"/>
-              </a:spcAft>
-              <a:buSzPct val="100000"/>
-              <a:buChar char="•"/>
-            </a:pPr>
-            <a:r>
-              <a:rPr lang="en-US" sz="1500" dirty="0">
-                <a:solidFill>
-                  <a:srgbClr val="3D3A36"/>
-                </a:solidFill>
-                <a:latin typeface="Calibri" pitchFamily="34" charset="0"/>
-                <a:ea typeface="Calibri" pitchFamily="34" charset="-122"/>
-                <a:cs typeface="Calibri" pitchFamily="34" charset="-120"/>
-              </a:rPr>
-              <a:t>It helps us test ideas fairly and draw reliable conclusions</a:t>
-            </a:r>
-            <a:endParaRPr lang="en-US" sz="1500" dirty="0"/>
-          </a:p>
-          <a:p>
-            <a:pPr marL="342900" indent="-342900">
-              <a:spcAft>
-                <a:spcPts val="800"/>
-              </a:spcAft>
-              <a:buSzPct val="100000"/>
-              <a:buChar char="•"/>
-            </a:pPr>
-            <a:r>
-              <a:rPr lang="en-US" sz="1500" dirty="0">
-                <a:solidFill>
-                  <a:srgbClr val="3D3A36"/>
-                </a:solidFill>
-                <a:latin typeface="Calibri" pitchFamily="34" charset="0"/>
-                <a:ea typeface="Calibri" pitchFamily="34" charset="-122"/>
-                <a:cs typeface="Calibri" pitchFamily="34" charset="-120"/>
-              </a:rPr>
-              <a:t>The steps: Question → Research → Hypothesis → Experiment → Analyse → Conclude</a:t>
-            </a:r>
-            <a:endParaRPr lang="en-US" sz="1500" dirty="0"/>
-          </a:p>
-          <a:p>
-            <a:pPr marL="342900" indent="-342900">
-              <a:spcAft>
-                <a:spcPts val="800"/>
-              </a:spcAft>
-              <a:buSzPct val="100000"/>
-              <a:buChar char="•"/>
-            </a:pPr>
-            <a:r>
-              <a:rPr lang="en-US" sz="1500" dirty="0">
-                <a:solidFill>
-                  <a:srgbClr val="3D3A36"/>
-                </a:solidFill>
-                <a:latin typeface="Calibri" pitchFamily="34" charset="0"/>
-                <a:ea typeface="Calibri" pitchFamily="34" charset="-122"/>
-                <a:cs typeface="Calibri" pitchFamily="34" charset="-120"/>
-              </a:rPr>
-              <a:t>Not always linear — scientists often repeat steps</a:t>
-            </a:r>
-            <a:endParaRPr lang="en-US" sz="1500" dirty="0"/>
-          </a:p>
-        </p:txBody>
-      </p:sp>
-      <p:sp>
-        <p:nvSpPr>
-          <p:cNvPr id="5" name="Shape 3"/>
-          <p:cNvSpPr/>
-          <p:nvPr/>
-        </p:nvSpPr>
-        <p:spPr>
-          <a:xfrm>
-            <a:off x="548640" y="4754880"/>
-            <a:ext cx="8046720" cy="9144"/>
-          </a:xfrm>
-          <a:prstGeom prst="rect">
-            <a:avLst/>
-          </a:prstGeom>
-          <a:solidFill>
-            <a:srgbClr val="F3F1EE"/>
-          </a:solidFill>
-          <a:ln/>
-        </p:spPr>
-      </p:sp>
-      <p:sp>
-        <p:nvSpPr>
-          <p:cNvPr id="6" name="Text 4"/>
-          <p:cNvSpPr/>
-          <p:nvPr/>
-        </p:nvSpPr>
-        <p:spPr>
-          <a:xfrm>
-            <a:off x="548640" y="4800600"/>
-            <a:ext cx="3657600" cy="274320"/>
-          </a:xfrm>
-          <a:prstGeom prst="rect">
-            <a:avLst/>
-          </a:prstGeom>
-          <a:noFill/>
-          <a:ln/>
-        </p:spPr>
-        <p:txBody>
-          <a:bodyPr wrap="square" rtlCol="0" anchor="ctr"/>
-          <a:lstStyle/>
-          <a:p>
-            <a:pPr indent="0" marL="0">
-              <a:buNone/>
-            </a:pPr>
-            <a:r>
-              <a:rPr lang="en-US" sz="800" dirty="0">
-                <a:solidFill>
-                  <a:srgbClr val="9B9690"/>
-                </a:solidFill>
-              </a:rPr>
-              <a:t>mrzocchi.com</a:t>
-            </a:r>
-            <a:endParaRPr lang="en-US" sz="800" dirty="0"/>
           </a:p>
         </p:txBody>
       </p:sp>
@@ -1635,7 +1717,7 @@
     <p:bg>
       <p:bgPr>
         <a:solidFill>
-          <a:srgbClr val="FFFFFF"/>
+          <a:srgbClr val="FAF8F5"/>
         </a:solidFill>
       </p:bgPr>
     </p:bg>
@@ -1681,8 +1763,8 @@
         </p:nvSpPr>
         <p:spPr>
           <a:xfrm>
-            <a:off x="548640" y="274320"/>
-            <a:ext cx="8046720" cy="640080"/>
+            <a:off x="7772400" y="4709160"/>
+            <a:ext cx="1097280" cy="320040"/>
           </a:xfrm>
           <a:prstGeom prst="rect">
             <a:avLst/>
@@ -1691,7 +1773,46 @@
           <a:ln/>
         </p:spPr>
         <p:txBody>
-          <a:bodyPr wrap="square" lIns="0" tIns="0" rIns="0" bIns="0" rtlCol="0" anchor="ctr"/>
+          <a:bodyPr wrap="square" rtlCol="0" anchor="ctr"/>
+          <a:lstStyle/>
+          <a:p>
+            <a:pPr algn="r" indent="0" marL="0">
+              <a:buNone/>
+            </a:pPr>
+            <a:r>
+              <a:rPr lang="en-US" sz="900" dirty="0">
+                <a:solidFill>
+                  <a:srgbClr val="6B6660"/>
+                </a:solidFill>
+                <a:latin typeface="Calibri" pitchFamily="34" charset="0"/>
+                <a:ea typeface="Calibri" pitchFamily="34" charset="-122"/>
+                <a:cs typeface="Calibri" pitchFamily="34" charset="-120"/>
+              </a:rPr>
+              <a:t>3 / 6</a:t>
+            </a:r>
+            <a:endParaRPr lang="en-US" sz="900" dirty="0"/>
+          </a:p>
+        </p:txBody>
+      </p:sp>
+      <p:sp>
+        <p:nvSpPr>
+          <p:cNvPr id="4" name="Text 2"/>
+          <p:cNvSpPr/>
+          <p:nvPr/>
+        </p:nvSpPr>
+        <p:spPr>
+          <a:xfrm>
+            <a:off x="457200" y="274320"/>
+            <a:ext cx="8229600" cy="640080"/>
+          </a:xfrm>
+          <a:prstGeom prst="rect">
+            <a:avLst/>
+          </a:prstGeom>
+          <a:noFill/>
+          <a:ln/>
+        </p:spPr>
+        <p:txBody>
+          <a:bodyPr wrap="square" rtlCol="0" anchor="ctr"/>
           <a:lstStyle/>
           <a:p>
             <a:pPr indent="0" marL="0">
@@ -1706,7 +1827,7 @@
                 <a:ea typeface="Georgia" pitchFamily="34" charset="-122"/>
                 <a:cs typeface="Georgia" pitchFamily="34" charset="-120"/>
               </a:rPr>
-              <a:t>The Steps in Detail</a:t>
+              <a:t>The Six Steps</a:t>
             </a:r>
             <a:endParaRPr lang="en-US" sz="2600" dirty="0"/>
           </a:p>
@@ -1714,14 +1835,66 @@
       </p:sp>
       <p:sp>
         <p:nvSpPr>
-          <p:cNvPr id="4" name="Text 2"/>
-          <p:cNvSpPr/>
-          <p:nvPr/>
-        </p:nvSpPr>
-        <p:spPr>
-          <a:xfrm>
-            <a:off x="548640" y="1097280"/>
-            <a:ext cx="8046720" cy="3474720"/>
+          <p:cNvPr id="5" name="Shape 3"/>
+          <p:cNvSpPr/>
+          <p:nvPr/>
+        </p:nvSpPr>
+        <p:spPr>
+          <a:xfrm>
+            <a:off x="457200" y="1188720"/>
+            <a:ext cx="2560320" cy="1828800"/>
+          </a:xfrm>
+          <a:prstGeom prst="rect">
+            <a:avLst/>
+          </a:prstGeom>
+          <a:solidFill>
+            <a:srgbClr val="FFFFFF"/>
+          </a:solidFill>
+          <a:ln w="12700">
+            <a:solidFill>
+              <a:srgbClr val="E5E2DC"/>
+            </a:solidFill>
+            <a:prstDash val="solid"/>
+          </a:ln>
+          <a:effectLst>
+            <a:outerShdw sx="100000" sy="100000" kx="0" ky="0" algn="bl" rotWithShape="0" blurRad="50800" dist="25400" dir="8100000">
+              <a:srgbClr val="000000">
+                <a:alpha val="10000"/>
+              </a:srgbClr>
+            </a:outerShdw>
+          </a:effectLst>
+        </p:spPr>
+      </p:sp>
+      <p:sp>
+        <p:nvSpPr>
+          <p:cNvPr id="6" name="Shape 4"/>
+          <p:cNvSpPr/>
+          <p:nvPr/>
+        </p:nvSpPr>
+        <p:spPr>
+          <a:xfrm>
+            <a:off x="457200" y="1188720"/>
+            <a:ext cx="2560320" cy="54864"/>
+          </a:xfrm>
+          <a:prstGeom prst="rect">
+            <a:avLst/>
+          </a:prstGeom>
+          <a:solidFill>
+            <a:srgbClr val="2A9D8F"/>
+          </a:solidFill>
+          <a:ln/>
+        </p:spPr>
+      </p:sp>
+      <p:sp>
+        <p:nvSpPr>
+          <p:cNvPr id="7" name="Text 5"/>
+          <p:cNvSpPr/>
+          <p:nvPr/>
+        </p:nvSpPr>
+        <p:spPr>
+          <a:xfrm>
+            <a:off x="594360" y="1325880"/>
+            <a:ext cx="2286000" cy="365760"/>
           </a:xfrm>
           <a:prstGeom prst="rect">
             <a:avLst/>
@@ -1730,39 +1903,53 @@
           <a:ln/>
         </p:spPr>
         <p:txBody>
-          <a:bodyPr wrap="square" rtlCol="0" anchor="t"/>
-          <a:lstStyle/>
-          <a:p>
-            <a:pPr marL="342900" indent="-342900">
-              <a:spcAft>
-                <a:spcPts val="800"/>
-              </a:spcAft>
-              <a:buSzPct val="100000"/>
-              <a:buChar char="•"/>
-            </a:pPr>
-            <a:r>
-              <a:rPr lang="en-US" sz="1500" dirty="0">
-                <a:solidFill>
-                  <a:srgbClr val="3D3A36"/>
+          <a:bodyPr wrap="square" rtlCol="0" anchor="ctr"/>
+          <a:lstStyle/>
+          <a:p>
+            <a:pPr indent="0" marL="0">
+              <a:buNone/>
+            </a:pPr>
+            <a:r>
+              <a:rPr lang="en-US" sz="1400" b="1" dirty="0">
+                <a:solidFill>
+                  <a:srgbClr val="1B2A4A"/>
                 </a:solidFill>
                 <a:latin typeface="Calibri" pitchFamily="34" charset="0"/>
                 <a:ea typeface="Calibri" pitchFamily="34" charset="-122"/>
                 <a:cs typeface="Calibri" pitchFamily="34" charset="-120"/>
               </a:rPr>
-              <a:t>1. ASK A QUESTION — observe something and wonder why</a:t>
-            </a:r>
-            <a:endParaRPr lang="en-US" sz="1500" dirty="0"/>
-          </a:p>
-          <a:p>
-            <a:pPr marL="342900" indent="-342900">
-              <a:spcAft>
-                <a:spcPts val="800"/>
-              </a:spcAft>
-              <a:buSzPct val="100000"/>
-              <a:buChar char="•"/>
-            </a:pPr>
-            <a:r>
-              <a:rPr lang="en-US" sz="1500" dirty="0">
+              <a:t>1. Observe &amp; Question</a:t>
+            </a:r>
+            <a:endParaRPr lang="en-US" sz="1400" dirty="0"/>
+          </a:p>
+        </p:txBody>
+      </p:sp>
+      <p:sp>
+        <p:nvSpPr>
+          <p:cNvPr id="8" name="Text 6"/>
+          <p:cNvSpPr/>
+          <p:nvPr/>
+        </p:nvSpPr>
+        <p:spPr>
+          <a:xfrm>
+            <a:off x="594360" y="1737360"/>
+            <a:ext cx="2286000" cy="1097280"/>
+          </a:xfrm>
+          <a:prstGeom prst="rect">
+            <a:avLst/>
+          </a:prstGeom>
+          <a:noFill/>
+          <a:ln/>
+        </p:spPr>
+        <p:txBody>
+          <a:bodyPr wrap="square" rtlCol="0" anchor="t"/>
+          <a:lstStyle/>
+          <a:p>
+            <a:pPr indent="0" marL="0">
+              <a:buNone/>
+            </a:pPr>
+            <a:r>
+              <a:rPr lang="en-US" sz="1100" dirty="0">
                 <a:solidFill>
                   <a:srgbClr val="3D3A36"/>
                 </a:solidFill>
@@ -1770,41 +1957,129 @@
                 <a:ea typeface="Calibri" pitchFamily="34" charset="-122"/>
                 <a:cs typeface="Calibri" pitchFamily="34" charset="-120"/>
               </a:rPr>
-              <a:t>2. RESEARCH — find out what is already known</a:t>
-            </a:r>
-            <a:endParaRPr lang="en-US" sz="1500" dirty="0"/>
-          </a:p>
-          <a:p>
-            <a:pPr marL="342900" indent="-342900">
-              <a:spcAft>
-                <a:spcPts val="800"/>
-              </a:spcAft>
-              <a:buSzPct val="100000"/>
-              <a:buChar char="•"/>
-            </a:pPr>
-            <a:r>
-              <a:rPr lang="en-US" sz="1500" dirty="0">
-                <a:solidFill>
-                  <a:srgbClr val="3D3A36"/>
+              <a:t>Notice something interesting. Ask a testable question: 'Does the amount of sunlight affect plant growth?'</a:t>
+            </a:r>
+            <a:endParaRPr lang="en-US" sz="1100" dirty="0"/>
+          </a:p>
+        </p:txBody>
+      </p:sp>
+      <p:sp>
+        <p:nvSpPr>
+          <p:cNvPr id="9" name="Shape 7"/>
+          <p:cNvSpPr/>
+          <p:nvPr/>
+        </p:nvSpPr>
+        <p:spPr>
+          <a:xfrm>
+            <a:off x="3291840" y="1188720"/>
+            <a:ext cx="2560320" cy="1828800"/>
+          </a:xfrm>
+          <a:prstGeom prst="rect">
+            <a:avLst/>
+          </a:prstGeom>
+          <a:solidFill>
+            <a:srgbClr val="FFFFFF"/>
+          </a:solidFill>
+          <a:ln w="12700">
+            <a:solidFill>
+              <a:srgbClr val="E5E2DC"/>
+            </a:solidFill>
+            <a:prstDash val="solid"/>
+          </a:ln>
+          <a:effectLst>
+            <a:outerShdw sx="100000" sy="100000" kx="0" ky="0" algn="bl" rotWithShape="0" blurRad="50800" dist="25400" dir="8100000">
+              <a:srgbClr val="000000">
+                <a:alpha val="10000"/>
+              </a:srgbClr>
+            </a:outerShdw>
+          </a:effectLst>
+        </p:spPr>
+      </p:sp>
+      <p:sp>
+        <p:nvSpPr>
+          <p:cNvPr id="10" name="Shape 8"/>
+          <p:cNvSpPr/>
+          <p:nvPr/>
+        </p:nvSpPr>
+        <p:spPr>
+          <a:xfrm>
+            <a:off x="3291840" y="1188720"/>
+            <a:ext cx="2560320" cy="54864"/>
+          </a:xfrm>
+          <a:prstGeom prst="rect">
+            <a:avLst/>
+          </a:prstGeom>
+          <a:solidFill>
+            <a:srgbClr val="2A9D8F"/>
+          </a:solidFill>
+          <a:ln/>
+        </p:spPr>
+      </p:sp>
+      <p:sp>
+        <p:nvSpPr>
+          <p:cNvPr id="11" name="Text 9"/>
+          <p:cNvSpPr/>
+          <p:nvPr/>
+        </p:nvSpPr>
+        <p:spPr>
+          <a:xfrm>
+            <a:off x="3429000" y="1325880"/>
+            <a:ext cx="2286000" cy="365760"/>
+          </a:xfrm>
+          <a:prstGeom prst="rect">
+            <a:avLst/>
+          </a:prstGeom>
+          <a:noFill/>
+          <a:ln/>
+        </p:spPr>
+        <p:txBody>
+          <a:bodyPr wrap="square" rtlCol="0" anchor="ctr"/>
+          <a:lstStyle/>
+          <a:p>
+            <a:pPr indent="0" marL="0">
+              <a:buNone/>
+            </a:pPr>
+            <a:r>
+              <a:rPr lang="en-US" sz="1400" b="1" dirty="0">
+                <a:solidFill>
+                  <a:srgbClr val="1B2A4A"/>
                 </a:solidFill>
                 <a:latin typeface="Calibri" pitchFamily="34" charset="0"/>
                 <a:ea typeface="Calibri" pitchFamily="34" charset="-122"/>
                 <a:cs typeface="Calibri" pitchFamily="34" charset="-120"/>
               </a:rPr>
-              <a:t>3. HYPOTHESIS — make a testable prediction (If... then... because...)</a:t>
-            </a:r>
-            <a:endParaRPr lang="en-US" sz="1500" dirty="0"/>
-          </a:p>
-          <a:p>
-            <a:pPr marL="342900" indent="-342900">
-              <a:spcAft>
-                <a:spcPts val="800"/>
-              </a:spcAft>
-              <a:buSzPct val="100000"/>
-              <a:buChar char="•"/>
-            </a:pPr>
-            <a:r>
-              <a:rPr lang="en-US" sz="1500" dirty="0">
+              <a:t>2. Research</a:t>
+            </a:r>
+            <a:endParaRPr lang="en-US" sz="1400" dirty="0"/>
+          </a:p>
+        </p:txBody>
+      </p:sp>
+      <p:sp>
+        <p:nvSpPr>
+          <p:cNvPr id="12" name="Text 10"/>
+          <p:cNvSpPr/>
+          <p:nvPr/>
+        </p:nvSpPr>
+        <p:spPr>
+          <a:xfrm>
+            <a:off x="3429000" y="1737360"/>
+            <a:ext cx="2286000" cy="1097280"/>
+          </a:xfrm>
+          <a:prstGeom prst="rect">
+            <a:avLst/>
+          </a:prstGeom>
+          <a:noFill/>
+          <a:ln/>
+        </p:spPr>
+        <p:txBody>
+          <a:bodyPr wrap="square" rtlCol="0" anchor="t"/>
+          <a:lstStyle/>
+          <a:p>
+            <a:pPr indent="0" marL="0">
+              <a:buNone/>
+            </a:pPr>
+            <a:r>
+              <a:rPr lang="en-US" sz="1100" dirty="0">
                 <a:solidFill>
                   <a:srgbClr val="3D3A36"/>
                 </a:solidFill>
@@ -1812,41 +2087,129 @@
                 <a:ea typeface="Calibri" pitchFamily="34" charset="-122"/>
                 <a:cs typeface="Calibri" pitchFamily="34" charset="-120"/>
               </a:rPr>
-              <a:t>4. EXPERIMENT — design a fair test with one variable changed</a:t>
-            </a:r>
-            <a:endParaRPr lang="en-US" sz="1500" dirty="0"/>
-          </a:p>
-          <a:p>
-            <a:pPr marL="342900" indent="-342900">
-              <a:spcAft>
-                <a:spcPts val="800"/>
-              </a:spcAft>
-              <a:buSzPct val="100000"/>
-              <a:buChar char="•"/>
-            </a:pPr>
-            <a:r>
-              <a:rPr lang="en-US" sz="1500" dirty="0">
-                <a:solidFill>
-                  <a:srgbClr val="3D3A36"/>
+              <a:t>Find out what is already known. Read textbooks, articles, and reliable sources to build background knowledge.</a:t>
+            </a:r>
+            <a:endParaRPr lang="en-US" sz="1100" dirty="0"/>
+          </a:p>
+        </p:txBody>
+      </p:sp>
+      <p:sp>
+        <p:nvSpPr>
+          <p:cNvPr id="13" name="Shape 11"/>
+          <p:cNvSpPr/>
+          <p:nvPr/>
+        </p:nvSpPr>
+        <p:spPr>
+          <a:xfrm>
+            <a:off x="6126480" y="1188720"/>
+            <a:ext cx="2560320" cy="1828800"/>
+          </a:xfrm>
+          <a:prstGeom prst="rect">
+            <a:avLst/>
+          </a:prstGeom>
+          <a:solidFill>
+            <a:srgbClr val="FFFFFF"/>
+          </a:solidFill>
+          <a:ln w="12700">
+            <a:solidFill>
+              <a:srgbClr val="E5E2DC"/>
+            </a:solidFill>
+            <a:prstDash val="solid"/>
+          </a:ln>
+          <a:effectLst>
+            <a:outerShdw sx="100000" sy="100000" kx="0" ky="0" algn="bl" rotWithShape="0" blurRad="50800" dist="25400" dir="8100000">
+              <a:srgbClr val="000000">
+                <a:alpha val="10000"/>
+              </a:srgbClr>
+            </a:outerShdw>
+          </a:effectLst>
+        </p:spPr>
+      </p:sp>
+      <p:sp>
+        <p:nvSpPr>
+          <p:cNvPr id="14" name="Shape 12"/>
+          <p:cNvSpPr/>
+          <p:nvPr/>
+        </p:nvSpPr>
+        <p:spPr>
+          <a:xfrm>
+            <a:off x="6126480" y="1188720"/>
+            <a:ext cx="2560320" cy="54864"/>
+          </a:xfrm>
+          <a:prstGeom prst="rect">
+            <a:avLst/>
+          </a:prstGeom>
+          <a:solidFill>
+            <a:srgbClr val="2A9D8F"/>
+          </a:solidFill>
+          <a:ln/>
+        </p:spPr>
+      </p:sp>
+      <p:sp>
+        <p:nvSpPr>
+          <p:cNvPr id="15" name="Text 13"/>
+          <p:cNvSpPr/>
+          <p:nvPr/>
+        </p:nvSpPr>
+        <p:spPr>
+          <a:xfrm>
+            <a:off x="6263640" y="1325880"/>
+            <a:ext cx="2286000" cy="365760"/>
+          </a:xfrm>
+          <a:prstGeom prst="rect">
+            <a:avLst/>
+          </a:prstGeom>
+          <a:noFill/>
+          <a:ln/>
+        </p:spPr>
+        <p:txBody>
+          <a:bodyPr wrap="square" rtlCol="0" anchor="ctr"/>
+          <a:lstStyle/>
+          <a:p>
+            <a:pPr indent="0" marL="0">
+              <a:buNone/>
+            </a:pPr>
+            <a:r>
+              <a:rPr lang="en-US" sz="1400" b="1" dirty="0">
+                <a:solidFill>
+                  <a:srgbClr val="1B2A4A"/>
                 </a:solidFill>
                 <a:latin typeface="Calibri" pitchFamily="34" charset="0"/>
                 <a:ea typeface="Calibri" pitchFamily="34" charset="-122"/>
                 <a:cs typeface="Calibri" pitchFamily="34" charset="-120"/>
               </a:rPr>
-              <a:t>5. COLLECT DATA — record measurements and observations</a:t>
-            </a:r>
-            <a:endParaRPr lang="en-US" sz="1500" dirty="0"/>
-          </a:p>
-          <a:p>
-            <a:pPr marL="342900" indent="-342900">
-              <a:spcAft>
-                <a:spcPts val="800"/>
-              </a:spcAft>
-              <a:buSzPct val="100000"/>
-              <a:buChar char="•"/>
-            </a:pPr>
-            <a:r>
-              <a:rPr lang="en-US" sz="1500" dirty="0">
+              <a:t>3. Hypothesise</a:t>
+            </a:r>
+            <a:endParaRPr lang="en-US" sz="1400" dirty="0"/>
+          </a:p>
+        </p:txBody>
+      </p:sp>
+      <p:sp>
+        <p:nvSpPr>
+          <p:cNvPr id="16" name="Text 14"/>
+          <p:cNvSpPr/>
+          <p:nvPr/>
+        </p:nvSpPr>
+        <p:spPr>
+          <a:xfrm>
+            <a:off x="6263640" y="1737360"/>
+            <a:ext cx="2286000" cy="1097280"/>
+          </a:xfrm>
+          <a:prstGeom prst="rect">
+            <a:avLst/>
+          </a:prstGeom>
+          <a:noFill/>
+          <a:ln/>
+        </p:spPr>
+        <p:txBody>
+          <a:bodyPr wrap="square" rtlCol="0" anchor="t"/>
+          <a:lstStyle/>
+          <a:p>
+            <a:pPr indent="0" marL="0">
+              <a:buNone/>
+            </a:pPr>
+            <a:r>
+              <a:rPr lang="en-US" sz="1100" dirty="0">
                 <a:solidFill>
                   <a:srgbClr val="3D3A36"/>
                 </a:solidFill>
@@ -1854,86 +2217,9 @@
                 <a:ea typeface="Calibri" pitchFamily="34" charset="-122"/>
                 <a:cs typeface="Calibri" pitchFamily="34" charset="-120"/>
               </a:rPr>
-              <a:t>6. ANALYSE — look for patterns in your data</a:t>
-            </a:r>
-            <a:endParaRPr lang="en-US" sz="1500" dirty="0"/>
-          </a:p>
-          <a:p>
-            <a:pPr marL="342900" indent="-342900">
-              <a:spcAft>
-                <a:spcPts val="800"/>
-              </a:spcAft>
-              <a:buSzPct val="100000"/>
-              <a:buChar char="•"/>
-            </a:pPr>
-            <a:r>
-              <a:rPr lang="en-US" sz="1500" dirty="0">
-                <a:solidFill>
-                  <a:srgbClr val="3D3A36"/>
-                </a:solidFill>
-                <a:latin typeface="Calibri" pitchFamily="34" charset="0"/>
-                <a:ea typeface="Calibri" pitchFamily="34" charset="-122"/>
-                <a:cs typeface="Calibri" pitchFamily="34" charset="-120"/>
-              </a:rPr>
-              <a:t>7. CONCLUDE — does your data support your hypothesis?</a:t>
-            </a:r>
-            <a:endParaRPr lang="en-US" sz="1500" dirty="0"/>
-          </a:p>
-        </p:txBody>
-      </p:sp>
-      <p:sp>
-        <p:nvSpPr>
-          <p:cNvPr id="5" name="Shape 3"/>
-          <p:cNvSpPr/>
-          <p:nvPr/>
-        </p:nvSpPr>
-        <p:spPr>
-          <a:xfrm>
-            <a:off x="548640" y="4754880"/>
-            <a:ext cx="8046720" cy="9144"/>
-          </a:xfrm>
-          <a:prstGeom prst="rect">
-            <a:avLst/>
-          </a:prstGeom>
-          <a:solidFill>
-            <a:srgbClr val="F3F1EE"/>
-          </a:solidFill>
-          <a:ln/>
-        </p:spPr>
-      </p:sp>
-      <p:sp>
-        <p:nvSpPr>
-          <p:cNvPr id="6" name="Text 4"/>
-          <p:cNvSpPr/>
-          <p:nvPr/>
-        </p:nvSpPr>
-        <p:spPr>
-          <a:xfrm>
-            <a:off x="548640" y="4800600"/>
-            <a:ext cx="3657600" cy="274320"/>
-          </a:xfrm>
-          <a:prstGeom prst="rect">
-            <a:avLst/>
-          </a:prstGeom>
-          <a:noFill/>
-          <a:ln/>
-        </p:spPr>
-        <p:txBody>
-          <a:bodyPr wrap="square" rtlCol="0" anchor="ctr"/>
-          <a:lstStyle/>
-          <a:p>
-            <a:pPr indent="0" marL="0">
-              <a:buNone/>
-            </a:pPr>
-            <a:r>
-              <a:rPr lang="en-US" sz="800" dirty="0">
-                <a:solidFill>
-                  <a:srgbClr val="9B9690"/>
-                </a:solidFill>
-              </a:rPr>
-              <a:t>mrzocchi.com</a:t>
-            </a:r>
-            <a:endParaRPr lang="en-US" sz="800" dirty="0"/>
+              <a:t>Make a prediction using 'If... then... because...' format. A hypothesis must be testable and falsifiable.</a:t>
+            </a:r>
+            <a:endParaRPr lang="en-US" sz="1100" dirty="0"/>
           </a:p>
         </p:txBody>
       </p:sp>
@@ -1997,8 +2283,8 @@
         </p:nvSpPr>
         <p:spPr>
           <a:xfrm>
-            <a:off x="548640" y="274320"/>
-            <a:ext cx="8046720" cy="640080"/>
+            <a:off x="7772400" y="4709160"/>
+            <a:ext cx="1097280" cy="320040"/>
           </a:xfrm>
           <a:prstGeom prst="rect">
             <a:avLst/>
@@ -2007,7 +2293,46 @@
           <a:ln/>
         </p:spPr>
         <p:txBody>
-          <a:bodyPr wrap="square" lIns="0" tIns="0" rIns="0" bIns="0" rtlCol="0" anchor="ctr"/>
+          <a:bodyPr wrap="square" rtlCol="0" anchor="ctr"/>
+          <a:lstStyle/>
+          <a:p>
+            <a:pPr algn="r" indent="0" marL="0">
+              <a:buNone/>
+            </a:pPr>
+            <a:r>
+              <a:rPr lang="en-US" sz="900" dirty="0">
+                <a:solidFill>
+                  <a:srgbClr val="6B6660"/>
+                </a:solidFill>
+                <a:latin typeface="Calibri" pitchFamily="34" charset="0"/>
+                <a:ea typeface="Calibri" pitchFamily="34" charset="-122"/>
+                <a:cs typeface="Calibri" pitchFamily="34" charset="-120"/>
+              </a:rPr>
+              <a:t>4 / 6</a:t>
+            </a:r>
+            <a:endParaRPr lang="en-US" sz="900" dirty="0"/>
+          </a:p>
+        </p:txBody>
+      </p:sp>
+      <p:sp>
+        <p:nvSpPr>
+          <p:cNvPr id="4" name="Text 2"/>
+          <p:cNvSpPr/>
+          <p:nvPr/>
+        </p:nvSpPr>
+        <p:spPr>
+          <a:xfrm>
+            <a:off x="457200" y="274320"/>
+            <a:ext cx="8229600" cy="640080"/>
+          </a:xfrm>
+          <a:prstGeom prst="rect">
+            <a:avLst/>
+          </a:prstGeom>
+          <a:noFill/>
+          <a:ln/>
+        </p:spPr>
+        <p:txBody>
+          <a:bodyPr wrap="square" rtlCol="0" anchor="ctr"/>
           <a:lstStyle/>
           <a:p>
             <a:pPr indent="0" marL="0">
@@ -2022,7 +2347,7 @@
                 <a:ea typeface="Georgia" pitchFamily="34" charset="-122"/>
                 <a:cs typeface="Georgia" pitchFamily="34" charset="-120"/>
               </a:rPr>
-              <a:t>Key Terms</a:t>
+              <a:t>The Six Steps (continued)</a:t>
             </a:r>
             <a:endParaRPr lang="en-US" sz="2600" dirty="0"/>
           </a:p>
@@ -2030,14 +2355,14 @@
       </p:sp>
       <p:sp>
         <p:nvSpPr>
-          <p:cNvPr id="4" name="Shape 2"/>
-          <p:cNvSpPr/>
-          <p:nvPr/>
-        </p:nvSpPr>
-        <p:spPr>
-          <a:xfrm>
-            <a:off x="548640" y="1097280"/>
-            <a:ext cx="3749040" cy="594360"/>
+          <p:cNvPr id="5" name="Shape 3"/>
+          <p:cNvSpPr/>
+          <p:nvPr/>
+        </p:nvSpPr>
+        <p:spPr>
+          <a:xfrm>
+            <a:off x="457200" y="1188720"/>
+            <a:ext cx="2560320" cy="1828800"/>
           </a:xfrm>
           <a:prstGeom prst="rect">
             <a:avLst/>
@@ -2045,7 +2370,12 @@
           <a:solidFill>
             <a:srgbClr val="FFFFFF"/>
           </a:solidFill>
-          <a:ln/>
+          <a:ln w="12700">
+            <a:solidFill>
+              <a:srgbClr val="E5E2DC"/>
+            </a:solidFill>
+            <a:prstDash val="solid"/>
+          </a:ln>
           <a:effectLst>
             <a:outerShdw sx="100000" sy="100000" kx="0" ky="0" algn="bl" rotWithShape="0" blurRad="50800" dist="25400" dir="8100000">
               <a:srgbClr val="000000">
@@ -2057,14 +2387,14 @@
       </p:sp>
       <p:sp>
         <p:nvSpPr>
-          <p:cNvPr id="5" name="Shape 3"/>
-          <p:cNvSpPr/>
-          <p:nvPr/>
-        </p:nvSpPr>
-        <p:spPr>
-          <a:xfrm>
-            <a:off x="548640" y="1097280"/>
-            <a:ext cx="54864" cy="594360"/>
+          <p:cNvPr id="6" name="Shape 4"/>
+          <p:cNvSpPr/>
+          <p:nvPr/>
+        </p:nvSpPr>
+        <p:spPr>
+          <a:xfrm>
+            <a:off x="457200" y="1188720"/>
+            <a:ext cx="2560320" cy="54864"/>
           </a:xfrm>
           <a:prstGeom prst="rect">
             <a:avLst/>
@@ -2077,14 +2407,14 @@
       </p:sp>
       <p:sp>
         <p:nvSpPr>
-          <p:cNvPr id="6" name="Text 4"/>
-          <p:cNvSpPr/>
-          <p:nvPr/>
-        </p:nvSpPr>
-        <p:spPr>
-          <a:xfrm>
-            <a:off x="685800" y="1143000"/>
-            <a:ext cx="3520440" cy="502920"/>
+          <p:cNvPr id="7" name="Text 5"/>
+          <p:cNvSpPr/>
+          <p:nvPr/>
+        </p:nvSpPr>
+        <p:spPr>
+          <a:xfrm>
+            <a:off x="594360" y="1325880"/>
+            <a:ext cx="2286000" cy="365760"/>
           </a:xfrm>
           <a:prstGeom prst="rect">
             <a:avLst/>
@@ -2100,41 +2430,69 @@
               <a:buNone/>
             </a:pPr>
             <a:r>
-              <a:rPr lang="en-US" sz="1200" b="1" dirty="0">
+              <a:rPr lang="en-US" sz="1400" b="1" dirty="0">
                 <a:solidFill>
                   <a:srgbClr val="1B2A4A"/>
                 </a:solidFill>
-              </a:rPr>
-              <a:t>Hypothesis</a:t>
-            </a:r>
-            <a:endParaRPr lang="en-US" sz="1200" dirty="0"/>
-          </a:p>
+                <a:latin typeface="Calibri" pitchFamily="34" charset="0"/>
+                <a:ea typeface="Calibri" pitchFamily="34" charset="-122"/>
+                <a:cs typeface="Calibri" pitchFamily="34" charset="-120"/>
+              </a:rPr>
+              <a:t>4. Experiment</a:t>
+            </a:r>
+            <a:endParaRPr lang="en-US" sz="1400" dirty="0"/>
+          </a:p>
+        </p:txBody>
+      </p:sp>
+      <p:sp>
+        <p:nvSpPr>
+          <p:cNvPr id="8" name="Text 6"/>
+          <p:cNvSpPr/>
+          <p:nvPr/>
+        </p:nvSpPr>
+        <p:spPr>
+          <a:xfrm>
+            <a:off x="594360" y="1737360"/>
+            <a:ext cx="2286000" cy="1097280"/>
+          </a:xfrm>
+          <a:prstGeom prst="rect">
+            <a:avLst/>
+          </a:prstGeom>
+          <a:noFill/>
+          <a:ln/>
+        </p:spPr>
+        <p:txBody>
+          <a:bodyPr wrap="square" rtlCol="0" anchor="t"/>
+          <a:lstStyle/>
           <a:p>
             <a:pPr indent="0" marL="0">
               <a:buNone/>
             </a:pPr>
             <a:r>
-              <a:rPr lang="en-US" sz="1000" dirty="0">
-                <a:solidFill>
-                  <a:srgbClr val="6B6660"/>
-                </a:solidFill>
-              </a:rPr>
-              <a:t>A testable prediction based on observations</a:t>
-            </a:r>
-            <a:endParaRPr lang="en-US" sz="1200" dirty="0"/>
-          </a:p>
-        </p:txBody>
-      </p:sp>
-      <p:sp>
-        <p:nvSpPr>
-          <p:cNvPr id="7" name="Shape 5"/>
-          <p:cNvSpPr/>
-          <p:nvPr/>
-        </p:nvSpPr>
-        <p:spPr>
-          <a:xfrm>
-            <a:off x="4480560" y="1097280"/>
-            <a:ext cx="3749040" cy="594360"/>
+              <a:rPr lang="en-US" sz="1100" dirty="0">
+                <a:solidFill>
+                  <a:srgbClr val="3D3A36"/>
+                </a:solidFill>
+                <a:latin typeface="Calibri" pitchFamily="34" charset="0"/>
+                <a:ea typeface="Calibri" pitchFamily="34" charset="-122"/>
+                <a:cs typeface="Calibri" pitchFamily="34" charset="-120"/>
+              </a:rPr>
+              <a:t>Design a fair test. Change only ONE variable (independent). Measure the outcome (dependent). Keep everything else the same (controlled).</a:t>
+            </a:r>
+            <a:endParaRPr lang="en-US" sz="1100" dirty="0"/>
+          </a:p>
+        </p:txBody>
+      </p:sp>
+      <p:sp>
+        <p:nvSpPr>
+          <p:cNvPr id="9" name="Shape 7"/>
+          <p:cNvSpPr/>
+          <p:nvPr/>
+        </p:nvSpPr>
+        <p:spPr>
+          <a:xfrm>
+            <a:off x="3291840" y="1188720"/>
+            <a:ext cx="2560320" cy="1828800"/>
           </a:xfrm>
           <a:prstGeom prst="rect">
             <a:avLst/>
@@ -2142,7 +2500,12 @@
           <a:solidFill>
             <a:srgbClr val="FFFFFF"/>
           </a:solidFill>
-          <a:ln/>
+          <a:ln w="12700">
+            <a:solidFill>
+              <a:srgbClr val="E5E2DC"/>
+            </a:solidFill>
+            <a:prstDash val="solid"/>
+          </a:ln>
           <a:effectLst>
             <a:outerShdw sx="100000" sy="100000" kx="0" ky="0" algn="bl" rotWithShape="0" blurRad="50800" dist="25400" dir="8100000">
               <a:srgbClr val="000000">
@@ -2154,14 +2517,14 @@
       </p:sp>
       <p:sp>
         <p:nvSpPr>
-          <p:cNvPr id="8" name="Shape 6"/>
-          <p:cNvSpPr/>
-          <p:nvPr/>
-        </p:nvSpPr>
-        <p:spPr>
-          <a:xfrm>
-            <a:off x="4480560" y="1097280"/>
-            <a:ext cx="54864" cy="594360"/>
+          <p:cNvPr id="10" name="Shape 8"/>
+          <p:cNvSpPr/>
+          <p:nvPr/>
+        </p:nvSpPr>
+        <p:spPr>
+          <a:xfrm>
+            <a:off x="3291840" y="1188720"/>
+            <a:ext cx="2560320" cy="54864"/>
           </a:xfrm>
           <a:prstGeom prst="rect">
             <a:avLst/>
@@ -2174,14 +2537,14 @@
       </p:sp>
       <p:sp>
         <p:nvSpPr>
-          <p:cNvPr id="9" name="Text 7"/>
-          <p:cNvSpPr/>
-          <p:nvPr/>
-        </p:nvSpPr>
-        <p:spPr>
-          <a:xfrm>
-            <a:off x="4617720" y="1143000"/>
-            <a:ext cx="3520440" cy="502920"/>
+          <p:cNvPr id="11" name="Text 9"/>
+          <p:cNvSpPr/>
+          <p:nvPr/>
+        </p:nvSpPr>
+        <p:spPr>
+          <a:xfrm>
+            <a:off x="3429000" y="1325880"/>
+            <a:ext cx="2286000" cy="365760"/>
           </a:xfrm>
           <a:prstGeom prst="rect">
             <a:avLst/>
@@ -2197,41 +2560,69 @@
               <a:buNone/>
             </a:pPr>
             <a:r>
-              <a:rPr lang="en-US" sz="1200" b="1" dirty="0">
+              <a:rPr lang="en-US" sz="1400" b="1" dirty="0">
                 <a:solidFill>
                   <a:srgbClr val="1B2A4A"/>
                 </a:solidFill>
-              </a:rPr>
-              <a:t>Variable</a:t>
-            </a:r>
-            <a:endParaRPr lang="en-US" sz="1200" dirty="0"/>
-          </a:p>
+                <a:latin typeface="Calibri" pitchFamily="34" charset="0"/>
+                <a:ea typeface="Calibri" pitchFamily="34" charset="-122"/>
+                <a:cs typeface="Calibri" pitchFamily="34" charset="-120"/>
+              </a:rPr>
+              <a:t>5. Analyse</a:t>
+            </a:r>
+            <a:endParaRPr lang="en-US" sz="1400" dirty="0"/>
+          </a:p>
+        </p:txBody>
+      </p:sp>
+      <p:sp>
+        <p:nvSpPr>
+          <p:cNvPr id="12" name="Text 10"/>
+          <p:cNvSpPr/>
+          <p:nvPr/>
+        </p:nvSpPr>
+        <p:spPr>
+          <a:xfrm>
+            <a:off x="3429000" y="1737360"/>
+            <a:ext cx="2286000" cy="1097280"/>
+          </a:xfrm>
+          <a:prstGeom prst="rect">
+            <a:avLst/>
+          </a:prstGeom>
+          <a:noFill/>
+          <a:ln/>
+        </p:spPr>
+        <p:txBody>
+          <a:bodyPr wrap="square" rtlCol="0" anchor="t"/>
+          <a:lstStyle/>
           <a:p>
             <a:pPr indent="0" marL="0">
               <a:buNone/>
             </a:pPr>
             <a:r>
-              <a:rPr lang="en-US" sz="1000" dirty="0">
-                <a:solidFill>
-                  <a:srgbClr val="6B6660"/>
-                </a:solidFill>
-              </a:rPr>
-              <a:t>Something that can change in an experiment</a:t>
-            </a:r>
-            <a:endParaRPr lang="en-US" sz="1200" dirty="0"/>
-          </a:p>
-        </p:txBody>
-      </p:sp>
-      <p:sp>
-        <p:nvSpPr>
-          <p:cNvPr id="10" name="Shape 8"/>
-          <p:cNvSpPr/>
-          <p:nvPr/>
-        </p:nvSpPr>
-        <p:spPr>
-          <a:xfrm>
-            <a:off x="548640" y="1828800"/>
-            <a:ext cx="3749040" cy="594360"/>
+              <a:rPr lang="en-US" sz="1100" dirty="0">
+                <a:solidFill>
+                  <a:srgbClr val="3D3A36"/>
+                </a:solidFill>
+                <a:latin typeface="Calibri" pitchFamily="34" charset="0"/>
+                <a:ea typeface="Calibri" pitchFamily="34" charset="-122"/>
+                <a:cs typeface="Calibri" pitchFamily="34" charset="-120"/>
+              </a:rPr>
+              <a:t>Collect data in tables. Create graphs. Look for patterns. Calculate averages for reliability.</a:t>
+            </a:r>
+            <a:endParaRPr lang="en-US" sz="1100" dirty="0"/>
+          </a:p>
+        </p:txBody>
+      </p:sp>
+      <p:sp>
+        <p:nvSpPr>
+          <p:cNvPr id="13" name="Shape 11"/>
+          <p:cNvSpPr/>
+          <p:nvPr/>
+        </p:nvSpPr>
+        <p:spPr>
+          <a:xfrm>
+            <a:off x="6126480" y="1188720"/>
+            <a:ext cx="2560320" cy="1828800"/>
           </a:xfrm>
           <a:prstGeom prst="rect">
             <a:avLst/>
@@ -2239,7 +2630,12 @@
           <a:solidFill>
             <a:srgbClr val="FFFFFF"/>
           </a:solidFill>
-          <a:ln/>
+          <a:ln w="12700">
+            <a:solidFill>
+              <a:srgbClr val="E5E2DC"/>
+            </a:solidFill>
+            <a:prstDash val="solid"/>
+          </a:ln>
           <a:effectLst>
             <a:outerShdw sx="100000" sy="100000" kx="0" ky="0" algn="bl" rotWithShape="0" blurRad="50800" dist="25400" dir="8100000">
               <a:srgbClr val="000000">
@@ -2251,14 +2647,14 @@
       </p:sp>
       <p:sp>
         <p:nvSpPr>
-          <p:cNvPr id="11" name="Shape 9"/>
-          <p:cNvSpPr/>
-          <p:nvPr/>
-        </p:nvSpPr>
-        <p:spPr>
-          <a:xfrm>
-            <a:off x="548640" y="1828800"/>
-            <a:ext cx="54864" cy="594360"/>
+          <p:cNvPr id="14" name="Shape 12"/>
+          <p:cNvSpPr/>
+          <p:nvPr/>
+        </p:nvSpPr>
+        <p:spPr>
+          <a:xfrm>
+            <a:off x="6126480" y="1188720"/>
+            <a:ext cx="2560320" cy="54864"/>
           </a:xfrm>
           <a:prstGeom prst="rect">
             <a:avLst/>
@@ -2271,14 +2667,14 @@
       </p:sp>
       <p:sp>
         <p:nvSpPr>
-          <p:cNvPr id="12" name="Text 10"/>
-          <p:cNvSpPr/>
-          <p:nvPr/>
-        </p:nvSpPr>
-        <p:spPr>
-          <a:xfrm>
-            <a:off x="685800" y="1874520"/>
-            <a:ext cx="3520440" cy="502920"/>
+          <p:cNvPr id="15" name="Text 13"/>
+          <p:cNvSpPr/>
+          <p:nvPr/>
+        </p:nvSpPr>
+        <p:spPr>
+          <a:xfrm>
+            <a:off x="6263640" y="1325880"/>
+            <a:ext cx="2286000" cy="365760"/>
           </a:xfrm>
           <a:prstGeom prst="rect">
             <a:avLst/>
@@ -2294,355 +2690,56 @@
               <a:buNone/>
             </a:pPr>
             <a:r>
-              <a:rPr lang="en-US" sz="1200" b="1" dirty="0">
+              <a:rPr lang="en-US" sz="1400" b="1" dirty="0">
                 <a:solidFill>
                   <a:srgbClr val="1B2A4A"/>
                 </a:solidFill>
-              </a:rPr>
-              <a:t>Fair test</a:t>
-            </a:r>
-            <a:endParaRPr lang="en-US" sz="1200" dirty="0"/>
-          </a:p>
+                <a:latin typeface="Calibri" pitchFamily="34" charset="0"/>
+                <a:ea typeface="Calibri" pitchFamily="34" charset="-122"/>
+                <a:cs typeface="Calibri" pitchFamily="34" charset="-120"/>
+              </a:rPr>
+              <a:t>6. Conclude</a:t>
+            </a:r>
+            <a:endParaRPr lang="en-US" sz="1400" dirty="0"/>
+          </a:p>
+        </p:txBody>
+      </p:sp>
+      <p:sp>
+        <p:nvSpPr>
+          <p:cNvPr id="16" name="Text 14"/>
+          <p:cNvSpPr/>
+          <p:nvPr/>
+        </p:nvSpPr>
+        <p:spPr>
+          <a:xfrm>
+            <a:off x="6263640" y="1737360"/>
+            <a:ext cx="2286000" cy="1097280"/>
+          </a:xfrm>
+          <a:prstGeom prst="rect">
+            <a:avLst/>
+          </a:prstGeom>
+          <a:noFill/>
+          <a:ln/>
+        </p:spPr>
+        <p:txBody>
+          <a:bodyPr wrap="square" rtlCol="0" anchor="t"/>
+          <a:lstStyle/>
           <a:p>
             <a:pPr indent="0" marL="0">
               <a:buNone/>
             </a:pPr>
             <a:r>
-              <a:rPr lang="en-US" sz="1000" dirty="0">
-                <a:solidFill>
-                  <a:srgbClr val="6B6660"/>
-                </a:solidFill>
-              </a:rPr>
-              <a:t>Only ONE variable changes, all others stay the same</a:t>
-            </a:r>
-            <a:endParaRPr lang="en-US" sz="1200" dirty="0"/>
-          </a:p>
-        </p:txBody>
-      </p:sp>
-      <p:sp>
-        <p:nvSpPr>
-          <p:cNvPr id="13" name="Shape 11"/>
-          <p:cNvSpPr/>
-          <p:nvPr/>
-        </p:nvSpPr>
-        <p:spPr>
-          <a:xfrm>
-            <a:off x="4480560" y="1828800"/>
-            <a:ext cx="3749040" cy="594360"/>
-          </a:xfrm>
-          <a:prstGeom prst="rect">
-            <a:avLst/>
-          </a:prstGeom>
-          <a:solidFill>
-            <a:srgbClr val="FFFFFF"/>
-          </a:solidFill>
-          <a:ln/>
-          <a:effectLst>
-            <a:outerShdw sx="100000" sy="100000" kx="0" ky="0" algn="bl" rotWithShape="0" blurRad="50800" dist="25400" dir="8100000">
-              <a:srgbClr val="000000">
-                <a:alpha val="10000"/>
-              </a:srgbClr>
-            </a:outerShdw>
-          </a:effectLst>
-        </p:spPr>
-      </p:sp>
-      <p:sp>
-        <p:nvSpPr>
-          <p:cNvPr id="14" name="Shape 12"/>
-          <p:cNvSpPr/>
-          <p:nvPr/>
-        </p:nvSpPr>
-        <p:spPr>
-          <a:xfrm>
-            <a:off x="4480560" y="1828800"/>
-            <a:ext cx="54864" cy="594360"/>
-          </a:xfrm>
-          <a:prstGeom prst="rect">
-            <a:avLst/>
-          </a:prstGeom>
-          <a:solidFill>
-            <a:srgbClr val="2A9D8F"/>
-          </a:solidFill>
-          <a:ln/>
-        </p:spPr>
-      </p:sp>
-      <p:sp>
-        <p:nvSpPr>
-          <p:cNvPr id="15" name="Text 13"/>
-          <p:cNvSpPr/>
-          <p:nvPr/>
-        </p:nvSpPr>
-        <p:spPr>
-          <a:xfrm>
-            <a:off x="4617720" y="1874520"/>
-            <a:ext cx="3520440" cy="502920"/>
-          </a:xfrm>
-          <a:prstGeom prst="rect">
-            <a:avLst/>
-          </a:prstGeom>
-          <a:noFill/>
-          <a:ln/>
-        </p:spPr>
-        <p:txBody>
-          <a:bodyPr wrap="square" rtlCol="0" anchor="ctr"/>
-          <a:lstStyle/>
-          <a:p>
-            <a:pPr indent="0" marL="0">
-              <a:buNone/>
-            </a:pPr>
-            <a:r>
-              <a:rPr lang="en-US" sz="1200" b="1" dirty="0">
-                <a:solidFill>
-                  <a:srgbClr val="1B2A4A"/>
-                </a:solidFill>
-              </a:rPr>
-              <a:t>Data</a:t>
-            </a:r>
-            <a:endParaRPr lang="en-US" sz="1200" dirty="0"/>
-          </a:p>
-          <a:p>
-            <a:pPr indent="0" marL="0">
-              <a:buNone/>
-            </a:pPr>
-            <a:r>
-              <a:rPr lang="en-US" sz="1000" dirty="0">
-                <a:solidFill>
-                  <a:srgbClr val="6B6660"/>
-                </a:solidFill>
-              </a:rPr>
-              <a:t>Information collected during an experiment</a:t>
-            </a:r>
-            <a:endParaRPr lang="en-US" sz="1200" dirty="0"/>
-          </a:p>
-        </p:txBody>
-      </p:sp>
-      <p:sp>
-        <p:nvSpPr>
-          <p:cNvPr id="16" name="Shape 14"/>
-          <p:cNvSpPr/>
-          <p:nvPr/>
-        </p:nvSpPr>
-        <p:spPr>
-          <a:xfrm>
-            <a:off x="548640" y="2560320"/>
-            <a:ext cx="3749040" cy="594360"/>
-          </a:xfrm>
-          <a:prstGeom prst="rect">
-            <a:avLst/>
-          </a:prstGeom>
-          <a:solidFill>
-            <a:srgbClr val="FFFFFF"/>
-          </a:solidFill>
-          <a:ln/>
-          <a:effectLst>
-            <a:outerShdw sx="100000" sy="100000" kx="0" ky="0" algn="bl" rotWithShape="0" blurRad="50800" dist="25400" dir="8100000">
-              <a:srgbClr val="000000">
-                <a:alpha val="10000"/>
-              </a:srgbClr>
-            </a:outerShdw>
-          </a:effectLst>
-        </p:spPr>
-      </p:sp>
-      <p:sp>
-        <p:nvSpPr>
-          <p:cNvPr id="17" name="Shape 15"/>
-          <p:cNvSpPr/>
-          <p:nvPr/>
-        </p:nvSpPr>
-        <p:spPr>
-          <a:xfrm>
-            <a:off x="548640" y="2560320"/>
-            <a:ext cx="54864" cy="594360"/>
-          </a:xfrm>
-          <a:prstGeom prst="rect">
-            <a:avLst/>
-          </a:prstGeom>
-          <a:solidFill>
-            <a:srgbClr val="2A9D8F"/>
-          </a:solidFill>
-          <a:ln/>
-        </p:spPr>
-      </p:sp>
-      <p:sp>
-        <p:nvSpPr>
-          <p:cNvPr id="18" name="Text 16"/>
-          <p:cNvSpPr/>
-          <p:nvPr/>
-        </p:nvSpPr>
-        <p:spPr>
-          <a:xfrm>
-            <a:off x="685800" y="2606040"/>
-            <a:ext cx="3520440" cy="502920"/>
-          </a:xfrm>
-          <a:prstGeom prst="rect">
-            <a:avLst/>
-          </a:prstGeom>
-          <a:noFill/>
-          <a:ln/>
-        </p:spPr>
-        <p:txBody>
-          <a:bodyPr wrap="square" rtlCol="0" anchor="ctr"/>
-          <a:lstStyle/>
-          <a:p>
-            <a:pPr indent="0" marL="0">
-              <a:buNone/>
-            </a:pPr>
-            <a:r>
-              <a:rPr lang="en-US" sz="1200" b="1" dirty="0">
-                <a:solidFill>
-                  <a:srgbClr val="1B2A4A"/>
-                </a:solidFill>
-              </a:rPr>
-              <a:t>Conclusion</a:t>
-            </a:r>
-            <a:endParaRPr lang="en-US" sz="1200" dirty="0"/>
-          </a:p>
-          <a:p>
-            <a:pPr indent="0" marL="0">
-              <a:buNone/>
-            </a:pPr>
-            <a:r>
-              <a:rPr lang="en-US" sz="1000" dirty="0">
-                <a:solidFill>
-                  <a:srgbClr val="6B6660"/>
-                </a:solidFill>
-              </a:rPr>
-              <a:t>A summary of what the results show</a:t>
-            </a:r>
-            <a:endParaRPr lang="en-US" sz="1200" dirty="0"/>
-          </a:p>
-        </p:txBody>
-      </p:sp>
-      <p:sp>
-        <p:nvSpPr>
-          <p:cNvPr id="19" name="Shape 17"/>
-          <p:cNvSpPr/>
-          <p:nvPr/>
-        </p:nvSpPr>
-        <p:spPr>
-          <a:xfrm>
-            <a:off x="4480560" y="2560320"/>
-            <a:ext cx="3749040" cy="594360"/>
-          </a:xfrm>
-          <a:prstGeom prst="rect">
-            <a:avLst/>
-          </a:prstGeom>
-          <a:solidFill>
-            <a:srgbClr val="FFFFFF"/>
-          </a:solidFill>
-          <a:ln/>
-          <a:effectLst>
-            <a:outerShdw sx="100000" sy="100000" kx="0" ky="0" algn="bl" rotWithShape="0" blurRad="50800" dist="25400" dir="8100000">
-              <a:srgbClr val="000000">
-                <a:alpha val="10000"/>
-              </a:srgbClr>
-            </a:outerShdw>
-          </a:effectLst>
-        </p:spPr>
-      </p:sp>
-      <p:sp>
-        <p:nvSpPr>
-          <p:cNvPr id="20" name="Shape 18"/>
-          <p:cNvSpPr/>
-          <p:nvPr/>
-        </p:nvSpPr>
-        <p:spPr>
-          <a:xfrm>
-            <a:off x="4480560" y="2560320"/>
-            <a:ext cx="54864" cy="594360"/>
-          </a:xfrm>
-          <a:prstGeom prst="rect">
-            <a:avLst/>
-          </a:prstGeom>
-          <a:solidFill>
-            <a:srgbClr val="2A9D8F"/>
-          </a:solidFill>
-          <a:ln/>
-        </p:spPr>
-      </p:sp>
-      <p:sp>
-        <p:nvSpPr>
-          <p:cNvPr id="21" name="Text 19"/>
-          <p:cNvSpPr/>
-          <p:nvPr/>
-        </p:nvSpPr>
-        <p:spPr>
-          <a:xfrm>
-            <a:off x="4617720" y="2606040"/>
-            <a:ext cx="3520440" cy="502920"/>
-          </a:xfrm>
-          <a:prstGeom prst="rect">
-            <a:avLst/>
-          </a:prstGeom>
-          <a:noFill/>
-          <a:ln/>
-        </p:spPr>
-        <p:txBody>
-          <a:bodyPr wrap="square" rtlCol="0" anchor="ctr"/>
-          <a:lstStyle/>
-          <a:p>
-            <a:pPr indent="0" marL="0">
-              <a:buNone/>
-            </a:pPr>
-            <a:r>
-              <a:rPr lang="en-US" sz="1200" b="1" dirty="0">
-                <a:solidFill>
-                  <a:srgbClr val="1B2A4A"/>
-                </a:solidFill>
-              </a:rPr>
-              <a:t>Peer review</a:t>
-            </a:r>
-            <a:endParaRPr lang="en-US" sz="1200" dirty="0"/>
-          </a:p>
-          <a:p>
-            <a:pPr indent="0" marL="0">
-              <a:buNone/>
-            </a:pPr>
-            <a:r>
-              <a:rPr lang="en-US" sz="1000" dirty="0">
-                <a:solidFill>
-                  <a:srgbClr val="6B6660"/>
-                </a:solidFill>
-              </a:rPr>
-              <a:t>Other scientists check and evaluate your work</a:t>
-            </a:r>
-            <a:endParaRPr lang="en-US" sz="1200" dirty="0"/>
-          </a:p>
-        </p:txBody>
-      </p:sp>
-      <p:sp>
-        <p:nvSpPr>
-          <p:cNvPr id="22" name="Text 20"/>
-          <p:cNvSpPr/>
-          <p:nvPr/>
-        </p:nvSpPr>
-        <p:spPr>
-          <a:xfrm>
-            <a:off x="548640" y="4800600"/>
-            <a:ext cx="3657600" cy="274320"/>
-          </a:xfrm>
-          <a:prstGeom prst="rect">
-            <a:avLst/>
-          </a:prstGeom>
-          <a:noFill/>
-          <a:ln/>
-        </p:spPr>
-        <p:txBody>
-          <a:bodyPr wrap="square" rtlCol="0" anchor="ctr"/>
-          <a:lstStyle/>
-          <a:p>
-            <a:pPr indent="0" marL="0">
-              <a:buNone/>
-            </a:pPr>
-            <a:r>
-              <a:rPr lang="en-US" sz="800" dirty="0">
-                <a:solidFill>
-                  <a:srgbClr val="9B9690"/>
-                </a:solidFill>
-              </a:rPr>
-              <a:t>mrzocchi.com</a:t>
-            </a:r>
-            <a:endParaRPr lang="en-US" sz="800" dirty="0"/>
+              <a:rPr lang="en-US" sz="1100" dirty="0">
+                <a:solidFill>
+                  <a:srgbClr val="3D3A36"/>
+                </a:solidFill>
+                <a:latin typeface="Calibri" pitchFamily="34" charset="0"/>
+                <a:ea typeface="Calibri" pitchFamily="34" charset="-122"/>
+                <a:cs typeface="Calibri" pitchFamily="34" charset="-120"/>
+              </a:rPr>
+              <a:t>Did your results support your hypothesis? Explain WHY. Suggest improvements for next time.</a:t>
+            </a:r>
+            <a:endParaRPr lang="en-US" sz="1100" dirty="0"/>
           </a:p>
         </p:txBody>
       </p:sp>
@@ -2657,6 +2754,466 @@
 <file path=ppt/slides/slide5.xml><?xml version="1.0" encoding="utf-8"?>
 <p:sld xmlns:a="http://schemas.openxmlformats.org/drawingml/2006/main" xmlns:r="http://schemas.openxmlformats.org/officeDocument/2006/relationships" xmlns:p="http://schemas.openxmlformats.org/presentationml/2006/main">
   <p:cSld name="Slide 5">
+    <p:bg>
+      <p:bgPr>
+        <a:solidFill>
+          <a:srgbClr val="FAF8F5"/>
+        </a:solidFill>
+      </p:bgPr>
+    </p:bg>
+    <p:spTree>
+      <p:nvGrpSpPr>
+        <p:cNvPr id="1" name=""/>
+        <p:cNvGrpSpPr/>
+        <p:nvPr/>
+      </p:nvGrpSpPr>
+      <p:grpSpPr>
+        <a:xfrm>
+          <a:off x="0" y="0"/>
+          <a:ext cx="0" cy="0"/>
+          <a:chOff x="0" y="0"/>
+          <a:chExt cx="0" cy="0"/>
+        </a:xfrm>
+      </p:grpSpPr>
+      <p:sp>
+        <p:nvSpPr>
+          <p:cNvPr id="2" name="Shape 0"/>
+          <p:cNvSpPr/>
+          <p:nvPr/>
+        </p:nvSpPr>
+        <p:spPr>
+          <a:xfrm>
+            <a:off x="0" y="0"/>
+            <a:ext cx="9144000" cy="54864"/>
+          </a:xfrm>
+          <a:prstGeom prst="rect">
+            <a:avLst/>
+          </a:prstGeom>
+          <a:solidFill>
+            <a:srgbClr val="2A9D8F"/>
+          </a:solidFill>
+          <a:ln/>
+        </p:spPr>
+      </p:sp>
+      <p:sp>
+        <p:nvSpPr>
+          <p:cNvPr id="3" name="Text 1"/>
+          <p:cNvSpPr/>
+          <p:nvPr/>
+        </p:nvSpPr>
+        <p:spPr>
+          <a:xfrm>
+            <a:off x="7772400" y="4709160"/>
+            <a:ext cx="1097280" cy="320040"/>
+          </a:xfrm>
+          <a:prstGeom prst="rect">
+            <a:avLst/>
+          </a:prstGeom>
+          <a:noFill/>
+          <a:ln/>
+        </p:spPr>
+        <p:txBody>
+          <a:bodyPr wrap="square" rtlCol="0" anchor="ctr"/>
+          <a:lstStyle/>
+          <a:p>
+            <a:pPr algn="r" indent="0" marL="0">
+              <a:buNone/>
+            </a:pPr>
+            <a:r>
+              <a:rPr lang="en-US" sz="900" dirty="0">
+                <a:solidFill>
+                  <a:srgbClr val="6B6660"/>
+                </a:solidFill>
+                <a:latin typeface="Calibri" pitchFamily="34" charset="0"/>
+                <a:ea typeface="Calibri" pitchFamily="34" charset="-122"/>
+                <a:cs typeface="Calibri" pitchFamily="34" charset="-120"/>
+              </a:rPr>
+              <a:t>5 / 6</a:t>
+            </a:r>
+            <a:endParaRPr lang="en-US" sz="900" dirty="0"/>
+          </a:p>
+        </p:txBody>
+      </p:sp>
+      <p:sp>
+        <p:nvSpPr>
+          <p:cNvPr id="4" name="Text 2"/>
+          <p:cNvSpPr/>
+          <p:nvPr/>
+        </p:nvSpPr>
+        <p:spPr>
+          <a:xfrm>
+            <a:off x="457200" y="274320"/>
+            <a:ext cx="8229600" cy="640080"/>
+          </a:xfrm>
+          <a:prstGeom prst="rect">
+            <a:avLst/>
+          </a:prstGeom>
+          <a:noFill/>
+          <a:ln/>
+        </p:spPr>
+        <p:txBody>
+          <a:bodyPr wrap="square" rtlCol="0" anchor="ctr"/>
+          <a:lstStyle/>
+          <a:p>
+            <a:pPr indent="0" marL="0">
+              <a:buNone/>
+            </a:pPr>
+            <a:r>
+              <a:rPr lang="en-US" sz="2600" b="1" dirty="0">
+                <a:solidFill>
+                  <a:srgbClr val="1B2A4A"/>
+                </a:solidFill>
+                <a:latin typeface="Georgia" pitchFamily="34" charset="0"/>
+                <a:ea typeface="Georgia" pitchFamily="34" charset="-122"/>
+                <a:cs typeface="Georgia" pitchFamily="34" charset="-120"/>
+              </a:rPr>
+              <a:t>Hypothesis vs Prediction</a:t>
+            </a:r>
+            <a:endParaRPr lang="en-US" sz="2600" dirty="0"/>
+          </a:p>
+        </p:txBody>
+      </p:sp>
+      <p:sp>
+        <p:nvSpPr>
+          <p:cNvPr id="5" name="Text 3"/>
+          <p:cNvSpPr/>
+          <p:nvPr/>
+        </p:nvSpPr>
+        <p:spPr>
+          <a:xfrm>
+            <a:off x="457200" y="1188720"/>
+            <a:ext cx="3840480" cy="3474720"/>
+          </a:xfrm>
+          <a:prstGeom prst="rect">
+            <a:avLst/>
+          </a:prstGeom>
+          <a:noFill/>
+          <a:ln/>
+        </p:spPr>
+        <p:txBody>
+          <a:bodyPr wrap="square" rtlCol="0" anchor="t"/>
+          <a:lstStyle/>
+          <a:p>
+            <a:pPr marL="342900" indent="-342900">
+              <a:spcAft>
+                <a:spcPts val="600"/>
+              </a:spcAft>
+              <a:buSzPct val="100000"/>
+              <a:buChar char="•"/>
+            </a:pPr>
+            <a:r>
+              <a:rPr lang="en-US" sz="1400" dirty="0">
+                <a:solidFill>
+                  <a:srgbClr val="3D3A36"/>
+                </a:solidFill>
+                <a:latin typeface="Calibri" pitchFamily="34" charset="0"/>
+                <a:ea typeface="Calibri" pitchFamily="34" charset="-122"/>
+                <a:cs typeface="Calibri" pitchFamily="34" charset="-120"/>
+              </a:rPr>
+              <a:t>A hypothesis explains WHY something happens</a:t>
+            </a:r>
+            <a:endParaRPr lang="en-US" sz="1400" dirty="0"/>
+          </a:p>
+          <a:p>
+            <a:pPr marL="342900" indent="-342900">
+              <a:spcAft>
+                <a:spcPts val="600"/>
+              </a:spcAft>
+              <a:buSzPct val="100000"/>
+              <a:buChar char="•"/>
+            </a:pPr>
+            <a:r>
+              <a:rPr lang="en-US" sz="1400" dirty="0">
+                <a:solidFill>
+                  <a:srgbClr val="3D3A36"/>
+                </a:solidFill>
+                <a:latin typeface="Calibri" pitchFamily="34" charset="0"/>
+                <a:ea typeface="Calibri" pitchFamily="34" charset="-122"/>
+                <a:cs typeface="Calibri" pitchFamily="34" charset="-120"/>
+              </a:rPr>
+              <a:t>It is based on existing knowledge</a:t>
+            </a:r>
+            <a:endParaRPr lang="en-US" sz="1400" dirty="0"/>
+          </a:p>
+          <a:p>
+            <a:pPr marL="342900" indent="-342900">
+              <a:spcAft>
+                <a:spcPts val="600"/>
+              </a:spcAft>
+              <a:buSzPct val="100000"/>
+              <a:buChar char="•"/>
+            </a:pPr>
+            <a:r>
+              <a:rPr lang="en-US" sz="1400" dirty="0">
+                <a:solidFill>
+                  <a:srgbClr val="3D3A36"/>
+                </a:solidFill>
+                <a:latin typeface="Calibri" pitchFamily="34" charset="0"/>
+                <a:ea typeface="Calibri" pitchFamily="34" charset="-122"/>
+                <a:cs typeface="Calibri" pitchFamily="34" charset="-120"/>
+              </a:rPr>
+              <a:t>Example: 'Plants need sunlight for photosynthesis, so more light should increase growth'</a:t>
+            </a:r>
+            <a:endParaRPr lang="en-US" sz="1400" dirty="0"/>
+          </a:p>
+          <a:p>
+            <a:pPr marL="342900" indent="-342900">
+              <a:spcAft>
+                <a:spcPts val="600"/>
+              </a:spcAft>
+              <a:buSzPct val="100000"/>
+              <a:buChar char="•"/>
+            </a:pPr>
+            <a:r>
+              <a:rPr lang="en-US" sz="1400" dirty="0">
+                <a:solidFill>
+                  <a:srgbClr val="3D3A36"/>
+                </a:solidFill>
+                <a:latin typeface="Calibri" pitchFamily="34" charset="0"/>
+                <a:ea typeface="Calibri" pitchFamily="34" charset="-122"/>
+                <a:cs typeface="Calibri" pitchFamily="34" charset="-120"/>
+              </a:rPr>
+              <a:t>A prediction states WHAT you expect to observe</a:t>
+            </a:r>
+            <a:endParaRPr lang="en-US" sz="1400" dirty="0"/>
+          </a:p>
+          <a:p>
+            <a:pPr marL="342900" indent="-342900">
+              <a:spcAft>
+                <a:spcPts val="600"/>
+              </a:spcAft>
+              <a:buSzPct val="100000"/>
+              <a:buChar char="•"/>
+            </a:pPr>
+            <a:r>
+              <a:rPr lang="en-US" sz="1400" dirty="0">
+                <a:solidFill>
+                  <a:srgbClr val="3D3A36"/>
+                </a:solidFill>
+                <a:latin typeface="Calibri" pitchFamily="34" charset="0"/>
+                <a:ea typeface="Calibri" pitchFamily="34" charset="-122"/>
+                <a:cs typeface="Calibri" pitchFamily="34" charset="-120"/>
+              </a:rPr>
+              <a:t>Example: 'If I increase sunlight, then the plant will grow taller'</a:t>
+            </a:r>
+            <a:endParaRPr lang="en-US" sz="1400" dirty="0"/>
+          </a:p>
+        </p:txBody>
+      </p:sp>
+      <p:sp>
+        <p:nvSpPr>
+          <p:cNvPr id="6" name="Shape 4"/>
+          <p:cNvSpPr/>
+          <p:nvPr/>
+        </p:nvSpPr>
+        <p:spPr>
+          <a:xfrm>
+            <a:off x="4846320" y="1188720"/>
+            <a:ext cx="3840480" cy="3474720"/>
+          </a:xfrm>
+          <a:prstGeom prst="rect">
+            <a:avLst/>
+          </a:prstGeom>
+          <a:solidFill>
+            <a:srgbClr val="FFFFFF"/>
+          </a:solidFill>
+          <a:ln w="12700">
+            <a:solidFill>
+              <a:srgbClr val="E5E2DC"/>
+            </a:solidFill>
+            <a:prstDash val="solid"/>
+          </a:ln>
+          <a:effectLst>
+            <a:outerShdw sx="100000" sy="100000" kx="0" ky="0" algn="bl" rotWithShape="0" blurRad="50800" dist="25400" dir="8100000">
+              <a:srgbClr val="000000">
+                <a:alpha val="10000"/>
+              </a:srgbClr>
+            </a:outerShdw>
+          </a:effectLst>
+        </p:spPr>
+      </p:sp>
+      <p:sp>
+        <p:nvSpPr>
+          <p:cNvPr id="7" name="Shape 5"/>
+          <p:cNvSpPr/>
+          <p:nvPr/>
+        </p:nvSpPr>
+        <p:spPr>
+          <a:xfrm>
+            <a:off x="4846320" y="1188720"/>
+            <a:ext cx="3840480" cy="54864"/>
+          </a:xfrm>
+          <a:prstGeom prst="rect">
+            <a:avLst/>
+          </a:prstGeom>
+          <a:solidFill>
+            <a:srgbClr val="2A9D8F"/>
+          </a:solidFill>
+          <a:ln/>
+        </p:spPr>
+      </p:sp>
+      <p:sp>
+        <p:nvSpPr>
+          <p:cNvPr id="8" name="Text 6"/>
+          <p:cNvSpPr/>
+          <p:nvPr/>
+        </p:nvSpPr>
+        <p:spPr>
+          <a:xfrm>
+            <a:off x="5120640" y="1371600"/>
+            <a:ext cx="3291840" cy="3108960"/>
+          </a:xfrm>
+          <a:prstGeom prst="rect">
+            <a:avLst/>
+          </a:prstGeom>
+          <a:noFill/>
+          <a:ln/>
+        </p:spPr>
+        <p:txBody>
+          <a:bodyPr wrap="square" rtlCol="0" anchor="t"/>
+          <a:lstStyle/>
+          <a:p>
+            <a:pPr indent="0" marL="0">
+              <a:spcAft>
+                <a:spcPts val="400"/>
+              </a:spcAft>
+              <a:buNone/>
+            </a:pPr>
+            <a:r>
+              <a:rPr lang="en-US" sz="1600" b="1" dirty="0">
+                <a:solidFill>
+                  <a:srgbClr val="1B2A4A"/>
+                </a:solidFill>
+                <a:latin typeface="Calibri" pitchFamily="34" charset="0"/>
+                <a:ea typeface="Calibri" pitchFamily="34" charset="-122"/>
+                <a:cs typeface="Calibri" pitchFamily="34" charset="-120"/>
+              </a:rPr>
+              <a:t>Key Vocabulary</a:t>
+            </a:r>
+            <a:endParaRPr lang="en-US" sz="1600" dirty="0"/>
+          </a:p>
+          <a:p>
+            <a:pPr indent="0" marL="0">
+              <a:spcAft>
+                <a:spcPts val="400"/>
+              </a:spcAft>
+              <a:buNone/>
+            </a:pPr>
+            <a:endParaRPr lang="en-US" sz="1600" dirty="0"/>
+          </a:p>
+          <a:p>
+            <a:pPr indent="0" marL="0">
+              <a:spcAft>
+                <a:spcPts val="400"/>
+              </a:spcAft>
+              <a:buNone/>
+            </a:pPr>
+            <a:r>
+              <a:rPr lang="en-US" sz="1300" dirty="0">
+                <a:solidFill>
+                  <a:srgbClr val="3D3A36"/>
+                </a:solidFill>
+                <a:latin typeface="Calibri" pitchFamily="34" charset="0"/>
+                <a:ea typeface="Calibri" pitchFamily="34" charset="-122"/>
+                <a:cs typeface="Calibri" pitchFamily="34" charset="-120"/>
+              </a:rPr>
+              <a:t>Hypothesis — a testable explanation</a:t>
+            </a:r>
+            <a:endParaRPr lang="en-US" sz="1600" dirty="0"/>
+          </a:p>
+          <a:p>
+            <a:pPr indent="0" marL="0">
+              <a:spcAft>
+                <a:spcPts val="400"/>
+              </a:spcAft>
+              <a:buNone/>
+            </a:pPr>
+            <a:r>
+              <a:rPr lang="en-US" sz="1300" dirty="0">
+                <a:solidFill>
+                  <a:srgbClr val="3D3A36"/>
+                </a:solidFill>
+                <a:latin typeface="Calibri" pitchFamily="34" charset="0"/>
+                <a:ea typeface="Calibri" pitchFamily="34" charset="-122"/>
+                <a:cs typeface="Calibri" pitchFamily="34" charset="-120"/>
+              </a:rPr>
+              <a:t>Variable — something that can change</a:t>
+            </a:r>
+            <a:endParaRPr lang="en-US" sz="1600" dirty="0"/>
+          </a:p>
+          <a:p>
+            <a:pPr indent="0" marL="0">
+              <a:spcAft>
+                <a:spcPts val="400"/>
+              </a:spcAft>
+              <a:buNone/>
+            </a:pPr>
+            <a:r>
+              <a:rPr lang="en-US" sz="1300" dirty="0">
+                <a:solidFill>
+                  <a:srgbClr val="3D3A36"/>
+                </a:solidFill>
+                <a:latin typeface="Calibri" pitchFamily="34" charset="0"/>
+                <a:ea typeface="Calibri" pitchFamily="34" charset="-122"/>
+                <a:cs typeface="Calibri" pitchFamily="34" charset="-120"/>
+              </a:rPr>
+              <a:t>Fair test — only one variable changes</a:t>
+            </a:r>
+            <a:endParaRPr lang="en-US" sz="1600" dirty="0"/>
+          </a:p>
+          <a:p>
+            <a:pPr indent="0" marL="0">
+              <a:spcAft>
+                <a:spcPts val="400"/>
+              </a:spcAft>
+              <a:buNone/>
+            </a:pPr>
+            <a:r>
+              <a:rPr lang="en-US" sz="1300" dirty="0">
+                <a:solidFill>
+                  <a:srgbClr val="3D3A36"/>
+                </a:solidFill>
+                <a:latin typeface="Calibri" pitchFamily="34" charset="0"/>
+                <a:ea typeface="Calibri" pitchFamily="34" charset="-122"/>
+                <a:cs typeface="Calibri" pitchFamily="34" charset="-120"/>
+              </a:rPr>
+              <a:t>Reliable — consistent, repeatable results</a:t>
+            </a:r>
+            <a:endParaRPr lang="en-US" sz="1600" dirty="0"/>
+          </a:p>
+          <a:p>
+            <a:pPr indent="0" marL="0">
+              <a:spcAft>
+                <a:spcPts val="400"/>
+              </a:spcAft>
+              <a:buNone/>
+            </a:pPr>
+            <a:r>
+              <a:rPr lang="en-US" sz="1300" dirty="0">
+                <a:solidFill>
+                  <a:srgbClr val="3D3A36"/>
+                </a:solidFill>
+                <a:latin typeface="Calibri" pitchFamily="34" charset="0"/>
+                <a:ea typeface="Calibri" pitchFamily="34" charset="-122"/>
+                <a:cs typeface="Calibri" pitchFamily="34" charset="-120"/>
+              </a:rPr>
+              <a:t>Valid — measures what it claims to measure</a:t>
+            </a:r>
+            <a:endParaRPr lang="en-US" sz="1600" dirty="0"/>
+          </a:p>
+        </p:txBody>
+      </p:sp>
+    </p:spTree>
+  </p:cSld>
+  <p:clrMapOvr>
+    <a:masterClrMapping/>
+  </p:clrMapOvr>
+</p:sld>
+</file>
+
+<file path=ppt/slides/slide6.xml><?xml version="1.0" encoding="utf-8"?>
+<p:sld xmlns:a="http://schemas.openxmlformats.org/drawingml/2006/main" xmlns:r="http://schemas.openxmlformats.org/officeDocument/2006/relationships" xmlns:p="http://schemas.openxmlformats.org/presentationml/2006/main">
+  <p:cSld name="Slide 6">
     <p:bg>
       <p:bgPr>
         <a:solidFill>
@@ -2687,13 +3244,13 @@
         <p:spPr>
           <a:xfrm>
             <a:off x="0" y="0"/>
-            <a:ext cx="9144000" cy="54864"/>
-          </a:xfrm>
-          <a:prstGeom prst="rect">
-            <a:avLst/>
-          </a:prstGeom>
-          <a:solidFill>
-            <a:srgbClr val="2A9D8F"/>
+            <a:ext cx="109728" cy="5143500"/>
+          </a:xfrm>
+          <a:prstGeom prst="rect">
+            <a:avLst/>
+          </a:prstGeom>
+          <a:solidFill>
+            <a:srgbClr val="E9C46A"/>
           </a:solidFill>
           <a:ln/>
         </p:spPr>
@@ -2706,8 +3263,8 @@
         </p:nvSpPr>
         <p:spPr>
           <a:xfrm>
-            <a:off x="548640" y="457200"/>
-            <a:ext cx="8046720" cy="640080"/>
+            <a:off x="731520" y="457200"/>
+            <a:ext cx="7772400" cy="731520"/>
           </a:xfrm>
           <a:prstGeom prst="rect">
             <a:avLst/>
@@ -2723,7 +3280,7 @@
               <a:buNone/>
             </a:pPr>
             <a:r>
-              <a:rPr lang="en-US" sz="2800" b="1" dirty="0">
+              <a:rPr lang="en-US" sz="3200" b="1" dirty="0">
                 <a:solidFill>
                   <a:srgbClr val="FFFFFF"/>
                 </a:solidFill>
@@ -2733,7 +3290,7 @@
               </a:rPr>
               <a:t>Key Takeaways</a:t>
             </a:r>
-            <a:endParaRPr lang="en-US" sz="2800" dirty="0"/>
+            <a:endParaRPr lang="en-US" sz="3200" dirty="0"/>
           </a:p>
         </p:txBody>
       </p:sp>
@@ -2745,8 +3302,8 @@
         </p:nvSpPr>
         <p:spPr>
           <a:xfrm>
-            <a:off x="731520" y="1371600"/>
-            <a:ext cx="7680960" cy="3200400"/>
+            <a:off x="731520" y="1463040"/>
+            <a:ext cx="7772400" cy="3200400"/>
           </a:xfrm>
           <a:prstGeom prst="rect">
             <a:avLst/>
@@ -2766,7 +3323,7 @@
               <a:buChar char="•"/>
             </a:pPr>
             <a:r>
-              <a:rPr lang="en-US" sz="1600" dirty="0">
+              <a:rPr lang="en-US" sz="1500" dirty="0">
                 <a:solidFill>
                   <a:srgbClr val="CADCFC"/>
                 </a:solidFill>
@@ -2774,9 +3331,9 @@
                 <a:ea typeface="Calibri" pitchFamily="34" charset="-122"/>
                 <a:cs typeface="Calibri" pitchFamily="34" charset="-120"/>
               </a:rPr>
-              <a:t>The scientific method makes investigations fair and repeatable</a:t>
-            </a:r>
-            <a:endParaRPr lang="en-US" sz="1600" dirty="0"/>
+              <a:t>The scientific method has 6 steps: Observe, Research, Hypothesise, Experiment, Analyse, Conclude</a:t>
+            </a:r>
+            <a:endParaRPr lang="en-US" sz="1500" dirty="0"/>
           </a:p>
           <a:p>
             <a:pPr marL="342900" indent="-342900">
@@ -2787,7 +3344,7 @@
               <a:buChar char="•"/>
             </a:pPr>
             <a:r>
-              <a:rPr lang="en-US" sz="1600" dirty="0">
+              <a:rPr lang="en-US" sz="1500" dirty="0">
                 <a:solidFill>
                   <a:srgbClr val="CADCFC"/>
                 </a:solidFill>
@@ -2795,9 +3352,9 @@
                 <a:ea typeface="Calibri" pitchFamily="34" charset="-122"/>
                 <a:cs typeface="Calibri" pitchFamily="34" charset="-120"/>
               </a:rPr>
-              <a:t>A good hypothesis uses 'If... then... because...' format</a:t>
-            </a:r>
-            <a:endParaRPr lang="en-US" sz="1600" dirty="0"/>
+              <a:t>A hypothesis uses 'If... then... because...' format</a:t>
+            </a:r>
+            <a:endParaRPr lang="en-US" sz="1500" dirty="0"/>
           </a:p>
           <a:p>
             <a:pPr marL="342900" indent="-342900">
@@ -2808,7 +3365,7 @@
               <a:buChar char="•"/>
             </a:pPr>
             <a:r>
-              <a:rPr lang="en-US" sz="1600" dirty="0">
+              <a:rPr lang="en-US" sz="1500" dirty="0">
                 <a:solidFill>
                   <a:srgbClr val="CADCFC"/>
                 </a:solidFill>
@@ -2816,9 +3373,9 @@
                 <a:ea typeface="Calibri" pitchFamily="34" charset="-122"/>
                 <a:cs typeface="Calibri" pitchFamily="34" charset="-120"/>
               </a:rPr>
-              <a:t>Only change ONE variable at a time</a:t>
-            </a:r>
-            <a:endParaRPr lang="en-US" sz="1600" dirty="0"/>
+              <a:t>A fair test changes only ONE variable</a:t>
+            </a:r>
+            <a:endParaRPr lang="en-US" sz="1500" dirty="0"/>
           </a:p>
           <a:p>
             <a:pPr marL="342900" indent="-342900">
@@ -2829,7 +3386,7 @@
               <a:buChar char="•"/>
             </a:pPr>
             <a:r>
-              <a:rPr lang="en-US" sz="1600" dirty="0">
+              <a:rPr lang="en-US" sz="1500" dirty="0">
                 <a:solidFill>
                   <a:srgbClr val="CADCFC"/>
                 </a:solidFill>
@@ -2837,9 +3394,30 @@
                 <a:ea typeface="Calibri" pitchFamily="34" charset="-122"/>
                 <a:cs typeface="Calibri" pitchFamily="34" charset="-120"/>
               </a:rPr>
-              <a:t>Your conclusion must be based on evidence, not opinion</a:t>
-            </a:r>
-            <a:endParaRPr lang="en-US" sz="1600" dirty="0"/>
+              <a:t>Results must be reliable (repeatable) and valid (accurate)</a:t>
+            </a:r>
+            <a:endParaRPr lang="en-US" sz="1500" dirty="0"/>
+          </a:p>
+          <a:p>
+            <a:pPr marL="342900" indent="-342900">
+              <a:spcAft>
+                <a:spcPts val="1000"/>
+              </a:spcAft>
+              <a:buSzPct val="100000"/>
+              <a:buChar char="•"/>
+            </a:pPr>
+            <a:r>
+              <a:rPr lang="en-US" sz="1500" dirty="0">
+                <a:solidFill>
+                  <a:srgbClr val="CADCFC"/>
+                </a:solidFill>
+                <a:latin typeface="Calibri" pitchFamily="34" charset="0"/>
+                <a:ea typeface="Calibri" pitchFamily="34" charset="-122"/>
+                <a:cs typeface="Calibri" pitchFamily="34" charset="-120"/>
+              </a:rPr>
+              <a:t>Science is a cycle — conclusions lead to new questions</a:t>
+            </a:r>
+            <a:endParaRPr lang="en-US" sz="1500" dirty="0"/>
           </a:p>
         </p:txBody>
       </p:sp>
@@ -2851,8 +3429,8 @@
         </p:nvSpPr>
         <p:spPr>
           <a:xfrm>
-            <a:off x="548640" y="4572000"/>
-            <a:ext cx="3657600" cy="274320"/>
+            <a:off x="731520" y="4572000"/>
+            <a:ext cx="7772400" cy="365760"/>
           </a:xfrm>
           <a:prstGeom prst="rect">
             <a:avLst/>
@@ -2868,14 +3446,17 @@
               <a:buNone/>
             </a:pPr>
             <a:r>
-              <a:rPr lang="en-US" sz="1000" dirty="0">
-                <a:solidFill>
-                  <a:srgbClr val="6B6660"/>
-                </a:solidFill>
+              <a:rPr lang="en-US" sz="1100" dirty="0">
+                <a:solidFill>
+                  <a:srgbClr val="E9C46A"/>
+                </a:solidFill>
+                <a:latin typeface="Calibri" pitchFamily="34" charset="0"/>
+                <a:ea typeface="Calibri" pitchFamily="34" charset="-122"/>
+                <a:cs typeface="Calibri" pitchFamily="34" charset="-120"/>
               </a:rPr>
               <a:t>mrzocchi.com</a:t>
             </a:r>
-            <a:endParaRPr lang="en-US" sz="1000" dirty="0"/>
+            <a:endParaRPr lang="en-US" sz="1100" dirty="0"/>
           </a:p>
         </p:txBody>
       </p:sp>

--- a/static/ppts/G6_Sci_T1_Scientific_Method.pptx
+++ b/static/ppts/G6_Sci_T1_Scientific_Method.pptx
@@ -11,9 +11,12 @@
     <p:sldId id="259" r:id="rId5"/>
     <p:sldId id="260" r:id="rId6"/>
     <p:sldId id="261" r:id="rId7"/>
+    <p:sldId id="262" r:id="rId8"/>
+    <p:sldId id="263" r:id="rId9"/>
+    <p:sldId id="264" r:id="rId10"/>
   </p:sldIdLst>
   <p:notesMasterIdLst>
-    <p:notesMasterId r:id="rId8"/>
+    <p:notesMasterId r:id="rId11"/>
   </p:notesMasterIdLst>
   <p:sldSz cx="9144000" cy="5143500"/>
   <p:notesSz cx="5143500" cy="9144000"/>
@@ -989,6 +992,270 @@
 </p:notes>
 </file>
 
+<file path=ppt/notesSlides/notesSlide7.xml><?xml version="1.0" encoding="utf-8"?>
+<p:notes xmlns:a="http://schemas.openxmlformats.org/drawingml/2006/main" xmlns:r="http://schemas.openxmlformats.org/officeDocument/2006/relationships" xmlns:p="http://schemas.openxmlformats.org/presentationml/2006/main">
+  <p:cSld>
+    <p:spTree>
+      <p:nvGrpSpPr>
+        <p:cNvPr id="1" name=""/>
+        <p:cNvGrpSpPr/>
+        <p:nvPr/>
+      </p:nvGrpSpPr>
+      <p:grpSpPr>
+        <a:xfrm>
+          <a:off x="0" y="0"/>
+          <a:ext cx="0" cy="0"/>
+          <a:chOff x="0" y="0"/>
+          <a:chExt cx="0" cy="0"/>
+        </a:xfrm>
+      </p:grpSpPr>
+      <p:sp>
+        <p:nvSpPr>
+          <p:cNvPr id="2" name="Slide Image Placeholder 1"/>
+          <p:cNvSpPr>
+            <a:spLocks noGrp="1" noRot="1" noChangeAspect="1"/>
+          </p:cNvSpPr>
+          <p:nvPr>
+            <p:ph type="sldImg"/>
+          </p:nvPr>
+        </p:nvSpPr>
+        <p:spPr/>
+      </p:sp>
+      <p:sp>
+        <p:nvSpPr>
+          <p:cNvPr id="3" name="Notes Placeholder 2"/>
+          <p:cNvSpPr>
+            <a:spLocks noGrp="1"/>
+          </p:cNvSpPr>
+          <p:nvPr>
+            <p:ph type="body" idx="1"/>
+          </p:nvPr>
+        </p:nvSpPr>
+        <p:spPr/>
+        <p:txBody>
+          <a:bodyPr/>
+          <a:lstStyle/>
+          <a:p>
+            <a:r>
+              <a:rPr lang="en-US" dirty="0"/>
+              <a:t/>
+            </a:r>
+            <a:endParaRPr lang="en-US" dirty="0"/>
+          </a:p>
+        </p:txBody>
+      </p:sp>
+      <p:sp>
+        <p:nvSpPr>
+          <p:cNvPr id="4" name="Slide Number Placeholder 3"/>
+          <p:cNvSpPr>
+            <a:spLocks noGrp="1"/>
+          </p:cNvSpPr>
+          <p:nvPr>
+            <p:ph type="sldNum" sz="quarter" idx="10"/>
+          </p:nvPr>
+        </p:nvSpPr>
+        <p:spPr/>
+        <p:txBody>
+          <a:bodyPr/>
+          <a:lstStyle/>
+          <a:p>
+            <a:fld id="{F7021451-1387-4CA6-816F-3879F97B5CBC}" type="slidenum">
+              <a:rPr lang="en-US"/>
+              <a:t>7</a:t>
+            </a:fld>
+            <a:endParaRPr lang="en-US"/>
+          </a:p>
+        </p:txBody>
+      </p:sp>
+    </p:spTree>
+    <p:extLst>
+      <p:ext uri="{BB962C8B-B14F-4D97-AF65-F5344CB8AC3E}">
+        <p14:creationId xmlns:p14="http://schemas.microsoft.com/office/powerpoint/2010/main" val="1024086991"/>
+      </p:ext>
+    </p:extLst>
+  </p:cSld>
+  <p:clrMapOvr>
+    <a:masterClrMapping/>
+  </p:clrMapOvr>
+</p:notes>
+</file>
+
+<file path=ppt/notesSlides/notesSlide8.xml><?xml version="1.0" encoding="utf-8"?>
+<p:notes xmlns:a="http://schemas.openxmlformats.org/drawingml/2006/main" xmlns:r="http://schemas.openxmlformats.org/officeDocument/2006/relationships" xmlns:p="http://schemas.openxmlformats.org/presentationml/2006/main">
+  <p:cSld>
+    <p:spTree>
+      <p:nvGrpSpPr>
+        <p:cNvPr id="1" name=""/>
+        <p:cNvGrpSpPr/>
+        <p:nvPr/>
+      </p:nvGrpSpPr>
+      <p:grpSpPr>
+        <a:xfrm>
+          <a:off x="0" y="0"/>
+          <a:ext cx="0" cy="0"/>
+          <a:chOff x="0" y="0"/>
+          <a:chExt cx="0" cy="0"/>
+        </a:xfrm>
+      </p:grpSpPr>
+      <p:sp>
+        <p:nvSpPr>
+          <p:cNvPr id="2" name="Slide Image Placeholder 1"/>
+          <p:cNvSpPr>
+            <a:spLocks noGrp="1" noRot="1" noChangeAspect="1"/>
+          </p:cNvSpPr>
+          <p:nvPr>
+            <p:ph type="sldImg"/>
+          </p:nvPr>
+        </p:nvSpPr>
+        <p:spPr/>
+      </p:sp>
+      <p:sp>
+        <p:nvSpPr>
+          <p:cNvPr id="3" name="Notes Placeholder 2"/>
+          <p:cNvSpPr>
+            <a:spLocks noGrp="1"/>
+          </p:cNvSpPr>
+          <p:nvPr>
+            <p:ph type="body" idx="1"/>
+          </p:nvPr>
+        </p:nvSpPr>
+        <p:spPr/>
+        <p:txBody>
+          <a:bodyPr/>
+          <a:lstStyle/>
+          <a:p>
+            <a:r>
+              <a:rPr lang="en-US" dirty="0"/>
+              <a:t/>
+            </a:r>
+            <a:endParaRPr lang="en-US" dirty="0"/>
+          </a:p>
+        </p:txBody>
+      </p:sp>
+      <p:sp>
+        <p:nvSpPr>
+          <p:cNvPr id="4" name="Slide Number Placeholder 3"/>
+          <p:cNvSpPr>
+            <a:spLocks noGrp="1"/>
+          </p:cNvSpPr>
+          <p:nvPr>
+            <p:ph type="sldNum" sz="quarter" idx="10"/>
+          </p:nvPr>
+        </p:nvSpPr>
+        <p:spPr/>
+        <p:txBody>
+          <a:bodyPr/>
+          <a:lstStyle/>
+          <a:p>
+            <a:fld id="{F7021451-1387-4CA6-816F-3879F97B5CBC}" type="slidenum">
+              <a:rPr lang="en-US"/>
+              <a:t>8</a:t>
+            </a:fld>
+            <a:endParaRPr lang="en-US"/>
+          </a:p>
+        </p:txBody>
+      </p:sp>
+    </p:spTree>
+    <p:extLst>
+      <p:ext uri="{BB962C8B-B14F-4D97-AF65-F5344CB8AC3E}">
+        <p14:creationId xmlns:p14="http://schemas.microsoft.com/office/powerpoint/2010/main" val="1024086991"/>
+      </p:ext>
+    </p:extLst>
+  </p:cSld>
+  <p:clrMapOvr>
+    <a:masterClrMapping/>
+  </p:clrMapOvr>
+</p:notes>
+</file>
+
+<file path=ppt/notesSlides/notesSlide9.xml><?xml version="1.0" encoding="utf-8"?>
+<p:notes xmlns:a="http://schemas.openxmlformats.org/drawingml/2006/main" xmlns:r="http://schemas.openxmlformats.org/officeDocument/2006/relationships" xmlns:p="http://schemas.openxmlformats.org/presentationml/2006/main">
+  <p:cSld>
+    <p:spTree>
+      <p:nvGrpSpPr>
+        <p:cNvPr id="1" name=""/>
+        <p:cNvGrpSpPr/>
+        <p:nvPr/>
+      </p:nvGrpSpPr>
+      <p:grpSpPr>
+        <a:xfrm>
+          <a:off x="0" y="0"/>
+          <a:ext cx="0" cy="0"/>
+          <a:chOff x="0" y="0"/>
+          <a:chExt cx="0" cy="0"/>
+        </a:xfrm>
+      </p:grpSpPr>
+      <p:sp>
+        <p:nvSpPr>
+          <p:cNvPr id="2" name="Slide Image Placeholder 1"/>
+          <p:cNvSpPr>
+            <a:spLocks noGrp="1" noRot="1" noChangeAspect="1"/>
+          </p:cNvSpPr>
+          <p:nvPr>
+            <p:ph type="sldImg"/>
+          </p:nvPr>
+        </p:nvSpPr>
+        <p:spPr/>
+      </p:sp>
+      <p:sp>
+        <p:nvSpPr>
+          <p:cNvPr id="3" name="Notes Placeholder 2"/>
+          <p:cNvSpPr>
+            <a:spLocks noGrp="1"/>
+          </p:cNvSpPr>
+          <p:nvPr>
+            <p:ph type="body" idx="1"/>
+          </p:nvPr>
+        </p:nvSpPr>
+        <p:spPr/>
+        <p:txBody>
+          <a:bodyPr/>
+          <a:lstStyle/>
+          <a:p>
+            <a:r>
+              <a:rPr lang="en-US" dirty="0"/>
+              <a:t/>
+            </a:r>
+            <a:endParaRPr lang="en-US" dirty="0"/>
+          </a:p>
+        </p:txBody>
+      </p:sp>
+      <p:sp>
+        <p:nvSpPr>
+          <p:cNvPr id="4" name="Slide Number Placeholder 3"/>
+          <p:cNvSpPr>
+            <a:spLocks noGrp="1"/>
+          </p:cNvSpPr>
+          <p:nvPr>
+            <p:ph type="sldNum" sz="quarter" idx="10"/>
+          </p:nvPr>
+        </p:nvSpPr>
+        <p:spPr/>
+        <p:txBody>
+          <a:bodyPr/>
+          <a:lstStyle/>
+          <a:p>
+            <a:fld id="{F7021451-1387-4CA6-816F-3879F97B5CBC}" type="slidenum">
+              <a:rPr lang="en-US"/>
+              <a:t>9</a:t>
+            </a:fld>
+            <a:endParaRPr lang="en-US"/>
+          </a:p>
+        </p:txBody>
+      </p:sp>
+    </p:spTree>
+    <p:extLst>
+      <p:ext uri="{BB962C8B-B14F-4D97-AF65-F5344CB8AC3E}">
+        <p14:creationId xmlns:p14="http://schemas.microsoft.com/office/powerpoint/2010/main" val="1024086991"/>
+      </p:ext>
+    </p:extLst>
+  </p:cSld>
+  <p:clrMapOvr>
+    <a:masterClrMapping/>
+  </p:clrMapOvr>
+</p:notes>
+</file>
+
 <file path=ppt/slideLayouts/slideLayout1.xml><?xml version="1.0" encoding="utf-8"?>
 <p:sldLayout xmlns:a="http://schemas.openxmlformats.org/drawingml/2006/main" xmlns:r="http://schemas.openxmlformats.org/officeDocument/2006/relationships" xmlns:p="http://schemas.openxmlformats.org/presentationml/2006/main" preserve="1">
   <p:cSld name="DEFAULT">
@@ -1299,13 +1566,6 @@
 <file path=ppt/slides/slide1.xml><?xml version="1.0" encoding="utf-8"?>
 <p:sld xmlns:a="http://schemas.openxmlformats.org/drawingml/2006/main" xmlns:r="http://schemas.openxmlformats.org/officeDocument/2006/relationships" xmlns:p="http://schemas.openxmlformats.org/presentationml/2006/main">
   <p:cSld name="Slide 1">
-    <p:bg>
-      <p:bgPr>
-        <a:solidFill>
-          <a:srgbClr val="1B2A4A"/>
-        </a:solidFill>
-      </p:bgPr>
-    </p:bg>
     <p:spTree>
       <p:nvGrpSpPr>
         <p:cNvPr id="1" name=""/>
@@ -1329,7 +1589,27 @@
         <p:spPr>
           <a:xfrm>
             <a:off x="0" y="0"/>
-            <a:ext cx="109728" cy="5143500"/>
+            <a:ext cx="9144000" cy="5143500"/>
+          </a:xfrm>
+          <a:prstGeom prst="rect">
+            <a:avLst/>
+          </a:prstGeom>
+          <a:solidFill>
+            <a:srgbClr val="1B2A4A"/>
+          </a:solidFill>
+          <a:ln/>
+        </p:spPr>
+      </p:sp>
+      <p:sp>
+        <p:nvSpPr>
+          <p:cNvPr id="3" name="Shape 1"/>
+          <p:cNvSpPr/>
+          <p:nvPr/>
+        </p:nvSpPr>
+        <p:spPr>
+          <a:xfrm>
+            <a:off x="0" y="4777740"/>
+            <a:ext cx="9144000" cy="365760"/>
           </a:xfrm>
           <a:prstGeom prst="rect">
             <a:avLst/>
@@ -1342,14 +1622,36 @@
       </p:sp>
       <p:sp>
         <p:nvSpPr>
-          <p:cNvPr id="3" name="Text 1"/>
-          <p:cNvSpPr/>
-          <p:nvPr/>
-        </p:nvSpPr>
-        <p:spPr>
-          <a:xfrm>
-            <a:off x="731520" y="1097280"/>
-            <a:ext cx="7772400" cy="1371600"/>
+          <p:cNvPr id="4" name="Shape 2"/>
+          <p:cNvSpPr/>
+          <p:nvPr/>
+        </p:nvSpPr>
+        <p:spPr>
+          <a:xfrm>
+            <a:off x="6858000" y="-1371600"/>
+            <a:ext cx="4572000" cy="4572000"/>
+          </a:xfrm>
+          <a:prstGeom prst="ellipse">
+            <a:avLst/>
+          </a:prstGeom>
+          <a:solidFill>
+            <a:srgbClr val="2A9D8F">
+              <a:alpha val="12000"/>
+            </a:srgbClr>
+          </a:solidFill>
+          <a:ln/>
+        </p:spPr>
+      </p:sp>
+      <p:sp>
+        <p:nvSpPr>
+          <p:cNvPr id="5" name="Text 3"/>
+          <p:cNvSpPr/>
+          <p:nvPr/>
+        </p:nvSpPr>
+        <p:spPr>
+          <a:xfrm>
+            <a:off x="731520" y="914400"/>
+            <a:ext cx="7680960" cy="457200"/>
           </a:xfrm>
           <a:prstGeom prst="rect">
             <a:avLst/>
@@ -1365,7 +1667,46 @@
               <a:buNone/>
             </a:pPr>
             <a:r>
-              <a:rPr lang="en-US" sz="4000" b="1" dirty="0">
+              <a:rPr lang="en-US" sz="1300" b="1" spc="500" kern="0" dirty="0">
+                <a:solidFill>
+                  <a:srgbClr val="2A9D8F"/>
+                </a:solidFill>
+                <a:latin typeface="Calibri" pitchFamily="34" charset="0"/>
+                <a:ea typeface="Calibri" pitchFamily="34" charset="-122"/>
+                <a:cs typeface="Calibri" pitchFamily="34" charset="-120"/>
+              </a:rPr>
+              <a:t>GRADE 6 SCIENCE</a:t>
+            </a:r>
+            <a:endParaRPr lang="en-US" sz="1300" dirty="0"/>
+          </a:p>
+        </p:txBody>
+      </p:sp>
+      <p:sp>
+        <p:nvSpPr>
+          <p:cNvPr id="6" name="Text 4"/>
+          <p:cNvSpPr/>
+          <p:nvPr/>
+        </p:nvSpPr>
+        <p:spPr>
+          <a:xfrm>
+            <a:off x="731520" y="1463040"/>
+            <a:ext cx="6858000" cy="1645920"/>
+          </a:xfrm>
+          <a:prstGeom prst="rect">
+            <a:avLst/>
+          </a:prstGeom>
+          <a:noFill/>
+          <a:ln/>
+        </p:spPr>
+        <p:txBody>
+          <a:bodyPr wrap="square" rtlCol="0" anchor="t"/>
+          <a:lstStyle/>
+          <a:p>
+            <a:pPr indent="0" marL="0">
+              <a:buNone/>
+            </a:pPr>
+            <a:r>
+              <a:rPr lang="en-US" sz="3800" b="1" dirty="0">
                 <a:solidFill>
                   <a:srgbClr val="FFFFFF"/>
                 </a:solidFill>
@@ -1375,20 +1716,20 @@
               </a:rPr>
               <a:t>The Scientific Method</a:t>
             </a:r>
-            <a:endParaRPr lang="en-US" sz="4000" dirty="0"/>
-          </a:p>
-        </p:txBody>
-      </p:sp>
-      <p:sp>
-        <p:nvSpPr>
-          <p:cNvPr id="4" name="Text 2"/>
-          <p:cNvSpPr/>
-          <p:nvPr/>
-        </p:nvSpPr>
-        <p:spPr>
-          <a:xfrm>
-            <a:off x="731520" y="2560320"/>
-            <a:ext cx="7772400" cy="548640"/>
+            <a:endParaRPr lang="en-US" sz="3800" dirty="0"/>
+          </a:p>
+        </p:txBody>
+      </p:sp>
+      <p:sp>
+        <p:nvSpPr>
+          <p:cNvPr id="7" name="Text 5"/>
+          <p:cNvSpPr/>
+          <p:nvPr/>
+        </p:nvSpPr>
+        <p:spPr>
+          <a:xfrm>
+            <a:off x="731520" y="3200400"/>
+            <a:ext cx="6400800" cy="548640"/>
           </a:xfrm>
           <a:prstGeom prst="rect">
             <a:avLst/>
@@ -1404,15 +1745,15 @@
               <a:buNone/>
             </a:pPr>
             <a:r>
-              <a:rPr lang="en-US" sz="1600" dirty="0">
-                <a:solidFill>
-                  <a:srgbClr val="E9C46A"/>
+              <a:rPr lang="en-US" sz="1600" i="1" dirty="0">
+                <a:solidFill>
+                  <a:srgbClr val="9B9690"/>
                 </a:solidFill>
                 <a:latin typeface="Calibri" pitchFamily="34" charset="0"/>
                 <a:ea typeface="Calibri" pitchFamily="34" charset="-122"/>
                 <a:cs typeface="Calibri" pitchFamily="34" charset="-120"/>
               </a:rPr>
-              <a:t>Grade 6 Science · Mr Zocchi</a:t>
+              <a:t>How scientists investigate the world</a:t>
             </a:r>
             <a:endParaRPr lang="en-US" sz="1600" dirty="0"/>
           </a:p>
@@ -1420,36 +1761,14 @@
       </p:sp>
       <p:sp>
         <p:nvSpPr>
-          <p:cNvPr id="5" name="Shape 3"/>
-          <p:cNvSpPr/>
-          <p:nvPr/>
-        </p:nvSpPr>
-        <p:spPr>
-          <a:xfrm>
-            <a:off x="731520" y="3474720"/>
-            <a:ext cx="2011680" cy="411480"/>
-          </a:xfrm>
-          <a:prstGeom prst="roundRect">
-            <a:avLst>
-              <a:gd name="adj" fmla="val 17778"/>
-            </a:avLst>
-          </a:prstGeom>
-          <a:solidFill>
-            <a:srgbClr val="2A9D8F"/>
-          </a:solidFill>
-          <a:ln/>
-        </p:spPr>
-      </p:sp>
-      <p:sp>
-        <p:nvSpPr>
-          <p:cNvPr id="6" name="Text 4"/>
-          <p:cNvSpPr/>
-          <p:nvPr/>
-        </p:nvSpPr>
-        <p:spPr>
-          <a:xfrm>
-            <a:off x="731520" y="3474720"/>
-            <a:ext cx="2011680" cy="411480"/>
+          <p:cNvPr id="8" name="Text 6"/>
+          <p:cNvSpPr/>
+          <p:nvPr/>
+        </p:nvSpPr>
+        <p:spPr>
+          <a:xfrm>
+            <a:off x="731520" y="4297680"/>
+            <a:ext cx="2743200" cy="365760"/>
           </a:xfrm>
           <a:prstGeom prst="rect">
             <a:avLst/>
@@ -1461,21 +1780,21 @@
           <a:bodyPr wrap="square" rtlCol="0" anchor="ctr"/>
           <a:lstStyle/>
           <a:p>
-            <a:pPr algn="ctr" indent="0" marL="0">
+            <a:pPr indent="0" marL="0">
               <a:buNone/>
             </a:pPr>
             <a:r>
-              <a:rPr lang="en-US" sz="1200" b="1" dirty="0">
-                <a:solidFill>
-                  <a:srgbClr val="FFFFFF"/>
+              <a:rPr lang="en-US" sz="1100" dirty="0">
+                <a:solidFill>
+                  <a:srgbClr val="9B9690"/>
                 </a:solidFill>
                 <a:latin typeface="Calibri" pitchFamily="34" charset="0"/>
                 <a:ea typeface="Calibri" pitchFamily="34" charset="-122"/>
                 <a:cs typeface="Calibri" pitchFamily="34" charset="-120"/>
               </a:rPr>
-              <a:t>Term 1 · Scientific Skills</a:t>
-            </a:r>
-            <a:endParaRPr lang="en-US" sz="1200" dirty="0"/>
+              <a:t>mrzocchi.com</a:t>
+            </a:r>
+            <a:endParaRPr lang="en-US" sz="1100" dirty="0"/>
           </a:p>
         </p:txBody>
       </p:sp>
@@ -1520,7 +1839,47 @@
         <p:spPr>
           <a:xfrm>
             <a:off x="0" y="0"/>
-            <a:ext cx="9144000" cy="54864"/>
+            <a:ext cx="9144000" cy="822960"/>
+          </a:xfrm>
+          <a:prstGeom prst="rect">
+            <a:avLst/>
+          </a:prstGeom>
+          <a:solidFill>
+            <a:srgbClr val="FFFFFF"/>
+          </a:solidFill>
+          <a:ln/>
+        </p:spPr>
+      </p:sp>
+      <p:sp>
+        <p:nvSpPr>
+          <p:cNvPr id="3" name="Shape 1"/>
+          <p:cNvSpPr/>
+          <p:nvPr/>
+        </p:nvSpPr>
+        <p:spPr>
+          <a:xfrm>
+            <a:off x="0" y="804672"/>
+            <a:ext cx="9144000" cy="27432"/>
+          </a:xfrm>
+          <a:prstGeom prst="rect">
+            <a:avLst/>
+          </a:prstGeom>
+          <a:solidFill>
+            <a:srgbClr val="E5E2DC"/>
+          </a:solidFill>
+          <a:ln/>
+        </p:spPr>
+      </p:sp>
+      <p:sp>
+        <p:nvSpPr>
+          <p:cNvPr id="4" name="Shape 2"/>
+          <p:cNvSpPr/>
+          <p:nvPr/>
+        </p:nvSpPr>
+        <p:spPr>
+          <a:xfrm>
+            <a:off x="548640" y="201168"/>
+            <a:ext cx="54864" cy="420624"/>
           </a:xfrm>
           <a:prstGeom prst="rect">
             <a:avLst/>
@@ -1533,14 +1892,14 @@
       </p:sp>
       <p:sp>
         <p:nvSpPr>
-          <p:cNvPr id="3" name="Text 1"/>
-          <p:cNvSpPr/>
-          <p:nvPr/>
-        </p:nvSpPr>
-        <p:spPr>
-          <a:xfrm>
-            <a:off x="7772400" y="4709160"/>
-            <a:ext cx="1097280" cy="320040"/>
+          <p:cNvPr id="5" name="Text 3"/>
+          <p:cNvSpPr/>
+          <p:nvPr/>
+        </p:nvSpPr>
+        <p:spPr>
+          <a:xfrm>
+            <a:off x="777240" y="137160"/>
+            <a:ext cx="7772400" cy="548640"/>
           </a:xfrm>
           <a:prstGeom prst="rect">
             <a:avLst/>
@@ -1549,37 +1908,37 @@
           <a:ln/>
         </p:spPr>
         <p:txBody>
-          <a:bodyPr wrap="square" rtlCol="0" anchor="ctr"/>
-          <a:lstStyle/>
-          <a:p>
-            <a:pPr algn="r" indent="0" marL="0">
+          <a:bodyPr wrap="square" lIns="0" tIns="0" rIns="0" bIns="0" rtlCol="0" anchor="ctr"/>
+          <a:lstStyle/>
+          <a:p>
+            <a:pPr indent="0" marL="0">
               <a:buNone/>
             </a:pPr>
             <a:r>
-              <a:rPr lang="en-US" sz="900" dirty="0">
-                <a:solidFill>
-                  <a:srgbClr val="6B6660"/>
-                </a:solidFill>
-                <a:latin typeface="Calibri" pitchFamily="34" charset="0"/>
-                <a:ea typeface="Calibri" pitchFamily="34" charset="-122"/>
-                <a:cs typeface="Calibri" pitchFamily="34" charset="-120"/>
-              </a:rPr>
-              <a:t>2 / 6</a:t>
-            </a:r>
-            <a:endParaRPr lang="en-US" sz="900" dirty="0"/>
-          </a:p>
-        </p:txBody>
-      </p:sp>
-      <p:sp>
-        <p:nvSpPr>
-          <p:cNvPr id="4" name="Shape 2"/>
-          <p:cNvSpPr/>
-          <p:nvPr/>
-        </p:nvSpPr>
-        <p:spPr>
-          <a:xfrm>
-            <a:off x="1371600" y="914400"/>
-            <a:ext cx="6400800" cy="3200400"/>
+              <a:rPr lang="en-US" sz="2000" b="1" dirty="0">
+                <a:solidFill>
+                  <a:srgbClr val="1B2A4A"/>
+                </a:solidFill>
+                <a:latin typeface="Georgia" pitchFamily="34" charset="0"/>
+                <a:ea typeface="Georgia" pitchFamily="34" charset="-122"/>
+                <a:cs typeface="Georgia" pitchFamily="34" charset="-120"/>
+              </a:rPr>
+              <a:t>Key Vocabulary</a:t>
+            </a:r>
+            <a:endParaRPr lang="en-US" sz="2000" dirty="0"/>
+          </a:p>
+        </p:txBody>
+      </p:sp>
+      <p:sp>
+        <p:nvSpPr>
+          <p:cNvPr id="6" name="Shape 4"/>
+          <p:cNvSpPr/>
+          <p:nvPr/>
+        </p:nvSpPr>
+        <p:spPr>
+          <a:xfrm>
+            <a:off x="731520" y="1051560"/>
+            <a:ext cx="3657600" cy="658368"/>
           </a:xfrm>
           <a:prstGeom prst="rect">
             <a:avLst/>
@@ -1587,12 +1946,7 @@
           <a:solidFill>
             <a:srgbClr val="FFFFFF"/>
           </a:solidFill>
-          <a:ln w="12700">
-            <a:solidFill>
-              <a:srgbClr val="E5E2DC"/>
-            </a:solidFill>
-            <a:prstDash val="solid"/>
-          </a:ln>
+          <a:ln/>
           <a:effectLst>
             <a:outerShdw sx="100000" sy="100000" kx="0" ky="0" algn="bl" rotWithShape="0" blurRad="50800" dist="25400" dir="8100000">
               <a:srgbClr val="000000">
@@ -1604,14 +1958,14 @@
       </p:sp>
       <p:sp>
         <p:nvSpPr>
-          <p:cNvPr id="5" name="Shape 3"/>
-          <p:cNvSpPr/>
-          <p:nvPr/>
-        </p:nvSpPr>
-        <p:spPr>
-          <a:xfrm>
-            <a:off x="1371600" y="914400"/>
-            <a:ext cx="91440" cy="3200400"/>
+          <p:cNvPr id="7" name="Shape 5"/>
+          <p:cNvSpPr/>
+          <p:nvPr/>
+        </p:nvSpPr>
+        <p:spPr>
+          <a:xfrm>
+            <a:off x="731520" y="1051560"/>
+            <a:ext cx="54864" cy="658368"/>
           </a:xfrm>
           <a:prstGeom prst="rect">
             <a:avLst/>
@@ -1624,14 +1978,14 @@
       </p:sp>
       <p:sp>
         <p:nvSpPr>
-          <p:cNvPr id="6" name="Text 4"/>
-          <p:cNvSpPr/>
-          <p:nvPr/>
-        </p:nvSpPr>
-        <p:spPr>
-          <a:xfrm>
-            <a:off x="1828800" y="1097280"/>
-            <a:ext cx="5669280" cy="640080"/>
+          <p:cNvPr id="8" name="Text 6"/>
+          <p:cNvSpPr/>
+          <p:nvPr/>
+        </p:nvSpPr>
+        <p:spPr>
+          <a:xfrm>
+            <a:off x="914400" y="1051560"/>
+            <a:ext cx="1463040" cy="658368"/>
           </a:xfrm>
           <a:prstGeom prst="rect">
             <a:avLst/>
@@ -1640,14 +1994,14 @@
           <a:ln/>
         </p:spPr>
         <p:txBody>
-          <a:bodyPr wrap="square" rtlCol="0" anchor="ctr"/>
+          <a:bodyPr wrap="square" lIns="0" tIns="0" rIns="0" bIns="0" rtlCol="0" anchor="ctr"/>
           <a:lstStyle/>
           <a:p>
             <a:pPr indent="0" marL="0">
               <a:buNone/>
             </a:pPr>
             <a:r>
-              <a:rPr lang="en-US" sz="2400" b="1" dirty="0">
+              <a:rPr lang="en-US" sz="1300" b="1" dirty="0">
                 <a:solidFill>
                   <a:srgbClr val="1B2A4A"/>
                 </a:solidFill>
@@ -1655,22 +2009,22 @@
                 <a:ea typeface="Georgia" pitchFamily="34" charset="-122"/>
                 <a:cs typeface="Georgia" pitchFamily="34" charset="-120"/>
               </a:rPr>
-              <a:t>What is the Scientific Method?</a:t>
-            </a:r>
-            <a:endParaRPr lang="en-US" sz="2400" dirty="0"/>
-          </a:p>
-        </p:txBody>
-      </p:sp>
-      <p:sp>
-        <p:nvSpPr>
-          <p:cNvPr id="7" name="Text 5"/>
-          <p:cNvSpPr/>
-          <p:nvPr/>
-        </p:nvSpPr>
-        <p:spPr>
-          <a:xfrm>
-            <a:off x="1828800" y="1828800"/>
-            <a:ext cx="5669280" cy="2011680"/>
+              <a:t>Hypothesis</a:t>
+            </a:r>
+            <a:endParaRPr lang="en-US" sz="1300" dirty="0"/>
+          </a:p>
+        </p:txBody>
+      </p:sp>
+      <p:sp>
+        <p:nvSpPr>
+          <p:cNvPr id="9" name="Text 7"/>
+          <p:cNvSpPr/>
+          <p:nvPr/>
+        </p:nvSpPr>
+        <p:spPr>
+          <a:xfrm>
+            <a:off x="2377440" y="1051560"/>
+            <a:ext cx="1920240" cy="658368"/>
           </a:xfrm>
           <a:prstGeom prst="rect">
             <a:avLst/>
@@ -1679,27 +2033,649 @@
           <a:ln/>
         </p:spPr>
         <p:txBody>
-          <a:bodyPr wrap="square" rtlCol="0" anchor="t"/>
+          <a:bodyPr wrap="square" lIns="0" tIns="0" rIns="0" bIns="0" rtlCol="0" anchor="ctr"/>
           <a:lstStyle/>
           <a:p>
             <a:pPr indent="0" marL="0">
-              <a:lnSpc>
-                <a:spcPct val="130000"/>
-              </a:lnSpc>
               <a:buNone/>
             </a:pPr>
             <a:r>
-              <a:rPr lang="en-US" sz="1500" dirty="0">
-                <a:solidFill>
-                  <a:srgbClr val="3D3A36"/>
+              <a:rPr lang="en-US" sz="1100" dirty="0">
+                <a:solidFill>
+                  <a:srgbClr val="6B6660"/>
                 </a:solidFill>
                 <a:latin typeface="Calibri" pitchFamily="34" charset="0"/>
                 <a:ea typeface="Calibri" pitchFamily="34" charset="-122"/>
                 <a:cs typeface="Calibri" pitchFamily="34" charset="-120"/>
               </a:rPr>
-              <a:t>The scientific method is a step-by-step process scientists use to answer questions about the natural world. It involves making observations, forming hypotheses, testing through experiments, and drawing conclusions based on evidence.</a:t>
-            </a:r>
-            <a:endParaRPr lang="en-US" sz="1500" dirty="0"/>
+              <a:t>A testable prediction</a:t>
+            </a:r>
+            <a:endParaRPr lang="en-US" sz="1100" dirty="0"/>
+          </a:p>
+        </p:txBody>
+      </p:sp>
+      <p:sp>
+        <p:nvSpPr>
+          <p:cNvPr id="10" name="Shape 8"/>
+          <p:cNvSpPr/>
+          <p:nvPr/>
+        </p:nvSpPr>
+        <p:spPr>
+          <a:xfrm>
+            <a:off x="4754880" y="1051560"/>
+            <a:ext cx="3657600" cy="658368"/>
+          </a:xfrm>
+          <a:prstGeom prst="rect">
+            <a:avLst/>
+          </a:prstGeom>
+          <a:solidFill>
+            <a:srgbClr val="FFFFFF"/>
+          </a:solidFill>
+          <a:ln/>
+          <a:effectLst>
+            <a:outerShdw sx="100000" sy="100000" kx="0" ky="0" algn="bl" rotWithShape="0" blurRad="50800" dist="25400" dir="8100000">
+              <a:srgbClr val="000000">
+                <a:alpha val="10000"/>
+              </a:srgbClr>
+            </a:outerShdw>
+          </a:effectLst>
+        </p:spPr>
+      </p:sp>
+      <p:sp>
+        <p:nvSpPr>
+          <p:cNvPr id="11" name="Shape 9"/>
+          <p:cNvSpPr/>
+          <p:nvPr/>
+        </p:nvSpPr>
+        <p:spPr>
+          <a:xfrm>
+            <a:off x="4754880" y="1051560"/>
+            <a:ext cx="54864" cy="658368"/>
+          </a:xfrm>
+          <a:prstGeom prst="rect">
+            <a:avLst/>
+          </a:prstGeom>
+          <a:solidFill>
+            <a:srgbClr val="2A9D8F"/>
+          </a:solidFill>
+          <a:ln/>
+        </p:spPr>
+      </p:sp>
+      <p:sp>
+        <p:nvSpPr>
+          <p:cNvPr id="12" name="Text 10"/>
+          <p:cNvSpPr/>
+          <p:nvPr/>
+        </p:nvSpPr>
+        <p:spPr>
+          <a:xfrm>
+            <a:off x="4937760" y="1051560"/>
+            <a:ext cx="1463040" cy="658368"/>
+          </a:xfrm>
+          <a:prstGeom prst="rect">
+            <a:avLst/>
+          </a:prstGeom>
+          <a:noFill/>
+          <a:ln/>
+        </p:spPr>
+        <p:txBody>
+          <a:bodyPr wrap="square" lIns="0" tIns="0" rIns="0" bIns="0" rtlCol="0" anchor="ctr"/>
+          <a:lstStyle/>
+          <a:p>
+            <a:pPr indent="0" marL="0">
+              <a:buNone/>
+            </a:pPr>
+            <a:r>
+              <a:rPr lang="en-US" sz="1300" b="1" dirty="0">
+                <a:solidFill>
+                  <a:srgbClr val="1B2A4A"/>
+                </a:solidFill>
+                <a:latin typeface="Georgia" pitchFamily="34" charset="0"/>
+                <a:ea typeface="Georgia" pitchFamily="34" charset="-122"/>
+                <a:cs typeface="Georgia" pitchFamily="34" charset="-120"/>
+              </a:rPr>
+              <a:t>Variable</a:t>
+            </a:r>
+            <a:endParaRPr lang="en-US" sz="1300" dirty="0"/>
+          </a:p>
+        </p:txBody>
+      </p:sp>
+      <p:sp>
+        <p:nvSpPr>
+          <p:cNvPr id="13" name="Text 11"/>
+          <p:cNvSpPr/>
+          <p:nvPr/>
+        </p:nvSpPr>
+        <p:spPr>
+          <a:xfrm>
+            <a:off x="6400800" y="1051560"/>
+            <a:ext cx="1920240" cy="658368"/>
+          </a:xfrm>
+          <a:prstGeom prst="rect">
+            <a:avLst/>
+          </a:prstGeom>
+          <a:noFill/>
+          <a:ln/>
+        </p:spPr>
+        <p:txBody>
+          <a:bodyPr wrap="square" lIns="0" tIns="0" rIns="0" bIns="0" rtlCol="0" anchor="ctr"/>
+          <a:lstStyle/>
+          <a:p>
+            <a:pPr indent="0" marL="0">
+              <a:buNone/>
+            </a:pPr>
+            <a:r>
+              <a:rPr lang="en-US" sz="1100" dirty="0">
+                <a:solidFill>
+                  <a:srgbClr val="6B6660"/>
+                </a:solidFill>
+                <a:latin typeface="Calibri" pitchFamily="34" charset="0"/>
+                <a:ea typeface="Calibri" pitchFamily="34" charset="-122"/>
+                <a:cs typeface="Calibri" pitchFamily="34" charset="-120"/>
+              </a:rPr>
+              <a:t>Something that can change</a:t>
+            </a:r>
+            <a:endParaRPr lang="en-US" sz="1100" dirty="0"/>
+          </a:p>
+        </p:txBody>
+      </p:sp>
+      <p:sp>
+        <p:nvSpPr>
+          <p:cNvPr id="14" name="Shape 12"/>
+          <p:cNvSpPr/>
+          <p:nvPr/>
+        </p:nvSpPr>
+        <p:spPr>
+          <a:xfrm>
+            <a:off x="731520" y="1819656"/>
+            <a:ext cx="3657600" cy="658368"/>
+          </a:xfrm>
+          <a:prstGeom prst="rect">
+            <a:avLst/>
+          </a:prstGeom>
+          <a:solidFill>
+            <a:srgbClr val="FFFFFF"/>
+          </a:solidFill>
+          <a:ln/>
+          <a:effectLst>
+            <a:outerShdw sx="100000" sy="100000" kx="0" ky="0" algn="bl" rotWithShape="0" blurRad="50800" dist="25400" dir="8100000">
+              <a:srgbClr val="000000">
+                <a:alpha val="10000"/>
+              </a:srgbClr>
+            </a:outerShdw>
+          </a:effectLst>
+        </p:spPr>
+      </p:sp>
+      <p:sp>
+        <p:nvSpPr>
+          <p:cNvPr id="15" name="Shape 13"/>
+          <p:cNvSpPr/>
+          <p:nvPr/>
+        </p:nvSpPr>
+        <p:spPr>
+          <a:xfrm>
+            <a:off x="731520" y="1819656"/>
+            <a:ext cx="54864" cy="658368"/>
+          </a:xfrm>
+          <a:prstGeom prst="rect">
+            <a:avLst/>
+          </a:prstGeom>
+          <a:solidFill>
+            <a:srgbClr val="2A9D8F"/>
+          </a:solidFill>
+          <a:ln/>
+        </p:spPr>
+      </p:sp>
+      <p:sp>
+        <p:nvSpPr>
+          <p:cNvPr id="16" name="Text 14"/>
+          <p:cNvSpPr/>
+          <p:nvPr/>
+        </p:nvSpPr>
+        <p:spPr>
+          <a:xfrm>
+            <a:off x="914400" y="1819656"/>
+            <a:ext cx="1463040" cy="658368"/>
+          </a:xfrm>
+          <a:prstGeom prst="rect">
+            <a:avLst/>
+          </a:prstGeom>
+          <a:noFill/>
+          <a:ln/>
+        </p:spPr>
+        <p:txBody>
+          <a:bodyPr wrap="square" lIns="0" tIns="0" rIns="0" bIns="0" rtlCol="0" anchor="ctr"/>
+          <a:lstStyle/>
+          <a:p>
+            <a:pPr indent="0" marL="0">
+              <a:buNone/>
+            </a:pPr>
+            <a:r>
+              <a:rPr lang="en-US" sz="1300" b="1" dirty="0">
+                <a:solidFill>
+                  <a:srgbClr val="1B2A4A"/>
+                </a:solidFill>
+                <a:latin typeface="Georgia" pitchFamily="34" charset="0"/>
+                <a:ea typeface="Georgia" pitchFamily="34" charset="-122"/>
+                <a:cs typeface="Georgia" pitchFamily="34" charset="-120"/>
+              </a:rPr>
+              <a:t>Fair test</a:t>
+            </a:r>
+            <a:endParaRPr lang="en-US" sz="1300" dirty="0"/>
+          </a:p>
+        </p:txBody>
+      </p:sp>
+      <p:sp>
+        <p:nvSpPr>
+          <p:cNvPr id="17" name="Text 15"/>
+          <p:cNvSpPr/>
+          <p:nvPr/>
+        </p:nvSpPr>
+        <p:spPr>
+          <a:xfrm>
+            <a:off x="2377440" y="1819656"/>
+            <a:ext cx="1920240" cy="658368"/>
+          </a:xfrm>
+          <a:prstGeom prst="rect">
+            <a:avLst/>
+          </a:prstGeom>
+          <a:noFill/>
+          <a:ln/>
+        </p:spPr>
+        <p:txBody>
+          <a:bodyPr wrap="square" lIns="0" tIns="0" rIns="0" bIns="0" rtlCol="0" anchor="ctr"/>
+          <a:lstStyle/>
+          <a:p>
+            <a:pPr indent="0" marL="0">
+              <a:buNone/>
+            </a:pPr>
+            <a:r>
+              <a:rPr lang="en-US" sz="1100" dirty="0">
+                <a:solidFill>
+                  <a:srgbClr val="6B6660"/>
+                </a:solidFill>
+                <a:latin typeface="Calibri" pitchFamily="34" charset="0"/>
+                <a:ea typeface="Calibri" pitchFamily="34" charset="-122"/>
+                <a:cs typeface="Calibri" pitchFamily="34" charset="-120"/>
+              </a:rPr>
+              <a:t>Only one variable changes</a:t>
+            </a:r>
+            <a:endParaRPr lang="en-US" sz="1100" dirty="0"/>
+          </a:p>
+        </p:txBody>
+      </p:sp>
+      <p:sp>
+        <p:nvSpPr>
+          <p:cNvPr id="18" name="Shape 16"/>
+          <p:cNvSpPr/>
+          <p:nvPr/>
+        </p:nvSpPr>
+        <p:spPr>
+          <a:xfrm>
+            <a:off x="4754880" y="1819656"/>
+            <a:ext cx="3657600" cy="658368"/>
+          </a:xfrm>
+          <a:prstGeom prst="rect">
+            <a:avLst/>
+          </a:prstGeom>
+          <a:solidFill>
+            <a:srgbClr val="FFFFFF"/>
+          </a:solidFill>
+          <a:ln/>
+          <a:effectLst>
+            <a:outerShdw sx="100000" sy="100000" kx="0" ky="0" algn="bl" rotWithShape="0" blurRad="50800" dist="25400" dir="8100000">
+              <a:srgbClr val="000000">
+                <a:alpha val="10000"/>
+              </a:srgbClr>
+            </a:outerShdw>
+          </a:effectLst>
+        </p:spPr>
+      </p:sp>
+      <p:sp>
+        <p:nvSpPr>
+          <p:cNvPr id="19" name="Shape 17"/>
+          <p:cNvSpPr/>
+          <p:nvPr/>
+        </p:nvSpPr>
+        <p:spPr>
+          <a:xfrm>
+            <a:off x="4754880" y="1819656"/>
+            <a:ext cx="54864" cy="658368"/>
+          </a:xfrm>
+          <a:prstGeom prst="rect">
+            <a:avLst/>
+          </a:prstGeom>
+          <a:solidFill>
+            <a:srgbClr val="2A9D8F"/>
+          </a:solidFill>
+          <a:ln/>
+        </p:spPr>
+      </p:sp>
+      <p:sp>
+        <p:nvSpPr>
+          <p:cNvPr id="20" name="Text 18"/>
+          <p:cNvSpPr/>
+          <p:nvPr/>
+        </p:nvSpPr>
+        <p:spPr>
+          <a:xfrm>
+            <a:off x="4937760" y="1819656"/>
+            <a:ext cx="1463040" cy="658368"/>
+          </a:xfrm>
+          <a:prstGeom prst="rect">
+            <a:avLst/>
+          </a:prstGeom>
+          <a:noFill/>
+          <a:ln/>
+        </p:spPr>
+        <p:txBody>
+          <a:bodyPr wrap="square" lIns="0" tIns="0" rIns="0" bIns="0" rtlCol="0" anchor="ctr"/>
+          <a:lstStyle/>
+          <a:p>
+            <a:pPr indent="0" marL="0">
+              <a:buNone/>
+            </a:pPr>
+            <a:r>
+              <a:rPr lang="en-US" sz="1300" b="1" dirty="0">
+                <a:solidFill>
+                  <a:srgbClr val="1B2A4A"/>
+                </a:solidFill>
+                <a:latin typeface="Georgia" pitchFamily="34" charset="0"/>
+                <a:ea typeface="Georgia" pitchFamily="34" charset="-122"/>
+                <a:cs typeface="Georgia" pitchFamily="34" charset="-120"/>
+              </a:rPr>
+              <a:t>Data</a:t>
+            </a:r>
+            <a:endParaRPr lang="en-US" sz="1300" dirty="0"/>
+          </a:p>
+        </p:txBody>
+      </p:sp>
+      <p:sp>
+        <p:nvSpPr>
+          <p:cNvPr id="21" name="Text 19"/>
+          <p:cNvSpPr/>
+          <p:nvPr/>
+        </p:nvSpPr>
+        <p:spPr>
+          <a:xfrm>
+            <a:off x="6400800" y="1819656"/>
+            <a:ext cx="1920240" cy="658368"/>
+          </a:xfrm>
+          <a:prstGeom prst="rect">
+            <a:avLst/>
+          </a:prstGeom>
+          <a:noFill/>
+          <a:ln/>
+        </p:spPr>
+        <p:txBody>
+          <a:bodyPr wrap="square" lIns="0" tIns="0" rIns="0" bIns="0" rtlCol="0" anchor="ctr"/>
+          <a:lstStyle/>
+          <a:p>
+            <a:pPr indent="0" marL="0">
+              <a:buNone/>
+            </a:pPr>
+            <a:r>
+              <a:rPr lang="en-US" sz="1100" dirty="0">
+                <a:solidFill>
+                  <a:srgbClr val="6B6660"/>
+                </a:solidFill>
+                <a:latin typeface="Calibri" pitchFamily="34" charset="0"/>
+                <a:ea typeface="Calibri" pitchFamily="34" charset="-122"/>
+                <a:cs typeface="Calibri" pitchFamily="34" charset="-120"/>
+              </a:rPr>
+              <a:t>Information collected in an experiment</a:t>
+            </a:r>
+            <a:endParaRPr lang="en-US" sz="1100" dirty="0"/>
+          </a:p>
+        </p:txBody>
+      </p:sp>
+      <p:sp>
+        <p:nvSpPr>
+          <p:cNvPr id="22" name="Shape 20"/>
+          <p:cNvSpPr/>
+          <p:nvPr/>
+        </p:nvSpPr>
+        <p:spPr>
+          <a:xfrm>
+            <a:off x="731520" y="2587752"/>
+            <a:ext cx="3657600" cy="658368"/>
+          </a:xfrm>
+          <a:prstGeom prst="rect">
+            <a:avLst/>
+          </a:prstGeom>
+          <a:solidFill>
+            <a:srgbClr val="FFFFFF"/>
+          </a:solidFill>
+          <a:ln/>
+          <a:effectLst>
+            <a:outerShdw sx="100000" sy="100000" kx="0" ky="0" algn="bl" rotWithShape="0" blurRad="50800" dist="25400" dir="8100000">
+              <a:srgbClr val="000000">
+                <a:alpha val="10000"/>
+              </a:srgbClr>
+            </a:outerShdw>
+          </a:effectLst>
+        </p:spPr>
+      </p:sp>
+      <p:sp>
+        <p:nvSpPr>
+          <p:cNvPr id="23" name="Shape 21"/>
+          <p:cNvSpPr/>
+          <p:nvPr/>
+        </p:nvSpPr>
+        <p:spPr>
+          <a:xfrm>
+            <a:off x="731520" y="2587752"/>
+            <a:ext cx="54864" cy="658368"/>
+          </a:xfrm>
+          <a:prstGeom prst="rect">
+            <a:avLst/>
+          </a:prstGeom>
+          <a:solidFill>
+            <a:srgbClr val="2A9D8F"/>
+          </a:solidFill>
+          <a:ln/>
+        </p:spPr>
+      </p:sp>
+      <p:sp>
+        <p:nvSpPr>
+          <p:cNvPr id="24" name="Text 22"/>
+          <p:cNvSpPr/>
+          <p:nvPr/>
+        </p:nvSpPr>
+        <p:spPr>
+          <a:xfrm>
+            <a:off x="914400" y="2587752"/>
+            <a:ext cx="1463040" cy="658368"/>
+          </a:xfrm>
+          <a:prstGeom prst="rect">
+            <a:avLst/>
+          </a:prstGeom>
+          <a:noFill/>
+          <a:ln/>
+        </p:spPr>
+        <p:txBody>
+          <a:bodyPr wrap="square" lIns="0" tIns="0" rIns="0" bIns="0" rtlCol="0" anchor="ctr"/>
+          <a:lstStyle/>
+          <a:p>
+            <a:pPr indent="0" marL="0">
+              <a:buNone/>
+            </a:pPr>
+            <a:r>
+              <a:rPr lang="en-US" sz="1300" b="1" dirty="0">
+                <a:solidFill>
+                  <a:srgbClr val="1B2A4A"/>
+                </a:solidFill>
+                <a:latin typeface="Georgia" pitchFamily="34" charset="0"/>
+                <a:ea typeface="Georgia" pitchFamily="34" charset="-122"/>
+                <a:cs typeface="Georgia" pitchFamily="34" charset="-120"/>
+              </a:rPr>
+              <a:t>Conclusion</a:t>
+            </a:r>
+            <a:endParaRPr lang="en-US" sz="1300" dirty="0"/>
+          </a:p>
+        </p:txBody>
+      </p:sp>
+      <p:sp>
+        <p:nvSpPr>
+          <p:cNvPr id="25" name="Text 23"/>
+          <p:cNvSpPr/>
+          <p:nvPr/>
+        </p:nvSpPr>
+        <p:spPr>
+          <a:xfrm>
+            <a:off x="2377440" y="2587752"/>
+            <a:ext cx="1920240" cy="658368"/>
+          </a:xfrm>
+          <a:prstGeom prst="rect">
+            <a:avLst/>
+          </a:prstGeom>
+          <a:noFill/>
+          <a:ln/>
+        </p:spPr>
+        <p:txBody>
+          <a:bodyPr wrap="square" lIns="0" tIns="0" rIns="0" bIns="0" rtlCol="0" anchor="ctr"/>
+          <a:lstStyle/>
+          <a:p>
+            <a:pPr indent="0" marL="0">
+              <a:buNone/>
+            </a:pPr>
+            <a:r>
+              <a:rPr lang="en-US" sz="1100" dirty="0">
+                <a:solidFill>
+                  <a:srgbClr val="6B6660"/>
+                </a:solidFill>
+                <a:latin typeface="Calibri" pitchFamily="34" charset="0"/>
+                <a:ea typeface="Calibri" pitchFamily="34" charset="-122"/>
+                <a:cs typeface="Calibri" pitchFamily="34" charset="-120"/>
+              </a:rPr>
+              <a:t>What the results show</a:t>
+            </a:r>
+            <a:endParaRPr lang="en-US" sz="1100" dirty="0"/>
+          </a:p>
+        </p:txBody>
+      </p:sp>
+      <p:sp>
+        <p:nvSpPr>
+          <p:cNvPr id="26" name="Shape 24"/>
+          <p:cNvSpPr/>
+          <p:nvPr/>
+        </p:nvSpPr>
+        <p:spPr>
+          <a:xfrm>
+            <a:off x="4754880" y="2587752"/>
+            <a:ext cx="3657600" cy="658368"/>
+          </a:xfrm>
+          <a:prstGeom prst="rect">
+            <a:avLst/>
+          </a:prstGeom>
+          <a:solidFill>
+            <a:srgbClr val="FFFFFF"/>
+          </a:solidFill>
+          <a:ln/>
+          <a:effectLst>
+            <a:outerShdw sx="100000" sy="100000" kx="0" ky="0" algn="bl" rotWithShape="0" blurRad="50800" dist="25400" dir="8100000">
+              <a:srgbClr val="000000">
+                <a:alpha val="10000"/>
+              </a:srgbClr>
+            </a:outerShdw>
+          </a:effectLst>
+        </p:spPr>
+      </p:sp>
+      <p:sp>
+        <p:nvSpPr>
+          <p:cNvPr id="27" name="Shape 25"/>
+          <p:cNvSpPr/>
+          <p:nvPr/>
+        </p:nvSpPr>
+        <p:spPr>
+          <a:xfrm>
+            <a:off x="4754880" y="2587752"/>
+            <a:ext cx="54864" cy="658368"/>
+          </a:xfrm>
+          <a:prstGeom prst="rect">
+            <a:avLst/>
+          </a:prstGeom>
+          <a:solidFill>
+            <a:srgbClr val="2A9D8F"/>
+          </a:solidFill>
+          <a:ln/>
+        </p:spPr>
+      </p:sp>
+      <p:sp>
+        <p:nvSpPr>
+          <p:cNvPr id="28" name="Text 26"/>
+          <p:cNvSpPr/>
+          <p:nvPr/>
+        </p:nvSpPr>
+        <p:spPr>
+          <a:xfrm>
+            <a:off x="4937760" y="2587752"/>
+            <a:ext cx="1463040" cy="658368"/>
+          </a:xfrm>
+          <a:prstGeom prst="rect">
+            <a:avLst/>
+          </a:prstGeom>
+          <a:noFill/>
+          <a:ln/>
+        </p:spPr>
+        <p:txBody>
+          <a:bodyPr wrap="square" lIns="0" tIns="0" rIns="0" bIns="0" rtlCol="0" anchor="ctr"/>
+          <a:lstStyle/>
+          <a:p>
+            <a:pPr indent="0" marL="0">
+              <a:buNone/>
+            </a:pPr>
+            <a:r>
+              <a:rPr lang="en-US" sz="1300" b="1" dirty="0">
+                <a:solidFill>
+                  <a:srgbClr val="1B2A4A"/>
+                </a:solidFill>
+                <a:latin typeface="Georgia" pitchFamily="34" charset="0"/>
+                <a:ea typeface="Georgia" pitchFamily="34" charset="-122"/>
+                <a:cs typeface="Georgia" pitchFamily="34" charset="-120"/>
+              </a:rPr>
+              <a:t>Evaluate</a:t>
+            </a:r>
+            <a:endParaRPr lang="en-US" sz="1300" dirty="0"/>
+          </a:p>
+        </p:txBody>
+      </p:sp>
+      <p:sp>
+        <p:nvSpPr>
+          <p:cNvPr id="29" name="Text 27"/>
+          <p:cNvSpPr/>
+          <p:nvPr/>
+        </p:nvSpPr>
+        <p:spPr>
+          <a:xfrm>
+            <a:off x="6400800" y="2587752"/>
+            <a:ext cx="1920240" cy="658368"/>
+          </a:xfrm>
+          <a:prstGeom prst="rect">
+            <a:avLst/>
+          </a:prstGeom>
+          <a:noFill/>
+          <a:ln/>
+        </p:spPr>
+        <p:txBody>
+          <a:bodyPr wrap="square" lIns="0" tIns="0" rIns="0" bIns="0" rtlCol="0" anchor="ctr"/>
+          <a:lstStyle/>
+          <a:p>
+            <a:pPr indent="0" marL="0">
+              <a:buNone/>
+            </a:pPr>
+            <a:r>
+              <a:rPr lang="en-US" sz="1100" dirty="0">
+                <a:solidFill>
+                  <a:srgbClr val="6B6660"/>
+                </a:solidFill>
+                <a:latin typeface="Calibri" pitchFamily="34" charset="0"/>
+                <a:ea typeface="Calibri" pitchFamily="34" charset="-122"/>
+                <a:cs typeface="Calibri" pitchFamily="34" charset="-120"/>
+              </a:rPr>
+              <a:t>Judging how good your method was</a:t>
+            </a:r>
+            <a:endParaRPr lang="en-US" sz="1100" dirty="0"/>
           </a:p>
         </p:txBody>
       </p:sp>
@@ -1744,7 +2720,47 @@
         <p:spPr>
           <a:xfrm>
             <a:off x="0" y="0"/>
-            <a:ext cx="9144000" cy="54864"/>
+            <a:ext cx="9144000" cy="822960"/>
+          </a:xfrm>
+          <a:prstGeom prst="rect">
+            <a:avLst/>
+          </a:prstGeom>
+          <a:solidFill>
+            <a:srgbClr val="FFFFFF"/>
+          </a:solidFill>
+          <a:ln/>
+        </p:spPr>
+      </p:sp>
+      <p:sp>
+        <p:nvSpPr>
+          <p:cNvPr id="3" name="Shape 1"/>
+          <p:cNvSpPr/>
+          <p:nvPr/>
+        </p:nvSpPr>
+        <p:spPr>
+          <a:xfrm>
+            <a:off x="0" y="804672"/>
+            <a:ext cx="9144000" cy="27432"/>
+          </a:xfrm>
+          <a:prstGeom prst="rect">
+            <a:avLst/>
+          </a:prstGeom>
+          <a:solidFill>
+            <a:srgbClr val="E5E2DC"/>
+          </a:solidFill>
+          <a:ln/>
+        </p:spPr>
+      </p:sp>
+      <p:sp>
+        <p:nvSpPr>
+          <p:cNvPr id="4" name="Shape 2"/>
+          <p:cNvSpPr/>
+          <p:nvPr/>
+        </p:nvSpPr>
+        <p:spPr>
+          <a:xfrm>
+            <a:off x="548640" y="201168"/>
+            <a:ext cx="54864" cy="420624"/>
           </a:xfrm>
           <a:prstGeom prst="rect">
             <a:avLst/>
@@ -1757,14 +2773,14 @@
       </p:sp>
       <p:sp>
         <p:nvSpPr>
-          <p:cNvPr id="3" name="Text 1"/>
-          <p:cNvSpPr/>
-          <p:nvPr/>
-        </p:nvSpPr>
-        <p:spPr>
-          <a:xfrm>
-            <a:off x="7772400" y="4709160"/>
-            <a:ext cx="1097280" cy="320040"/>
+          <p:cNvPr id="5" name="Text 3"/>
+          <p:cNvSpPr/>
+          <p:nvPr/>
+        </p:nvSpPr>
+        <p:spPr>
+          <a:xfrm>
+            <a:off x="777240" y="137160"/>
+            <a:ext cx="7772400" cy="548640"/>
           </a:xfrm>
           <a:prstGeom prst="rect">
             <a:avLst/>
@@ -1773,89 +2789,214 @@
           <a:ln/>
         </p:spPr>
         <p:txBody>
-          <a:bodyPr wrap="square" rtlCol="0" anchor="ctr"/>
-          <a:lstStyle/>
-          <a:p>
-            <a:pPr algn="r" indent="0" marL="0">
+          <a:bodyPr wrap="square" lIns="0" tIns="0" rIns="0" bIns="0" rtlCol="0" anchor="ctr"/>
+          <a:lstStyle/>
+          <a:p>
+            <a:pPr indent="0" marL="0">
               <a:buNone/>
             </a:pPr>
             <a:r>
-              <a:rPr lang="en-US" sz="900" dirty="0">
-                <a:solidFill>
-                  <a:srgbClr val="6B6660"/>
+              <a:rPr lang="en-US" sz="2000" b="1" dirty="0">
+                <a:solidFill>
+                  <a:srgbClr val="1B2A4A"/>
+                </a:solidFill>
+                <a:latin typeface="Georgia" pitchFamily="34" charset="0"/>
+                <a:ea typeface="Georgia" pitchFamily="34" charset="-122"/>
+                <a:cs typeface="Georgia" pitchFamily="34" charset="-120"/>
+              </a:rPr>
+              <a:t>Steps of the Scientific Method</a:t>
+            </a:r>
+            <a:endParaRPr lang="en-US" sz="2000" dirty="0"/>
+          </a:p>
+        </p:txBody>
+      </p:sp>
+      <p:sp>
+        <p:nvSpPr>
+          <p:cNvPr id="6" name="Text 4"/>
+          <p:cNvSpPr/>
+          <p:nvPr/>
+        </p:nvSpPr>
+        <p:spPr>
+          <a:xfrm>
+            <a:off x="731520" y="1051560"/>
+            <a:ext cx="7680960" cy="3108960"/>
+          </a:xfrm>
+          <a:prstGeom prst="rect">
+            <a:avLst/>
+          </a:prstGeom>
+          <a:noFill/>
+          <a:ln/>
+        </p:spPr>
+        <p:txBody>
+          <a:bodyPr wrap="square" rtlCol="0" anchor="t"/>
+          <a:lstStyle/>
+          <a:p>
+            <a:pPr marL="342900" indent="-342900">
+              <a:spcAft>
+                <a:spcPts val="800"/>
+              </a:spcAft>
+              <a:buSzPct val="100000"/>
+              <a:buChar char="•"/>
+            </a:pPr>
+            <a:r>
+              <a:rPr lang="en-US" sz="1500" dirty="0">
+                <a:solidFill>
+                  <a:srgbClr val="3D3A36"/>
                 </a:solidFill>
                 <a:latin typeface="Calibri" pitchFamily="34" charset="0"/>
                 <a:ea typeface="Calibri" pitchFamily="34" charset="-122"/>
                 <a:cs typeface="Calibri" pitchFamily="34" charset="-120"/>
               </a:rPr>
-              <a:t>3 / 6</a:t>
-            </a:r>
-            <a:endParaRPr lang="en-US" sz="900" dirty="0"/>
-          </a:p>
-        </p:txBody>
-      </p:sp>
-      <p:sp>
-        <p:nvSpPr>
-          <p:cNvPr id="4" name="Text 2"/>
-          <p:cNvSpPr/>
-          <p:nvPr/>
-        </p:nvSpPr>
-        <p:spPr>
-          <a:xfrm>
-            <a:off x="457200" y="274320"/>
-            <a:ext cx="8229600" cy="640080"/>
-          </a:xfrm>
-          <a:prstGeom prst="rect">
-            <a:avLst/>
-          </a:prstGeom>
-          <a:noFill/>
-          <a:ln/>
-        </p:spPr>
-        <p:txBody>
-          <a:bodyPr wrap="square" rtlCol="0" anchor="ctr"/>
-          <a:lstStyle/>
-          <a:p>
-            <a:pPr indent="0" marL="0">
-              <a:buNone/>
-            </a:pPr>
-            <a:r>
-              <a:rPr lang="en-US" sz="2600" b="1" dirty="0">
-                <a:solidFill>
-                  <a:srgbClr val="1B2A4A"/>
-                </a:solidFill>
-                <a:latin typeface="Georgia" pitchFamily="34" charset="0"/>
-                <a:ea typeface="Georgia" pitchFamily="34" charset="-122"/>
-                <a:cs typeface="Georgia" pitchFamily="34" charset="-120"/>
-              </a:rPr>
-              <a:t>The Six Steps</a:t>
-            </a:r>
-            <a:endParaRPr lang="en-US" sz="2600" dirty="0"/>
-          </a:p>
-        </p:txBody>
-      </p:sp>
-      <p:sp>
-        <p:nvSpPr>
-          <p:cNvPr id="5" name="Shape 3"/>
-          <p:cNvSpPr/>
-          <p:nvPr/>
-        </p:nvSpPr>
-        <p:spPr>
-          <a:xfrm>
-            <a:off x="457200" y="1188720"/>
-            <a:ext cx="2560320" cy="1828800"/>
-          </a:xfrm>
-          <a:prstGeom prst="rect">
-            <a:avLst/>
-          </a:prstGeom>
-          <a:solidFill>
-            <a:srgbClr val="FFFFFF"/>
-          </a:solidFill>
-          <a:ln w="12700">
-            <a:solidFill>
-              <a:srgbClr val="E5E2DC"/>
-            </a:solidFill>
-            <a:prstDash val="solid"/>
-          </a:ln>
+              <a:t>1. Ask a question — what do you want to find out?</a:t>
+            </a:r>
+            <a:endParaRPr lang="en-US" sz="1500" dirty="0"/>
+          </a:p>
+          <a:p>
+            <a:pPr marL="342900" indent="-342900">
+              <a:spcAft>
+                <a:spcPts val="800"/>
+              </a:spcAft>
+              <a:buSzPct val="100000"/>
+              <a:buChar char="•"/>
+            </a:pPr>
+            <a:r>
+              <a:rPr lang="en-US" sz="1500" dirty="0">
+                <a:solidFill>
+                  <a:srgbClr val="3D3A36"/>
+                </a:solidFill>
+                <a:latin typeface="Calibri" pitchFamily="34" charset="0"/>
+                <a:ea typeface="Calibri" pitchFamily="34" charset="-122"/>
+                <a:cs typeface="Calibri" pitchFamily="34" charset="-120"/>
+              </a:rPr>
+              <a:t>2. Research — what do scientists already know?</a:t>
+            </a:r>
+            <a:endParaRPr lang="en-US" sz="1500" dirty="0"/>
+          </a:p>
+          <a:p>
+            <a:pPr marL="342900" indent="-342900">
+              <a:spcAft>
+                <a:spcPts val="800"/>
+              </a:spcAft>
+              <a:buSzPct val="100000"/>
+              <a:buChar char="•"/>
+            </a:pPr>
+            <a:r>
+              <a:rPr lang="en-US" sz="1500" dirty="0">
+                <a:solidFill>
+                  <a:srgbClr val="3D3A36"/>
+                </a:solidFill>
+                <a:latin typeface="Calibri" pitchFamily="34" charset="0"/>
+                <a:ea typeface="Calibri" pitchFamily="34" charset="-122"/>
+                <a:cs typeface="Calibri" pitchFamily="34" charset="-120"/>
+              </a:rPr>
+              <a:t>3. Make a hypothesis — your testable prediction.</a:t>
+            </a:r>
+            <a:endParaRPr lang="en-US" sz="1500" dirty="0"/>
+          </a:p>
+          <a:p>
+            <a:pPr marL="342900" indent="-342900">
+              <a:spcAft>
+                <a:spcPts val="800"/>
+              </a:spcAft>
+              <a:buSzPct val="100000"/>
+              <a:buChar char="•"/>
+            </a:pPr>
+            <a:r>
+              <a:rPr lang="en-US" sz="1500" dirty="0">
+                <a:solidFill>
+                  <a:srgbClr val="3D3A36"/>
+                </a:solidFill>
+                <a:latin typeface="Calibri" pitchFamily="34" charset="0"/>
+                <a:ea typeface="Calibri" pitchFamily="34" charset="-122"/>
+                <a:cs typeface="Calibri" pitchFamily="34" charset="-120"/>
+              </a:rPr>
+              <a:t>4. Design an experiment — plan your fair test.</a:t>
+            </a:r>
+            <a:endParaRPr lang="en-US" sz="1500" dirty="0"/>
+          </a:p>
+          <a:p>
+            <a:pPr marL="342900" indent="-342900">
+              <a:spcAft>
+                <a:spcPts val="800"/>
+              </a:spcAft>
+              <a:buSzPct val="100000"/>
+              <a:buChar char="•"/>
+            </a:pPr>
+            <a:r>
+              <a:rPr lang="en-US" sz="1500" dirty="0">
+                <a:solidFill>
+                  <a:srgbClr val="3D3A36"/>
+                </a:solidFill>
+                <a:latin typeface="Calibri" pitchFamily="34" charset="0"/>
+                <a:ea typeface="Calibri" pitchFamily="34" charset="-122"/>
+                <a:cs typeface="Calibri" pitchFamily="34" charset="-120"/>
+              </a:rPr>
+              <a:t>5. Collect data — record measurements carefully.</a:t>
+            </a:r>
+            <a:endParaRPr lang="en-US" sz="1500" dirty="0"/>
+          </a:p>
+          <a:p>
+            <a:pPr marL="342900" indent="-342900">
+              <a:spcAft>
+                <a:spcPts val="800"/>
+              </a:spcAft>
+              <a:buSzPct val="100000"/>
+              <a:buChar char="•"/>
+            </a:pPr>
+            <a:r>
+              <a:rPr lang="en-US" sz="1500" dirty="0">
+                <a:solidFill>
+                  <a:srgbClr val="3D3A36"/>
+                </a:solidFill>
+                <a:latin typeface="Calibri" pitchFamily="34" charset="0"/>
+                <a:ea typeface="Calibri" pitchFamily="34" charset="-122"/>
+                <a:cs typeface="Calibri" pitchFamily="34" charset="-120"/>
+              </a:rPr>
+              <a:t>6. Analyse — look for patterns in your results.</a:t>
+            </a:r>
+            <a:endParaRPr lang="en-US" sz="1500" dirty="0"/>
+          </a:p>
+          <a:p>
+            <a:pPr marL="342900" indent="-342900">
+              <a:spcAft>
+                <a:spcPts val="800"/>
+              </a:spcAft>
+              <a:buSzPct val="100000"/>
+              <a:buChar char="•"/>
+            </a:pPr>
+            <a:r>
+              <a:rPr lang="en-US" sz="1500" dirty="0">
+                <a:solidFill>
+                  <a:srgbClr val="3D3A36"/>
+                </a:solidFill>
+                <a:latin typeface="Calibri" pitchFamily="34" charset="0"/>
+                <a:ea typeface="Calibri" pitchFamily="34" charset="-122"/>
+                <a:cs typeface="Calibri" pitchFamily="34" charset="-120"/>
+              </a:rPr>
+              <a:t>7. Conclude — does your data support your hypothesis?</a:t>
+            </a:r>
+            <a:endParaRPr lang="en-US" sz="1500" dirty="0"/>
+          </a:p>
+        </p:txBody>
+      </p:sp>
+      <p:sp>
+        <p:nvSpPr>
+          <p:cNvPr id="7" name="Shape 5"/>
+          <p:cNvSpPr/>
+          <p:nvPr/>
+        </p:nvSpPr>
+        <p:spPr>
+          <a:xfrm>
+            <a:off x="731520" y="4206240"/>
+            <a:ext cx="7680960" cy="640080"/>
+          </a:xfrm>
+          <a:prstGeom prst="rect">
+            <a:avLst/>
+          </a:prstGeom>
+          <a:solidFill>
+            <a:srgbClr val="E8F5F3"/>
+          </a:solidFill>
+          <a:ln/>
           <a:effectLst>
             <a:outerShdw sx="100000" sy="100000" kx="0" ky="0" algn="bl" rotWithShape="0" blurRad="50800" dist="25400" dir="8100000">
               <a:srgbClr val="000000">
@@ -1867,34 +3008,14 @@
       </p:sp>
       <p:sp>
         <p:nvSpPr>
-          <p:cNvPr id="6" name="Shape 4"/>
-          <p:cNvSpPr/>
-          <p:nvPr/>
-        </p:nvSpPr>
-        <p:spPr>
-          <a:xfrm>
-            <a:off x="457200" y="1188720"/>
-            <a:ext cx="2560320" cy="54864"/>
-          </a:xfrm>
-          <a:prstGeom prst="rect">
-            <a:avLst/>
-          </a:prstGeom>
-          <a:solidFill>
-            <a:srgbClr val="2A9D8F"/>
-          </a:solidFill>
-          <a:ln/>
-        </p:spPr>
-      </p:sp>
-      <p:sp>
-        <p:nvSpPr>
-          <p:cNvPr id="7" name="Text 5"/>
-          <p:cNvSpPr/>
-          <p:nvPr/>
-        </p:nvSpPr>
-        <p:spPr>
-          <a:xfrm>
-            <a:off x="594360" y="1325880"/>
-            <a:ext cx="2286000" cy="365760"/>
+          <p:cNvPr id="8" name="Text 6"/>
+          <p:cNvSpPr/>
+          <p:nvPr/>
+        </p:nvSpPr>
+        <p:spPr>
+          <a:xfrm>
+            <a:off x="914400" y="4251960"/>
+            <a:ext cx="7315200" cy="548640"/>
           </a:xfrm>
           <a:prstGeom prst="rect">
             <a:avLst/>
@@ -1910,46 +3031,21 @@
               <a:buNone/>
             </a:pPr>
             <a:r>
-              <a:rPr lang="en-US" sz="1400" b="1" dirty="0">
-                <a:solidFill>
-                  <a:srgbClr val="1B2A4A"/>
+              <a:rPr lang="en-US" sz="1200" b="1" dirty="0">
+                <a:solidFill>
+                  <a:srgbClr val="2A9D8F"/>
                 </a:solidFill>
                 <a:latin typeface="Calibri" pitchFamily="34" charset="0"/>
                 <a:ea typeface="Calibri" pitchFamily="34" charset="-122"/>
                 <a:cs typeface="Calibri" pitchFamily="34" charset="-120"/>
               </a:rPr>
-              <a:t>1. Observe &amp; Question</a:t>
-            </a:r>
-            <a:endParaRPr lang="en-US" sz="1400" dirty="0"/>
-          </a:p>
-        </p:txBody>
-      </p:sp>
-      <p:sp>
-        <p:nvSpPr>
-          <p:cNvPr id="8" name="Text 6"/>
-          <p:cNvSpPr/>
-          <p:nvPr/>
-        </p:nvSpPr>
-        <p:spPr>
-          <a:xfrm>
-            <a:off x="594360" y="1737360"/>
-            <a:ext cx="2286000" cy="1097280"/>
-          </a:xfrm>
-          <a:prstGeom prst="rect">
-            <a:avLst/>
-          </a:prstGeom>
-          <a:noFill/>
-          <a:ln/>
-        </p:spPr>
-        <p:txBody>
-          <a:bodyPr wrap="square" rtlCol="0" anchor="t"/>
-          <a:lstStyle/>
-          <a:p>
+              <a:t>Key Idea: </a:t>
+            </a:r>
             <a:pPr indent="0" marL="0">
               <a:buNone/>
             </a:pPr>
             <a:r>
-              <a:rPr lang="en-US" sz="1100" dirty="0">
+              <a:rPr lang="en-US" sz="1200" i="1" dirty="0">
                 <a:solidFill>
                   <a:srgbClr val="3D3A36"/>
                 </a:solidFill>
@@ -1957,269 +3053,9 @@
                 <a:ea typeface="Calibri" pitchFamily="34" charset="-122"/>
                 <a:cs typeface="Calibri" pitchFamily="34" charset="-120"/>
               </a:rPr>
-              <a:t>Notice something interesting. Ask a testable question: 'Does the amount of sunlight affect plant growth?'</a:t>
-            </a:r>
-            <a:endParaRPr lang="en-US" sz="1100" dirty="0"/>
-          </a:p>
-        </p:txBody>
-      </p:sp>
-      <p:sp>
-        <p:nvSpPr>
-          <p:cNvPr id="9" name="Shape 7"/>
-          <p:cNvSpPr/>
-          <p:nvPr/>
-        </p:nvSpPr>
-        <p:spPr>
-          <a:xfrm>
-            <a:off x="3291840" y="1188720"/>
-            <a:ext cx="2560320" cy="1828800"/>
-          </a:xfrm>
-          <a:prstGeom prst="rect">
-            <a:avLst/>
-          </a:prstGeom>
-          <a:solidFill>
-            <a:srgbClr val="FFFFFF"/>
-          </a:solidFill>
-          <a:ln w="12700">
-            <a:solidFill>
-              <a:srgbClr val="E5E2DC"/>
-            </a:solidFill>
-            <a:prstDash val="solid"/>
-          </a:ln>
-          <a:effectLst>
-            <a:outerShdw sx="100000" sy="100000" kx="0" ky="0" algn="bl" rotWithShape="0" blurRad="50800" dist="25400" dir="8100000">
-              <a:srgbClr val="000000">
-                <a:alpha val="10000"/>
-              </a:srgbClr>
-            </a:outerShdw>
-          </a:effectLst>
-        </p:spPr>
-      </p:sp>
-      <p:sp>
-        <p:nvSpPr>
-          <p:cNvPr id="10" name="Shape 8"/>
-          <p:cNvSpPr/>
-          <p:nvPr/>
-        </p:nvSpPr>
-        <p:spPr>
-          <a:xfrm>
-            <a:off x="3291840" y="1188720"/>
-            <a:ext cx="2560320" cy="54864"/>
-          </a:xfrm>
-          <a:prstGeom prst="rect">
-            <a:avLst/>
-          </a:prstGeom>
-          <a:solidFill>
-            <a:srgbClr val="2A9D8F"/>
-          </a:solidFill>
-          <a:ln/>
-        </p:spPr>
-      </p:sp>
-      <p:sp>
-        <p:nvSpPr>
-          <p:cNvPr id="11" name="Text 9"/>
-          <p:cNvSpPr/>
-          <p:nvPr/>
-        </p:nvSpPr>
-        <p:spPr>
-          <a:xfrm>
-            <a:off x="3429000" y="1325880"/>
-            <a:ext cx="2286000" cy="365760"/>
-          </a:xfrm>
-          <a:prstGeom prst="rect">
-            <a:avLst/>
-          </a:prstGeom>
-          <a:noFill/>
-          <a:ln/>
-        </p:spPr>
-        <p:txBody>
-          <a:bodyPr wrap="square" rtlCol="0" anchor="ctr"/>
-          <a:lstStyle/>
-          <a:p>
-            <a:pPr indent="0" marL="0">
-              <a:buNone/>
-            </a:pPr>
-            <a:r>
-              <a:rPr lang="en-US" sz="1400" b="1" dirty="0">
-                <a:solidFill>
-                  <a:srgbClr val="1B2A4A"/>
-                </a:solidFill>
-                <a:latin typeface="Calibri" pitchFamily="34" charset="0"/>
-                <a:ea typeface="Calibri" pitchFamily="34" charset="-122"/>
-                <a:cs typeface="Calibri" pitchFamily="34" charset="-120"/>
-              </a:rPr>
-              <a:t>2. Research</a:t>
-            </a:r>
-            <a:endParaRPr lang="en-US" sz="1400" dirty="0"/>
-          </a:p>
-        </p:txBody>
-      </p:sp>
-      <p:sp>
-        <p:nvSpPr>
-          <p:cNvPr id="12" name="Text 10"/>
-          <p:cNvSpPr/>
-          <p:nvPr/>
-        </p:nvSpPr>
-        <p:spPr>
-          <a:xfrm>
-            <a:off x="3429000" y="1737360"/>
-            <a:ext cx="2286000" cy="1097280"/>
-          </a:xfrm>
-          <a:prstGeom prst="rect">
-            <a:avLst/>
-          </a:prstGeom>
-          <a:noFill/>
-          <a:ln/>
-        </p:spPr>
-        <p:txBody>
-          <a:bodyPr wrap="square" rtlCol="0" anchor="t"/>
-          <a:lstStyle/>
-          <a:p>
-            <a:pPr indent="0" marL="0">
-              <a:buNone/>
-            </a:pPr>
-            <a:r>
-              <a:rPr lang="en-US" sz="1100" dirty="0">
-                <a:solidFill>
-                  <a:srgbClr val="3D3A36"/>
-                </a:solidFill>
-                <a:latin typeface="Calibri" pitchFamily="34" charset="0"/>
-                <a:ea typeface="Calibri" pitchFamily="34" charset="-122"/>
-                <a:cs typeface="Calibri" pitchFamily="34" charset="-120"/>
-              </a:rPr>
-              <a:t>Find out what is already known. Read textbooks, articles, and reliable sources to build background knowledge.</a:t>
-            </a:r>
-            <a:endParaRPr lang="en-US" sz="1100" dirty="0"/>
-          </a:p>
-        </p:txBody>
-      </p:sp>
-      <p:sp>
-        <p:nvSpPr>
-          <p:cNvPr id="13" name="Shape 11"/>
-          <p:cNvSpPr/>
-          <p:nvPr/>
-        </p:nvSpPr>
-        <p:spPr>
-          <a:xfrm>
-            <a:off x="6126480" y="1188720"/>
-            <a:ext cx="2560320" cy="1828800"/>
-          </a:xfrm>
-          <a:prstGeom prst="rect">
-            <a:avLst/>
-          </a:prstGeom>
-          <a:solidFill>
-            <a:srgbClr val="FFFFFF"/>
-          </a:solidFill>
-          <a:ln w="12700">
-            <a:solidFill>
-              <a:srgbClr val="E5E2DC"/>
-            </a:solidFill>
-            <a:prstDash val="solid"/>
-          </a:ln>
-          <a:effectLst>
-            <a:outerShdw sx="100000" sy="100000" kx="0" ky="0" algn="bl" rotWithShape="0" blurRad="50800" dist="25400" dir="8100000">
-              <a:srgbClr val="000000">
-                <a:alpha val="10000"/>
-              </a:srgbClr>
-            </a:outerShdw>
-          </a:effectLst>
-        </p:spPr>
-      </p:sp>
-      <p:sp>
-        <p:nvSpPr>
-          <p:cNvPr id="14" name="Shape 12"/>
-          <p:cNvSpPr/>
-          <p:nvPr/>
-        </p:nvSpPr>
-        <p:spPr>
-          <a:xfrm>
-            <a:off x="6126480" y="1188720"/>
-            <a:ext cx="2560320" cy="54864"/>
-          </a:xfrm>
-          <a:prstGeom prst="rect">
-            <a:avLst/>
-          </a:prstGeom>
-          <a:solidFill>
-            <a:srgbClr val="2A9D8F"/>
-          </a:solidFill>
-          <a:ln/>
-        </p:spPr>
-      </p:sp>
-      <p:sp>
-        <p:nvSpPr>
-          <p:cNvPr id="15" name="Text 13"/>
-          <p:cNvSpPr/>
-          <p:nvPr/>
-        </p:nvSpPr>
-        <p:spPr>
-          <a:xfrm>
-            <a:off x="6263640" y="1325880"/>
-            <a:ext cx="2286000" cy="365760"/>
-          </a:xfrm>
-          <a:prstGeom prst="rect">
-            <a:avLst/>
-          </a:prstGeom>
-          <a:noFill/>
-          <a:ln/>
-        </p:spPr>
-        <p:txBody>
-          <a:bodyPr wrap="square" rtlCol="0" anchor="ctr"/>
-          <a:lstStyle/>
-          <a:p>
-            <a:pPr indent="0" marL="0">
-              <a:buNone/>
-            </a:pPr>
-            <a:r>
-              <a:rPr lang="en-US" sz="1400" b="1" dirty="0">
-                <a:solidFill>
-                  <a:srgbClr val="1B2A4A"/>
-                </a:solidFill>
-                <a:latin typeface="Calibri" pitchFamily="34" charset="0"/>
-                <a:ea typeface="Calibri" pitchFamily="34" charset="-122"/>
-                <a:cs typeface="Calibri" pitchFamily="34" charset="-120"/>
-              </a:rPr>
-              <a:t>3. Hypothesise</a:t>
-            </a:r>
-            <a:endParaRPr lang="en-US" sz="1400" dirty="0"/>
-          </a:p>
-        </p:txBody>
-      </p:sp>
-      <p:sp>
-        <p:nvSpPr>
-          <p:cNvPr id="16" name="Text 14"/>
-          <p:cNvSpPr/>
-          <p:nvPr/>
-        </p:nvSpPr>
-        <p:spPr>
-          <a:xfrm>
-            <a:off x="6263640" y="1737360"/>
-            <a:ext cx="2286000" cy="1097280"/>
-          </a:xfrm>
-          <a:prstGeom prst="rect">
-            <a:avLst/>
-          </a:prstGeom>
-          <a:noFill/>
-          <a:ln/>
-        </p:spPr>
-        <p:txBody>
-          <a:bodyPr wrap="square" rtlCol="0" anchor="t"/>
-          <a:lstStyle/>
-          <a:p>
-            <a:pPr indent="0" marL="0">
-              <a:buNone/>
-            </a:pPr>
-            <a:r>
-              <a:rPr lang="en-US" sz="1100" dirty="0">
-                <a:solidFill>
-                  <a:srgbClr val="3D3A36"/>
-                </a:solidFill>
-                <a:latin typeface="Calibri" pitchFamily="34" charset="0"/>
-                <a:ea typeface="Calibri" pitchFamily="34" charset="-122"/>
-                <a:cs typeface="Calibri" pitchFamily="34" charset="-120"/>
-              </a:rPr>
-              <a:t>Make a prediction using 'If... then... because...' format. A hypothesis must be testable and falsifiable.</a:t>
-            </a:r>
-            <a:endParaRPr lang="en-US" sz="1100" dirty="0"/>
+              <a:t>The method is a cycle — new questions lead to new investigations.</a:t>
+            </a:r>
+            <a:endParaRPr lang="en-US" sz="1200" dirty="0"/>
           </a:p>
         </p:txBody>
       </p:sp>
@@ -2264,7 +3100,47 @@
         <p:spPr>
           <a:xfrm>
             <a:off x="0" y="0"/>
-            <a:ext cx="9144000" cy="54864"/>
+            <a:ext cx="9144000" cy="822960"/>
+          </a:xfrm>
+          <a:prstGeom prst="rect">
+            <a:avLst/>
+          </a:prstGeom>
+          <a:solidFill>
+            <a:srgbClr val="FFFFFF"/>
+          </a:solidFill>
+          <a:ln/>
+        </p:spPr>
+      </p:sp>
+      <p:sp>
+        <p:nvSpPr>
+          <p:cNvPr id="3" name="Shape 1"/>
+          <p:cNvSpPr/>
+          <p:nvPr/>
+        </p:nvSpPr>
+        <p:spPr>
+          <a:xfrm>
+            <a:off x="0" y="804672"/>
+            <a:ext cx="9144000" cy="27432"/>
+          </a:xfrm>
+          <a:prstGeom prst="rect">
+            <a:avLst/>
+          </a:prstGeom>
+          <a:solidFill>
+            <a:srgbClr val="E5E2DC"/>
+          </a:solidFill>
+          <a:ln/>
+        </p:spPr>
+      </p:sp>
+      <p:sp>
+        <p:nvSpPr>
+          <p:cNvPr id="4" name="Shape 2"/>
+          <p:cNvSpPr/>
+          <p:nvPr/>
+        </p:nvSpPr>
+        <p:spPr>
+          <a:xfrm>
+            <a:off x="548640" y="201168"/>
+            <a:ext cx="54864" cy="420624"/>
           </a:xfrm>
           <a:prstGeom prst="rect">
             <a:avLst/>
@@ -2277,14 +3153,14 @@
       </p:sp>
       <p:sp>
         <p:nvSpPr>
-          <p:cNvPr id="3" name="Text 1"/>
-          <p:cNvSpPr/>
-          <p:nvPr/>
-        </p:nvSpPr>
-        <p:spPr>
-          <a:xfrm>
-            <a:off x="7772400" y="4709160"/>
-            <a:ext cx="1097280" cy="320040"/>
+          <p:cNvPr id="5" name="Text 3"/>
+          <p:cNvSpPr/>
+          <p:nvPr/>
+        </p:nvSpPr>
+        <p:spPr>
+          <a:xfrm>
+            <a:off x="777240" y="137160"/>
+            <a:ext cx="7772400" cy="548640"/>
           </a:xfrm>
           <a:prstGeom prst="rect">
             <a:avLst/>
@@ -2293,53 +3169,14 @@
           <a:ln/>
         </p:spPr>
         <p:txBody>
-          <a:bodyPr wrap="square" rtlCol="0" anchor="ctr"/>
-          <a:lstStyle/>
-          <a:p>
-            <a:pPr algn="r" indent="0" marL="0">
-              <a:buNone/>
-            </a:pPr>
-            <a:r>
-              <a:rPr lang="en-US" sz="900" dirty="0">
-                <a:solidFill>
-                  <a:srgbClr val="6B6660"/>
-                </a:solidFill>
-                <a:latin typeface="Calibri" pitchFamily="34" charset="0"/>
-                <a:ea typeface="Calibri" pitchFamily="34" charset="-122"/>
-                <a:cs typeface="Calibri" pitchFamily="34" charset="-120"/>
-              </a:rPr>
-              <a:t>4 / 6</a:t>
-            </a:r>
-            <a:endParaRPr lang="en-US" sz="900" dirty="0"/>
-          </a:p>
-        </p:txBody>
-      </p:sp>
-      <p:sp>
-        <p:nvSpPr>
-          <p:cNvPr id="4" name="Text 2"/>
-          <p:cNvSpPr/>
-          <p:nvPr/>
-        </p:nvSpPr>
-        <p:spPr>
-          <a:xfrm>
-            <a:off x="457200" y="274320"/>
-            <a:ext cx="8229600" cy="640080"/>
-          </a:xfrm>
-          <a:prstGeom prst="rect">
-            <a:avLst/>
-          </a:prstGeom>
-          <a:noFill/>
-          <a:ln/>
-        </p:spPr>
-        <p:txBody>
-          <a:bodyPr wrap="square" rtlCol="0" anchor="ctr"/>
+          <a:bodyPr wrap="square" lIns="0" tIns="0" rIns="0" bIns="0" rtlCol="0" anchor="ctr"/>
           <a:lstStyle/>
           <a:p>
             <a:pPr indent="0" marL="0">
               <a:buNone/>
             </a:pPr>
             <a:r>
-              <a:rPr lang="en-US" sz="2600" b="1" dirty="0">
+              <a:rPr lang="en-US" sz="2000" b="1" dirty="0">
                 <a:solidFill>
                   <a:srgbClr val="1B2A4A"/>
                 </a:solidFill>
@@ -2347,22 +3184,22 @@
                 <a:ea typeface="Georgia" pitchFamily="34" charset="-122"/>
                 <a:cs typeface="Georgia" pitchFamily="34" charset="-120"/>
               </a:rPr>
-              <a:t>The Six Steps (continued)</a:t>
-            </a:r>
-            <a:endParaRPr lang="en-US" sz="2600" dirty="0"/>
-          </a:p>
-        </p:txBody>
-      </p:sp>
-      <p:sp>
-        <p:nvSpPr>
-          <p:cNvPr id="5" name="Shape 3"/>
-          <p:cNvSpPr/>
-          <p:nvPr/>
-        </p:nvSpPr>
-        <p:spPr>
-          <a:xfrm>
-            <a:off x="457200" y="1188720"/>
-            <a:ext cx="2560320" cy="1828800"/>
+              <a:t>Good vs Bad Hypotheses</a:t>
+            </a:r>
+            <a:endParaRPr lang="en-US" sz="2000" dirty="0"/>
+          </a:p>
+        </p:txBody>
+      </p:sp>
+      <p:sp>
+        <p:nvSpPr>
+          <p:cNvPr id="6" name="Shape 4"/>
+          <p:cNvSpPr/>
+          <p:nvPr/>
+        </p:nvSpPr>
+        <p:spPr>
+          <a:xfrm>
+            <a:off x="548640" y="1051560"/>
+            <a:ext cx="3840480" cy="3474720"/>
           </a:xfrm>
           <a:prstGeom prst="rect">
             <a:avLst/>
@@ -2370,12 +3207,7 @@
           <a:solidFill>
             <a:srgbClr val="FFFFFF"/>
           </a:solidFill>
-          <a:ln w="12700">
-            <a:solidFill>
-              <a:srgbClr val="E5E2DC"/>
-            </a:solidFill>
-            <a:prstDash val="solid"/>
-          </a:ln>
+          <a:ln/>
           <a:effectLst>
             <a:outerShdw sx="100000" sy="100000" kx="0" ky="0" algn="bl" rotWithShape="0" blurRad="50800" dist="25400" dir="8100000">
               <a:srgbClr val="000000">
@@ -2387,14 +3219,14 @@
       </p:sp>
       <p:sp>
         <p:nvSpPr>
-          <p:cNvPr id="6" name="Shape 4"/>
-          <p:cNvSpPr/>
-          <p:nvPr/>
-        </p:nvSpPr>
-        <p:spPr>
-          <a:xfrm>
-            <a:off x="457200" y="1188720"/>
-            <a:ext cx="2560320" cy="54864"/>
+          <p:cNvPr id="7" name="Shape 5"/>
+          <p:cNvSpPr/>
+          <p:nvPr/>
+        </p:nvSpPr>
+        <p:spPr>
+          <a:xfrm>
+            <a:off x="548640" y="1051560"/>
+            <a:ext cx="3840480" cy="54864"/>
           </a:xfrm>
           <a:prstGeom prst="rect">
             <a:avLst/>
@@ -2407,14 +3239,14 @@
       </p:sp>
       <p:sp>
         <p:nvSpPr>
-          <p:cNvPr id="7" name="Text 5"/>
-          <p:cNvSpPr/>
-          <p:nvPr/>
-        </p:nvSpPr>
-        <p:spPr>
-          <a:xfrm>
-            <a:off x="594360" y="1325880"/>
-            <a:ext cx="2286000" cy="365760"/>
+          <p:cNvPr id="8" name="Text 6"/>
+          <p:cNvSpPr/>
+          <p:nvPr/>
+        </p:nvSpPr>
+        <p:spPr>
+          <a:xfrm>
+            <a:off x="777240" y="1188720"/>
+            <a:ext cx="3383280" cy="457200"/>
           </a:xfrm>
           <a:prstGeom prst="rect">
             <a:avLst/>
@@ -2423,53 +3255,78 @@
           <a:ln/>
         </p:spPr>
         <p:txBody>
-          <a:bodyPr wrap="square" rtlCol="0" anchor="ctr"/>
+          <a:bodyPr wrap="square" lIns="0" tIns="0" rIns="0" bIns="0" rtlCol="0" anchor="ctr"/>
           <a:lstStyle/>
           <a:p>
             <a:pPr indent="0" marL="0">
               <a:buNone/>
             </a:pPr>
             <a:r>
-              <a:rPr lang="en-US" sz="1400" b="1" dirty="0">
+              <a:rPr lang="en-US" sz="1500" b="1" dirty="0">
                 <a:solidFill>
                   <a:srgbClr val="1B2A4A"/>
+                </a:solidFill>
+                <a:latin typeface="Georgia" pitchFamily="34" charset="0"/>
+                <a:ea typeface="Georgia" pitchFamily="34" charset="-122"/>
+                <a:cs typeface="Georgia" pitchFamily="34" charset="-120"/>
+              </a:rPr>
+              <a:t>Good Hypothesis</a:t>
+            </a:r>
+            <a:endParaRPr lang="en-US" sz="1500" dirty="0"/>
+          </a:p>
+        </p:txBody>
+      </p:sp>
+      <p:sp>
+        <p:nvSpPr>
+          <p:cNvPr id="9" name="Text 7"/>
+          <p:cNvSpPr/>
+          <p:nvPr/>
+        </p:nvSpPr>
+        <p:spPr>
+          <a:xfrm>
+            <a:off x="777240" y="1691640"/>
+            <a:ext cx="3383280" cy="2651760"/>
+          </a:xfrm>
+          <a:prstGeom prst="rect">
+            <a:avLst/>
+          </a:prstGeom>
+          <a:noFill/>
+          <a:ln/>
+        </p:spPr>
+        <p:txBody>
+          <a:bodyPr wrap="square" rtlCol="0" anchor="t"/>
+          <a:lstStyle/>
+          <a:p>
+            <a:pPr marL="342900" indent="-342900">
+              <a:spcAft>
+                <a:spcPts val="600"/>
+              </a:spcAft>
+              <a:buSzPct val="100000"/>
+              <a:buChar char="•"/>
+            </a:pPr>
+            <a:r>
+              <a:rPr lang="en-US" sz="1300" dirty="0">
+                <a:solidFill>
+                  <a:srgbClr val="3D3A36"/>
                 </a:solidFill>
                 <a:latin typeface="Calibri" pitchFamily="34" charset="0"/>
                 <a:ea typeface="Calibri" pitchFamily="34" charset="-122"/>
                 <a:cs typeface="Calibri" pitchFamily="34" charset="-120"/>
               </a:rPr>
-              <a:t>4. Experiment</a:t>
-            </a:r>
-            <a:endParaRPr lang="en-US" sz="1400" dirty="0"/>
-          </a:p>
-        </p:txBody>
-      </p:sp>
-      <p:sp>
-        <p:nvSpPr>
-          <p:cNvPr id="8" name="Text 6"/>
-          <p:cNvSpPr/>
-          <p:nvPr/>
-        </p:nvSpPr>
-        <p:spPr>
-          <a:xfrm>
-            <a:off x="594360" y="1737360"/>
-            <a:ext cx="2286000" cy="1097280"/>
-          </a:xfrm>
-          <a:prstGeom prst="rect">
-            <a:avLst/>
-          </a:prstGeom>
-          <a:noFill/>
-          <a:ln/>
-        </p:spPr>
-        <p:txBody>
-          <a:bodyPr wrap="square" rtlCol="0" anchor="t"/>
-          <a:lstStyle/>
-          <a:p>
-            <a:pPr indent="0" marL="0">
-              <a:buNone/>
-            </a:pPr>
-            <a:r>
-              <a:rPr lang="en-US" sz="1100" dirty="0">
+              <a:t>Specific and testable</a:t>
+            </a:r>
+            <a:endParaRPr lang="en-US" sz="1300" dirty="0"/>
+          </a:p>
+          <a:p>
+            <a:pPr marL="342900" indent="-342900">
+              <a:spcAft>
+                <a:spcPts val="600"/>
+              </a:spcAft>
+              <a:buSzPct val="100000"/>
+              <a:buChar char="•"/>
+            </a:pPr>
+            <a:r>
+              <a:rPr lang="en-US" sz="1300" dirty="0">
                 <a:solidFill>
                   <a:srgbClr val="3D3A36"/>
                 </a:solidFill>
@@ -2477,22 +3334,64 @@
                 <a:ea typeface="Calibri" pitchFamily="34" charset="-122"/>
                 <a:cs typeface="Calibri" pitchFamily="34" charset="-120"/>
               </a:rPr>
-              <a:t>Design a fair test. Change only ONE variable (independent). Measure the outcome (dependent). Keep everything else the same (controlled).</a:t>
-            </a:r>
-            <a:endParaRPr lang="en-US" sz="1100" dirty="0"/>
-          </a:p>
-        </p:txBody>
-      </p:sp>
-      <p:sp>
-        <p:nvSpPr>
-          <p:cNvPr id="9" name="Shape 7"/>
-          <p:cNvSpPr/>
-          <p:nvPr/>
-        </p:nvSpPr>
-        <p:spPr>
-          <a:xfrm>
-            <a:off x="3291840" y="1188720"/>
-            <a:ext cx="2560320" cy="1828800"/>
+              <a:t>'If I add more fertiliser, the plant will grow taller'</a:t>
+            </a:r>
+            <a:endParaRPr lang="en-US" sz="1300" dirty="0"/>
+          </a:p>
+          <a:p>
+            <a:pPr marL="342900" indent="-342900">
+              <a:spcAft>
+                <a:spcPts val="600"/>
+              </a:spcAft>
+              <a:buSzPct val="100000"/>
+              <a:buChar char="•"/>
+            </a:pPr>
+            <a:r>
+              <a:rPr lang="en-US" sz="1300" dirty="0">
+                <a:solidFill>
+                  <a:srgbClr val="3D3A36"/>
+                </a:solidFill>
+                <a:latin typeface="Calibri" pitchFamily="34" charset="0"/>
+                <a:ea typeface="Calibri" pitchFamily="34" charset="-122"/>
+                <a:cs typeface="Calibri" pitchFamily="34" charset="-120"/>
+              </a:rPr>
+              <a:t>States WHAT you will change and WHAT you will measure</a:t>
+            </a:r>
+            <a:endParaRPr lang="en-US" sz="1300" dirty="0"/>
+          </a:p>
+          <a:p>
+            <a:pPr marL="342900" indent="-342900">
+              <a:spcAft>
+                <a:spcPts val="600"/>
+              </a:spcAft>
+              <a:buSzPct val="100000"/>
+              <a:buChar char="•"/>
+            </a:pPr>
+            <a:r>
+              <a:rPr lang="en-US" sz="1300" dirty="0">
+                <a:solidFill>
+                  <a:srgbClr val="3D3A36"/>
+                </a:solidFill>
+                <a:latin typeface="Calibri" pitchFamily="34" charset="0"/>
+                <a:ea typeface="Calibri" pitchFamily="34" charset="-122"/>
+                <a:cs typeface="Calibri" pitchFamily="34" charset="-120"/>
+              </a:rPr>
+              <a:t>Can be proven right OR wrong</a:t>
+            </a:r>
+            <a:endParaRPr lang="en-US" sz="1300" dirty="0"/>
+          </a:p>
+        </p:txBody>
+      </p:sp>
+      <p:sp>
+        <p:nvSpPr>
+          <p:cNvPr id="10" name="Shape 8"/>
+          <p:cNvSpPr/>
+          <p:nvPr/>
+        </p:nvSpPr>
+        <p:spPr>
+          <a:xfrm>
+            <a:off x="4754880" y="1051560"/>
+            <a:ext cx="3840480" cy="3474720"/>
           </a:xfrm>
           <a:prstGeom prst="rect">
             <a:avLst/>
@@ -2500,12 +3399,7 @@
           <a:solidFill>
             <a:srgbClr val="FFFFFF"/>
           </a:solidFill>
-          <a:ln w="12700">
-            <a:solidFill>
-              <a:srgbClr val="E5E2DC"/>
-            </a:solidFill>
-            <a:prstDash val="solid"/>
-          </a:ln>
+          <a:ln/>
           <a:effectLst>
             <a:outerShdw sx="100000" sy="100000" kx="0" ky="0" algn="bl" rotWithShape="0" blurRad="50800" dist="25400" dir="8100000">
               <a:srgbClr val="000000">
@@ -2517,34 +3411,34 @@
       </p:sp>
       <p:sp>
         <p:nvSpPr>
-          <p:cNvPr id="10" name="Shape 8"/>
-          <p:cNvSpPr/>
-          <p:nvPr/>
-        </p:nvSpPr>
-        <p:spPr>
-          <a:xfrm>
-            <a:off x="3291840" y="1188720"/>
-            <a:ext cx="2560320" cy="54864"/>
-          </a:xfrm>
-          <a:prstGeom prst="rect">
-            <a:avLst/>
-          </a:prstGeom>
-          <a:solidFill>
-            <a:srgbClr val="2A9D8F"/>
-          </a:solidFill>
-          <a:ln/>
-        </p:spPr>
-      </p:sp>
-      <p:sp>
-        <p:nvSpPr>
-          <p:cNvPr id="11" name="Text 9"/>
-          <p:cNvSpPr/>
-          <p:nvPr/>
-        </p:nvSpPr>
-        <p:spPr>
-          <a:xfrm>
-            <a:off x="3429000" y="1325880"/>
-            <a:ext cx="2286000" cy="365760"/>
+          <p:cNvPr id="11" name="Shape 9"/>
+          <p:cNvSpPr/>
+          <p:nvPr/>
+        </p:nvSpPr>
+        <p:spPr>
+          <a:xfrm>
+            <a:off x="4754880" y="1051560"/>
+            <a:ext cx="3840480" cy="54864"/>
+          </a:xfrm>
+          <a:prstGeom prst="rect">
+            <a:avLst/>
+          </a:prstGeom>
+          <a:solidFill>
+            <a:srgbClr val="E9C46A"/>
+          </a:solidFill>
+          <a:ln/>
+        </p:spPr>
+      </p:sp>
+      <p:sp>
+        <p:nvSpPr>
+          <p:cNvPr id="12" name="Text 10"/>
+          <p:cNvSpPr/>
+          <p:nvPr/>
+        </p:nvSpPr>
+        <p:spPr>
+          <a:xfrm>
+            <a:off x="4983480" y="1188720"/>
+            <a:ext cx="3383280" cy="457200"/>
           </a:xfrm>
           <a:prstGeom prst="rect">
             <a:avLst/>
@@ -2553,53 +3447,78 @@
           <a:ln/>
         </p:spPr>
         <p:txBody>
-          <a:bodyPr wrap="square" rtlCol="0" anchor="ctr"/>
+          <a:bodyPr wrap="square" lIns="0" tIns="0" rIns="0" bIns="0" rtlCol="0" anchor="ctr"/>
           <a:lstStyle/>
           <a:p>
             <a:pPr indent="0" marL="0">
               <a:buNone/>
             </a:pPr>
             <a:r>
-              <a:rPr lang="en-US" sz="1400" b="1" dirty="0">
+              <a:rPr lang="en-US" sz="1500" b="1" dirty="0">
                 <a:solidFill>
                   <a:srgbClr val="1B2A4A"/>
+                </a:solidFill>
+                <a:latin typeface="Georgia" pitchFamily="34" charset="0"/>
+                <a:ea typeface="Georgia" pitchFamily="34" charset="-122"/>
+                <a:cs typeface="Georgia" pitchFamily="34" charset="-120"/>
+              </a:rPr>
+              <a:t>Bad Hypothesis</a:t>
+            </a:r>
+            <a:endParaRPr lang="en-US" sz="1500" dirty="0"/>
+          </a:p>
+        </p:txBody>
+      </p:sp>
+      <p:sp>
+        <p:nvSpPr>
+          <p:cNvPr id="13" name="Text 11"/>
+          <p:cNvSpPr/>
+          <p:nvPr/>
+        </p:nvSpPr>
+        <p:spPr>
+          <a:xfrm>
+            <a:off x="4983480" y="1691640"/>
+            <a:ext cx="3383280" cy="2651760"/>
+          </a:xfrm>
+          <a:prstGeom prst="rect">
+            <a:avLst/>
+          </a:prstGeom>
+          <a:noFill/>
+          <a:ln/>
+        </p:spPr>
+        <p:txBody>
+          <a:bodyPr wrap="square" rtlCol="0" anchor="t"/>
+          <a:lstStyle/>
+          <a:p>
+            <a:pPr marL="342900" indent="-342900">
+              <a:spcAft>
+                <a:spcPts val="600"/>
+              </a:spcAft>
+              <a:buSzPct val="100000"/>
+              <a:buChar char="•"/>
+            </a:pPr>
+            <a:r>
+              <a:rPr lang="en-US" sz="1300" dirty="0">
+                <a:solidFill>
+                  <a:srgbClr val="3D3A36"/>
                 </a:solidFill>
                 <a:latin typeface="Calibri" pitchFamily="34" charset="0"/>
                 <a:ea typeface="Calibri" pitchFamily="34" charset="-122"/>
                 <a:cs typeface="Calibri" pitchFamily="34" charset="-120"/>
               </a:rPr>
-              <a:t>5. Analyse</a:t>
-            </a:r>
-            <a:endParaRPr lang="en-US" sz="1400" dirty="0"/>
-          </a:p>
-        </p:txBody>
-      </p:sp>
-      <p:sp>
-        <p:nvSpPr>
-          <p:cNvPr id="12" name="Text 10"/>
-          <p:cNvSpPr/>
-          <p:nvPr/>
-        </p:nvSpPr>
-        <p:spPr>
-          <a:xfrm>
-            <a:off x="3429000" y="1737360"/>
-            <a:ext cx="2286000" cy="1097280"/>
-          </a:xfrm>
-          <a:prstGeom prst="rect">
-            <a:avLst/>
-          </a:prstGeom>
-          <a:noFill/>
-          <a:ln/>
-        </p:spPr>
-        <p:txBody>
-          <a:bodyPr wrap="square" rtlCol="0" anchor="t"/>
-          <a:lstStyle/>
-          <a:p>
-            <a:pPr indent="0" marL="0">
-              <a:buNone/>
-            </a:pPr>
-            <a:r>
-              <a:rPr lang="en-US" sz="1100" dirty="0">
+              <a:t>Too vague or impossible to test</a:t>
+            </a:r>
+            <a:endParaRPr lang="en-US" sz="1300" dirty="0"/>
+          </a:p>
+          <a:p>
+            <a:pPr marL="342900" indent="-342900">
+              <a:spcAft>
+                <a:spcPts val="600"/>
+              </a:spcAft>
+              <a:buSzPct val="100000"/>
+              <a:buChar char="•"/>
+            </a:pPr>
+            <a:r>
+              <a:rPr lang="en-US" sz="1300" dirty="0">
                 <a:solidFill>
                   <a:srgbClr val="3D3A36"/>
                 </a:solidFill>
@@ -2607,129 +3526,41 @@
                 <a:ea typeface="Calibri" pitchFamily="34" charset="-122"/>
                 <a:cs typeface="Calibri" pitchFamily="34" charset="-120"/>
               </a:rPr>
-              <a:t>Collect data in tables. Create graphs. Look for patterns. Calculate averages for reliability.</a:t>
-            </a:r>
-            <a:endParaRPr lang="en-US" sz="1100" dirty="0"/>
-          </a:p>
-        </p:txBody>
-      </p:sp>
-      <p:sp>
-        <p:nvSpPr>
-          <p:cNvPr id="13" name="Shape 11"/>
-          <p:cNvSpPr/>
-          <p:nvPr/>
-        </p:nvSpPr>
-        <p:spPr>
-          <a:xfrm>
-            <a:off x="6126480" y="1188720"/>
-            <a:ext cx="2560320" cy="1828800"/>
-          </a:xfrm>
-          <a:prstGeom prst="rect">
-            <a:avLst/>
-          </a:prstGeom>
-          <a:solidFill>
-            <a:srgbClr val="FFFFFF"/>
-          </a:solidFill>
-          <a:ln w="12700">
-            <a:solidFill>
-              <a:srgbClr val="E5E2DC"/>
-            </a:solidFill>
-            <a:prstDash val="solid"/>
-          </a:ln>
-          <a:effectLst>
-            <a:outerShdw sx="100000" sy="100000" kx="0" ky="0" algn="bl" rotWithShape="0" blurRad="50800" dist="25400" dir="8100000">
-              <a:srgbClr val="000000">
-                <a:alpha val="10000"/>
-              </a:srgbClr>
-            </a:outerShdw>
-          </a:effectLst>
-        </p:spPr>
-      </p:sp>
-      <p:sp>
-        <p:nvSpPr>
-          <p:cNvPr id="14" name="Shape 12"/>
-          <p:cNvSpPr/>
-          <p:nvPr/>
-        </p:nvSpPr>
-        <p:spPr>
-          <a:xfrm>
-            <a:off x="6126480" y="1188720"/>
-            <a:ext cx="2560320" cy="54864"/>
-          </a:xfrm>
-          <a:prstGeom prst="rect">
-            <a:avLst/>
-          </a:prstGeom>
-          <a:solidFill>
-            <a:srgbClr val="2A9D8F"/>
-          </a:solidFill>
-          <a:ln/>
-        </p:spPr>
-      </p:sp>
-      <p:sp>
-        <p:nvSpPr>
-          <p:cNvPr id="15" name="Text 13"/>
-          <p:cNvSpPr/>
-          <p:nvPr/>
-        </p:nvSpPr>
-        <p:spPr>
-          <a:xfrm>
-            <a:off x="6263640" y="1325880"/>
-            <a:ext cx="2286000" cy="365760"/>
-          </a:xfrm>
-          <a:prstGeom prst="rect">
-            <a:avLst/>
-          </a:prstGeom>
-          <a:noFill/>
-          <a:ln/>
-        </p:spPr>
-        <p:txBody>
-          <a:bodyPr wrap="square" rtlCol="0" anchor="ctr"/>
-          <a:lstStyle/>
-          <a:p>
-            <a:pPr indent="0" marL="0">
-              <a:buNone/>
-            </a:pPr>
-            <a:r>
-              <a:rPr lang="en-US" sz="1400" b="1" dirty="0">
-                <a:solidFill>
-                  <a:srgbClr val="1B2A4A"/>
+              <a:t>'Plants are nice'</a:t>
+            </a:r>
+            <a:endParaRPr lang="en-US" sz="1300" dirty="0"/>
+          </a:p>
+          <a:p>
+            <a:pPr marL="342900" indent="-342900">
+              <a:spcAft>
+                <a:spcPts val="600"/>
+              </a:spcAft>
+              <a:buSzPct val="100000"/>
+              <a:buChar char="•"/>
+            </a:pPr>
+            <a:r>
+              <a:rPr lang="en-US" sz="1300" dirty="0">
+                <a:solidFill>
+                  <a:srgbClr val="3D3A36"/>
                 </a:solidFill>
                 <a:latin typeface="Calibri" pitchFamily="34" charset="0"/>
                 <a:ea typeface="Calibri" pitchFamily="34" charset="-122"/>
                 <a:cs typeface="Calibri" pitchFamily="34" charset="-120"/>
               </a:rPr>
-              <a:t>6. Conclude</a:t>
-            </a:r>
-            <a:endParaRPr lang="en-US" sz="1400" dirty="0"/>
-          </a:p>
-        </p:txBody>
-      </p:sp>
-      <p:sp>
-        <p:nvSpPr>
-          <p:cNvPr id="16" name="Text 14"/>
-          <p:cNvSpPr/>
-          <p:nvPr/>
-        </p:nvSpPr>
-        <p:spPr>
-          <a:xfrm>
-            <a:off x="6263640" y="1737360"/>
-            <a:ext cx="2286000" cy="1097280"/>
-          </a:xfrm>
-          <a:prstGeom prst="rect">
-            <a:avLst/>
-          </a:prstGeom>
-          <a:noFill/>
-          <a:ln/>
-        </p:spPr>
-        <p:txBody>
-          <a:bodyPr wrap="square" rtlCol="0" anchor="t"/>
-          <a:lstStyle/>
-          <a:p>
-            <a:pPr indent="0" marL="0">
-              <a:buNone/>
-            </a:pPr>
-            <a:r>
-              <a:rPr lang="en-US" sz="1100" dirty="0">
+              <a:t>Does not say what will change or be measured</a:t>
+            </a:r>
+            <a:endParaRPr lang="en-US" sz="1300" dirty="0"/>
+          </a:p>
+          <a:p>
+            <a:pPr marL="342900" indent="-342900">
+              <a:spcAft>
+                <a:spcPts val="600"/>
+              </a:spcAft>
+              <a:buSzPct val="100000"/>
+              <a:buChar char="•"/>
+            </a:pPr>
+            <a:r>
+              <a:rPr lang="en-US" sz="1300" dirty="0">
                 <a:solidFill>
                   <a:srgbClr val="3D3A36"/>
                 </a:solidFill>
@@ -2737,9 +3568,9 @@
                 <a:ea typeface="Calibri" pitchFamily="34" charset="-122"/>
                 <a:cs typeface="Calibri" pitchFamily="34" charset="-120"/>
               </a:rPr>
-              <a:t>Did your results support your hypothesis? Explain WHY. Suggest improvements for next time.</a:t>
-            </a:r>
-            <a:endParaRPr lang="en-US" sz="1100" dirty="0"/>
+              <a:t>Cannot be tested with an experiment</a:t>
+            </a:r>
+            <a:endParaRPr lang="en-US" sz="1300" dirty="0"/>
           </a:p>
         </p:txBody>
       </p:sp>
@@ -2784,7 +3615,47 @@
         <p:spPr>
           <a:xfrm>
             <a:off x="0" y="0"/>
-            <a:ext cx="9144000" cy="54864"/>
+            <a:ext cx="9144000" cy="822960"/>
+          </a:xfrm>
+          <a:prstGeom prst="rect">
+            <a:avLst/>
+          </a:prstGeom>
+          <a:solidFill>
+            <a:srgbClr val="FFFFFF"/>
+          </a:solidFill>
+          <a:ln/>
+        </p:spPr>
+      </p:sp>
+      <p:sp>
+        <p:nvSpPr>
+          <p:cNvPr id="3" name="Shape 1"/>
+          <p:cNvSpPr/>
+          <p:nvPr/>
+        </p:nvSpPr>
+        <p:spPr>
+          <a:xfrm>
+            <a:off x="0" y="804672"/>
+            <a:ext cx="9144000" cy="27432"/>
+          </a:xfrm>
+          <a:prstGeom prst="rect">
+            <a:avLst/>
+          </a:prstGeom>
+          <a:solidFill>
+            <a:srgbClr val="E5E2DC"/>
+          </a:solidFill>
+          <a:ln/>
+        </p:spPr>
+      </p:sp>
+      <p:sp>
+        <p:nvSpPr>
+          <p:cNvPr id="4" name="Shape 2"/>
+          <p:cNvSpPr/>
+          <p:nvPr/>
+        </p:nvSpPr>
+        <p:spPr>
+          <a:xfrm>
+            <a:off x="548640" y="201168"/>
+            <a:ext cx="54864" cy="420624"/>
           </a:xfrm>
           <a:prstGeom prst="rect">
             <a:avLst/>
@@ -2797,14 +3668,14 @@
       </p:sp>
       <p:sp>
         <p:nvSpPr>
-          <p:cNvPr id="3" name="Text 1"/>
-          <p:cNvSpPr/>
-          <p:nvPr/>
-        </p:nvSpPr>
-        <p:spPr>
-          <a:xfrm>
-            <a:off x="7772400" y="4709160"/>
-            <a:ext cx="1097280" cy="320040"/>
+          <p:cNvPr id="5" name="Text 3"/>
+          <p:cNvSpPr/>
+          <p:nvPr/>
+        </p:nvSpPr>
+        <p:spPr>
+          <a:xfrm>
+            <a:off x="777240" y="137160"/>
+            <a:ext cx="7772400" cy="548640"/>
           </a:xfrm>
           <a:prstGeom prst="rect">
             <a:avLst/>
@@ -2813,96 +3684,78 @@
           <a:ln/>
         </p:spPr>
         <p:txBody>
-          <a:bodyPr wrap="square" rtlCol="0" anchor="ctr"/>
-          <a:lstStyle/>
-          <a:p>
-            <a:pPr algn="r" indent="0" marL="0">
+          <a:bodyPr wrap="square" lIns="0" tIns="0" rIns="0" bIns="0" rtlCol="0" anchor="ctr"/>
+          <a:lstStyle/>
+          <a:p>
+            <a:pPr indent="0" marL="0">
               <a:buNone/>
             </a:pPr>
             <a:r>
-              <a:rPr lang="en-US" sz="900" dirty="0">
-                <a:solidFill>
-                  <a:srgbClr val="6B6660"/>
+              <a:rPr lang="en-US" sz="2000" b="1" dirty="0">
+                <a:solidFill>
+                  <a:srgbClr val="1B2A4A"/>
+                </a:solidFill>
+                <a:latin typeface="Georgia" pitchFamily="34" charset="0"/>
+                <a:ea typeface="Georgia" pitchFamily="34" charset="-122"/>
+                <a:cs typeface="Georgia" pitchFamily="34" charset="-120"/>
+              </a:rPr>
+              <a:t>Writing a Method</a:t>
+            </a:r>
+            <a:endParaRPr lang="en-US" sz="2000" dirty="0"/>
+          </a:p>
+        </p:txBody>
+      </p:sp>
+      <p:sp>
+        <p:nvSpPr>
+          <p:cNvPr id="6" name="Text 4"/>
+          <p:cNvSpPr/>
+          <p:nvPr/>
+        </p:nvSpPr>
+        <p:spPr>
+          <a:xfrm>
+            <a:off x="731520" y="1051560"/>
+            <a:ext cx="7680960" cy="3108960"/>
+          </a:xfrm>
+          <a:prstGeom prst="rect">
+            <a:avLst/>
+          </a:prstGeom>
+          <a:noFill/>
+          <a:ln/>
+        </p:spPr>
+        <p:txBody>
+          <a:bodyPr wrap="square" rtlCol="0" anchor="t"/>
+          <a:lstStyle/>
+          <a:p>
+            <a:pPr marL="342900" indent="-342900">
+              <a:spcAft>
+                <a:spcPts val="800"/>
+              </a:spcAft>
+              <a:buSzPct val="100000"/>
+              <a:buChar char="•"/>
+            </a:pPr>
+            <a:r>
+              <a:rPr lang="en-US" sz="1500" dirty="0">
+                <a:solidFill>
+                  <a:srgbClr val="3D3A36"/>
                 </a:solidFill>
                 <a:latin typeface="Calibri" pitchFamily="34" charset="0"/>
                 <a:ea typeface="Calibri" pitchFamily="34" charset="-122"/>
                 <a:cs typeface="Calibri" pitchFamily="34" charset="-120"/>
               </a:rPr>
-              <a:t>5 / 6</a:t>
-            </a:r>
-            <a:endParaRPr lang="en-US" sz="900" dirty="0"/>
-          </a:p>
-        </p:txBody>
-      </p:sp>
-      <p:sp>
-        <p:nvSpPr>
-          <p:cNvPr id="4" name="Text 2"/>
-          <p:cNvSpPr/>
-          <p:nvPr/>
-        </p:nvSpPr>
-        <p:spPr>
-          <a:xfrm>
-            <a:off x="457200" y="274320"/>
-            <a:ext cx="8229600" cy="640080"/>
-          </a:xfrm>
-          <a:prstGeom prst="rect">
-            <a:avLst/>
-          </a:prstGeom>
-          <a:noFill/>
-          <a:ln/>
-        </p:spPr>
-        <p:txBody>
-          <a:bodyPr wrap="square" rtlCol="0" anchor="ctr"/>
-          <a:lstStyle/>
-          <a:p>
-            <a:pPr indent="0" marL="0">
-              <a:buNone/>
-            </a:pPr>
-            <a:r>
-              <a:rPr lang="en-US" sz="2600" b="1" dirty="0">
-                <a:solidFill>
-                  <a:srgbClr val="1B2A4A"/>
-                </a:solidFill>
-                <a:latin typeface="Georgia" pitchFamily="34" charset="0"/>
-                <a:ea typeface="Georgia" pitchFamily="34" charset="-122"/>
-                <a:cs typeface="Georgia" pitchFamily="34" charset="-120"/>
-              </a:rPr>
-              <a:t>Hypothesis vs Prediction</a:t>
-            </a:r>
-            <a:endParaRPr lang="en-US" sz="2600" dirty="0"/>
-          </a:p>
-        </p:txBody>
-      </p:sp>
-      <p:sp>
-        <p:nvSpPr>
-          <p:cNvPr id="5" name="Text 3"/>
-          <p:cNvSpPr/>
-          <p:nvPr/>
-        </p:nvSpPr>
-        <p:spPr>
-          <a:xfrm>
-            <a:off x="457200" y="1188720"/>
-            <a:ext cx="3840480" cy="3474720"/>
-          </a:xfrm>
-          <a:prstGeom prst="rect">
-            <a:avLst/>
-          </a:prstGeom>
-          <a:noFill/>
-          <a:ln/>
-        </p:spPr>
-        <p:txBody>
-          <a:bodyPr wrap="square" rtlCol="0" anchor="t"/>
-          <a:lstStyle/>
+              <a:t>Write numbered steps that someone else could follow.</a:t>
+            </a:r>
+            <a:endParaRPr lang="en-US" sz="1500" dirty="0"/>
+          </a:p>
           <a:p>
             <a:pPr marL="342900" indent="-342900">
               <a:spcAft>
-                <a:spcPts val="600"/>
+                <a:spcPts val="800"/>
               </a:spcAft>
               <a:buSzPct val="100000"/>
               <a:buChar char="•"/>
             </a:pPr>
             <a:r>
-              <a:rPr lang="en-US" sz="1400" dirty="0">
+              <a:rPr lang="en-US" sz="1500" dirty="0">
                 <a:solidFill>
                   <a:srgbClr val="3D3A36"/>
                 </a:solidFill>
@@ -2910,20 +3763,20 @@
                 <a:ea typeface="Calibri" pitchFamily="34" charset="-122"/>
                 <a:cs typeface="Calibri" pitchFamily="34" charset="-120"/>
               </a:rPr>
-              <a:t>A hypothesis explains WHY something happens</a:t>
-            </a:r>
-            <a:endParaRPr lang="en-US" sz="1400" dirty="0"/>
+              <a:t>Include equipment needed and quantities.</a:t>
+            </a:r>
+            <a:endParaRPr lang="en-US" sz="1500" dirty="0"/>
           </a:p>
           <a:p>
             <a:pPr marL="342900" indent="-342900">
               <a:spcAft>
-                <a:spcPts val="600"/>
+                <a:spcPts val="800"/>
               </a:spcAft>
               <a:buSzPct val="100000"/>
               <a:buChar char="•"/>
             </a:pPr>
             <a:r>
-              <a:rPr lang="en-US" sz="1400" dirty="0">
+              <a:rPr lang="en-US" sz="1500" dirty="0">
                 <a:solidFill>
                   <a:srgbClr val="3D3A36"/>
                 </a:solidFill>
@@ -2931,20 +3784,20 @@
                 <a:ea typeface="Calibri" pitchFamily="34" charset="-122"/>
                 <a:cs typeface="Calibri" pitchFamily="34" charset="-120"/>
               </a:rPr>
-              <a:t>It is based on existing knowledge</a:t>
-            </a:r>
-            <a:endParaRPr lang="en-US" sz="1400" dirty="0"/>
+              <a:t>State what you will change (independent variable).</a:t>
+            </a:r>
+            <a:endParaRPr lang="en-US" sz="1500" dirty="0"/>
           </a:p>
           <a:p>
             <a:pPr marL="342900" indent="-342900">
               <a:spcAft>
-                <a:spcPts val="600"/>
+                <a:spcPts val="800"/>
               </a:spcAft>
               <a:buSzPct val="100000"/>
               <a:buChar char="•"/>
             </a:pPr>
             <a:r>
-              <a:rPr lang="en-US" sz="1400" dirty="0">
+              <a:rPr lang="en-US" sz="1500" dirty="0">
                 <a:solidFill>
                   <a:srgbClr val="3D3A36"/>
                 </a:solidFill>
@@ -2952,20 +3805,20 @@
                 <a:ea typeface="Calibri" pitchFamily="34" charset="-122"/>
                 <a:cs typeface="Calibri" pitchFamily="34" charset="-120"/>
               </a:rPr>
-              <a:t>Example: 'Plants need sunlight for photosynthesis, so more light should increase growth'</a:t>
-            </a:r>
-            <a:endParaRPr lang="en-US" sz="1400" dirty="0"/>
+              <a:t>State what you will measure (dependent variable).</a:t>
+            </a:r>
+            <a:endParaRPr lang="en-US" sz="1500" dirty="0"/>
           </a:p>
           <a:p>
             <a:pPr marL="342900" indent="-342900">
               <a:spcAft>
-                <a:spcPts val="600"/>
+                <a:spcPts val="800"/>
               </a:spcAft>
               <a:buSzPct val="100000"/>
               <a:buChar char="•"/>
             </a:pPr>
             <a:r>
-              <a:rPr lang="en-US" sz="1400" dirty="0">
+              <a:rPr lang="en-US" sz="1500" dirty="0">
                 <a:solidFill>
                   <a:srgbClr val="3D3A36"/>
                 </a:solidFill>
@@ -2973,20 +3826,20 @@
                 <a:ea typeface="Calibri" pitchFamily="34" charset="-122"/>
                 <a:cs typeface="Calibri" pitchFamily="34" charset="-120"/>
               </a:rPr>
-              <a:t>A prediction states WHAT you expect to observe</a:t>
-            </a:r>
-            <a:endParaRPr lang="en-US" sz="1400" dirty="0"/>
+              <a:t>State what you will keep the same (controlled variables).</a:t>
+            </a:r>
+            <a:endParaRPr lang="en-US" sz="1500" dirty="0"/>
           </a:p>
           <a:p>
             <a:pPr marL="342900" indent="-342900">
               <a:spcAft>
-                <a:spcPts val="600"/>
+                <a:spcPts val="800"/>
               </a:spcAft>
               <a:buSzPct val="100000"/>
               <a:buChar char="•"/>
             </a:pPr>
             <a:r>
-              <a:rPr lang="en-US" sz="1400" dirty="0">
+              <a:rPr lang="en-US" sz="1500" dirty="0">
                 <a:solidFill>
                   <a:srgbClr val="3D3A36"/>
                 </a:solidFill>
@@ -2994,35 +3847,30 @@
                 <a:ea typeface="Calibri" pitchFamily="34" charset="-122"/>
                 <a:cs typeface="Calibri" pitchFamily="34" charset="-120"/>
               </a:rPr>
-              <a:t>Example: 'If I increase sunlight, then the plant will grow taller'</a:t>
-            </a:r>
-            <a:endParaRPr lang="en-US" sz="1400" dirty="0"/>
-          </a:p>
-        </p:txBody>
-      </p:sp>
-      <p:sp>
-        <p:nvSpPr>
-          <p:cNvPr id="6" name="Shape 4"/>
-          <p:cNvSpPr/>
-          <p:nvPr/>
-        </p:nvSpPr>
-        <p:spPr>
-          <a:xfrm>
-            <a:off x="4846320" y="1188720"/>
-            <a:ext cx="3840480" cy="3474720"/>
-          </a:xfrm>
-          <a:prstGeom prst="rect">
-            <a:avLst/>
-          </a:prstGeom>
-          <a:solidFill>
-            <a:srgbClr val="FFFFFF"/>
-          </a:solidFill>
-          <a:ln w="12700">
-            <a:solidFill>
-              <a:srgbClr val="E5E2DC"/>
-            </a:solidFill>
-            <a:prstDash val="solid"/>
-          </a:ln>
+              <a:t>Include how many times you will repeat the experiment.</a:t>
+            </a:r>
+            <a:endParaRPr lang="en-US" sz="1500" dirty="0"/>
+          </a:p>
+        </p:txBody>
+      </p:sp>
+      <p:sp>
+        <p:nvSpPr>
+          <p:cNvPr id="7" name="Shape 5"/>
+          <p:cNvSpPr/>
+          <p:nvPr/>
+        </p:nvSpPr>
+        <p:spPr>
+          <a:xfrm>
+            <a:off x="731520" y="4206240"/>
+            <a:ext cx="7680960" cy="640080"/>
+          </a:xfrm>
+          <a:prstGeom prst="rect">
+            <a:avLst/>
+          </a:prstGeom>
+          <a:solidFill>
+            <a:srgbClr val="E8F5F3"/>
+          </a:solidFill>
+          <a:ln/>
           <a:effectLst>
             <a:outerShdw sx="100000" sy="100000" kx="0" ky="0" algn="bl" rotWithShape="0" blurRad="50800" dist="25400" dir="8100000">
               <a:srgbClr val="000000">
@@ -3034,34 +3882,14 @@
       </p:sp>
       <p:sp>
         <p:nvSpPr>
-          <p:cNvPr id="7" name="Shape 5"/>
-          <p:cNvSpPr/>
-          <p:nvPr/>
-        </p:nvSpPr>
-        <p:spPr>
-          <a:xfrm>
-            <a:off x="4846320" y="1188720"/>
-            <a:ext cx="3840480" cy="54864"/>
-          </a:xfrm>
-          <a:prstGeom prst="rect">
-            <a:avLst/>
-          </a:prstGeom>
-          <a:solidFill>
-            <a:srgbClr val="2A9D8F"/>
-          </a:solidFill>
-          <a:ln/>
-        </p:spPr>
-      </p:sp>
-      <p:sp>
-        <p:nvSpPr>
           <p:cNvPr id="8" name="Text 6"/>
           <p:cNvSpPr/>
           <p:nvPr/>
         </p:nvSpPr>
         <p:spPr>
           <a:xfrm>
-            <a:off x="5120640" y="1371600"/>
-            <a:ext cx="3291840" cy="3108960"/>
+            <a:off x="914400" y="4251960"/>
+            <a:ext cx="7315200" cy="548640"/>
           </a:xfrm>
           <a:prstGeom prst="rect">
             <a:avLst/>
@@ -3070,46 +3898,28 @@
           <a:ln/>
         </p:spPr>
         <p:txBody>
-          <a:bodyPr wrap="square" rtlCol="0" anchor="t"/>
+          <a:bodyPr wrap="square" rtlCol="0" anchor="ctr"/>
           <a:lstStyle/>
           <a:p>
             <a:pPr indent="0" marL="0">
-              <a:spcAft>
-                <a:spcPts val="400"/>
-              </a:spcAft>
               <a:buNone/>
             </a:pPr>
             <a:r>
-              <a:rPr lang="en-US" sz="1600" b="1" dirty="0">
-                <a:solidFill>
-                  <a:srgbClr val="1B2A4A"/>
+              <a:rPr lang="en-US" sz="1200" b="1" dirty="0">
+                <a:solidFill>
+                  <a:srgbClr val="2A9D8F"/>
                 </a:solidFill>
                 <a:latin typeface="Calibri" pitchFamily="34" charset="0"/>
                 <a:ea typeface="Calibri" pitchFamily="34" charset="-122"/>
                 <a:cs typeface="Calibri" pitchFamily="34" charset="-120"/>
               </a:rPr>
-              <a:t>Key Vocabulary</a:t>
-            </a:r>
-            <a:endParaRPr lang="en-US" sz="1600" dirty="0"/>
-          </a:p>
-          <a:p>
+              <a:t>Key Idea: </a:t>
+            </a:r>
             <a:pPr indent="0" marL="0">
-              <a:spcAft>
-                <a:spcPts val="400"/>
-              </a:spcAft>
               <a:buNone/>
             </a:pPr>
-            <a:endParaRPr lang="en-US" sz="1600" dirty="0"/>
-          </a:p>
-          <a:p>
-            <a:pPr indent="0" marL="0">
-              <a:spcAft>
-                <a:spcPts val="400"/>
-              </a:spcAft>
-              <a:buNone/>
-            </a:pPr>
-            <a:r>
-              <a:rPr lang="en-US" sz="1300" dirty="0">
+            <a:r>
+              <a:rPr lang="en-US" sz="1200" i="1" dirty="0">
                 <a:solidFill>
                   <a:srgbClr val="3D3A36"/>
                 </a:solidFill>
@@ -3117,89 +3927,9 @@
                 <a:ea typeface="Calibri" pitchFamily="34" charset="-122"/>
                 <a:cs typeface="Calibri" pitchFamily="34" charset="-120"/>
               </a:rPr>
-              <a:t>Hypothesis — a testable explanation</a:t>
-            </a:r>
-            <a:endParaRPr lang="en-US" sz="1600" dirty="0"/>
-          </a:p>
-          <a:p>
-            <a:pPr indent="0" marL="0">
-              <a:spcAft>
-                <a:spcPts val="400"/>
-              </a:spcAft>
-              <a:buNone/>
-            </a:pPr>
-            <a:r>
-              <a:rPr lang="en-US" sz="1300" dirty="0">
-                <a:solidFill>
-                  <a:srgbClr val="3D3A36"/>
-                </a:solidFill>
-                <a:latin typeface="Calibri" pitchFamily="34" charset="0"/>
-                <a:ea typeface="Calibri" pitchFamily="34" charset="-122"/>
-                <a:cs typeface="Calibri" pitchFamily="34" charset="-120"/>
-              </a:rPr>
-              <a:t>Variable — something that can change</a:t>
-            </a:r>
-            <a:endParaRPr lang="en-US" sz="1600" dirty="0"/>
-          </a:p>
-          <a:p>
-            <a:pPr indent="0" marL="0">
-              <a:spcAft>
-                <a:spcPts val="400"/>
-              </a:spcAft>
-              <a:buNone/>
-            </a:pPr>
-            <a:r>
-              <a:rPr lang="en-US" sz="1300" dirty="0">
-                <a:solidFill>
-                  <a:srgbClr val="3D3A36"/>
-                </a:solidFill>
-                <a:latin typeface="Calibri" pitchFamily="34" charset="0"/>
-                <a:ea typeface="Calibri" pitchFamily="34" charset="-122"/>
-                <a:cs typeface="Calibri" pitchFamily="34" charset="-120"/>
-              </a:rPr>
-              <a:t>Fair test — only one variable changes</a:t>
-            </a:r>
-            <a:endParaRPr lang="en-US" sz="1600" dirty="0"/>
-          </a:p>
-          <a:p>
-            <a:pPr indent="0" marL="0">
-              <a:spcAft>
-                <a:spcPts val="400"/>
-              </a:spcAft>
-              <a:buNone/>
-            </a:pPr>
-            <a:r>
-              <a:rPr lang="en-US" sz="1300" dirty="0">
-                <a:solidFill>
-                  <a:srgbClr val="3D3A36"/>
-                </a:solidFill>
-                <a:latin typeface="Calibri" pitchFamily="34" charset="0"/>
-                <a:ea typeface="Calibri" pitchFamily="34" charset="-122"/>
-                <a:cs typeface="Calibri" pitchFamily="34" charset="-120"/>
-              </a:rPr>
-              <a:t>Reliable — consistent, repeatable results</a:t>
-            </a:r>
-            <a:endParaRPr lang="en-US" sz="1600" dirty="0"/>
-          </a:p>
-          <a:p>
-            <a:pPr indent="0" marL="0">
-              <a:spcAft>
-                <a:spcPts val="400"/>
-              </a:spcAft>
-              <a:buNone/>
-            </a:pPr>
-            <a:r>
-              <a:rPr lang="en-US" sz="1300" dirty="0">
-                <a:solidFill>
-                  <a:srgbClr val="3D3A36"/>
-                </a:solidFill>
-                <a:latin typeface="Calibri" pitchFamily="34" charset="0"/>
-                <a:ea typeface="Calibri" pitchFamily="34" charset="-122"/>
-                <a:cs typeface="Calibri" pitchFamily="34" charset="-120"/>
-              </a:rPr>
-              <a:t>Valid — measures what it claims to measure</a:t>
-            </a:r>
-            <a:endParaRPr lang="en-US" sz="1600" dirty="0"/>
+              <a:t>A good method is like a recipe — anyone should be able to follow it and get the same results.</a:t>
+            </a:r>
+            <a:endParaRPr lang="en-US" sz="1200" dirty="0"/>
           </a:p>
         </p:txBody>
       </p:sp>
@@ -3217,7 +3947,7 @@
     <p:bg>
       <p:bgPr>
         <a:solidFill>
-          <a:srgbClr val="1B2A4A"/>
+          <a:srgbClr val="FAF8F5"/>
         </a:solidFill>
       </p:bgPr>
     </p:bg>
@@ -3244,27 +3974,67 @@
         <p:spPr>
           <a:xfrm>
             <a:off x="0" y="0"/>
-            <a:ext cx="109728" cy="5143500"/>
-          </a:xfrm>
-          <a:prstGeom prst="rect">
-            <a:avLst/>
-          </a:prstGeom>
-          <a:solidFill>
-            <a:srgbClr val="E9C46A"/>
-          </a:solidFill>
-          <a:ln/>
-        </p:spPr>
-      </p:sp>
-      <p:sp>
-        <p:nvSpPr>
-          <p:cNvPr id="3" name="Text 1"/>
-          <p:cNvSpPr/>
-          <p:nvPr/>
-        </p:nvSpPr>
-        <p:spPr>
-          <a:xfrm>
-            <a:off x="731520" y="457200"/>
-            <a:ext cx="7772400" cy="731520"/>
+            <a:ext cx="9144000" cy="822960"/>
+          </a:xfrm>
+          <a:prstGeom prst="rect">
+            <a:avLst/>
+          </a:prstGeom>
+          <a:solidFill>
+            <a:srgbClr val="FFFFFF"/>
+          </a:solidFill>
+          <a:ln/>
+        </p:spPr>
+      </p:sp>
+      <p:sp>
+        <p:nvSpPr>
+          <p:cNvPr id="3" name="Shape 1"/>
+          <p:cNvSpPr/>
+          <p:nvPr/>
+        </p:nvSpPr>
+        <p:spPr>
+          <a:xfrm>
+            <a:off x="0" y="804672"/>
+            <a:ext cx="9144000" cy="27432"/>
+          </a:xfrm>
+          <a:prstGeom prst="rect">
+            <a:avLst/>
+          </a:prstGeom>
+          <a:solidFill>
+            <a:srgbClr val="E5E2DC"/>
+          </a:solidFill>
+          <a:ln/>
+        </p:spPr>
+      </p:sp>
+      <p:sp>
+        <p:nvSpPr>
+          <p:cNvPr id="4" name="Shape 2"/>
+          <p:cNvSpPr/>
+          <p:nvPr/>
+        </p:nvSpPr>
+        <p:spPr>
+          <a:xfrm>
+            <a:off x="548640" y="201168"/>
+            <a:ext cx="54864" cy="420624"/>
+          </a:xfrm>
+          <a:prstGeom prst="rect">
+            <a:avLst/>
+          </a:prstGeom>
+          <a:solidFill>
+            <a:srgbClr val="2A9D8F"/>
+          </a:solidFill>
+          <a:ln/>
+        </p:spPr>
+      </p:sp>
+      <p:sp>
+        <p:nvSpPr>
+          <p:cNvPr id="5" name="Text 3"/>
+          <p:cNvSpPr/>
+          <p:nvPr/>
+        </p:nvSpPr>
+        <p:spPr>
+          <a:xfrm>
+            <a:off x="777240" y="137160"/>
+            <a:ext cx="7772400" cy="548640"/>
           </a:xfrm>
           <a:prstGeom prst="rect">
             <a:avLst/>
@@ -3273,37 +4043,639 @@
           <a:ln/>
         </p:spPr>
         <p:txBody>
-          <a:bodyPr wrap="square" rtlCol="0" anchor="ctr"/>
+          <a:bodyPr wrap="square" lIns="0" tIns="0" rIns="0" bIns="0" rtlCol="0" anchor="ctr"/>
           <a:lstStyle/>
           <a:p>
             <a:pPr indent="0" marL="0">
               <a:buNone/>
             </a:pPr>
             <a:r>
-              <a:rPr lang="en-US" sz="3200" b="1" dirty="0">
-                <a:solidFill>
-                  <a:srgbClr val="FFFFFF"/>
+              <a:rPr lang="en-US" sz="2000" b="1" dirty="0">
+                <a:solidFill>
+                  <a:srgbClr val="1B2A4A"/>
                 </a:solidFill>
                 <a:latin typeface="Georgia" pitchFamily="34" charset="0"/>
                 <a:ea typeface="Georgia" pitchFamily="34" charset="-122"/>
                 <a:cs typeface="Georgia" pitchFamily="34" charset="-120"/>
               </a:rPr>
-              <a:t>Key Takeaways</a:t>
-            </a:r>
-            <a:endParaRPr lang="en-US" sz="3200" dirty="0"/>
-          </a:p>
-        </p:txBody>
-      </p:sp>
-      <p:sp>
-        <p:nvSpPr>
-          <p:cNvPr id="4" name="Text 2"/>
+              <a:t>Why We Repeat Experiments</a:t>
+            </a:r>
+            <a:endParaRPr lang="en-US" sz="2000" dirty="0"/>
+          </a:p>
+        </p:txBody>
+      </p:sp>
+      <p:sp>
+        <p:nvSpPr>
+          <p:cNvPr id="6" name="Shape 4"/>
+          <p:cNvSpPr/>
+          <p:nvPr/>
+        </p:nvSpPr>
+        <p:spPr>
+          <a:xfrm>
+            <a:off x="731520" y="1280160"/>
+            <a:ext cx="2377440" cy="2377440"/>
+          </a:xfrm>
+          <a:prstGeom prst="rect">
+            <a:avLst/>
+          </a:prstGeom>
+          <a:solidFill>
+            <a:srgbClr val="FFFFFF"/>
+          </a:solidFill>
+          <a:ln/>
+          <a:effectLst>
+            <a:outerShdw sx="100000" sy="100000" kx="0" ky="0" algn="bl" rotWithShape="0" blurRad="50800" dist="25400" dir="8100000">
+              <a:srgbClr val="000000">
+                <a:alpha val="10000"/>
+              </a:srgbClr>
+            </a:outerShdw>
+          </a:effectLst>
+        </p:spPr>
+      </p:sp>
+      <p:sp>
+        <p:nvSpPr>
+          <p:cNvPr id="7" name="Text 5"/>
           <p:cNvSpPr/>
           <p:nvPr/>
         </p:nvSpPr>
         <p:spPr>
           <a:xfrm>
             <a:off x="731520" y="1463040"/>
-            <a:ext cx="7772400" cy="3200400"/>
+            <a:ext cx="2377440" cy="914400"/>
+          </a:xfrm>
+          <a:prstGeom prst="rect">
+            <a:avLst/>
+          </a:prstGeom>
+          <a:noFill/>
+          <a:ln/>
+        </p:spPr>
+        <p:txBody>
+          <a:bodyPr wrap="square" rtlCol="0" anchor="ctr"/>
+          <a:lstStyle/>
+          <a:p>
+            <a:pPr algn="ctr" indent="0" marL="0">
+              <a:buNone/>
+            </a:pPr>
+            <a:r>
+              <a:rPr lang="en-US" sz="3600" b="1" dirty="0">
+                <a:solidFill>
+                  <a:srgbClr val="2A9D8F"/>
+                </a:solidFill>
+                <a:latin typeface="Georgia" pitchFamily="34" charset="0"/>
+                <a:ea typeface="Georgia" pitchFamily="34" charset="-122"/>
+                <a:cs typeface="Georgia" pitchFamily="34" charset="-120"/>
+              </a:rPr>
+              <a:t>3×</a:t>
+            </a:r>
+            <a:endParaRPr lang="en-US" sz="3600" dirty="0"/>
+          </a:p>
+        </p:txBody>
+      </p:sp>
+      <p:sp>
+        <p:nvSpPr>
+          <p:cNvPr id="8" name="Text 6"/>
+          <p:cNvSpPr/>
+          <p:nvPr/>
+        </p:nvSpPr>
+        <p:spPr>
+          <a:xfrm>
+            <a:off x="731520" y="2423160"/>
+            <a:ext cx="2377440" cy="365760"/>
+          </a:xfrm>
+          <a:prstGeom prst="rect">
+            <a:avLst/>
+          </a:prstGeom>
+          <a:noFill/>
+          <a:ln/>
+        </p:spPr>
+        <p:txBody>
+          <a:bodyPr wrap="square" rtlCol="0" anchor="ctr"/>
+          <a:lstStyle/>
+          <a:p>
+            <a:pPr algn="ctr" indent="0" marL="0">
+              <a:buNone/>
+            </a:pPr>
+            <a:r>
+              <a:rPr lang="en-US" sz="1200" b="1" dirty="0">
+                <a:solidFill>
+                  <a:srgbClr val="6B6660"/>
+                </a:solidFill>
+                <a:latin typeface="Calibri" pitchFamily="34" charset="0"/>
+                <a:ea typeface="Calibri" pitchFamily="34" charset="-122"/>
+                <a:cs typeface="Calibri" pitchFamily="34" charset="-120"/>
+              </a:rPr>
+              <a:t>MINIMUM REPEATS</a:t>
+            </a:r>
+            <a:endParaRPr lang="en-US" sz="1200" dirty="0"/>
+          </a:p>
+        </p:txBody>
+      </p:sp>
+      <p:sp>
+        <p:nvSpPr>
+          <p:cNvPr id="9" name="Text 7"/>
+          <p:cNvSpPr/>
+          <p:nvPr/>
+        </p:nvSpPr>
+        <p:spPr>
+          <a:xfrm>
+            <a:off x="822960" y="2834640"/>
+            <a:ext cx="2194560" cy="640080"/>
+          </a:xfrm>
+          <a:prstGeom prst="rect">
+            <a:avLst/>
+          </a:prstGeom>
+          <a:noFill/>
+          <a:ln/>
+        </p:spPr>
+        <p:txBody>
+          <a:bodyPr wrap="square" rtlCol="0" anchor="ctr"/>
+          <a:lstStyle/>
+          <a:p>
+            <a:pPr algn="ctr" indent="0" marL="0">
+              <a:buNone/>
+            </a:pPr>
+            <a:r>
+              <a:rPr lang="en-US" sz="1000" dirty="0">
+                <a:solidFill>
+                  <a:srgbClr val="9B9690"/>
+                </a:solidFill>
+                <a:latin typeface="Calibri" pitchFamily="34" charset="0"/>
+                <a:ea typeface="Calibri" pitchFamily="34" charset="-122"/>
+                <a:cs typeface="Calibri" pitchFamily="34" charset="-120"/>
+              </a:rPr>
+              <a:t>Most experiments need at least 3 trials to be reliable</a:t>
+            </a:r>
+            <a:endParaRPr lang="en-US" sz="1000" dirty="0"/>
+          </a:p>
+        </p:txBody>
+      </p:sp>
+      <p:sp>
+        <p:nvSpPr>
+          <p:cNvPr id="10" name="Shape 8"/>
+          <p:cNvSpPr/>
+          <p:nvPr/>
+        </p:nvSpPr>
+        <p:spPr>
+          <a:xfrm>
+            <a:off x="3383280" y="1280160"/>
+            <a:ext cx="2377440" cy="2377440"/>
+          </a:xfrm>
+          <a:prstGeom prst="rect">
+            <a:avLst/>
+          </a:prstGeom>
+          <a:solidFill>
+            <a:srgbClr val="FFFFFF"/>
+          </a:solidFill>
+          <a:ln/>
+          <a:effectLst>
+            <a:outerShdw sx="100000" sy="100000" kx="0" ky="0" algn="bl" rotWithShape="0" blurRad="50800" dist="25400" dir="8100000">
+              <a:srgbClr val="000000">
+                <a:alpha val="10000"/>
+              </a:srgbClr>
+            </a:outerShdw>
+          </a:effectLst>
+        </p:spPr>
+      </p:sp>
+      <p:sp>
+        <p:nvSpPr>
+          <p:cNvPr id="11" name="Text 9"/>
+          <p:cNvSpPr/>
+          <p:nvPr/>
+        </p:nvSpPr>
+        <p:spPr>
+          <a:xfrm>
+            <a:off x="3383280" y="1463040"/>
+            <a:ext cx="2377440" cy="914400"/>
+          </a:xfrm>
+          <a:prstGeom prst="rect">
+            <a:avLst/>
+          </a:prstGeom>
+          <a:noFill/>
+          <a:ln/>
+        </p:spPr>
+        <p:txBody>
+          <a:bodyPr wrap="square" rtlCol="0" anchor="ctr"/>
+          <a:lstStyle/>
+          <a:p>
+            <a:pPr algn="ctr" indent="0" marL="0">
+              <a:buNone/>
+            </a:pPr>
+            <a:r>
+              <a:rPr lang="en-US" sz="3600" b="1" dirty="0">
+                <a:solidFill>
+                  <a:srgbClr val="2A9D8F"/>
+                </a:solidFill>
+                <a:latin typeface="Georgia" pitchFamily="34" charset="0"/>
+                <a:ea typeface="Georgia" pitchFamily="34" charset="-122"/>
+                <a:cs typeface="Georgia" pitchFamily="34" charset="-120"/>
+              </a:rPr>
+              <a:t>Mean</a:t>
+            </a:r>
+            <a:endParaRPr lang="en-US" sz="3600" dirty="0"/>
+          </a:p>
+        </p:txBody>
+      </p:sp>
+      <p:sp>
+        <p:nvSpPr>
+          <p:cNvPr id="12" name="Text 10"/>
+          <p:cNvSpPr/>
+          <p:nvPr/>
+        </p:nvSpPr>
+        <p:spPr>
+          <a:xfrm>
+            <a:off x="3383280" y="2423160"/>
+            <a:ext cx="2377440" cy="365760"/>
+          </a:xfrm>
+          <a:prstGeom prst="rect">
+            <a:avLst/>
+          </a:prstGeom>
+          <a:noFill/>
+          <a:ln/>
+        </p:spPr>
+        <p:txBody>
+          <a:bodyPr wrap="square" rtlCol="0" anchor="ctr"/>
+          <a:lstStyle/>
+          <a:p>
+            <a:pPr algn="ctr" indent="0" marL="0">
+              <a:buNone/>
+            </a:pPr>
+            <a:r>
+              <a:rPr lang="en-US" sz="1200" b="1" dirty="0">
+                <a:solidFill>
+                  <a:srgbClr val="6B6660"/>
+                </a:solidFill>
+                <a:latin typeface="Calibri" pitchFamily="34" charset="0"/>
+                <a:ea typeface="Calibri" pitchFamily="34" charset="-122"/>
+                <a:cs typeface="Calibri" pitchFamily="34" charset="-120"/>
+              </a:rPr>
+              <a:t>AVERAGE RESULT</a:t>
+            </a:r>
+            <a:endParaRPr lang="en-US" sz="1200" dirty="0"/>
+          </a:p>
+        </p:txBody>
+      </p:sp>
+      <p:sp>
+        <p:nvSpPr>
+          <p:cNvPr id="13" name="Text 11"/>
+          <p:cNvSpPr/>
+          <p:nvPr/>
+        </p:nvSpPr>
+        <p:spPr>
+          <a:xfrm>
+            <a:off x="3474720" y="2834640"/>
+            <a:ext cx="2194560" cy="640080"/>
+          </a:xfrm>
+          <a:prstGeom prst="rect">
+            <a:avLst/>
+          </a:prstGeom>
+          <a:noFill/>
+          <a:ln/>
+        </p:spPr>
+        <p:txBody>
+          <a:bodyPr wrap="square" rtlCol="0" anchor="ctr"/>
+          <a:lstStyle/>
+          <a:p>
+            <a:pPr algn="ctr" indent="0" marL="0">
+              <a:buNone/>
+            </a:pPr>
+            <a:r>
+              <a:rPr lang="en-US" sz="1000" dirty="0">
+                <a:solidFill>
+                  <a:srgbClr val="9B9690"/>
+                </a:solidFill>
+                <a:latin typeface="Calibri" pitchFamily="34" charset="0"/>
+                <a:ea typeface="Calibri" pitchFamily="34" charset="-122"/>
+                <a:cs typeface="Calibri" pitchFamily="34" charset="-120"/>
+              </a:rPr>
+              <a:t>Add all results, divide by number of trials</a:t>
+            </a:r>
+            <a:endParaRPr lang="en-US" sz="1000" dirty="0"/>
+          </a:p>
+        </p:txBody>
+      </p:sp>
+      <p:sp>
+        <p:nvSpPr>
+          <p:cNvPr id="14" name="Shape 12"/>
+          <p:cNvSpPr/>
+          <p:nvPr/>
+        </p:nvSpPr>
+        <p:spPr>
+          <a:xfrm>
+            <a:off x="6035040" y="1280160"/>
+            <a:ext cx="2377440" cy="2377440"/>
+          </a:xfrm>
+          <a:prstGeom prst="rect">
+            <a:avLst/>
+          </a:prstGeom>
+          <a:solidFill>
+            <a:srgbClr val="FFFFFF"/>
+          </a:solidFill>
+          <a:ln/>
+          <a:effectLst>
+            <a:outerShdw sx="100000" sy="100000" kx="0" ky="0" algn="bl" rotWithShape="0" blurRad="50800" dist="25400" dir="8100000">
+              <a:srgbClr val="000000">
+                <a:alpha val="10000"/>
+              </a:srgbClr>
+            </a:outerShdw>
+          </a:effectLst>
+        </p:spPr>
+      </p:sp>
+      <p:sp>
+        <p:nvSpPr>
+          <p:cNvPr id="15" name="Text 13"/>
+          <p:cNvSpPr/>
+          <p:nvPr/>
+        </p:nvSpPr>
+        <p:spPr>
+          <a:xfrm>
+            <a:off x="6035040" y="1463040"/>
+            <a:ext cx="2377440" cy="914400"/>
+          </a:xfrm>
+          <a:prstGeom prst="rect">
+            <a:avLst/>
+          </a:prstGeom>
+          <a:noFill/>
+          <a:ln/>
+        </p:spPr>
+        <p:txBody>
+          <a:bodyPr wrap="square" rtlCol="0" anchor="ctr"/>
+          <a:lstStyle/>
+          <a:p>
+            <a:pPr algn="ctr" indent="0" marL="0">
+              <a:buNone/>
+            </a:pPr>
+            <a:r>
+              <a:rPr lang="en-US" sz="3600" b="1" dirty="0">
+                <a:solidFill>
+                  <a:srgbClr val="2A9D8F"/>
+                </a:solidFill>
+                <a:latin typeface="Georgia" pitchFamily="34" charset="0"/>
+                <a:ea typeface="Georgia" pitchFamily="34" charset="-122"/>
+                <a:cs typeface="Georgia" pitchFamily="34" charset="-120"/>
+              </a:rPr>
+              <a:t>±</a:t>
+            </a:r>
+            <a:endParaRPr lang="en-US" sz="3600" dirty="0"/>
+          </a:p>
+        </p:txBody>
+      </p:sp>
+      <p:sp>
+        <p:nvSpPr>
+          <p:cNvPr id="16" name="Text 14"/>
+          <p:cNvSpPr/>
+          <p:nvPr/>
+        </p:nvSpPr>
+        <p:spPr>
+          <a:xfrm>
+            <a:off x="6035040" y="2423160"/>
+            <a:ext cx="2377440" cy="365760"/>
+          </a:xfrm>
+          <a:prstGeom prst="rect">
+            <a:avLst/>
+          </a:prstGeom>
+          <a:noFill/>
+          <a:ln/>
+        </p:spPr>
+        <p:txBody>
+          <a:bodyPr wrap="square" rtlCol="0" anchor="ctr"/>
+          <a:lstStyle/>
+          <a:p>
+            <a:pPr algn="ctr" indent="0" marL="0">
+              <a:buNone/>
+            </a:pPr>
+            <a:r>
+              <a:rPr lang="en-US" sz="1200" b="1" dirty="0">
+                <a:solidFill>
+                  <a:srgbClr val="6B6660"/>
+                </a:solidFill>
+                <a:latin typeface="Calibri" pitchFamily="34" charset="0"/>
+                <a:ea typeface="Calibri" pitchFamily="34" charset="-122"/>
+                <a:cs typeface="Calibri" pitchFamily="34" charset="-120"/>
+              </a:rPr>
+              <a:t>ANOMALIES</a:t>
+            </a:r>
+            <a:endParaRPr lang="en-US" sz="1200" dirty="0"/>
+          </a:p>
+        </p:txBody>
+      </p:sp>
+      <p:sp>
+        <p:nvSpPr>
+          <p:cNvPr id="17" name="Text 15"/>
+          <p:cNvSpPr/>
+          <p:nvPr/>
+        </p:nvSpPr>
+        <p:spPr>
+          <a:xfrm>
+            <a:off x="6126480" y="2834640"/>
+            <a:ext cx="2194560" cy="640080"/>
+          </a:xfrm>
+          <a:prstGeom prst="rect">
+            <a:avLst/>
+          </a:prstGeom>
+          <a:noFill/>
+          <a:ln/>
+        </p:spPr>
+        <p:txBody>
+          <a:bodyPr wrap="square" rtlCol="0" anchor="ctr"/>
+          <a:lstStyle/>
+          <a:p>
+            <a:pPr algn="ctr" indent="0" marL="0">
+              <a:buNone/>
+            </a:pPr>
+            <a:r>
+              <a:rPr lang="en-US" sz="1000" dirty="0">
+                <a:solidFill>
+                  <a:srgbClr val="9B9690"/>
+                </a:solidFill>
+                <a:latin typeface="Calibri" pitchFamily="34" charset="0"/>
+                <a:ea typeface="Calibri" pitchFamily="34" charset="-122"/>
+                <a:cs typeface="Calibri" pitchFamily="34" charset="-120"/>
+              </a:rPr>
+              <a:t>Results that don't fit the pattern — circle and investigate</a:t>
+            </a:r>
+            <a:endParaRPr lang="en-US" sz="1000" dirty="0"/>
+          </a:p>
+        </p:txBody>
+      </p:sp>
+      <p:sp>
+        <p:nvSpPr>
+          <p:cNvPr id="18" name="Text 16"/>
+          <p:cNvSpPr/>
+          <p:nvPr/>
+        </p:nvSpPr>
+        <p:spPr>
+          <a:xfrm>
+            <a:off x="731520" y="4114800"/>
+            <a:ext cx="7680960" cy="457200"/>
+          </a:xfrm>
+          <a:prstGeom prst="rect">
+            <a:avLst/>
+          </a:prstGeom>
+          <a:noFill/>
+          <a:ln/>
+        </p:spPr>
+        <p:txBody>
+          <a:bodyPr wrap="square" rtlCol="0" anchor="ctr"/>
+          <a:lstStyle/>
+          <a:p>
+            <a:pPr algn="ctr" indent="0" marL="0">
+              <a:buNone/>
+            </a:pPr>
+            <a:r>
+              <a:rPr lang="en-US" sz="1200" i="1" dirty="0">
+                <a:solidFill>
+                  <a:srgbClr val="6B6660"/>
+                </a:solidFill>
+                <a:latin typeface="Calibri" pitchFamily="34" charset="0"/>
+                <a:ea typeface="Calibri" pitchFamily="34" charset="-122"/>
+                <a:cs typeface="Calibri" pitchFamily="34" charset="-120"/>
+              </a:rPr>
+              <a:t>Repeating experiments makes our results more reliable and helps us spot errors.</a:t>
+            </a:r>
+            <a:endParaRPr lang="en-US" sz="1200" dirty="0"/>
+          </a:p>
+        </p:txBody>
+      </p:sp>
+    </p:spTree>
+  </p:cSld>
+  <p:clrMapOvr>
+    <a:masterClrMapping/>
+  </p:clrMapOvr>
+</p:sld>
+</file>
+
+<file path=ppt/slides/slide7.xml><?xml version="1.0" encoding="utf-8"?>
+<p:sld xmlns:a="http://schemas.openxmlformats.org/drawingml/2006/main" xmlns:r="http://schemas.openxmlformats.org/officeDocument/2006/relationships" xmlns:p="http://schemas.openxmlformats.org/presentationml/2006/main">
+  <p:cSld name="Slide 7">
+    <p:bg>
+      <p:bgPr>
+        <a:solidFill>
+          <a:srgbClr val="FAF8F5"/>
+        </a:solidFill>
+      </p:bgPr>
+    </p:bg>
+    <p:spTree>
+      <p:nvGrpSpPr>
+        <p:cNvPr id="1" name=""/>
+        <p:cNvGrpSpPr/>
+        <p:nvPr/>
+      </p:nvGrpSpPr>
+      <p:grpSpPr>
+        <a:xfrm>
+          <a:off x="0" y="0"/>
+          <a:ext cx="0" cy="0"/>
+          <a:chOff x="0" y="0"/>
+          <a:chExt cx="0" cy="0"/>
+        </a:xfrm>
+      </p:grpSpPr>
+      <p:sp>
+        <p:nvSpPr>
+          <p:cNvPr id="2" name="Shape 0"/>
+          <p:cNvSpPr/>
+          <p:nvPr/>
+        </p:nvSpPr>
+        <p:spPr>
+          <a:xfrm>
+            <a:off x="0" y="0"/>
+            <a:ext cx="9144000" cy="822960"/>
+          </a:xfrm>
+          <a:prstGeom prst="rect">
+            <a:avLst/>
+          </a:prstGeom>
+          <a:solidFill>
+            <a:srgbClr val="FFFFFF"/>
+          </a:solidFill>
+          <a:ln/>
+        </p:spPr>
+      </p:sp>
+      <p:sp>
+        <p:nvSpPr>
+          <p:cNvPr id="3" name="Shape 1"/>
+          <p:cNvSpPr/>
+          <p:nvPr/>
+        </p:nvSpPr>
+        <p:spPr>
+          <a:xfrm>
+            <a:off x="0" y="804672"/>
+            <a:ext cx="9144000" cy="27432"/>
+          </a:xfrm>
+          <a:prstGeom prst="rect">
+            <a:avLst/>
+          </a:prstGeom>
+          <a:solidFill>
+            <a:srgbClr val="E5E2DC"/>
+          </a:solidFill>
+          <a:ln/>
+        </p:spPr>
+      </p:sp>
+      <p:sp>
+        <p:nvSpPr>
+          <p:cNvPr id="4" name="Shape 2"/>
+          <p:cNvSpPr/>
+          <p:nvPr/>
+        </p:nvSpPr>
+        <p:spPr>
+          <a:xfrm>
+            <a:off x="548640" y="201168"/>
+            <a:ext cx="54864" cy="420624"/>
+          </a:xfrm>
+          <a:prstGeom prst="rect">
+            <a:avLst/>
+          </a:prstGeom>
+          <a:solidFill>
+            <a:srgbClr val="2A9D8F"/>
+          </a:solidFill>
+          <a:ln/>
+        </p:spPr>
+      </p:sp>
+      <p:sp>
+        <p:nvSpPr>
+          <p:cNvPr id="5" name="Text 3"/>
+          <p:cNvSpPr/>
+          <p:nvPr/>
+        </p:nvSpPr>
+        <p:spPr>
+          <a:xfrm>
+            <a:off x="777240" y="137160"/>
+            <a:ext cx="7772400" cy="548640"/>
+          </a:xfrm>
+          <a:prstGeom prst="rect">
+            <a:avLst/>
+          </a:prstGeom>
+          <a:noFill/>
+          <a:ln/>
+        </p:spPr>
+        <p:txBody>
+          <a:bodyPr wrap="square" lIns="0" tIns="0" rIns="0" bIns="0" rtlCol="0" anchor="ctr"/>
+          <a:lstStyle/>
+          <a:p>
+            <a:pPr indent="0" marL="0">
+              <a:buNone/>
+            </a:pPr>
+            <a:r>
+              <a:rPr lang="en-US" sz="2000" b="1" dirty="0">
+                <a:solidFill>
+                  <a:srgbClr val="1B2A4A"/>
+                </a:solidFill>
+                <a:latin typeface="Georgia" pitchFamily="34" charset="0"/>
+                <a:ea typeface="Georgia" pitchFamily="34" charset="-122"/>
+                <a:cs typeface="Georgia" pitchFamily="34" charset="-120"/>
+              </a:rPr>
+              <a:t>Analysing Your Results</a:t>
+            </a:r>
+            <a:endParaRPr lang="en-US" sz="2000" dirty="0"/>
+          </a:p>
+        </p:txBody>
+      </p:sp>
+      <p:sp>
+        <p:nvSpPr>
+          <p:cNvPr id="6" name="Text 4"/>
+          <p:cNvSpPr/>
+          <p:nvPr/>
+        </p:nvSpPr>
+        <p:spPr>
+          <a:xfrm>
+            <a:off x="731520" y="1051560"/>
+            <a:ext cx="7680960" cy="3108960"/>
           </a:xfrm>
           <a:prstGeom prst="rect">
             <a:avLst/>
@@ -3317,7 +4689,7 @@
           <a:p>
             <a:pPr marL="342900" indent="-342900">
               <a:spcAft>
-                <a:spcPts val="1000"/>
+                <a:spcPts val="800"/>
               </a:spcAft>
               <a:buSzPct val="100000"/>
               <a:buChar char="•"/>
@@ -3325,20 +4697,20 @@
             <a:r>
               <a:rPr lang="en-US" sz="1500" dirty="0">
                 <a:solidFill>
-                  <a:srgbClr val="CADCFC"/>
+                  <a:srgbClr val="3D3A36"/>
                 </a:solidFill>
                 <a:latin typeface="Calibri" pitchFamily="34" charset="0"/>
                 <a:ea typeface="Calibri" pitchFamily="34" charset="-122"/>
                 <a:cs typeface="Calibri" pitchFamily="34" charset="-120"/>
               </a:rPr>
-              <a:t>The scientific method has 6 steps: Observe, Research, Hypothesise, Experiment, Analyse, Conclude</a:t>
+              <a:t>Organise data in a clear table with units.</a:t>
             </a:r>
             <a:endParaRPr lang="en-US" sz="1500" dirty="0"/>
           </a:p>
           <a:p>
             <a:pPr marL="342900" indent="-342900">
               <a:spcAft>
-                <a:spcPts val="1000"/>
+                <a:spcPts val="800"/>
               </a:spcAft>
               <a:buSzPct val="100000"/>
               <a:buChar char="•"/>
@@ -3346,20 +4718,20 @@
             <a:r>
               <a:rPr lang="en-US" sz="1500" dirty="0">
                 <a:solidFill>
-                  <a:srgbClr val="CADCFC"/>
+                  <a:srgbClr val="3D3A36"/>
                 </a:solidFill>
                 <a:latin typeface="Calibri" pitchFamily="34" charset="0"/>
                 <a:ea typeface="Calibri" pitchFamily="34" charset="-122"/>
                 <a:cs typeface="Calibri" pitchFamily="34" charset="-120"/>
               </a:rPr>
-              <a:t>A hypothesis uses 'If... then... because...' format</a:t>
+              <a:t>Calculate the mean (average) for each set of results.</a:t>
             </a:r>
             <a:endParaRPr lang="en-US" sz="1500" dirty="0"/>
           </a:p>
           <a:p>
             <a:pPr marL="342900" indent="-342900">
               <a:spcAft>
-                <a:spcPts val="1000"/>
+                <a:spcPts val="800"/>
               </a:spcAft>
               <a:buSzPct val="100000"/>
               <a:buChar char="•"/>
@@ -3367,20 +4739,20 @@
             <a:r>
               <a:rPr lang="en-US" sz="1500" dirty="0">
                 <a:solidFill>
-                  <a:srgbClr val="CADCFC"/>
+                  <a:srgbClr val="3D3A36"/>
                 </a:solidFill>
                 <a:latin typeface="Calibri" pitchFamily="34" charset="0"/>
                 <a:ea typeface="Calibri" pitchFamily="34" charset="-122"/>
                 <a:cs typeface="Calibri" pitchFamily="34" charset="-120"/>
               </a:rPr>
-              <a:t>A fair test changes only ONE variable</a:t>
+              <a:t>Draw a graph — bar chart for categories, line graph for continuous data.</a:t>
             </a:r>
             <a:endParaRPr lang="en-US" sz="1500" dirty="0"/>
           </a:p>
           <a:p>
             <a:pPr marL="342900" indent="-342900">
               <a:spcAft>
-                <a:spcPts val="1000"/>
+                <a:spcPts val="800"/>
               </a:spcAft>
               <a:buSzPct val="100000"/>
               <a:buChar char="•"/>
@@ -3388,20 +4760,20 @@
             <a:r>
               <a:rPr lang="en-US" sz="1500" dirty="0">
                 <a:solidFill>
-                  <a:srgbClr val="CADCFC"/>
+                  <a:srgbClr val="3D3A36"/>
                 </a:solidFill>
                 <a:latin typeface="Calibri" pitchFamily="34" charset="0"/>
                 <a:ea typeface="Calibri" pitchFamily="34" charset="-122"/>
                 <a:cs typeface="Calibri" pitchFamily="34" charset="-120"/>
               </a:rPr>
-              <a:t>Results must be reliable (repeatable) and valid (accurate)</a:t>
+              <a:t>Look for patterns or trends in your graph.</a:t>
             </a:r>
             <a:endParaRPr lang="en-US" sz="1500" dirty="0"/>
           </a:p>
           <a:p>
             <a:pPr marL="342900" indent="-342900">
               <a:spcAft>
-                <a:spcPts val="1000"/>
+                <a:spcPts val="800"/>
               </a:spcAft>
               <a:buSzPct val="100000"/>
               <a:buChar char="•"/>
@@ -3409,13 +4781,13 @@
             <a:r>
               <a:rPr lang="en-US" sz="1500" dirty="0">
                 <a:solidFill>
-                  <a:srgbClr val="CADCFC"/>
+                  <a:srgbClr val="3D3A36"/>
                 </a:solidFill>
                 <a:latin typeface="Calibri" pitchFamily="34" charset="0"/>
                 <a:ea typeface="Calibri" pitchFamily="34" charset="-122"/>
                 <a:cs typeface="Calibri" pitchFamily="34" charset="-120"/>
               </a:rPr>
-              <a:t>Science is a cycle — conclusions lead to new questions</a:t>
+              <a:t>Identify any anomalies (results that don't fit).</a:t>
             </a:r>
             <a:endParaRPr lang="en-US" sz="1500" dirty="0"/>
           </a:p>
@@ -3423,14 +4795,41 @@
       </p:sp>
       <p:sp>
         <p:nvSpPr>
-          <p:cNvPr id="5" name="Text 3"/>
-          <p:cNvSpPr/>
-          <p:nvPr/>
-        </p:nvSpPr>
-        <p:spPr>
-          <a:xfrm>
-            <a:off x="731520" y="4572000"/>
-            <a:ext cx="7772400" cy="365760"/>
+          <p:cNvPr id="7" name="Shape 5"/>
+          <p:cNvSpPr/>
+          <p:nvPr/>
+        </p:nvSpPr>
+        <p:spPr>
+          <a:xfrm>
+            <a:off x="731520" y="4206240"/>
+            <a:ext cx="7680960" cy="640080"/>
+          </a:xfrm>
+          <a:prstGeom prst="rect">
+            <a:avLst/>
+          </a:prstGeom>
+          <a:solidFill>
+            <a:srgbClr val="E8F5F3"/>
+          </a:solidFill>
+          <a:ln/>
+          <a:effectLst>
+            <a:outerShdw sx="100000" sy="100000" kx="0" ky="0" algn="bl" rotWithShape="0" blurRad="50800" dist="25400" dir="8100000">
+              <a:srgbClr val="000000">
+                <a:alpha val="10000"/>
+              </a:srgbClr>
+            </a:outerShdw>
+          </a:effectLst>
+        </p:spPr>
+      </p:sp>
+      <p:sp>
+        <p:nvSpPr>
+          <p:cNvPr id="8" name="Text 6"/>
+          <p:cNvSpPr/>
+          <p:nvPr/>
+        </p:nvSpPr>
+        <p:spPr>
+          <a:xfrm>
+            <a:off x="914400" y="4251960"/>
+            <a:ext cx="7315200" cy="548640"/>
           </a:xfrm>
           <a:prstGeom prst="rect">
             <a:avLst/>
@@ -3446,17 +4845,921 @@
               <a:buNone/>
             </a:pPr>
             <a:r>
-              <a:rPr lang="en-US" sz="1100" dirty="0">
-                <a:solidFill>
-                  <a:srgbClr val="E9C46A"/>
+              <a:rPr lang="en-US" sz="1200" b="1" dirty="0">
+                <a:solidFill>
+                  <a:srgbClr val="2A9D8F"/>
                 </a:solidFill>
                 <a:latin typeface="Calibri" pitchFamily="34" charset="0"/>
                 <a:ea typeface="Calibri" pitchFamily="34" charset="-122"/>
                 <a:cs typeface="Calibri" pitchFamily="34" charset="-120"/>
               </a:rPr>
+              <a:t>Key Idea: </a:t>
+            </a:r>
+            <a:pPr indent="0" marL="0">
+              <a:buNone/>
+            </a:pPr>
+            <a:r>
+              <a:rPr lang="en-US" sz="1200" i="1" dirty="0">
+                <a:solidFill>
+                  <a:srgbClr val="3D3A36"/>
+                </a:solidFill>
+                <a:latin typeface="Calibri" pitchFamily="34" charset="0"/>
+                <a:ea typeface="Calibri" pitchFamily="34" charset="-122"/>
+                <a:cs typeface="Calibri" pitchFamily="34" charset="-120"/>
+              </a:rPr>
+              <a:t>Patterns in data help us answer our original question.</a:t>
+            </a:r>
+            <a:endParaRPr lang="en-US" sz="1200" dirty="0"/>
+          </a:p>
+        </p:txBody>
+      </p:sp>
+    </p:spTree>
+  </p:cSld>
+  <p:clrMapOvr>
+    <a:masterClrMapping/>
+  </p:clrMapOvr>
+</p:sld>
+</file>
+
+<file path=ppt/slides/slide8.xml><?xml version="1.0" encoding="utf-8"?>
+<p:sld xmlns:a="http://schemas.openxmlformats.org/drawingml/2006/main" xmlns:r="http://schemas.openxmlformats.org/officeDocument/2006/relationships" xmlns:p="http://schemas.openxmlformats.org/presentationml/2006/main">
+  <p:cSld name="Slide 8">
+    <p:bg>
+      <p:bgPr>
+        <a:solidFill>
+          <a:srgbClr val="FAF8F5"/>
+        </a:solidFill>
+      </p:bgPr>
+    </p:bg>
+    <p:spTree>
+      <p:nvGrpSpPr>
+        <p:cNvPr id="1" name=""/>
+        <p:cNvGrpSpPr/>
+        <p:nvPr/>
+      </p:nvGrpSpPr>
+      <p:grpSpPr>
+        <a:xfrm>
+          <a:off x="0" y="0"/>
+          <a:ext cx="0" cy="0"/>
+          <a:chOff x="0" y="0"/>
+          <a:chExt cx="0" cy="0"/>
+        </a:xfrm>
+      </p:grpSpPr>
+      <p:sp>
+        <p:nvSpPr>
+          <p:cNvPr id="2" name="Shape 0"/>
+          <p:cNvSpPr/>
+          <p:nvPr/>
+        </p:nvSpPr>
+        <p:spPr>
+          <a:xfrm>
+            <a:off x="0" y="0"/>
+            <a:ext cx="9144000" cy="822960"/>
+          </a:xfrm>
+          <a:prstGeom prst="rect">
+            <a:avLst/>
+          </a:prstGeom>
+          <a:solidFill>
+            <a:srgbClr val="FFFFFF"/>
+          </a:solidFill>
+          <a:ln/>
+        </p:spPr>
+      </p:sp>
+      <p:sp>
+        <p:nvSpPr>
+          <p:cNvPr id="3" name="Shape 1"/>
+          <p:cNvSpPr/>
+          <p:nvPr/>
+        </p:nvSpPr>
+        <p:spPr>
+          <a:xfrm>
+            <a:off x="0" y="804672"/>
+            <a:ext cx="9144000" cy="27432"/>
+          </a:xfrm>
+          <a:prstGeom prst="rect">
+            <a:avLst/>
+          </a:prstGeom>
+          <a:solidFill>
+            <a:srgbClr val="E5E2DC"/>
+          </a:solidFill>
+          <a:ln/>
+        </p:spPr>
+      </p:sp>
+      <p:sp>
+        <p:nvSpPr>
+          <p:cNvPr id="4" name="Shape 2"/>
+          <p:cNvSpPr/>
+          <p:nvPr/>
+        </p:nvSpPr>
+        <p:spPr>
+          <a:xfrm>
+            <a:off x="548640" y="201168"/>
+            <a:ext cx="54864" cy="420624"/>
+          </a:xfrm>
+          <a:prstGeom prst="rect">
+            <a:avLst/>
+          </a:prstGeom>
+          <a:solidFill>
+            <a:srgbClr val="2A9D8F"/>
+          </a:solidFill>
+          <a:ln/>
+        </p:spPr>
+      </p:sp>
+      <p:sp>
+        <p:nvSpPr>
+          <p:cNvPr id="5" name="Text 3"/>
+          <p:cNvSpPr/>
+          <p:nvPr/>
+        </p:nvSpPr>
+        <p:spPr>
+          <a:xfrm>
+            <a:off x="777240" y="137160"/>
+            <a:ext cx="7772400" cy="548640"/>
+          </a:xfrm>
+          <a:prstGeom prst="rect">
+            <a:avLst/>
+          </a:prstGeom>
+          <a:noFill/>
+          <a:ln/>
+        </p:spPr>
+        <p:txBody>
+          <a:bodyPr wrap="square" lIns="0" tIns="0" rIns="0" bIns="0" rtlCol="0" anchor="ctr"/>
+          <a:lstStyle/>
+          <a:p>
+            <a:pPr indent="0" marL="0">
+              <a:buNone/>
+            </a:pPr>
+            <a:r>
+              <a:rPr lang="en-US" sz="2000" b="1" dirty="0">
+                <a:solidFill>
+                  <a:srgbClr val="1B2A4A"/>
+                </a:solidFill>
+                <a:latin typeface="Georgia" pitchFamily="34" charset="0"/>
+                <a:ea typeface="Georgia" pitchFamily="34" charset="-122"/>
+                <a:cs typeface="Georgia" pitchFamily="34" charset="-120"/>
+              </a:rPr>
+              <a:t>Check Your Understanding</a:t>
+            </a:r>
+            <a:endParaRPr lang="en-US" sz="2000" dirty="0"/>
+          </a:p>
+        </p:txBody>
+      </p:sp>
+      <p:sp>
+        <p:nvSpPr>
+          <p:cNvPr id="6" name="Shape 4"/>
+          <p:cNvSpPr/>
+          <p:nvPr/>
+        </p:nvSpPr>
+        <p:spPr>
+          <a:xfrm>
+            <a:off x="731520" y="1051560"/>
+            <a:ext cx="7680960" cy="438912"/>
+          </a:xfrm>
+          <a:prstGeom prst="rect">
+            <a:avLst/>
+          </a:prstGeom>
+          <a:solidFill>
+            <a:srgbClr val="FFFFFF"/>
+          </a:solidFill>
+          <a:ln/>
+        </p:spPr>
+      </p:sp>
+      <p:sp>
+        <p:nvSpPr>
+          <p:cNvPr id="7" name="Text 5"/>
+          <p:cNvSpPr/>
+          <p:nvPr/>
+        </p:nvSpPr>
+        <p:spPr>
+          <a:xfrm>
+            <a:off x="868680" y="1051560"/>
+            <a:ext cx="320040" cy="438912"/>
+          </a:xfrm>
+          <a:prstGeom prst="rect">
+            <a:avLst/>
+          </a:prstGeom>
+          <a:noFill/>
+          <a:ln/>
+        </p:spPr>
+        <p:txBody>
+          <a:bodyPr wrap="square" rtlCol="0" anchor="ctr"/>
+          <a:lstStyle/>
+          <a:p>
+            <a:pPr indent="0" marL="0">
+              <a:buNone/>
+            </a:pPr>
+            <a:r>
+              <a:rPr lang="en-US" sz="1400" dirty="0">
+                <a:solidFill>
+                  <a:srgbClr val="2A9D8F"/>
+                </a:solidFill>
+              </a:rPr>
+              <a:t>☐</a:t>
+            </a:r>
+            <a:endParaRPr lang="en-US" sz="1400" dirty="0"/>
+          </a:p>
+        </p:txBody>
+      </p:sp>
+      <p:sp>
+        <p:nvSpPr>
+          <p:cNvPr id="8" name="Text 6"/>
+          <p:cNvSpPr/>
+          <p:nvPr/>
+        </p:nvSpPr>
+        <p:spPr>
+          <a:xfrm>
+            <a:off x="1234440" y="1051560"/>
+            <a:ext cx="6949440" cy="438912"/>
+          </a:xfrm>
+          <a:prstGeom prst="rect">
+            <a:avLst/>
+          </a:prstGeom>
+          <a:noFill/>
+          <a:ln/>
+        </p:spPr>
+        <p:txBody>
+          <a:bodyPr wrap="square" rtlCol="0" anchor="ctr"/>
+          <a:lstStyle/>
+          <a:p>
+            <a:pPr indent="0" marL="0">
+              <a:buNone/>
+            </a:pPr>
+            <a:r>
+              <a:rPr lang="en-US" sz="1300" dirty="0">
+                <a:solidFill>
+                  <a:srgbClr val="3D3A36"/>
+                </a:solidFill>
+                <a:latin typeface="Calibri" pitchFamily="34" charset="0"/>
+                <a:ea typeface="Calibri" pitchFamily="34" charset="-122"/>
+                <a:cs typeface="Calibri" pitchFamily="34" charset="-120"/>
+              </a:rPr>
+              <a:t>I can list the steps of the scientific method</a:t>
+            </a:r>
+            <a:endParaRPr lang="en-US" sz="1300" dirty="0"/>
+          </a:p>
+        </p:txBody>
+      </p:sp>
+      <p:sp>
+        <p:nvSpPr>
+          <p:cNvPr id="9" name="Shape 7"/>
+          <p:cNvSpPr/>
+          <p:nvPr/>
+        </p:nvSpPr>
+        <p:spPr>
+          <a:xfrm>
+            <a:off x="731520" y="1554480"/>
+            <a:ext cx="7680960" cy="438912"/>
+          </a:xfrm>
+          <a:prstGeom prst="rect">
+            <a:avLst/>
+          </a:prstGeom>
+          <a:solidFill>
+            <a:srgbClr val="F8F6F3"/>
+          </a:solidFill>
+          <a:ln/>
+        </p:spPr>
+      </p:sp>
+      <p:sp>
+        <p:nvSpPr>
+          <p:cNvPr id="10" name="Text 8"/>
+          <p:cNvSpPr/>
+          <p:nvPr/>
+        </p:nvSpPr>
+        <p:spPr>
+          <a:xfrm>
+            <a:off x="868680" y="1554480"/>
+            <a:ext cx="320040" cy="438912"/>
+          </a:xfrm>
+          <a:prstGeom prst="rect">
+            <a:avLst/>
+          </a:prstGeom>
+          <a:noFill/>
+          <a:ln/>
+        </p:spPr>
+        <p:txBody>
+          <a:bodyPr wrap="square" rtlCol="0" anchor="ctr"/>
+          <a:lstStyle/>
+          <a:p>
+            <a:pPr indent="0" marL="0">
+              <a:buNone/>
+            </a:pPr>
+            <a:r>
+              <a:rPr lang="en-US" sz="1400" dirty="0">
+                <a:solidFill>
+                  <a:srgbClr val="2A9D8F"/>
+                </a:solidFill>
+              </a:rPr>
+              <a:t>☐</a:t>
+            </a:r>
+            <a:endParaRPr lang="en-US" sz="1400" dirty="0"/>
+          </a:p>
+        </p:txBody>
+      </p:sp>
+      <p:sp>
+        <p:nvSpPr>
+          <p:cNvPr id="11" name="Text 9"/>
+          <p:cNvSpPr/>
+          <p:nvPr/>
+        </p:nvSpPr>
+        <p:spPr>
+          <a:xfrm>
+            <a:off x="1234440" y="1554480"/>
+            <a:ext cx="6949440" cy="438912"/>
+          </a:xfrm>
+          <a:prstGeom prst="rect">
+            <a:avLst/>
+          </a:prstGeom>
+          <a:noFill/>
+          <a:ln/>
+        </p:spPr>
+        <p:txBody>
+          <a:bodyPr wrap="square" rtlCol="0" anchor="ctr"/>
+          <a:lstStyle/>
+          <a:p>
+            <a:pPr indent="0" marL="0">
+              <a:buNone/>
+            </a:pPr>
+            <a:r>
+              <a:rPr lang="en-US" sz="1300" dirty="0">
+                <a:solidFill>
+                  <a:srgbClr val="3D3A36"/>
+                </a:solidFill>
+                <a:latin typeface="Calibri" pitchFamily="34" charset="0"/>
+                <a:ea typeface="Calibri" pitchFamily="34" charset="-122"/>
+                <a:cs typeface="Calibri" pitchFamily="34" charset="-120"/>
+              </a:rPr>
+              <a:t>I can write a testable hypothesis</a:t>
+            </a:r>
+            <a:endParaRPr lang="en-US" sz="1300" dirty="0"/>
+          </a:p>
+        </p:txBody>
+      </p:sp>
+      <p:sp>
+        <p:nvSpPr>
+          <p:cNvPr id="12" name="Shape 10"/>
+          <p:cNvSpPr/>
+          <p:nvPr/>
+        </p:nvSpPr>
+        <p:spPr>
+          <a:xfrm>
+            <a:off x="731520" y="2057400"/>
+            <a:ext cx="7680960" cy="438912"/>
+          </a:xfrm>
+          <a:prstGeom prst="rect">
+            <a:avLst/>
+          </a:prstGeom>
+          <a:solidFill>
+            <a:srgbClr val="FFFFFF"/>
+          </a:solidFill>
+          <a:ln/>
+        </p:spPr>
+      </p:sp>
+      <p:sp>
+        <p:nvSpPr>
+          <p:cNvPr id="13" name="Text 11"/>
+          <p:cNvSpPr/>
+          <p:nvPr/>
+        </p:nvSpPr>
+        <p:spPr>
+          <a:xfrm>
+            <a:off x="868680" y="2057400"/>
+            <a:ext cx="320040" cy="438912"/>
+          </a:xfrm>
+          <a:prstGeom prst="rect">
+            <a:avLst/>
+          </a:prstGeom>
+          <a:noFill/>
+          <a:ln/>
+        </p:spPr>
+        <p:txBody>
+          <a:bodyPr wrap="square" rtlCol="0" anchor="ctr"/>
+          <a:lstStyle/>
+          <a:p>
+            <a:pPr indent="0" marL="0">
+              <a:buNone/>
+            </a:pPr>
+            <a:r>
+              <a:rPr lang="en-US" sz="1400" dirty="0">
+                <a:solidFill>
+                  <a:srgbClr val="2A9D8F"/>
+                </a:solidFill>
+              </a:rPr>
+              <a:t>☐</a:t>
+            </a:r>
+            <a:endParaRPr lang="en-US" sz="1400" dirty="0"/>
+          </a:p>
+        </p:txBody>
+      </p:sp>
+      <p:sp>
+        <p:nvSpPr>
+          <p:cNvPr id="14" name="Text 12"/>
+          <p:cNvSpPr/>
+          <p:nvPr/>
+        </p:nvSpPr>
+        <p:spPr>
+          <a:xfrm>
+            <a:off x="1234440" y="2057400"/>
+            <a:ext cx="6949440" cy="438912"/>
+          </a:xfrm>
+          <a:prstGeom prst="rect">
+            <a:avLst/>
+          </a:prstGeom>
+          <a:noFill/>
+          <a:ln/>
+        </p:spPr>
+        <p:txBody>
+          <a:bodyPr wrap="square" rtlCol="0" anchor="ctr"/>
+          <a:lstStyle/>
+          <a:p>
+            <a:pPr indent="0" marL="0">
+              <a:buNone/>
+            </a:pPr>
+            <a:r>
+              <a:rPr lang="en-US" sz="1300" dirty="0">
+                <a:solidFill>
+                  <a:srgbClr val="3D3A36"/>
+                </a:solidFill>
+                <a:latin typeface="Calibri" pitchFamily="34" charset="0"/>
+                <a:ea typeface="Calibri" pitchFamily="34" charset="-122"/>
+                <a:cs typeface="Calibri" pitchFamily="34" charset="-120"/>
+              </a:rPr>
+              <a:t>I can identify variables in an experiment</a:t>
+            </a:r>
+            <a:endParaRPr lang="en-US" sz="1300" dirty="0"/>
+          </a:p>
+        </p:txBody>
+      </p:sp>
+      <p:sp>
+        <p:nvSpPr>
+          <p:cNvPr id="15" name="Shape 13"/>
+          <p:cNvSpPr/>
+          <p:nvPr/>
+        </p:nvSpPr>
+        <p:spPr>
+          <a:xfrm>
+            <a:off x="731520" y="2560320"/>
+            <a:ext cx="7680960" cy="438912"/>
+          </a:xfrm>
+          <a:prstGeom prst="rect">
+            <a:avLst/>
+          </a:prstGeom>
+          <a:solidFill>
+            <a:srgbClr val="F8F6F3"/>
+          </a:solidFill>
+          <a:ln/>
+        </p:spPr>
+      </p:sp>
+      <p:sp>
+        <p:nvSpPr>
+          <p:cNvPr id="16" name="Text 14"/>
+          <p:cNvSpPr/>
+          <p:nvPr/>
+        </p:nvSpPr>
+        <p:spPr>
+          <a:xfrm>
+            <a:off x="868680" y="2560320"/>
+            <a:ext cx="320040" cy="438912"/>
+          </a:xfrm>
+          <a:prstGeom prst="rect">
+            <a:avLst/>
+          </a:prstGeom>
+          <a:noFill/>
+          <a:ln/>
+        </p:spPr>
+        <p:txBody>
+          <a:bodyPr wrap="square" rtlCol="0" anchor="ctr"/>
+          <a:lstStyle/>
+          <a:p>
+            <a:pPr indent="0" marL="0">
+              <a:buNone/>
+            </a:pPr>
+            <a:r>
+              <a:rPr lang="en-US" sz="1400" dirty="0">
+                <a:solidFill>
+                  <a:srgbClr val="2A9D8F"/>
+                </a:solidFill>
+              </a:rPr>
+              <a:t>☐</a:t>
+            </a:r>
+            <a:endParaRPr lang="en-US" sz="1400" dirty="0"/>
+          </a:p>
+        </p:txBody>
+      </p:sp>
+      <p:sp>
+        <p:nvSpPr>
+          <p:cNvPr id="17" name="Text 15"/>
+          <p:cNvSpPr/>
+          <p:nvPr/>
+        </p:nvSpPr>
+        <p:spPr>
+          <a:xfrm>
+            <a:off x="1234440" y="2560320"/>
+            <a:ext cx="6949440" cy="438912"/>
+          </a:xfrm>
+          <a:prstGeom prst="rect">
+            <a:avLst/>
+          </a:prstGeom>
+          <a:noFill/>
+          <a:ln/>
+        </p:spPr>
+        <p:txBody>
+          <a:bodyPr wrap="square" rtlCol="0" anchor="ctr"/>
+          <a:lstStyle/>
+          <a:p>
+            <a:pPr indent="0" marL="0">
+              <a:buNone/>
+            </a:pPr>
+            <a:r>
+              <a:rPr lang="en-US" sz="1300" dirty="0">
+                <a:solidFill>
+                  <a:srgbClr val="3D3A36"/>
+                </a:solidFill>
+                <a:latin typeface="Calibri" pitchFamily="34" charset="0"/>
+                <a:ea typeface="Calibri" pitchFamily="34" charset="-122"/>
+                <a:cs typeface="Calibri" pitchFamily="34" charset="-120"/>
+              </a:rPr>
+              <a:t>I know why we repeat experiments</a:t>
+            </a:r>
+            <a:endParaRPr lang="en-US" sz="1300" dirty="0"/>
+          </a:p>
+        </p:txBody>
+      </p:sp>
+      <p:sp>
+        <p:nvSpPr>
+          <p:cNvPr id="18" name="Shape 16"/>
+          <p:cNvSpPr/>
+          <p:nvPr/>
+        </p:nvSpPr>
+        <p:spPr>
+          <a:xfrm>
+            <a:off x="731520" y="3063240"/>
+            <a:ext cx="7680960" cy="438912"/>
+          </a:xfrm>
+          <a:prstGeom prst="rect">
+            <a:avLst/>
+          </a:prstGeom>
+          <a:solidFill>
+            <a:srgbClr val="FFFFFF"/>
+          </a:solidFill>
+          <a:ln/>
+        </p:spPr>
+      </p:sp>
+      <p:sp>
+        <p:nvSpPr>
+          <p:cNvPr id="19" name="Text 17"/>
+          <p:cNvSpPr/>
+          <p:nvPr/>
+        </p:nvSpPr>
+        <p:spPr>
+          <a:xfrm>
+            <a:off x="868680" y="3063240"/>
+            <a:ext cx="320040" cy="438912"/>
+          </a:xfrm>
+          <a:prstGeom prst="rect">
+            <a:avLst/>
+          </a:prstGeom>
+          <a:noFill/>
+          <a:ln/>
+        </p:spPr>
+        <p:txBody>
+          <a:bodyPr wrap="square" rtlCol="0" anchor="ctr"/>
+          <a:lstStyle/>
+          <a:p>
+            <a:pPr indent="0" marL="0">
+              <a:buNone/>
+            </a:pPr>
+            <a:r>
+              <a:rPr lang="en-US" sz="1400" dirty="0">
+                <a:solidFill>
+                  <a:srgbClr val="2A9D8F"/>
+                </a:solidFill>
+              </a:rPr>
+              <a:t>☐</a:t>
+            </a:r>
+            <a:endParaRPr lang="en-US" sz="1400" dirty="0"/>
+          </a:p>
+        </p:txBody>
+      </p:sp>
+      <p:sp>
+        <p:nvSpPr>
+          <p:cNvPr id="20" name="Text 18"/>
+          <p:cNvSpPr/>
+          <p:nvPr/>
+        </p:nvSpPr>
+        <p:spPr>
+          <a:xfrm>
+            <a:off x="1234440" y="3063240"/>
+            <a:ext cx="6949440" cy="438912"/>
+          </a:xfrm>
+          <a:prstGeom prst="rect">
+            <a:avLst/>
+          </a:prstGeom>
+          <a:noFill/>
+          <a:ln/>
+        </p:spPr>
+        <p:txBody>
+          <a:bodyPr wrap="square" rtlCol="0" anchor="ctr"/>
+          <a:lstStyle/>
+          <a:p>
+            <a:pPr indent="0" marL="0">
+              <a:buNone/>
+            </a:pPr>
+            <a:r>
+              <a:rPr lang="en-US" sz="1300" dirty="0">
+                <a:solidFill>
+                  <a:srgbClr val="3D3A36"/>
+                </a:solidFill>
+                <a:latin typeface="Calibri" pitchFamily="34" charset="0"/>
+                <a:ea typeface="Calibri" pitchFamily="34" charset="-122"/>
+                <a:cs typeface="Calibri" pitchFamily="34" charset="-120"/>
+              </a:rPr>
+              <a:t>I can draw a conclusion from results</a:t>
+            </a:r>
+            <a:endParaRPr lang="en-US" sz="1300" dirty="0"/>
+          </a:p>
+        </p:txBody>
+      </p:sp>
+      <p:sp>
+        <p:nvSpPr>
+          <p:cNvPr id="21" name="Shape 19"/>
+          <p:cNvSpPr/>
+          <p:nvPr/>
+        </p:nvSpPr>
+        <p:spPr>
+          <a:xfrm>
+            <a:off x="731520" y="3749040"/>
+            <a:ext cx="7680960" cy="594360"/>
+          </a:xfrm>
+          <a:prstGeom prst="rect">
+            <a:avLst/>
+          </a:prstGeom>
+          <a:solidFill>
+            <a:srgbClr val="E8F5F3"/>
+          </a:solidFill>
+          <a:ln/>
+          <a:effectLst>
+            <a:outerShdw sx="100000" sy="100000" kx="0" ky="0" algn="bl" rotWithShape="0" blurRad="50800" dist="25400" dir="8100000">
+              <a:srgbClr val="000000">
+                <a:alpha val="10000"/>
+              </a:srgbClr>
+            </a:outerShdw>
+          </a:effectLst>
+        </p:spPr>
+      </p:sp>
+      <p:sp>
+        <p:nvSpPr>
+          <p:cNvPr id="22" name="Text 20"/>
+          <p:cNvSpPr/>
+          <p:nvPr/>
+        </p:nvSpPr>
+        <p:spPr>
+          <a:xfrm>
+            <a:off x="914400" y="3749040"/>
+            <a:ext cx="7315200" cy="594360"/>
+          </a:xfrm>
+          <a:prstGeom prst="rect">
+            <a:avLst/>
+          </a:prstGeom>
+          <a:noFill/>
+          <a:ln/>
+        </p:spPr>
+        <p:txBody>
+          <a:bodyPr wrap="square" rtlCol="0" anchor="ctr"/>
+          <a:lstStyle/>
+          <a:p>
+            <a:pPr indent="0" marL="0">
+              <a:buNone/>
+            </a:pPr>
+            <a:r>
+              <a:rPr lang="en-US" sz="1200" b="1" dirty="0">
+                <a:solidFill>
+                  <a:srgbClr val="2A9D8F"/>
+                </a:solidFill>
+                <a:latin typeface="Calibri" pitchFamily="34" charset="0"/>
+                <a:ea typeface="Calibri" pitchFamily="34" charset="-122"/>
+                <a:cs typeface="Calibri" pitchFamily="34" charset="-120"/>
+              </a:rPr>
+              <a:t>Key Idea: </a:t>
+            </a:r>
+            <a:pPr indent="0" marL="0">
+              <a:buNone/>
+            </a:pPr>
+            <a:r>
+              <a:rPr lang="en-US" sz="1200" i="1" dirty="0">
+                <a:solidFill>
+                  <a:srgbClr val="3D3A36"/>
+                </a:solidFill>
+                <a:latin typeface="Calibri" pitchFamily="34" charset="0"/>
+                <a:ea typeface="Calibri" pitchFamily="34" charset="-122"/>
+                <a:cs typeface="Calibri" pitchFamily="34" charset="-120"/>
+              </a:rPr>
+              <a:t>Science is about asking questions and finding answers through careful investigation.</a:t>
+            </a:r>
+            <a:endParaRPr lang="en-US" sz="1200" dirty="0"/>
+          </a:p>
+        </p:txBody>
+      </p:sp>
+    </p:spTree>
+  </p:cSld>
+  <p:clrMapOvr>
+    <a:masterClrMapping/>
+  </p:clrMapOvr>
+</p:sld>
+</file>
+
+<file path=ppt/slides/slide9.xml><?xml version="1.0" encoding="utf-8"?>
+<p:sld xmlns:a="http://schemas.openxmlformats.org/drawingml/2006/main" xmlns:r="http://schemas.openxmlformats.org/officeDocument/2006/relationships" xmlns:p="http://schemas.openxmlformats.org/presentationml/2006/main">
+  <p:cSld name="Slide 9">
+    <p:spTree>
+      <p:nvGrpSpPr>
+        <p:cNvPr id="1" name=""/>
+        <p:cNvGrpSpPr/>
+        <p:nvPr/>
+      </p:nvGrpSpPr>
+      <p:grpSpPr>
+        <a:xfrm>
+          <a:off x="0" y="0"/>
+          <a:ext cx="0" cy="0"/>
+          <a:chOff x="0" y="0"/>
+          <a:chExt cx="0" cy="0"/>
+        </a:xfrm>
+      </p:grpSpPr>
+      <p:sp>
+        <p:nvSpPr>
+          <p:cNvPr id="2" name="Shape 0"/>
+          <p:cNvSpPr/>
+          <p:nvPr/>
+        </p:nvSpPr>
+        <p:spPr>
+          <a:xfrm>
+            <a:off x="0" y="0"/>
+            <a:ext cx="9144000" cy="5143500"/>
+          </a:xfrm>
+          <a:prstGeom prst="rect">
+            <a:avLst/>
+          </a:prstGeom>
+          <a:solidFill>
+            <a:srgbClr val="1B2A4A"/>
+          </a:solidFill>
+          <a:ln/>
+        </p:spPr>
+      </p:sp>
+      <p:sp>
+        <p:nvSpPr>
+          <p:cNvPr id="3" name="Shape 1"/>
+          <p:cNvSpPr/>
+          <p:nvPr/>
+        </p:nvSpPr>
+        <p:spPr>
+          <a:xfrm>
+            <a:off x="0" y="4777740"/>
+            <a:ext cx="9144000" cy="365760"/>
+          </a:xfrm>
+          <a:prstGeom prst="rect">
+            <a:avLst/>
+          </a:prstGeom>
+          <a:solidFill>
+            <a:srgbClr val="2A9D8F"/>
+          </a:solidFill>
+          <a:ln/>
+        </p:spPr>
+      </p:sp>
+      <p:sp>
+        <p:nvSpPr>
+          <p:cNvPr id="4" name="Shape 2"/>
+          <p:cNvSpPr/>
+          <p:nvPr/>
+        </p:nvSpPr>
+        <p:spPr>
+          <a:xfrm>
+            <a:off x="-914400" y="-914400"/>
+            <a:ext cx="3657600" cy="3657600"/>
+          </a:xfrm>
+          <a:prstGeom prst="ellipse">
+            <a:avLst/>
+          </a:prstGeom>
+          <a:solidFill>
+            <a:srgbClr val="2A9D8F">
+              <a:alpha val="10000"/>
+            </a:srgbClr>
+          </a:solidFill>
+          <a:ln/>
+        </p:spPr>
+      </p:sp>
+      <p:sp>
+        <p:nvSpPr>
+          <p:cNvPr id="5" name="Text 3"/>
+          <p:cNvSpPr/>
+          <p:nvPr/>
+        </p:nvSpPr>
+        <p:spPr>
+          <a:xfrm>
+            <a:off x="731520" y="1463040"/>
+            <a:ext cx="7680960" cy="822960"/>
+          </a:xfrm>
+          <a:prstGeom prst="rect">
+            <a:avLst/>
+          </a:prstGeom>
+          <a:noFill/>
+          <a:ln/>
+        </p:spPr>
+        <p:txBody>
+          <a:bodyPr wrap="square" rtlCol="0" anchor="ctr"/>
+          <a:lstStyle/>
+          <a:p>
+            <a:pPr algn="ctr" indent="0" marL="0">
+              <a:buNone/>
+            </a:pPr>
+            <a:r>
+              <a:rPr lang="en-US" sz="3400" b="1" dirty="0">
+                <a:solidFill>
+                  <a:srgbClr val="FFFFFF"/>
+                </a:solidFill>
+                <a:latin typeface="Georgia" pitchFamily="34" charset="0"/>
+                <a:ea typeface="Georgia" pitchFamily="34" charset="-122"/>
+                <a:cs typeface="Georgia" pitchFamily="34" charset="-120"/>
+              </a:rPr>
+              <a:t>Review &amp; Practise</a:t>
+            </a:r>
+            <a:endParaRPr lang="en-US" sz="3400" dirty="0"/>
+          </a:p>
+        </p:txBody>
+      </p:sp>
+      <p:sp>
+        <p:nvSpPr>
+          <p:cNvPr id="6" name="Text 4"/>
+          <p:cNvSpPr/>
+          <p:nvPr/>
+        </p:nvSpPr>
+        <p:spPr>
+          <a:xfrm>
+            <a:off x="731520" y="2468880"/>
+            <a:ext cx="7680960" cy="457200"/>
+          </a:xfrm>
+          <a:prstGeom prst="rect">
+            <a:avLst/>
+          </a:prstGeom>
+          <a:noFill/>
+          <a:ln/>
+        </p:spPr>
+        <p:txBody>
+          <a:bodyPr wrap="square" rtlCol="0" anchor="ctr"/>
+          <a:lstStyle/>
+          <a:p>
+            <a:pPr algn="ctr" indent="0" marL="0">
+              <a:buNone/>
+            </a:pPr>
+            <a:r>
+              <a:rPr lang="en-US" sz="1800" dirty="0">
+                <a:solidFill>
+                  <a:srgbClr val="2A9D8F"/>
+                </a:solidFill>
+                <a:latin typeface="Calibri" pitchFamily="34" charset="0"/>
+                <a:ea typeface="Calibri" pitchFamily="34" charset="-122"/>
+                <a:cs typeface="Calibri" pitchFamily="34" charset="-120"/>
+              </a:rPr>
               <a:t>mrzocchi.com</a:t>
             </a:r>
-            <a:endParaRPr lang="en-US" sz="1100" dirty="0"/>
+            <a:endParaRPr lang="en-US" sz="1800" dirty="0"/>
+          </a:p>
+        </p:txBody>
+      </p:sp>
+      <p:sp>
+        <p:nvSpPr>
+          <p:cNvPr id="7" name="Text 5"/>
+          <p:cNvSpPr/>
+          <p:nvPr/>
+        </p:nvSpPr>
+        <p:spPr>
+          <a:xfrm>
+            <a:off x="731520" y="3108960"/>
+            <a:ext cx="7680960" cy="457200"/>
+          </a:xfrm>
+          <a:prstGeom prst="rect">
+            <a:avLst/>
+          </a:prstGeom>
+          <a:noFill/>
+          <a:ln/>
+        </p:spPr>
+        <p:txBody>
+          <a:bodyPr wrap="square" rtlCol="0" anchor="ctr"/>
+          <a:lstStyle/>
+          <a:p>
+            <a:pPr algn="ctr" indent="0" marL="0">
+              <a:buNone/>
+            </a:pPr>
+            <a:r>
+              <a:rPr lang="en-US" sz="1300" dirty="0">
+                <a:solidFill>
+                  <a:srgbClr val="9B9690"/>
+                </a:solidFill>
+                <a:latin typeface="Calibri" pitchFamily="34" charset="0"/>
+                <a:ea typeface="Calibri" pitchFamily="34" charset="-122"/>
+                <a:cs typeface="Calibri" pitchFamily="34" charset="-120"/>
+              </a:rPr>
+              <a:t>Use the Self-Quiz, Review Games, and Practice Builder to test yourself.</a:t>
+            </a:r>
+            <a:endParaRPr lang="en-US" sz="1300" dirty="0"/>
           </a:p>
         </p:txBody>
       </p:sp>

--- a/static/ppts/G6_Sci_T1_Scientific_Method.pptx
+++ b/static/ppts/G6_Sci_T1_Scientific_Method.pptx
@@ -18,8 +18,8 @@
   <p:notesMasterIdLst>
     <p:notesMasterId r:id="rId11"/>
   </p:notesMasterIdLst>
-  <p:sldSz cx="9144000" cy="5143500"/>
-  <p:notesSz cx="5143500" cy="9144000"/>
+  <p:sldSz cx="12192000" cy="6858000"/>
+  <p:notesSz cx="6858000" cy="12192000"/>
   <p:defaultTextStyle>
     <a:lvl1pPr marL="0" algn="l" defTabSz="914400" rtl="0" eaLnBrk="1" latinLnBrk="0" hangingPunct="1">
       <a:defRPr sz="1800" kern="1200">
@@ -1566,6 +1566,13 @@
 <file path=ppt/slides/slide1.xml><?xml version="1.0" encoding="utf-8"?>
 <p:sld xmlns:a="http://schemas.openxmlformats.org/drawingml/2006/main" xmlns:r="http://schemas.openxmlformats.org/officeDocument/2006/relationships" xmlns:p="http://schemas.openxmlformats.org/presentationml/2006/main">
   <p:cSld name="Slide 1">
+    <p:bg>
+      <p:bgPr>
+        <a:solidFill>
+          <a:srgbClr val="2A9D8F"/>
+        </a:solidFill>
+      </p:bgPr>
+    </p:bg>
     <p:spTree>
       <p:nvGrpSpPr>
         <p:cNvPr id="1" name=""/>
@@ -1588,55 +1595,15 @@
         </p:nvSpPr>
         <p:spPr>
           <a:xfrm>
-            <a:off x="0" y="0"/>
-            <a:ext cx="9144000" cy="5143500"/>
-          </a:xfrm>
-          <a:prstGeom prst="rect">
+            <a:off x="7772400" y="-914400"/>
+            <a:ext cx="3657600" cy="3657600"/>
+          </a:xfrm>
+          <a:prstGeom prst="ellipse">
             <a:avLst/>
           </a:prstGeom>
           <a:solidFill>
-            <a:srgbClr val="1B2A4A"/>
-          </a:solidFill>
-          <a:ln/>
-        </p:spPr>
-      </p:sp>
-      <p:sp>
-        <p:nvSpPr>
-          <p:cNvPr id="3" name="Shape 1"/>
-          <p:cNvSpPr/>
-          <p:nvPr/>
-        </p:nvSpPr>
-        <p:spPr>
-          <a:xfrm>
-            <a:off x="0" y="4777740"/>
-            <a:ext cx="9144000" cy="365760"/>
-          </a:xfrm>
-          <a:prstGeom prst="rect">
-            <a:avLst/>
-          </a:prstGeom>
-          <a:solidFill>
-            <a:srgbClr val="2A9D8F"/>
-          </a:solidFill>
-          <a:ln/>
-        </p:spPr>
-      </p:sp>
-      <p:sp>
-        <p:nvSpPr>
-          <p:cNvPr id="4" name="Shape 2"/>
-          <p:cNvSpPr/>
-          <p:nvPr/>
-        </p:nvSpPr>
-        <p:spPr>
-          <a:xfrm>
-            <a:off x="6858000" y="-1371600"/>
-            <a:ext cx="4572000" cy="4572000"/>
-          </a:xfrm>
-          <a:prstGeom prst="ellipse">
-            <a:avLst/>
-          </a:prstGeom>
-          <a:solidFill>
-            <a:srgbClr val="2A9D8F">
-              <a:alpha val="12000"/>
+            <a:srgbClr val="FFFFFF">
+              <a:alpha val="8000"/>
             </a:srgbClr>
           </a:solidFill>
           <a:ln/>
@@ -1644,14 +1611,14 @@
       </p:sp>
       <p:sp>
         <p:nvSpPr>
-          <p:cNvPr id="5" name="Text 3"/>
-          <p:cNvSpPr/>
-          <p:nvPr/>
-        </p:nvSpPr>
-        <p:spPr>
-          <a:xfrm>
-            <a:off x="731520" y="914400"/>
-            <a:ext cx="7680960" cy="457200"/>
+          <p:cNvPr id="3" name="Text 1"/>
+          <p:cNvSpPr/>
+          <p:nvPr/>
+        </p:nvSpPr>
+        <p:spPr>
+          <a:xfrm>
+            <a:off x="731520" y="548640"/>
+            <a:ext cx="7315200" cy="365760"/>
           </a:xfrm>
           <a:prstGeom prst="rect">
             <a:avLst/>
@@ -1667,30 +1634,30 @@
               <a:buNone/>
             </a:pPr>
             <a:r>
-              <a:rPr lang="en-US" sz="1300" b="1" spc="500" kern="0" dirty="0">
-                <a:solidFill>
-                  <a:srgbClr val="2A9D8F"/>
-                </a:solidFill>
-                <a:latin typeface="Calibri" pitchFamily="34" charset="0"/>
-                <a:ea typeface="Calibri" pitchFamily="34" charset="-122"/>
-                <a:cs typeface="Calibri" pitchFamily="34" charset="-120"/>
+              <a:rPr lang="en-US" sz="1100" b="1" dirty="0">
+                <a:solidFill>
+                  <a:srgbClr val="F2D68A"/>
+                </a:solidFill>
+                <a:latin typeface="Arial" pitchFamily="34" charset="0"/>
+                <a:ea typeface="Arial" pitchFamily="34" charset="-122"/>
+                <a:cs typeface="Arial" pitchFamily="34" charset="-120"/>
               </a:rPr>
               <a:t>GRADE 6 SCIENCE</a:t>
             </a:r>
-            <a:endParaRPr lang="en-US" sz="1300" dirty="0"/>
-          </a:p>
-        </p:txBody>
-      </p:sp>
-      <p:sp>
-        <p:nvSpPr>
-          <p:cNvPr id="6" name="Text 4"/>
-          <p:cNvSpPr/>
-          <p:nvPr/>
-        </p:nvSpPr>
-        <p:spPr>
-          <a:xfrm>
-            <a:off x="731520" y="1463040"/>
-            <a:ext cx="6858000" cy="1645920"/>
+            <a:endParaRPr lang="en-US" sz="1100" dirty="0"/>
+          </a:p>
+        </p:txBody>
+      </p:sp>
+      <p:sp>
+        <p:nvSpPr>
+          <p:cNvPr id="4" name="Text 2"/>
+          <p:cNvSpPr/>
+          <p:nvPr/>
+        </p:nvSpPr>
+        <p:spPr>
+          <a:xfrm>
+            <a:off x="731520" y="1371600"/>
+            <a:ext cx="9144000" cy="1645920"/>
           </a:xfrm>
           <a:prstGeom prst="rect">
             <a:avLst/>
@@ -1699,14 +1666,17 @@
           <a:ln/>
         </p:spPr>
         <p:txBody>
-          <a:bodyPr wrap="square" rtlCol="0" anchor="t"/>
+          <a:bodyPr wrap="square" rtlCol="0" anchor="ctr"/>
           <a:lstStyle/>
           <a:p>
             <a:pPr indent="0" marL="0">
+              <a:lnSpc>
+                <a:spcPct val="110000"/>
+              </a:lnSpc>
               <a:buNone/>
             </a:pPr>
             <a:r>
-              <a:rPr lang="en-US" sz="3800" b="1" dirty="0">
+              <a:rPr lang="en-US" sz="3600" b="1" dirty="0">
                 <a:solidFill>
                   <a:srgbClr val="FFFFFF"/>
                 </a:solidFill>
@@ -1716,20 +1686,20 @@
               </a:rPr>
               <a:t>The Scientific Method</a:t>
             </a:r>
-            <a:endParaRPr lang="en-US" sz="3800" dirty="0"/>
-          </a:p>
-        </p:txBody>
-      </p:sp>
-      <p:sp>
-        <p:nvSpPr>
-          <p:cNvPr id="7" name="Text 5"/>
+            <a:endParaRPr lang="en-US" sz="3600" dirty="0"/>
+          </a:p>
+        </p:txBody>
+      </p:sp>
+      <p:sp>
+        <p:nvSpPr>
+          <p:cNvPr id="5" name="Text 3"/>
           <p:cNvSpPr/>
           <p:nvPr/>
         </p:nvSpPr>
         <p:spPr>
           <a:xfrm>
             <a:off x="731520" y="3200400"/>
-            <a:ext cx="6400800" cy="548640"/>
+            <a:ext cx="7315200" cy="548640"/>
           </a:xfrm>
           <a:prstGeom prst="rect">
             <a:avLst/>
@@ -1745,13 +1715,15 @@
               <a:buNone/>
             </a:pPr>
             <a:r>
-              <a:rPr lang="en-US" sz="1600" i="1" dirty="0">
-                <a:solidFill>
-                  <a:srgbClr val="9B9690"/>
-                </a:solidFill>
-                <a:latin typeface="Calibri" pitchFamily="34" charset="0"/>
-                <a:ea typeface="Calibri" pitchFamily="34" charset="-122"/>
-                <a:cs typeface="Calibri" pitchFamily="34" charset="-120"/>
+              <a:rPr lang="en-US" sz="1600" dirty="0">
+                <a:solidFill>
+                  <a:srgbClr val="FFFFFF">
+                    <a:alpha val="65000"/>
+                  </a:srgbClr>
+                </a:solidFill>
+                <a:latin typeface="Arial" pitchFamily="34" charset="0"/>
+                <a:ea typeface="Arial" pitchFamily="34" charset="-122"/>
+                <a:cs typeface="Arial" pitchFamily="34" charset="-120"/>
               </a:rPr>
               <a:t>How scientists investigate the world</a:t>
             </a:r>
@@ -1761,14 +1733,14 @@
       </p:sp>
       <p:sp>
         <p:nvSpPr>
-          <p:cNvPr id="8" name="Text 6"/>
-          <p:cNvSpPr/>
-          <p:nvPr/>
-        </p:nvSpPr>
-        <p:spPr>
-          <a:xfrm>
-            <a:off x="731520" y="4297680"/>
-            <a:ext cx="2743200" cy="365760"/>
+          <p:cNvPr id="6" name="Text 4"/>
+          <p:cNvSpPr/>
+          <p:nvPr/>
+        </p:nvSpPr>
+        <p:spPr>
+          <a:xfrm>
+            <a:off x="731520" y="4389120"/>
+            <a:ext cx="2743200" cy="320040"/>
           </a:xfrm>
           <a:prstGeom prst="rect">
             <a:avLst/>
@@ -1784,17 +1756,19 @@
               <a:buNone/>
             </a:pPr>
             <a:r>
-              <a:rPr lang="en-US" sz="1100" dirty="0">
-                <a:solidFill>
-                  <a:srgbClr val="9B9690"/>
-                </a:solidFill>
-                <a:latin typeface="Calibri" pitchFamily="34" charset="0"/>
-                <a:ea typeface="Calibri" pitchFamily="34" charset="-122"/>
-                <a:cs typeface="Calibri" pitchFamily="34" charset="-120"/>
+              <a:rPr lang="en-US" sz="1000" dirty="0">
+                <a:solidFill>
+                  <a:srgbClr val="FFFFFF">
+                    <a:alpha val="40000"/>
+                  </a:srgbClr>
+                </a:solidFill>
+                <a:latin typeface="Arial" pitchFamily="34" charset="0"/>
+                <a:ea typeface="Arial" pitchFamily="34" charset="-122"/>
+                <a:cs typeface="Arial" pitchFamily="34" charset="-120"/>
               </a:rPr>
               <a:t>mrzocchi.com</a:t>
             </a:r>
-            <a:endParaRPr lang="en-US" sz="1100" dirty="0"/>
+            <a:endParaRPr lang="en-US" sz="1000" dirty="0"/>
           </a:p>
         </p:txBody>
       </p:sp>
@@ -1839,67 +1813,113 @@
         <p:spPr>
           <a:xfrm>
             <a:off x="0" y="0"/>
-            <a:ext cx="9144000" cy="822960"/>
-          </a:xfrm>
-          <a:prstGeom prst="rect">
-            <a:avLst/>
+            <a:ext cx="73152" cy="5148072"/>
+          </a:xfrm>
+          <a:prstGeom prst="rect">
+            <a:avLst/>
+          </a:prstGeom>
+          <a:solidFill>
+            <a:srgbClr val="2A9D8F"/>
+          </a:solidFill>
+          <a:ln/>
+        </p:spPr>
+      </p:sp>
+      <p:sp>
+        <p:nvSpPr>
+          <p:cNvPr id="3" name="Text 1"/>
+          <p:cNvSpPr/>
+          <p:nvPr/>
+        </p:nvSpPr>
+        <p:spPr>
+          <a:xfrm>
+            <a:off x="548640" y="274320"/>
+            <a:ext cx="9144000" cy="640080"/>
+          </a:xfrm>
+          <a:prstGeom prst="rect">
+            <a:avLst/>
+          </a:prstGeom>
+          <a:noFill/>
+          <a:ln/>
+        </p:spPr>
+        <p:txBody>
+          <a:bodyPr wrap="square" rtlCol="0" anchor="ctr"/>
+          <a:lstStyle/>
+          <a:p>
+            <a:pPr indent="0" marL="0">
+              <a:buNone/>
+            </a:pPr>
+            <a:r>
+              <a:rPr lang="en-US" sz="2400" b="1" dirty="0">
+                <a:solidFill>
+                  <a:srgbClr val="1B2A4A"/>
+                </a:solidFill>
+                <a:latin typeface="Georgia" pitchFamily="34" charset="0"/>
+                <a:ea typeface="Georgia" pitchFamily="34" charset="-122"/>
+                <a:cs typeface="Georgia" pitchFamily="34" charset="-120"/>
+              </a:rPr>
+              <a:t>Key Vocabulary</a:t>
+            </a:r>
+            <a:endParaRPr lang="en-US" sz="2400" dirty="0"/>
+          </a:p>
+        </p:txBody>
+      </p:sp>
+      <p:sp>
+        <p:nvSpPr>
+          <p:cNvPr id="4" name="Shape 2"/>
+          <p:cNvSpPr/>
+          <p:nvPr/>
+        </p:nvSpPr>
+        <p:spPr>
+          <a:xfrm>
+            <a:off x="548640" y="960120"/>
+            <a:ext cx="2286000" cy="36576"/>
+          </a:xfrm>
+          <a:prstGeom prst="rect">
+            <a:avLst/>
+          </a:prstGeom>
+          <a:solidFill>
+            <a:srgbClr val="2A9D8F"/>
+          </a:solidFill>
+          <a:ln/>
+        </p:spPr>
+      </p:sp>
+      <p:sp>
+        <p:nvSpPr>
+          <p:cNvPr id="5" name="Shape 3"/>
+          <p:cNvSpPr/>
+          <p:nvPr/>
+        </p:nvSpPr>
+        <p:spPr>
+          <a:xfrm>
+            <a:off x="548640" y="1234440"/>
+            <a:ext cx="3200400" cy="914400"/>
+          </a:xfrm>
+          <a:prstGeom prst="roundRect">
+            <a:avLst>
+              <a:gd name="adj" fmla="val 10000"/>
+            </a:avLst>
           </a:prstGeom>
           <a:solidFill>
             <a:srgbClr val="FFFFFF"/>
           </a:solidFill>
-          <a:ln/>
-        </p:spPr>
-      </p:sp>
-      <p:sp>
-        <p:nvSpPr>
-          <p:cNvPr id="3" name="Shape 1"/>
-          <p:cNvSpPr/>
-          <p:nvPr/>
-        </p:nvSpPr>
-        <p:spPr>
-          <a:xfrm>
-            <a:off x="0" y="804672"/>
-            <a:ext cx="9144000" cy="27432"/>
-          </a:xfrm>
-          <a:prstGeom prst="rect">
-            <a:avLst/>
-          </a:prstGeom>
-          <a:solidFill>
-            <a:srgbClr val="E5E2DC"/>
-          </a:solidFill>
-          <a:ln/>
-        </p:spPr>
-      </p:sp>
-      <p:sp>
-        <p:nvSpPr>
-          <p:cNvPr id="4" name="Shape 2"/>
-          <p:cNvSpPr/>
-          <p:nvPr/>
-        </p:nvSpPr>
-        <p:spPr>
-          <a:xfrm>
-            <a:off x="548640" y="201168"/>
-            <a:ext cx="54864" cy="420624"/>
-          </a:xfrm>
-          <a:prstGeom prst="rect">
-            <a:avLst/>
-          </a:prstGeom>
-          <a:solidFill>
-            <a:srgbClr val="2A9D8F"/>
-          </a:solidFill>
-          <a:ln/>
-        </p:spPr>
-      </p:sp>
-      <p:sp>
-        <p:nvSpPr>
-          <p:cNvPr id="5" name="Text 3"/>
-          <p:cNvSpPr/>
-          <p:nvPr/>
-        </p:nvSpPr>
-        <p:spPr>
-          <a:xfrm>
-            <a:off x="777240" y="137160"/>
-            <a:ext cx="7772400" cy="548640"/>
+          <a:ln w="9525">
+            <a:solidFill>
+              <a:srgbClr val="E5E2DC"/>
+            </a:solidFill>
+            <a:prstDash val="solid"/>
+          </a:ln>
+        </p:spPr>
+      </p:sp>
+      <p:sp>
+        <p:nvSpPr>
+          <p:cNvPr id="6" name="Text 4"/>
+          <p:cNvSpPr/>
+          <p:nvPr/>
+        </p:nvSpPr>
+        <p:spPr>
+          <a:xfrm>
+            <a:off x="685800" y="1307592"/>
+            <a:ext cx="2926080" cy="320040"/>
           </a:xfrm>
           <a:prstGeom prst="rect">
             <a:avLst/>
@@ -1908,84 +1928,106 @@
           <a:ln/>
         </p:spPr>
         <p:txBody>
-          <a:bodyPr wrap="square" lIns="0" tIns="0" rIns="0" bIns="0" rtlCol="0" anchor="ctr"/>
+          <a:bodyPr wrap="square" rtlCol="0" anchor="ctr"/>
           <a:lstStyle/>
           <a:p>
             <a:pPr indent="0" marL="0">
               <a:buNone/>
             </a:pPr>
             <a:r>
-              <a:rPr lang="en-US" sz="2000" b="1" dirty="0">
-                <a:solidFill>
-                  <a:srgbClr val="1B2A4A"/>
+              <a:rPr lang="en-US" sz="1400" b="1" dirty="0">
+                <a:solidFill>
+                  <a:srgbClr val="2A9D8F"/>
                 </a:solidFill>
                 <a:latin typeface="Georgia" pitchFamily="34" charset="0"/>
                 <a:ea typeface="Georgia" pitchFamily="34" charset="-122"/>
                 <a:cs typeface="Georgia" pitchFamily="34" charset="-120"/>
               </a:rPr>
-              <a:t>Key Vocabulary</a:t>
-            </a:r>
-            <a:endParaRPr lang="en-US" sz="2000" dirty="0"/>
-          </a:p>
-        </p:txBody>
-      </p:sp>
-      <p:sp>
-        <p:nvSpPr>
-          <p:cNvPr id="6" name="Shape 4"/>
-          <p:cNvSpPr/>
-          <p:nvPr/>
-        </p:nvSpPr>
-        <p:spPr>
-          <a:xfrm>
-            <a:off x="731520" y="1051560"/>
-            <a:ext cx="3657600" cy="658368"/>
-          </a:xfrm>
-          <a:prstGeom prst="rect">
-            <a:avLst/>
+              <a:t>Hypothesis</a:t>
+            </a:r>
+            <a:endParaRPr lang="en-US" sz="1400" dirty="0"/>
+          </a:p>
+        </p:txBody>
+      </p:sp>
+      <p:sp>
+        <p:nvSpPr>
+          <p:cNvPr id="7" name="Text 5"/>
+          <p:cNvSpPr/>
+          <p:nvPr/>
+        </p:nvSpPr>
+        <p:spPr>
+          <a:xfrm>
+            <a:off x="685800" y="1645920"/>
+            <a:ext cx="2926080" cy="457200"/>
+          </a:xfrm>
+          <a:prstGeom prst="rect">
+            <a:avLst/>
+          </a:prstGeom>
+          <a:noFill/>
+          <a:ln/>
+        </p:spPr>
+        <p:txBody>
+          <a:bodyPr wrap="square" rtlCol="0" anchor="ctr"/>
+          <a:lstStyle/>
+          <a:p>
+            <a:pPr indent="0" marL="0">
+              <a:lnSpc>
+                <a:spcPct val="130000"/>
+              </a:lnSpc>
+              <a:buNone/>
+            </a:pPr>
+            <a:r>
+              <a:rPr lang="en-US" sz="1100" dirty="0">
+                <a:solidFill>
+                  <a:srgbClr val="6B6660"/>
+                </a:solidFill>
+                <a:latin typeface="Arial" pitchFamily="34" charset="0"/>
+                <a:ea typeface="Arial" pitchFamily="34" charset="-122"/>
+                <a:cs typeface="Arial" pitchFamily="34" charset="-120"/>
+              </a:rPr>
+              <a:t>A testable prediction — what you think will happen and why.</a:t>
+            </a:r>
+            <a:endParaRPr lang="en-US" sz="1100" dirty="0"/>
+          </a:p>
+        </p:txBody>
+      </p:sp>
+      <p:sp>
+        <p:nvSpPr>
+          <p:cNvPr id="8" name="Shape 6"/>
+          <p:cNvSpPr/>
+          <p:nvPr/>
+        </p:nvSpPr>
+        <p:spPr>
+          <a:xfrm>
+            <a:off x="4023360" y="1234440"/>
+            <a:ext cx="3200400" cy="914400"/>
+          </a:xfrm>
+          <a:prstGeom prst="roundRect">
+            <a:avLst>
+              <a:gd name="adj" fmla="val 10000"/>
+            </a:avLst>
           </a:prstGeom>
           <a:solidFill>
             <a:srgbClr val="FFFFFF"/>
           </a:solidFill>
-          <a:ln/>
-          <a:effectLst>
-            <a:outerShdw sx="100000" sy="100000" kx="0" ky="0" algn="bl" rotWithShape="0" blurRad="50800" dist="25400" dir="8100000">
-              <a:srgbClr val="000000">
-                <a:alpha val="10000"/>
-              </a:srgbClr>
-            </a:outerShdw>
-          </a:effectLst>
-        </p:spPr>
-      </p:sp>
-      <p:sp>
-        <p:nvSpPr>
-          <p:cNvPr id="7" name="Shape 5"/>
-          <p:cNvSpPr/>
-          <p:nvPr/>
-        </p:nvSpPr>
-        <p:spPr>
-          <a:xfrm>
-            <a:off x="731520" y="1051560"/>
-            <a:ext cx="54864" cy="658368"/>
-          </a:xfrm>
-          <a:prstGeom prst="rect">
-            <a:avLst/>
-          </a:prstGeom>
-          <a:solidFill>
-            <a:srgbClr val="2A9D8F"/>
-          </a:solidFill>
-          <a:ln/>
-        </p:spPr>
-      </p:sp>
-      <p:sp>
-        <p:nvSpPr>
-          <p:cNvPr id="8" name="Text 6"/>
-          <p:cNvSpPr/>
-          <p:nvPr/>
-        </p:nvSpPr>
-        <p:spPr>
-          <a:xfrm>
-            <a:off x="914400" y="1051560"/>
-            <a:ext cx="1463040" cy="658368"/>
+          <a:ln w="9525">
+            <a:solidFill>
+              <a:srgbClr val="E5E2DC"/>
+            </a:solidFill>
+            <a:prstDash val="solid"/>
+          </a:ln>
+        </p:spPr>
+      </p:sp>
+      <p:sp>
+        <p:nvSpPr>
+          <p:cNvPr id="9" name="Text 7"/>
+          <p:cNvSpPr/>
+          <p:nvPr/>
+        </p:nvSpPr>
+        <p:spPr>
+          <a:xfrm>
+            <a:off x="4160520" y="1307592"/>
+            <a:ext cx="2926080" cy="320040"/>
           </a:xfrm>
           <a:prstGeom prst="rect">
             <a:avLst/>
@@ -1994,37 +2036,37 @@
           <a:ln/>
         </p:spPr>
         <p:txBody>
-          <a:bodyPr wrap="square" lIns="0" tIns="0" rIns="0" bIns="0" rtlCol="0" anchor="ctr"/>
+          <a:bodyPr wrap="square" rtlCol="0" anchor="ctr"/>
           <a:lstStyle/>
           <a:p>
             <a:pPr indent="0" marL="0">
               <a:buNone/>
             </a:pPr>
             <a:r>
-              <a:rPr lang="en-US" sz="1300" b="1" dirty="0">
-                <a:solidFill>
-                  <a:srgbClr val="1B2A4A"/>
+              <a:rPr lang="en-US" sz="1400" b="1" dirty="0">
+                <a:solidFill>
+                  <a:srgbClr val="2A9D8F"/>
                 </a:solidFill>
                 <a:latin typeface="Georgia" pitchFamily="34" charset="0"/>
                 <a:ea typeface="Georgia" pitchFamily="34" charset="-122"/>
                 <a:cs typeface="Georgia" pitchFamily="34" charset="-120"/>
               </a:rPr>
-              <a:t>Hypothesis</a:t>
-            </a:r>
-            <a:endParaRPr lang="en-US" sz="1300" dirty="0"/>
-          </a:p>
-        </p:txBody>
-      </p:sp>
-      <p:sp>
-        <p:nvSpPr>
-          <p:cNvPr id="9" name="Text 7"/>
-          <p:cNvSpPr/>
-          <p:nvPr/>
-        </p:nvSpPr>
-        <p:spPr>
-          <a:xfrm>
-            <a:off x="2377440" y="1051560"/>
-            <a:ext cx="1920240" cy="658368"/>
+              <a:t>Variable</a:t>
+            </a:r>
+            <a:endParaRPr lang="en-US" sz="1400" dirty="0"/>
+          </a:p>
+        </p:txBody>
+      </p:sp>
+      <p:sp>
+        <p:nvSpPr>
+          <p:cNvPr id="10" name="Text 8"/>
+          <p:cNvSpPr/>
+          <p:nvPr/>
+        </p:nvSpPr>
+        <p:spPr>
+          <a:xfrm>
+            <a:off x="4160520" y="1645920"/>
+            <a:ext cx="2926080" cy="457200"/>
           </a:xfrm>
           <a:prstGeom prst="rect">
             <a:avLst/>
@@ -2033,10 +2075,13 @@
           <a:ln/>
         </p:spPr>
         <p:txBody>
-          <a:bodyPr wrap="square" lIns="0" tIns="0" rIns="0" bIns="0" rtlCol="0" anchor="ctr"/>
+          <a:bodyPr wrap="square" rtlCol="0" anchor="ctr"/>
           <a:lstStyle/>
           <a:p>
             <a:pPr indent="0" marL="0">
+              <a:lnSpc>
+                <a:spcPct val="130000"/>
+              </a:lnSpc>
               <a:buNone/>
             </a:pPr>
             <a:r>
@@ -2044,11 +2089,11 @@
                 <a:solidFill>
                   <a:srgbClr val="6B6660"/>
                 </a:solidFill>
-                <a:latin typeface="Calibri" pitchFamily="34" charset="0"/>
-                <a:ea typeface="Calibri" pitchFamily="34" charset="-122"/>
-                <a:cs typeface="Calibri" pitchFamily="34" charset="-120"/>
-              </a:rPr>
-              <a:t>A testable prediction</a:t>
+                <a:latin typeface="Arial" pitchFamily="34" charset="0"/>
+                <a:ea typeface="Arial" pitchFamily="34" charset="-122"/>
+                <a:cs typeface="Arial" pitchFamily="34" charset="-120"/>
+              </a:rPr>
+              <a:t>Something that can change in an experiment.</a:t>
             </a:r>
             <a:endParaRPr lang="en-US" sz="1100" dirty="0"/>
           </a:p>
@@ -2056,49 +2101,29 @@
       </p:sp>
       <p:sp>
         <p:nvSpPr>
-          <p:cNvPr id="10" name="Shape 8"/>
-          <p:cNvSpPr/>
-          <p:nvPr/>
-        </p:nvSpPr>
-        <p:spPr>
-          <a:xfrm>
-            <a:off x="4754880" y="1051560"/>
-            <a:ext cx="3657600" cy="658368"/>
-          </a:xfrm>
-          <a:prstGeom prst="rect">
-            <a:avLst/>
+          <p:cNvPr id="11" name="Shape 9"/>
+          <p:cNvSpPr/>
+          <p:nvPr/>
+        </p:nvSpPr>
+        <p:spPr>
+          <a:xfrm>
+            <a:off x="7498080" y="1234440"/>
+            <a:ext cx="3200400" cy="914400"/>
+          </a:xfrm>
+          <a:prstGeom prst="roundRect">
+            <a:avLst>
+              <a:gd name="adj" fmla="val 10000"/>
+            </a:avLst>
           </a:prstGeom>
           <a:solidFill>
             <a:srgbClr val="FFFFFF"/>
           </a:solidFill>
-          <a:ln/>
-          <a:effectLst>
-            <a:outerShdw sx="100000" sy="100000" kx="0" ky="0" algn="bl" rotWithShape="0" blurRad="50800" dist="25400" dir="8100000">
-              <a:srgbClr val="000000">
-                <a:alpha val="10000"/>
-              </a:srgbClr>
-            </a:outerShdw>
-          </a:effectLst>
-        </p:spPr>
-      </p:sp>
-      <p:sp>
-        <p:nvSpPr>
-          <p:cNvPr id="11" name="Shape 9"/>
-          <p:cNvSpPr/>
-          <p:nvPr/>
-        </p:nvSpPr>
-        <p:spPr>
-          <a:xfrm>
-            <a:off x="4754880" y="1051560"/>
-            <a:ext cx="54864" cy="658368"/>
-          </a:xfrm>
-          <a:prstGeom prst="rect">
-            <a:avLst/>
-          </a:prstGeom>
-          <a:solidFill>
-            <a:srgbClr val="2A9D8F"/>
-          </a:solidFill>
-          <a:ln/>
+          <a:ln w="9525">
+            <a:solidFill>
+              <a:srgbClr val="E5E2DC"/>
+            </a:solidFill>
+            <a:prstDash val="solid"/>
+          </a:ln>
         </p:spPr>
       </p:sp>
       <p:sp>
@@ -2109,8 +2134,8 @@
         </p:nvSpPr>
         <p:spPr>
           <a:xfrm>
-            <a:off x="4937760" y="1051560"/>
-            <a:ext cx="1463040" cy="658368"/>
+            <a:off x="7635240" y="1307592"/>
+            <a:ext cx="2926080" cy="320040"/>
           </a:xfrm>
           <a:prstGeom prst="rect">
             <a:avLst/>
@@ -2119,24 +2144,24 @@
           <a:ln/>
         </p:spPr>
         <p:txBody>
-          <a:bodyPr wrap="square" lIns="0" tIns="0" rIns="0" bIns="0" rtlCol="0" anchor="ctr"/>
+          <a:bodyPr wrap="square" rtlCol="0" anchor="ctr"/>
           <a:lstStyle/>
           <a:p>
             <a:pPr indent="0" marL="0">
               <a:buNone/>
             </a:pPr>
             <a:r>
-              <a:rPr lang="en-US" sz="1300" b="1" dirty="0">
-                <a:solidFill>
-                  <a:srgbClr val="1B2A4A"/>
+              <a:rPr lang="en-US" sz="1400" b="1" dirty="0">
+                <a:solidFill>
+                  <a:srgbClr val="2A9D8F"/>
                 </a:solidFill>
                 <a:latin typeface="Georgia" pitchFamily="34" charset="0"/>
                 <a:ea typeface="Georgia" pitchFamily="34" charset="-122"/>
                 <a:cs typeface="Georgia" pitchFamily="34" charset="-120"/>
               </a:rPr>
-              <a:t>Variable</a:t>
-            </a:r>
-            <a:endParaRPr lang="en-US" sz="1300" dirty="0"/>
+              <a:t>Fair Test</a:t>
+            </a:r>
+            <a:endParaRPr lang="en-US" sz="1400" dirty="0"/>
           </a:p>
         </p:txBody>
       </p:sp>
@@ -2148,8 +2173,8 @@
         </p:nvSpPr>
         <p:spPr>
           <a:xfrm>
-            <a:off x="6400800" y="1051560"/>
-            <a:ext cx="1920240" cy="658368"/>
+            <a:off x="7635240" y="1645920"/>
+            <a:ext cx="2926080" cy="457200"/>
           </a:xfrm>
           <a:prstGeom prst="rect">
             <a:avLst/>
@@ -2158,10 +2183,13 @@
           <a:ln/>
         </p:spPr>
         <p:txBody>
-          <a:bodyPr wrap="square" lIns="0" tIns="0" rIns="0" bIns="0" rtlCol="0" anchor="ctr"/>
+          <a:bodyPr wrap="square" rtlCol="0" anchor="ctr"/>
           <a:lstStyle/>
           <a:p>
             <a:pPr indent="0" marL="0">
+              <a:lnSpc>
+                <a:spcPct val="130000"/>
+              </a:lnSpc>
               <a:buNone/>
             </a:pPr>
             <a:r>
@@ -2169,11 +2197,11 @@
                 <a:solidFill>
                   <a:srgbClr val="6B6660"/>
                 </a:solidFill>
-                <a:latin typeface="Calibri" pitchFamily="34" charset="0"/>
-                <a:ea typeface="Calibri" pitchFamily="34" charset="-122"/>
-                <a:cs typeface="Calibri" pitchFamily="34" charset="-120"/>
-              </a:rPr>
-              <a:t>Something that can change</a:t>
+                <a:latin typeface="Arial" pitchFamily="34" charset="0"/>
+                <a:ea typeface="Arial" pitchFamily="34" charset="-122"/>
+                <a:cs typeface="Arial" pitchFamily="34" charset="-120"/>
+              </a:rPr>
+              <a:t>An experiment where only ONE variable is changed.</a:t>
             </a:r>
             <a:endParaRPr lang="en-US" sz="1100" dirty="0"/>
           </a:p>
@@ -2187,55 +2215,35 @@
         </p:nvSpPr>
         <p:spPr>
           <a:xfrm>
-            <a:off x="731520" y="1819656"/>
-            <a:ext cx="3657600" cy="658368"/>
-          </a:xfrm>
-          <a:prstGeom prst="rect">
-            <a:avLst/>
+            <a:off x="548640" y="2286000"/>
+            <a:ext cx="3200400" cy="914400"/>
+          </a:xfrm>
+          <a:prstGeom prst="roundRect">
+            <a:avLst>
+              <a:gd name="adj" fmla="val 10000"/>
+            </a:avLst>
           </a:prstGeom>
           <a:solidFill>
             <a:srgbClr val="FFFFFF"/>
           </a:solidFill>
-          <a:ln/>
-          <a:effectLst>
-            <a:outerShdw sx="100000" sy="100000" kx="0" ky="0" algn="bl" rotWithShape="0" blurRad="50800" dist="25400" dir="8100000">
-              <a:srgbClr val="000000">
-                <a:alpha val="10000"/>
-              </a:srgbClr>
-            </a:outerShdw>
-          </a:effectLst>
-        </p:spPr>
-      </p:sp>
-      <p:sp>
-        <p:nvSpPr>
-          <p:cNvPr id="15" name="Shape 13"/>
-          <p:cNvSpPr/>
-          <p:nvPr/>
-        </p:nvSpPr>
-        <p:spPr>
-          <a:xfrm>
-            <a:off x="731520" y="1819656"/>
-            <a:ext cx="54864" cy="658368"/>
-          </a:xfrm>
-          <a:prstGeom prst="rect">
-            <a:avLst/>
-          </a:prstGeom>
-          <a:solidFill>
-            <a:srgbClr val="2A9D8F"/>
-          </a:solidFill>
-          <a:ln/>
-        </p:spPr>
-      </p:sp>
-      <p:sp>
-        <p:nvSpPr>
-          <p:cNvPr id="16" name="Text 14"/>
-          <p:cNvSpPr/>
-          <p:nvPr/>
-        </p:nvSpPr>
-        <p:spPr>
-          <a:xfrm>
-            <a:off x="914400" y="1819656"/>
-            <a:ext cx="1463040" cy="658368"/>
+          <a:ln w="9525">
+            <a:solidFill>
+              <a:srgbClr val="E5E2DC"/>
+            </a:solidFill>
+            <a:prstDash val="solid"/>
+          </a:ln>
+        </p:spPr>
+      </p:sp>
+      <p:sp>
+        <p:nvSpPr>
+          <p:cNvPr id="15" name="Text 13"/>
+          <p:cNvSpPr/>
+          <p:nvPr/>
+        </p:nvSpPr>
+        <p:spPr>
+          <a:xfrm>
+            <a:off x="685800" y="2359152"/>
+            <a:ext cx="2926080" cy="320040"/>
           </a:xfrm>
           <a:prstGeom prst="rect">
             <a:avLst/>
@@ -2244,37 +2252,37 @@
           <a:ln/>
         </p:spPr>
         <p:txBody>
-          <a:bodyPr wrap="square" lIns="0" tIns="0" rIns="0" bIns="0" rtlCol="0" anchor="ctr"/>
+          <a:bodyPr wrap="square" rtlCol="0" anchor="ctr"/>
           <a:lstStyle/>
           <a:p>
             <a:pPr indent="0" marL="0">
               <a:buNone/>
             </a:pPr>
             <a:r>
-              <a:rPr lang="en-US" sz="1300" b="1" dirty="0">
-                <a:solidFill>
-                  <a:srgbClr val="1B2A4A"/>
+              <a:rPr lang="en-US" sz="1400" b="1" dirty="0">
+                <a:solidFill>
+                  <a:srgbClr val="2A9D8F"/>
                 </a:solidFill>
                 <a:latin typeface="Georgia" pitchFamily="34" charset="0"/>
                 <a:ea typeface="Georgia" pitchFamily="34" charset="-122"/>
                 <a:cs typeface="Georgia" pitchFamily="34" charset="-120"/>
               </a:rPr>
-              <a:t>Fair test</a:t>
-            </a:r>
-            <a:endParaRPr lang="en-US" sz="1300" dirty="0"/>
-          </a:p>
-        </p:txBody>
-      </p:sp>
-      <p:sp>
-        <p:nvSpPr>
-          <p:cNvPr id="17" name="Text 15"/>
-          <p:cNvSpPr/>
-          <p:nvPr/>
-        </p:nvSpPr>
-        <p:spPr>
-          <a:xfrm>
-            <a:off x="2377440" y="1819656"/>
-            <a:ext cx="1920240" cy="658368"/>
+              <a:t>Data</a:t>
+            </a:r>
+            <a:endParaRPr lang="en-US" sz="1400" dirty="0"/>
+          </a:p>
+        </p:txBody>
+      </p:sp>
+      <p:sp>
+        <p:nvSpPr>
+          <p:cNvPr id="16" name="Text 14"/>
+          <p:cNvSpPr/>
+          <p:nvPr/>
+        </p:nvSpPr>
+        <p:spPr>
+          <a:xfrm>
+            <a:off x="685800" y="2697480"/>
+            <a:ext cx="2926080" cy="457200"/>
           </a:xfrm>
           <a:prstGeom prst="rect">
             <a:avLst/>
@@ -2283,10 +2291,13 @@
           <a:ln/>
         </p:spPr>
         <p:txBody>
-          <a:bodyPr wrap="square" lIns="0" tIns="0" rIns="0" bIns="0" rtlCol="0" anchor="ctr"/>
+          <a:bodyPr wrap="square" rtlCol="0" anchor="ctr"/>
           <a:lstStyle/>
           <a:p>
             <a:pPr indent="0" marL="0">
+              <a:lnSpc>
+                <a:spcPct val="130000"/>
+              </a:lnSpc>
               <a:buNone/>
             </a:pPr>
             <a:r>
@@ -2294,11 +2305,11 @@
                 <a:solidFill>
                   <a:srgbClr val="6B6660"/>
                 </a:solidFill>
-                <a:latin typeface="Calibri" pitchFamily="34" charset="0"/>
-                <a:ea typeface="Calibri" pitchFamily="34" charset="-122"/>
-                <a:cs typeface="Calibri" pitchFamily="34" charset="-120"/>
-              </a:rPr>
-              <a:t>Only one variable changes</a:t>
+                <a:latin typeface="Arial" pitchFamily="34" charset="0"/>
+                <a:ea typeface="Arial" pitchFamily="34" charset="-122"/>
+                <a:cs typeface="Arial" pitchFamily="34" charset="-120"/>
+              </a:rPr>
+              <a:t>Information collected during an experiment (numbers or observations).</a:t>
             </a:r>
             <a:endParaRPr lang="en-US" sz="1100" dirty="0"/>
           </a:p>
@@ -2306,61 +2317,41 @@
       </p:sp>
       <p:sp>
         <p:nvSpPr>
-          <p:cNvPr id="18" name="Shape 16"/>
-          <p:cNvSpPr/>
-          <p:nvPr/>
-        </p:nvSpPr>
-        <p:spPr>
-          <a:xfrm>
-            <a:off x="4754880" y="1819656"/>
-            <a:ext cx="3657600" cy="658368"/>
-          </a:xfrm>
-          <a:prstGeom prst="rect">
-            <a:avLst/>
+          <p:cNvPr id="17" name="Shape 15"/>
+          <p:cNvSpPr/>
+          <p:nvPr/>
+        </p:nvSpPr>
+        <p:spPr>
+          <a:xfrm>
+            <a:off x="4023360" y="2286000"/>
+            <a:ext cx="3200400" cy="914400"/>
+          </a:xfrm>
+          <a:prstGeom prst="roundRect">
+            <a:avLst>
+              <a:gd name="adj" fmla="val 10000"/>
+            </a:avLst>
           </a:prstGeom>
           <a:solidFill>
             <a:srgbClr val="FFFFFF"/>
           </a:solidFill>
-          <a:ln/>
-          <a:effectLst>
-            <a:outerShdw sx="100000" sy="100000" kx="0" ky="0" algn="bl" rotWithShape="0" blurRad="50800" dist="25400" dir="8100000">
-              <a:srgbClr val="000000">
-                <a:alpha val="10000"/>
-              </a:srgbClr>
-            </a:outerShdw>
-          </a:effectLst>
-        </p:spPr>
-      </p:sp>
-      <p:sp>
-        <p:nvSpPr>
-          <p:cNvPr id="19" name="Shape 17"/>
-          <p:cNvSpPr/>
-          <p:nvPr/>
-        </p:nvSpPr>
-        <p:spPr>
-          <a:xfrm>
-            <a:off x="4754880" y="1819656"/>
-            <a:ext cx="54864" cy="658368"/>
-          </a:xfrm>
-          <a:prstGeom prst="rect">
-            <a:avLst/>
-          </a:prstGeom>
-          <a:solidFill>
-            <a:srgbClr val="2A9D8F"/>
-          </a:solidFill>
-          <a:ln/>
-        </p:spPr>
-      </p:sp>
-      <p:sp>
-        <p:nvSpPr>
-          <p:cNvPr id="20" name="Text 18"/>
-          <p:cNvSpPr/>
-          <p:nvPr/>
-        </p:nvSpPr>
-        <p:spPr>
-          <a:xfrm>
-            <a:off x="4937760" y="1819656"/>
-            <a:ext cx="1463040" cy="658368"/>
+          <a:ln w="9525">
+            <a:solidFill>
+              <a:srgbClr val="E5E2DC"/>
+            </a:solidFill>
+            <a:prstDash val="solid"/>
+          </a:ln>
+        </p:spPr>
+      </p:sp>
+      <p:sp>
+        <p:nvSpPr>
+          <p:cNvPr id="18" name="Text 16"/>
+          <p:cNvSpPr/>
+          <p:nvPr/>
+        </p:nvSpPr>
+        <p:spPr>
+          <a:xfrm>
+            <a:off x="4160520" y="2359152"/>
+            <a:ext cx="2926080" cy="320040"/>
           </a:xfrm>
           <a:prstGeom prst="rect">
             <a:avLst/>
@@ -2369,37 +2360,37 @@
           <a:ln/>
         </p:spPr>
         <p:txBody>
-          <a:bodyPr wrap="square" lIns="0" tIns="0" rIns="0" bIns="0" rtlCol="0" anchor="ctr"/>
+          <a:bodyPr wrap="square" rtlCol="0" anchor="ctr"/>
           <a:lstStyle/>
           <a:p>
             <a:pPr indent="0" marL="0">
               <a:buNone/>
             </a:pPr>
             <a:r>
-              <a:rPr lang="en-US" sz="1300" b="1" dirty="0">
-                <a:solidFill>
-                  <a:srgbClr val="1B2A4A"/>
+              <a:rPr lang="en-US" sz="1400" b="1" dirty="0">
+                <a:solidFill>
+                  <a:srgbClr val="2A9D8F"/>
                 </a:solidFill>
                 <a:latin typeface="Georgia" pitchFamily="34" charset="0"/>
                 <a:ea typeface="Georgia" pitchFamily="34" charset="-122"/>
                 <a:cs typeface="Georgia" pitchFamily="34" charset="-120"/>
               </a:rPr>
-              <a:t>Data</a:t>
-            </a:r>
-            <a:endParaRPr lang="en-US" sz="1300" dirty="0"/>
-          </a:p>
-        </p:txBody>
-      </p:sp>
-      <p:sp>
-        <p:nvSpPr>
-          <p:cNvPr id="21" name="Text 19"/>
-          <p:cNvSpPr/>
-          <p:nvPr/>
-        </p:nvSpPr>
-        <p:spPr>
-          <a:xfrm>
-            <a:off x="6400800" y="1819656"/>
-            <a:ext cx="1920240" cy="658368"/>
+              <a:t>Conclusion</a:t>
+            </a:r>
+            <a:endParaRPr lang="en-US" sz="1400" dirty="0"/>
+          </a:p>
+        </p:txBody>
+      </p:sp>
+      <p:sp>
+        <p:nvSpPr>
+          <p:cNvPr id="19" name="Text 17"/>
+          <p:cNvSpPr/>
+          <p:nvPr/>
+        </p:nvSpPr>
+        <p:spPr>
+          <a:xfrm>
+            <a:off x="4160520" y="2697480"/>
+            <a:ext cx="2926080" cy="457200"/>
           </a:xfrm>
           <a:prstGeom prst="rect">
             <a:avLst/>
@@ -2408,10 +2399,13 @@
           <a:ln/>
         </p:spPr>
         <p:txBody>
-          <a:bodyPr wrap="square" lIns="0" tIns="0" rIns="0" bIns="0" rtlCol="0" anchor="ctr"/>
+          <a:bodyPr wrap="square" rtlCol="0" anchor="ctr"/>
           <a:lstStyle/>
           <a:p>
             <a:pPr indent="0" marL="0">
+              <a:lnSpc>
+                <a:spcPct val="130000"/>
+              </a:lnSpc>
               <a:buNone/>
             </a:pPr>
             <a:r>
@@ -2419,11 +2413,11 @@
                 <a:solidFill>
                   <a:srgbClr val="6B6660"/>
                 </a:solidFill>
-                <a:latin typeface="Calibri" pitchFamily="34" charset="0"/>
-                <a:ea typeface="Calibri" pitchFamily="34" charset="-122"/>
-                <a:cs typeface="Calibri" pitchFamily="34" charset="-120"/>
-              </a:rPr>
-              <a:t>Information collected in an experiment</a:t>
+                <a:latin typeface="Arial" pitchFamily="34" charset="0"/>
+                <a:ea typeface="Arial" pitchFamily="34" charset="-122"/>
+                <a:cs typeface="Arial" pitchFamily="34" charset="-120"/>
+              </a:rPr>
+              <a:t>A summary of what the results show.</a:t>
             </a:r>
             <a:endParaRPr lang="en-US" sz="1100" dirty="0"/>
           </a:p>
@@ -2431,61 +2425,41 @@
       </p:sp>
       <p:sp>
         <p:nvSpPr>
-          <p:cNvPr id="22" name="Shape 20"/>
-          <p:cNvSpPr/>
-          <p:nvPr/>
-        </p:nvSpPr>
-        <p:spPr>
-          <a:xfrm>
-            <a:off x="731520" y="2587752"/>
-            <a:ext cx="3657600" cy="658368"/>
-          </a:xfrm>
-          <a:prstGeom prst="rect">
-            <a:avLst/>
+          <p:cNvPr id="20" name="Shape 18"/>
+          <p:cNvSpPr/>
+          <p:nvPr/>
+        </p:nvSpPr>
+        <p:spPr>
+          <a:xfrm>
+            <a:off x="7498080" y="2286000"/>
+            <a:ext cx="3200400" cy="914400"/>
+          </a:xfrm>
+          <a:prstGeom prst="roundRect">
+            <a:avLst>
+              <a:gd name="adj" fmla="val 10000"/>
+            </a:avLst>
           </a:prstGeom>
           <a:solidFill>
             <a:srgbClr val="FFFFFF"/>
           </a:solidFill>
-          <a:ln/>
-          <a:effectLst>
-            <a:outerShdw sx="100000" sy="100000" kx="0" ky="0" algn="bl" rotWithShape="0" blurRad="50800" dist="25400" dir="8100000">
-              <a:srgbClr val="000000">
-                <a:alpha val="10000"/>
-              </a:srgbClr>
-            </a:outerShdw>
-          </a:effectLst>
-        </p:spPr>
-      </p:sp>
-      <p:sp>
-        <p:nvSpPr>
-          <p:cNvPr id="23" name="Shape 21"/>
-          <p:cNvSpPr/>
-          <p:nvPr/>
-        </p:nvSpPr>
-        <p:spPr>
-          <a:xfrm>
-            <a:off x="731520" y="2587752"/>
-            <a:ext cx="54864" cy="658368"/>
-          </a:xfrm>
-          <a:prstGeom prst="rect">
-            <a:avLst/>
-          </a:prstGeom>
-          <a:solidFill>
-            <a:srgbClr val="2A9D8F"/>
-          </a:solidFill>
-          <a:ln/>
-        </p:spPr>
-      </p:sp>
-      <p:sp>
-        <p:nvSpPr>
-          <p:cNvPr id="24" name="Text 22"/>
-          <p:cNvSpPr/>
-          <p:nvPr/>
-        </p:nvSpPr>
-        <p:spPr>
-          <a:xfrm>
-            <a:off x="914400" y="2587752"/>
-            <a:ext cx="1463040" cy="658368"/>
+          <a:ln w="9525">
+            <a:solidFill>
+              <a:srgbClr val="E5E2DC"/>
+            </a:solidFill>
+            <a:prstDash val="solid"/>
+          </a:ln>
+        </p:spPr>
+      </p:sp>
+      <p:sp>
+        <p:nvSpPr>
+          <p:cNvPr id="21" name="Text 19"/>
+          <p:cNvSpPr/>
+          <p:nvPr/>
+        </p:nvSpPr>
+        <p:spPr>
+          <a:xfrm>
+            <a:off x="7635240" y="2359152"/>
+            <a:ext cx="2926080" cy="320040"/>
           </a:xfrm>
           <a:prstGeom prst="rect">
             <a:avLst/>
@@ -2494,37 +2468,37 @@
           <a:ln/>
         </p:spPr>
         <p:txBody>
-          <a:bodyPr wrap="square" lIns="0" tIns="0" rIns="0" bIns="0" rtlCol="0" anchor="ctr"/>
+          <a:bodyPr wrap="square" rtlCol="0" anchor="ctr"/>
           <a:lstStyle/>
           <a:p>
             <a:pPr indent="0" marL="0">
               <a:buNone/>
             </a:pPr>
             <a:r>
-              <a:rPr lang="en-US" sz="1300" b="1" dirty="0">
-                <a:solidFill>
-                  <a:srgbClr val="1B2A4A"/>
+              <a:rPr lang="en-US" sz="1400" b="1" dirty="0">
+                <a:solidFill>
+                  <a:srgbClr val="2A9D8F"/>
                 </a:solidFill>
                 <a:latin typeface="Georgia" pitchFamily="34" charset="0"/>
                 <a:ea typeface="Georgia" pitchFamily="34" charset="-122"/>
                 <a:cs typeface="Georgia" pitchFamily="34" charset="-120"/>
               </a:rPr>
-              <a:t>Conclusion</a:t>
-            </a:r>
-            <a:endParaRPr lang="en-US" sz="1300" dirty="0"/>
-          </a:p>
-        </p:txBody>
-      </p:sp>
-      <p:sp>
-        <p:nvSpPr>
-          <p:cNvPr id="25" name="Text 23"/>
-          <p:cNvSpPr/>
-          <p:nvPr/>
-        </p:nvSpPr>
-        <p:spPr>
-          <a:xfrm>
-            <a:off x="2377440" y="2587752"/>
-            <a:ext cx="1920240" cy="658368"/>
+              <a:t>Evaluation</a:t>
+            </a:r>
+            <a:endParaRPr lang="en-US" sz="1400" dirty="0"/>
+          </a:p>
+        </p:txBody>
+      </p:sp>
+      <p:sp>
+        <p:nvSpPr>
+          <p:cNvPr id="22" name="Text 20"/>
+          <p:cNvSpPr/>
+          <p:nvPr/>
+        </p:nvSpPr>
+        <p:spPr>
+          <a:xfrm>
+            <a:off x="7635240" y="2697480"/>
+            <a:ext cx="2926080" cy="457200"/>
           </a:xfrm>
           <a:prstGeom prst="rect">
             <a:avLst/>
@@ -2533,10 +2507,13 @@
           <a:ln/>
         </p:spPr>
         <p:txBody>
-          <a:bodyPr wrap="square" lIns="0" tIns="0" rIns="0" bIns="0" rtlCol="0" anchor="ctr"/>
+          <a:bodyPr wrap="square" rtlCol="0" anchor="ctr"/>
           <a:lstStyle/>
           <a:p>
             <a:pPr indent="0" marL="0">
+              <a:lnSpc>
+                <a:spcPct val="130000"/>
+              </a:lnSpc>
               <a:buNone/>
             </a:pPr>
             <a:r>
@@ -2544,136 +2521,11 @@
                 <a:solidFill>
                   <a:srgbClr val="6B6660"/>
                 </a:solidFill>
-                <a:latin typeface="Calibri" pitchFamily="34" charset="0"/>
-                <a:ea typeface="Calibri" pitchFamily="34" charset="-122"/>
-                <a:cs typeface="Calibri" pitchFamily="34" charset="-120"/>
-              </a:rPr>
-              <a:t>What the results show</a:t>
-            </a:r>
-            <a:endParaRPr lang="en-US" sz="1100" dirty="0"/>
-          </a:p>
-        </p:txBody>
-      </p:sp>
-      <p:sp>
-        <p:nvSpPr>
-          <p:cNvPr id="26" name="Shape 24"/>
-          <p:cNvSpPr/>
-          <p:nvPr/>
-        </p:nvSpPr>
-        <p:spPr>
-          <a:xfrm>
-            <a:off x="4754880" y="2587752"/>
-            <a:ext cx="3657600" cy="658368"/>
-          </a:xfrm>
-          <a:prstGeom prst="rect">
-            <a:avLst/>
-          </a:prstGeom>
-          <a:solidFill>
-            <a:srgbClr val="FFFFFF"/>
-          </a:solidFill>
-          <a:ln/>
-          <a:effectLst>
-            <a:outerShdw sx="100000" sy="100000" kx="0" ky="0" algn="bl" rotWithShape="0" blurRad="50800" dist="25400" dir="8100000">
-              <a:srgbClr val="000000">
-                <a:alpha val="10000"/>
-              </a:srgbClr>
-            </a:outerShdw>
-          </a:effectLst>
-        </p:spPr>
-      </p:sp>
-      <p:sp>
-        <p:nvSpPr>
-          <p:cNvPr id="27" name="Shape 25"/>
-          <p:cNvSpPr/>
-          <p:nvPr/>
-        </p:nvSpPr>
-        <p:spPr>
-          <a:xfrm>
-            <a:off x="4754880" y="2587752"/>
-            <a:ext cx="54864" cy="658368"/>
-          </a:xfrm>
-          <a:prstGeom prst="rect">
-            <a:avLst/>
-          </a:prstGeom>
-          <a:solidFill>
-            <a:srgbClr val="2A9D8F"/>
-          </a:solidFill>
-          <a:ln/>
-        </p:spPr>
-      </p:sp>
-      <p:sp>
-        <p:nvSpPr>
-          <p:cNvPr id="28" name="Text 26"/>
-          <p:cNvSpPr/>
-          <p:nvPr/>
-        </p:nvSpPr>
-        <p:spPr>
-          <a:xfrm>
-            <a:off x="4937760" y="2587752"/>
-            <a:ext cx="1463040" cy="658368"/>
-          </a:xfrm>
-          <a:prstGeom prst="rect">
-            <a:avLst/>
-          </a:prstGeom>
-          <a:noFill/>
-          <a:ln/>
-        </p:spPr>
-        <p:txBody>
-          <a:bodyPr wrap="square" lIns="0" tIns="0" rIns="0" bIns="0" rtlCol="0" anchor="ctr"/>
-          <a:lstStyle/>
-          <a:p>
-            <a:pPr indent="0" marL="0">
-              <a:buNone/>
-            </a:pPr>
-            <a:r>
-              <a:rPr lang="en-US" sz="1300" b="1" dirty="0">
-                <a:solidFill>
-                  <a:srgbClr val="1B2A4A"/>
-                </a:solidFill>
-                <a:latin typeface="Georgia" pitchFamily="34" charset="0"/>
-                <a:ea typeface="Georgia" pitchFamily="34" charset="-122"/>
-                <a:cs typeface="Georgia" pitchFamily="34" charset="-120"/>
-              </a:rPr>
-              <a:t>Evaluate</a:t>
-            </a:r>
-            <a:endParaRPr lang="en-US" sz="1300" dirty="0"/>
-          </a:p>
-        </p:txBody>
-      </p:sp>
-      <p:sp>
-        <p:nvSpPr>
-          <p:cNvPr id="29" name="Text 27"/>
-          <p:cNvSpPr/>
-          <p:nvPr/>
-        </p:nvSpPr>
-        <p:spPr>
-          <a:xfrm>
-            <a:off x="6400800" y="2587752"/>
-            <a:ext cx="1920240" cy="658368"/>
-          </a:xfrm>
-          <a:prstGeom prst="rect">
-            <a:avLst/>
-          </a:prstGeom>
-          <a:noFill/>
-          <a:ln/>
-        </p:spPr>
-        <p:txBody>
-          <a:bodyPr wrap="square" lIns="0" tIns="0" rIns="0" bIns="0" rtlCol="0" anchor="ctr"/>
-          <a:lstStyle/>
-          <a:p>
-            <a:pPr indent="0" marL="0">
-              <a:buNone/>
-            </a:pPr>
-            <a:r>
-              <a:rPr lang="en-US" sz="1100" dirty="0">
-                <a:solidFill>
-                  <a:srgbClr val="6B6660"/>
-                </a:solidFill>
-                <a:latin typeface="Calibri" pitchFamily="34" charset="0"/>
-                <a:ea typeface="Calibri" pitchFamily="34" charset="-122"/>
-                <a:cs typeface="Calibri" pitchFamily="34" charset="-120"/>
-              </a:rPr>
-              <a:t>Judging how good your method was</a:t>
+                <a:latin typeface="Arial" pitchFamily="34" charset="0"/>
+                <a:ea typeface="Arial" pitchFamily="34" charset="-122"/>
+                <a:cs typeface="Arial" pitchFamily="34" charset="-120"/>
+              </a:rPr>
+              <a:t>Reviewing what went well and what could be improved.</a:t>
             </a:r>
             <a:endParaRPr lang="en-US" sz="1100" dirty="0"/>
           </a:p>
@@ -2720,47 +2572,7 @@
         <p:spPr>
           <a:xfrm>
             <a:off x="0" y="0"/>
-            <a:ext cx="9144000" cy="822960"/>
-          </a:xfrm>
-          <a:prstGeom prst="rect">
-            <a:avLst/>
-          </a:prstGeom>
-          <a:solidFill>
-            <a:srgbClr val="FFFFFF"/>
-          </a:solidFill>
-          <a:ln/>
-        </p:spPr>
-      </p:sp>
-      <p:sp>
-        <p:nvSpPr>
-          <p:cNvPr id="3" name="Shape 1"/>
-          <p:cNvSpPr/>
-          <p:nvPr/>
-        </p:nvSpPr>
-        <p:spPr>
-          <a:xfrm>
-            <a:off x="0" y="804672"/>
-            <a:ext cx="9144000" cy="27432"/>
-          </a:xfrm>
-          <a:prstGeom prst="rect">
-            <a:avLst/>
-          </a:prstGeom>
-          <a:solidFill>
-            <a:srgbClr val="E5E2DC"/>
-          </a:solidFill>
-          <a:ln/>
-        </p:spPr>
-      </p:sp>
-      <p:sp>
-        <p:nvSpPr>
-          <p:cNvPr id="4" name="Shape 2"/>
-          <p:cNvSpPr/>
-          <p:nvPr/>
-        </p:nvSpPr>
-        <p:spPr>
-          <a:xfrm>
-            <a:off x="548640" y="201168"/>
-            <a:ext cx="54864" cy="420624"/>
+            <a:ext cx="73152" cy="5148072"/>
           </a:xfrm>
           <a:prstGeom prst="rect">
             <a:avLst/>
@@ -2773,14 +2585,14 @@
       </p:sp>
       <p:sp>
         <p:nvSpPr>
-          <p:cNvPr id="5" name="Text 3"/>
-          <p:cNvSpPr/>
-          <p:nvPr/>
-        </p:nvSpPr>
-        <p:spPr>
-          <a:xfrm>
-            <a:off x="777240" y="137160"/>
-            <a:ext cx="7772400" cy="548640"/>
+          <p:cNvPr id="3" name="Text 1"/>
+          <p:cNvSpPr/>
+          <p:nvPr/>
+        </p:nvSpPr>
+        <p:spPr>
+          <a:xfrm>
+            <a:off x="548640" y="274320"/>
+            <a:ext cx="9144000" cy="640080"/>
           </a:xfrm>
           <a:prstGeom prst="rect">
             <a:avLst/>
@@ -2789,14 +2601,14 @@
           <a:ln/>
         </p:spPr>
         <p:txBody>
-          <a:bodyPr wrap="square" lIns="0" tIns="0" rIns="0" bIns="0" rtlCol="0" anchor="ctr"/>
+          <a:bodyPr wrap="square" rtlCol="0" anchor="ctr"/>
           <a:lstStyle/>
           <a:p>
             <a:pPr indent="0" marL="0">
               <a:buNone/>
             </a:pPr>
             <a:r>
-              <a:rPr lang="en-US" sz="2000" b="1" dirty="0">
+              <a:rPr lang="en-US" sz="2400" b="1" dirty="0">
                 <a:solidFill>
                   <a:srgbClr val="1B2A4A"/>
                 </a:solidFill>
@@ -2806,20 +2618,40 @@
               </a:rPr>
               <a:t>Steps of the Scientific Method</a:t>
             </a:r>
-            <a:endParaRPr lang="en-US" sz="2000" dirty="0"/>
-          </a:p>
-        </p:txBody>
-      </p:sp>
-      <p:sp>
-        <p:nvSpPr>
-          <p:cNvPr id="6" name="Text 4"/>
-          <p:cNvSpPr/>
-          <p:nvPr/>
-        </p:nvSpPr>
-        <p:spPr>
-          <a:xfrm>
-            <a:off x="731520" y="1051560"/>
-            <a:ext cx="7680960" cy="3108960"/>
+            <a:endParaRPr lang="en-US" sz="2400" dirty="0"/>
+          </a:p>
+        </p:txBody>
+      </p:sp>
+      <p:sp>
+        <p:nvSpPr>
+          <p:cNvPr id="4" name="Shape 2"/>
+          <p:cNvSpPr/>
+          <p:nvPr/>
+        </p:nvSpPr>
+        <p:spPr>
+          <a:xfrm>
+            <a:off x="548640" y="960120"/>
+            <a:ext cx="2286000" cy="36576"/>
+          </a:xfrm>
+          <a:prstGeom prst="rect">
+            <a:avLst/>
+          </a:prstGeom>
+          <a:solidFill>
+            <a:srgbClr val="2A9D8F"/>
+          </a:solidFill>
+          <a:ln/>
+        </p:spPr>
+      </p:sp>
+      <p:sp>
+        <p:nvSpPr>
+          <p:cNvPr id="5" name="Text 3"/>
+          <p:cNvSpPr/>
+          <p:nvPr/>
+        </p:nvSpPr>
+        <p:spPr>
+          <a:xfrm>
+            <a:off x="548640" y="1188720"/>
+            <a:ext cx="10058400" cy="3474720"/>
           </a:xfrm>
           <a:prstGeom prst="rect">
             <a:avLst/>
@@ -2831,231 +2663,180 @@
           <a:bodyPr wrap="square" rtlCol="0" anchor="t"/>
           <a:lstStyle/>
           <a:p>
-            <a:pPr marL="342900" indent="-342900">
+            <a:pPr>
+              <a:lnSpc>
+                <a:spcPct val="150000"/>
+              </a:lnSpc>
               <a:spcAft>
-                <a:spcPts val="800"/>
+                <a:spcPts val="600"/>
               </a:spcAft>
-              <a:buSzPct val="100000"/>
-              <a:buChar char="•"/>
             </a:pPr>
             <a:r>
               <a:rPr lang="en-US" sz="1500" dirty="0">
                 <a:solidFill>
                   <a:srgbClr val="3D3A36"/>
                 </a:solidFill>
-                <a:latin typeface="Calibri" pitchFamily="34" charset="0"/>
-                <a:ea typeface="Calibri" pitchFamily="34" charset="-122"/>
-                <a:cs typeface="Calibri" pitchFamily="34" charset="-120"/>
+                <a:latin typeface="Arial" pitchFamily="34" charset="0"/>
+                <a:ea typeface="Arial" pitchFamily="34" charset="-122"/>
+                <a:cs typeface="Arial" pitchFamily="34" charset="-120"/>
               </a:rPr>
               <a:t>1. Ask a question — what do you want to find out?</a:t>
             </a:r>
             <a:endParaRPr lang="en-US" sz="1500" dirty="0"/>
           </a:p>
           <a:p>
-            <a:pPr marL="342900" indent="-342900">
+            <a:pPr>
+              <a:lnSpc>
+                <a:spcPct val="150000"/>
+              </a:lnSpc>
               <a:spcAft>
-                <a:spcPts val="800"/>
+                <a:spcPts val="600"/>
               </a:spcAft>
-              <a:buSzPct val="100000"/>
-              <a:buChar char="•"/>
             </a:pPr>
             <a:r>
               <a:rPr lang="en-US" sz="1500" dirty="0">
                 <a:solidFill>
                   <a:srgbClr val="3D3A36"/>
                 </a:solidFill>
-                <a:latin typeface="Calibri" pitchFamily="34" charset="0"/>
-                <a:ea typeface="Calibri" pitchFamily="34" charset="-122"/>
-                <a:cs typeface="Calibri" pitchFamily="34" charset="-120"/>
+                <a:latin typeface="Arial" pitchFamily="34" charset="0"/>
+                <a:ea typeface="Arial" pitchFamily="34" charset="-122"/>
+                <a:cs typeface="Arial" pitchFamily="34" charset="-120"/>
               </a:rPr>
               <a:t>2. Research — what do scientists already know?</a:t>
             </a:r>
             <a:endParaRPr lang="en-US" sz="1500" dirty="0"/>
           </a:p>
           <a:p>
-            <a:pPr marL="342900" indent="-342900">
+            <a:pPr>
+              <a:lnSpc>
+                <a:spcPct val="150000"/>
+              </a:lnSpc>
               <a:spcAft>
-                <a:spcPts val="800"/>
+                <a:spcPts val="600"/>
               </a:spcAft>
-              <a:buSzPct val="100000"/>
-              <a:buChar char="•"/>
             </a:pPr>
             <a:r>
               <a:rPr lang="en-US" sz="1500" dirty="0">
                 <a:solidFill>
                   <a:srgbClr val="3D3A36"/>
                 </a:solidFill>
-                <a:latin typeface="Calibri" pitchFamily="34" charset="0"/>
-                <a:ea typeface="Calibri" pitchFamily="34" charset="-122"/>
-                <a:cs typeface="Calibri" pitchFamily="34" charset="-120"/>
+                <a:latin typeface="Arial" pitchFamily="34" charset="0"/>
+                <a:ea typeface="Arial" pitchFamily="34" charset="-122"/>
+                <a:cs typeface="Arial" pitchFamily="34" charset="-120"/>
               </a:rPr>
               <a:t>3. Make a hypothesis — your testable prediction.</a:t>
             </a:r>
             <a:endParaRPr lang="en-US" sz="1500" dirty="0"/>
           </a:p>
           <a:p>
-            <a:pPr marL="342900" indent="-342900">
+            <a:pPr>
+              <a:lnSpc>
+                <a:spcPct val="150000"/>
+              </a:lnSpc>
               <a:spcAft>
-                <a:spcPts val="800"/>
+                <a:spcPts val="600"/>
               </a:spcAft>
-              <a:buSzPct val="100000"/>
-              <a:buChar char="•"/>
             </a:pPr>
             <a:r>
               <a:rPr lang="en-US" sz="1500" dirty="0">
                 <a:solidFill>
                   <a:srgbClr val="3D3A36"/>
                 </a:solidFill>
-                <a:latin typeface="Calibri" pitchFamily="34" charset="0"/>
-                <a:ea typeface="Calibri" pitchFamily="34" charset="-122"/>
-                <a:cs typeface="Calibri" pitchFamily="34" charset="-120"/>
+                <a:latin typeface="Arial" pitchFamily="34" charset="0"/>
+                <a:ea typeface="Arial" pitchFamily="34" charset="-122"/>
+                <a:cs typeface="Arial" pitchFamily="34" charset="-120"/>
               </a:rPr>
               <a:t>4. Design an experiment — plan your fair test.</a:t>
             </a:r>
             <a:endParaRPr lang="en-US" sz="1500" dirty="0"/>
           </a:p>
           <a:p>
-            <a:pPr marL="342900" indent="-342900">
+            <a:pPr>
+              <a:lnSpc>
+                <a:spcPct val="150000"/>
+              </a:lnSpc>
               <a:spcAft>
-                <a:spcPts val="800"/>
+                <a:spcPts val="600"/>
               </a:spcAft>
-              <a:buSzPct val="100000"/>
-              <a:buChar char="•"/>
             </a:pPr>
             <a:r>
               <a:rPr lang="en-US" sz="1500" dirty="0">
                 <a:solidFill>
                   <a:srgbClr val="3D3A36"/>
                 </a:solidFill>
-                <a:latin typeface="Calibri" pitchFamily="34" charset="0"/>
-                <a:ea typeface="Calibri" pitchFamily="34" charset="-122"/>
-                <a:cs typeface="Calibri" pitchFamily="34" charset="-120"/>
-              </a:rPr>
-              <a:t>5. Collect data — record measurements carefully.</a:t>
+                <a:latin typeface="Arial" pitchFamily="34" charset="0"/>
+                <a:ea typeface="Arial" pitchFamily="34" charset="-122"/>
+                <a:cs typeface="Arial" pitchFamily="34" charset="-120"/>
+              </a:rPr>
+              <a:t>5. Collect data — measure carefully and record everything.</a:t>
             </a:r>
             <a:endParaRPr lang="en-US" sz="1500" dirty="0"/>
           </a:p>
           <a:p>
-            <a:pPr marL="342900" indent="-342900">
+            <a:pPr>
+              <a:lnSpc>
+                <a:spcPct val="150000"/>
+              </a:lnSpc>
               <a:spcAft>
-                <a:spcPts val="800"/>
+                <a:spcPts val="600"/>
               </a:spcAft>
-              <a:buSzPct val="100000"/>
-              <a:buChar char="•"/>
             </a:pPr>
             <a:r>
               <a:rPr lang="en-US" sz="1500" dirty="0">
                 <a:solidFill>
                   <a:srgbClr val="3D3A36"/>
                 </a:solidFill>
-                <a:latin typeface="Calibri" pitchFamily="34" charset="0"/>
-                <a:ea typeface="Calibri" pitchFamily="34" charset="-122"/>
-                <a:cs typeface="Calibri" pitchFamily="34" charset="-120"/>
-              </a:rPr>
-              <a:t>6. Analyse — look for patterns in your results.</a:t>
+                <a:latin typeface="Arial" pitchFamily="34" charset="0"/>
+                <a:ea typeface="Arial" pitchFamily="34" charset="-122"/>
+                <a:cs typeface="Arial" pitchFamily="34" charset="-120"/>
+              </a:rPr>
+              <a:t>6. Analyse results — look for patterns in your data.</a:t>
             </a:r>
             <a:endParaRPr lang="en-US" sz="1500" dirty="0"/>
           </a:p>
           <a:p>
-            <a:pPr marL="342900" indent="-342900">
+            <a:pPr>
+              <a:lnSpc>
+                <a:spcPct val="150000"/>
+              </a:lnSpc>
               <a:spcAft>
-                <a:spcPts val="800"/>
+                <a:spcPts val="600"/>
               </a:spcAft>
-              <a:buSzPct val="100000"/>
-              <a:buChar char="•"/>
             </a:pPr>
             <a:r>
               <a:rPr lang="en-US" sz="1500" dirty="0">
                 <a:solidFill>
                   <a:srgbClr val="3D3A36"/>
                 </a:solidFill>
-                <a:latin typeface="Calibri" pitchFamily="34" charset="0"/>
-                <a:ea typeface="Calibri" pitchFamily="34" charset="-122"/>
-                <a:cs typeface="Calibri" pitchFamily="34" charset="-120"/>
-              </a:rPr>
-              <a:t>7. Conclude — does your data support your hypothesis?</a:t>
+                <a:latin typeface="Arial" pitchFamily="34" charset="0"/>
+                <a:ea typeface="Arial" pitchFamily="34" charset="-122"/>
+                <a:cs typeface="Arial" pitchFamily="34" charset="-120"/>
+              </a:rPr>
+              <a:t>7. Draw a conclusion — did the results support your hypothesis?</a:t>
             </a:r>
             <a:endParaRPr lang="en-US" sz="1500" dirty="0"/>
           </a:p>
-        </p:txBody>
-      </p:sp>
-      <p:sp>
-        <p:nvSpPr>
-          <p:cNvPr id="7" name="Shape 5"/>
-          <p:cNvSpPr/>
-          <p:nvPr/>
-        </p:nvSpPr>
-        <p:spPr>
-          <a:xfrm>
-            <a:off x="731520" y="4206240"/>
-            <a:ext cx="7680960" cy="640080"/>
-          </a:xfrm>
-          <a:prstGeom prst="rect">
-            <a:avLst/>
-          </a:prstGeom>
-          <a:solidFill>
-            <a:srgbClr val="E8F5F3"/>
-          </a:solidFill>
-          <a:ln/>
-          <a:effectLst>
-            <a:outerShdw sx="100000" sy="100000" kx="0" ky="0" algn="bl" rotWithShape="0" blurRad="50800" dist="25400" dir="8100000">
-              <a:srgbClr val="000000">
-                <a:alpha val="10000"/>
-              </a:srgbClr>
-            </a:outerShdw>
-          </a:effectLst>
-        </p:spPr>
-      </p:sp>
-      <p:sp>
-        <p:nvSpPr>
-          <p:cNvPr id="8" name="Text 6"/>
-          <p:cNvSpPr/>
-          <p:nvPr/>
-        </p:nvSpPr>
-        <p:spPr>
-          <a:xfrm>
-            <a:off x="914400" y="4251960"/>
-            <a:ext cx="7315200" cy="548640"/>
-          </a:xfrm>
-          <a:prstGeom prst="rect">
-            <a:avLst/>
-          </a:prstGeom>
-          <a:noFill/>
-          <a:ln/>
-        </p:spPr>
-        <p:txBody>
-          <a:bodyPr wrap="square" rtlCol="0" anchor="ctr"/>
-          <a:lstStyle/>
-          <a:p>
-            <a:pPr indent="0" marL="0">
-              <a:buNone/>
-            </a:pPr>
-            <a:r>
-              <a:rPr lang="en-US" sz="1200" b="1" dirty="0">
-                <a:solidFill>
-                  <a:srgbClr val="2A9D8F"/>
-                </a:solidFill>
-                <a:latin typeface="Calibri" pitchFamily="34" charset="0"/>
-                <a:ea typeface="Calibri" pitchFamily="34" charset="-122"/>
-                <a:cs typeface="Calibri" pitchFamily="34" charset="-120"/>
-              </a:rPr>
-              <a:t>Key Idea: </a:t>
-            </a:r>
-            <a:pPr indent="0" marL="0">
-              <a:buNone/>
-            </a:pPr>
-            <a:r>
-              <a:rPr lang="en-US" sz="1200" i="1" dirty="0">
+          <a:p>
+            <a:pPr>
+              <a:lnSpc>
+                <a:spcPct val="150000"/>
+              </a:lnSpc>
+              <a:spcAft>
+                <a:spcPts val="600"/>
+              </a:spcAft>
+            </a:pPr>
+            <a:r>
+              <a:rPr lang="en-US" sz="1500" dirty="0">
                 <a:solidFill>
                   <a:srgbClr val="3D3A36"/>
                 </a:solidFill>
-                <a:latin typeface="Calibri" pitchFamily="34" charset="0"/>
-                <a:ea typeface="Calibri" pitchFamily="34" charset="-122"/>
-                <a:cs typeface="Calibri" pitchFamily="34" charset="-120"/>
-              </a:rPr>
-              <a:t>The method is a cycle — new questions lead to new investigations.</a:t>
-            </a:r>
-            <a:endParaRPr lang="en-US" sz="1200" dirty="0"/>
+                <a:latin typeface="Arial" pitchFamily="34" charset="0"/>
+                <a:ea typeface="Arial" pitchFamily="34" charset="-122"/>
+                <a:cs typeface="Arial" pitchFamily="34" charset="-120"/>
+              </a:rPr>
+              <a:t>8. Evaluate — what could be improved?</a:t>
+            </a:r>
+            <a:endParaRPr lang="en-US" sz="1500" dirty="0"/>
           </a:p>
         </p:txBody>
       </p:sp>
@@ -3100,67 +2881,113 @@
         <p:spPr>
           <a:xfrm>
             <a:off x="0" y="0"/>
-            <a:ext cx="9144000" cy="822960"/>
-          </a:xfrm>
-          <a:prstGeom prst="rect">
-            <a:avLst/>
+            <a:ext cx="73152" cy="5148072"/>
+          </a:xfrm>
+          <a:prstGeom prst="rect">
+            <a:avLst/>
+          </a:prstGeom>
+          <a:solidFill>
+            <a:srgbClr val="2A9D8F"/>
+          </a:solidFill>
+          <a:ln/>
+        </p:spPr>
+      </p:sp>
+      <p:sp>
+        <p:nvSpPr>
+          <p:cNvPr id="3" name="Text 1"/>
+          <p:cNvSpPr/>
+          <p:nvPr/>
+        </p:nvSpPr>
+        <p:spPr>
+          <a:xfrm>
+            <a:off x="548640" y="274320"/>
+            <a:ext cx="9144000" cy="640080"/>
+          </a:xfrm>
+          <a:prstGeom prst="rect">
+            <a:avLst/>
+          </a:prstGeom>
+          <a:noFill/>
+          <a:ln/>
+        </p:spPr>
+        <p:txBody>
+          <a:bodyPr wrap="square" rtlCol="0" anchor="ctr"/>
+          <a:lstStyle/>
+          <a:p>
+            <a:pPr indent="0" marL="0">
+              <a:buNone/>
+            </a:pPr>
+            <a:r>
+              <a:rPr lang="en-US" sz="2400" b="1" dirty="0">
+                <a:solidFill>
+                  <a:srgbClr val="1B2A4A"/>
+                </a:solidFill>
+                <a:latin typeface="Georgia" pitchFamily="34" charset="0"/>
+                <a:ea typeface="Georgia" pitchFamily="34" charset="-122"/>
+                <a:cs typeface="Georgia" pitchFamily="34" charset="-120"/>
+              </a:rPr>
+              <a:t>Good vs Bad Hypotheses</a:t>
+            </a:r>
+            <a:endParaRPr lang="en-US" sz="2400" dirty="0"/>
+          </a:p>
+        </p:txBody>
+      </p:sp>
+      <p:sp>
+        <p:nvSpPr>
+          <p:cNvPr id="4" name="Shape 2"/>
+          <p:cNvSpPr/>
+          <p:nvPr/>
+        </p:nvSpPr>
+        <p:spPr>
+          <a:xfrm>
+            <a:off x="548640" y="960120"/>
+            <a:ext cx="2286000" cy="36576"/>
+          </a:xfrm>
+          <a:prstGeom prst="rect">
+            <a:avLst/>
+          </a:prstGeom>
+          <a:solidFill>
+            <a:srgbClr val="2A9D8F"/>
+          </a:solidFill>
+          <a:ln/>
+        </p:spPr>
+      </p:sp>
+      <p:sp>
+        <p:nvSpPr>
+          <p:cNvPr id="5" name="Shape 3"/>
+          <p:cNvSpPr/>
+          <p:nvPr/>
+        </p:nvSpPr>
+        <p:spPr>
+          <a:xfrm>
+            <a:off x="548640" y="1188720"/>
+            <a:ext cx="5029200" cy="3474720"/>
+          </a:xfrm>
+          <a:prstGeom prst="roundRect">
+            <a:avLst>
+              <a:gd name="adj" fmla="val 3158"/>
+            </a:avLst>
           </a:prstGeom>
           <a:solidFill>
             <a:srgbClr val="FFFFFF"/>
           </a:solidFill>
-          <a:ln/>
-        </p:spPr>
-      </p:sp>
-      <p:sp>
-        <p:nvSpPr>
-          <p:cNvPr id="3" name="Shape 1"/>
-          <p:cNvSpPr/>
-          <p:nvPr/>
-        </p:nvSpPr>
-        <p:spPr>
-          <a:xfrm>
-            <a:off x="0" y="804672"/>
-            <a:ext cx="9144000" cy="27432"/>
-          </a:xfrm>
-          <a:prstGeom prst="rect">
-            <a:avLst/>
-          </a:prstGeom>
-          <a:solidFill>
-            <a:srgbClr val="E5E2DC"/>
-          </a:solidFill>
-          <a:ln/>
-        </p:spPr>
-      </p:sp>
-      <p:sp>
-        <p:nvSpPr>
-          <p:cNvPr id="4" name="Shape 2"/>
-          <p:cNvSpPr/>
-          <p:nvPr/>
-        </p:nvSpPr>
-        <p:spPr>
-          <a:xfrm>
-            <a:off x="548640" y="201168"/>
-            <a:ext cx="54864" cy="420624"/>
-          </a:xfrm>
-          <a:prstGeom prst="rect">
-            <a:avLst/>
-          </a:prstGeom>
-          <a:solidFill>
-            <a:srgbClr val="2A9D8F"/>
-          </a:solidFill>
-          <a:ln/>
-        </p:spPr>
-      </p:sp>
-      <p:sp>
-        <p:nvSpPr>
-          <p:cNvPr id="5" name="Text 3"/>
-          <p:cNvSpPr/>
-          <p:nvPr/>
-        </p:nvSpPr>
-        <p:spPr>
-          <a:xfrm>
-            <a:off x="777240" y="137160"/>
-            <a:ext cx="7772400" cy="548640"/>
+          <a:ln w="9525">
+            <a:solidFill>
+              <a:srgbClr val="E5E2DC"/>
+            </a:solidFill>
+            <a:prstDash val="solid"/>
+          </a:ln>
+        </p:spPr>
+      </p:sp>
+      <p:sp>
+        <p:nvSpPr>
+          <p:cNvPr id="6" name="Text 4"/>
+          <p:cNvSpPr/>
+          <p:nvPr/>
+        </p:nvSpPr>
+        <p:spPr>
+          <a:xfrm>
+            <a:off x="777240" y="1325880"/>
+            <a:ext cx="4572000" cy="365760"/>
           </a:xfrm>
           <a:prstGeom prst="rect">
             <a:avLst/>
@@ -3169,84 +2996,174 @@
           <a:ln/>
         </p:spPr>
         <p:txBody>
-          <a:bodyPr wrap="square" lIns="0" tIns="0" rIns="0" bIns="0" rtlCol="0" anchor="ctr"/>
+          <a:bodyPr wrap="square" rtlCol="0" anchor="ctr"/>
           <a:lstStyle/>
           <a:p>
             <a:pPr indent="0" marL="0">
               <a:buNone/>
             </a:pPr>
             <a:r>
-              <a:rPr lang="en-US" sz="2000" b="1" dirty="0">
-                <a:solidFill>
-                  <a:srgbClr val="1B2A4A"/>
+              <a:rPr lang="en-US" sz="1500" b="1" dirty="0">
+                <a:solidFill>
+                  <a:srgbClr val="2A9D8F"/>
                 </a:solidFill>
                 <a:latin typeface="Georgia" pitchFamily="34" charset="0"/>
                 <a:ea typeface="Georgia" pitchFamily="34" charset="-122"/>
                 <a:cs typeface="Georgia" pitchFamily="34" charset="-120"/>
               </a:rPr>
-              <a:t>Good vs Bad Hypotheses</a:t>
-            </a:r>
-            <a:endParaRPr lang="en-US" sz="2000" dirty="0"/>
-          </a:p>
-        </p:txBody>
-      </p:sp>
-      <p:sp>
-        <p:nvSpPr>
-          <p:cNvPr id="6" name="Shape 4"/>
-          <p:cNvSpPr/>
-          <p:nvPr/>
-        </p:nvSpPr>
-        <p:spPr>
-          <a:xfrm>
-            <a:off x="548640" y="1051560"/>
-            <a:ext cx="3840480" cy="3474720"/>
-          </a:xfrm>
-          <a:prstGeom prst="rect">
-            <a:avLst/>
+              <a:t>✅ Good Hypothesis</a:t>
+            </a:r>
+            <a:endParaRPr lang="en-US" sz="1500" dirty="0"/>
+          </a:p>
+        </p:txBody>
+      </p:sp>
+      <p:sp>
+        <p:nvSpPr>
+          <p:cNvPr id="7" name="Text 5"/>
+          <p:cNvSpPr/>
+          <p:nvPr/>
+        </p:nvSpPr>
+        <p:spPr>
+          <a:xfrm>
+            <a:off x="777240" y="1783080"/>
+            <a:ext cx="4572000" cy="2651760"/>
+          </a:xfrm>
+          <a:prstGeom prst="rect">
+            <a:avLst/>
+          </a:prstGeom>
+          <a:noFill/>
+          <a:ln/>
+        </p:spPr>
+        <p:txBody>
+          <a:bodyPr wrap="square" rtlCol="0" anchor="t"/>
+          <a:lstStyle/>
+          <a:p>
+            <a:pPr>
+              <a:lnSpc>
+                <a:spcPct val="140000"/>
+              </a:lnSpc>
+              <a:spcAft>
+                <a:spcPts val="400"/>
+              </a:spcAft>
+            </a:pPr>
+            <a:r>
+              <a:rPr lang="en-US" sz="1300" dirty="0">
+                <a:solidFill>
+                  <a:srgbClr val="3D3A36"/>
+                </a:solidFill>
+                <a:latin typeface="Arial" pitchFamily="34" charset="0"/>
+                <a:ea typeface="Arial" pitchFamily="34" charset="-122"/>
+                <a:cs typeface="Arial" pitchFamily="34" charset="-120"/>
+              </a:rPr>
+              <a:t>Specific and testable.</a:t>
+            </a:r>
+            <a:endParaRPr lang="en-US" sz="1300" dirty="0"/>
+          </a:p>
+          <a:p>
+            <a:pPr>
+              <a:lnSpc>
+                <a:spcPct val="140000"/>
+              </a:lnSpc>
+              <a:spcAft>
+                <a:spcPts val="400"/>
+              </a:spcAft>
+            </a:pPr>
+            <a:r>
+              <a:rPr lang="en-US" sz="1300" dirty="0">
+                <a:solidFill>
+                  <a:srgbClr val="3D3A36"/>
+                </a:solidFill>
+                <a:latin typeface="Arial" pitchFamily="34" charset="0"/>
+                <a:ea typeface="Arial" pitchFamily="34" charset="-122"/>
+                <a:cs typeface="Arial" pitchFamily="34" charset="-120"/>
+              </a:rPr>
+              <a:t>'If I add more fertiliser, the plant will grow taller.'</a:t>
+            </a:r>
+            <a:endParaRPr lang="en-US" sz="1300" dirty="0"/>
+          </a:p>
+          <a:p>
+            <a:pPr>
+              <a:lnSpc>
+                <a:spcPct val="140000"/>
+              </a:lnSpc>
+              <a:spcAft>
+                <a:spcPts val="400"/>
+              </a:spcAft>
+            </a:pPr>
+            <a:r>
+              <a:rPr lang="en-US" sz="1300" dirty="0">
+                <a:solidFill>
+                  <a:srgbClr val="3D3A36"/>
+                </a:solidFill>
+                <a:latin typeface="Arial" pitchFamily="34" charset="0"/>
+                <a:ea typeface="Arial" pitchFamily="34" charset="-122"/>
+                <a:cs typeface="Arial" pitchFamily="34" charset="-120"/>
+              </a:rPr>
+              <a:t>States WHAT you change and WHAT you measure.</a:t>
+            </a:r>
+            <a:endParaRPr lang="en-US" sz="1300" dirty="0"/>
+          </a:p>
+          <a:p>
+            <a:pPr>
+              <a:lnSpc>
+                <a:spcPct val="140000"/>
+              </a:lnSpc>
+              <a:spcAft>
+                <a:spcPts val="400"/>
+              </a:spcAft>
+            </a:pPr>
+            <a:r>
+              <a:rPr lang="en-US" sz="1300" dirty="0">
+                <a:solidFill>
+                  <a:srgbClr val="3D3A36"/>
+                </a:solidFill>
+                <a:latin typeface="Arial" pitchFamily="34" charset="0"/>
+                <a:ea typeface="Arial" pitchFamily="34" charset="-122"/>
+                <a:cs typeface="Arial" pitchFamily="34" charset="-120"/>
+              </a:rPr>
+              <a:t>Based on existing knowledge or research.</a:t>
+            </a:r>
+            <a:endParaRPr lang="en-US" sz="1300" dirty="0"/>
+          </a:p>
+        </p:txBody>
+      </p:sp>
+      <p:sp>
+        <p:nvSpPr>
+          <p:cNvPr id="8" name="Shape 6"/>
+          <p:cNvSpPr/>
+          <p:nvPr/>
+        </p:nvSpPr>
+        <p:spPr>
+          <a:xfrm>
+            <a:off x="5852160" y="1188720"/>
+            <a:ext cx="5029200" cy="3474720"/>
+          </a:xfrm>
+          <a:prstGeom prst="roundRect">
+            <a:avLst>
+              <a:gd name="adj" fmla="val 3158"/>
+            </a:avLst>
           </a:prstGeom>
           <a:solidFill>
             <a:srgbClr val="FFFFFF"/>
           </a:solidFill>
-          <a:ln/>
-          <a:effectLst>
-            <a:outerShdw sx="100000" sy="100000" kx="0" ky="0" algn="bl" rotWithShape="0" blurRad="50800" dist="25400" dir="8100000">
-              <a:srgbClr val="000000">
-                <a:alpha val="10000"/>
-              </a:srgbClr>
-            </a:outerShdw>
-          </a:effectLst>
-        </p:spPr>
-      </p:sp>
-      <p:sp>
-        <p:nvSpPr>
-          <p:cNvPr id="7" name="Shape 5"/>
-          <p:cNvSpPr/>
-          <p:nvPr/>
-        </p:nvSpPr>
-        <p:spPr>
-          <a:xfrm>
-            <a:off x="548640" y="1051560"/>
-            <a:ext cx="3840480" cy="54864"/>
-          </a:xfrm>
-          <a:prstGeom prst="rect">
-            <a:avLst/>
-          </a:prstGeom>
-          <a:solidFill>
-            <a:srgbClr val="2A9D8F"/>
-          </a:solidFill>
-          <a:ln/>
-        </p:spPr>
-      </p:sp>
-      <p:sp>
-        <p:nvSpPr>
-          <p:cNvPr id="8" name="Text 6"/>
-          <p:cNvSpPr/>
-          <p:nvPr/>
-        </p:nvSpPr>
-        <p:spPr>
-          <a:xfrm>
-            <a:off x="777240" y="1188720"/>
-            <a:ext cx="3383280" cy="457200"/>
+          <a:ln w="9525">
+            <a:solidFill>
+              <a:srgbClr val="E5E2DC"/>
+            </a:solidFill>
+            <a:prstDash val="solid"/>
+          </a:ln>
+        </p:spPr>
+      </p:sp>
+      <p:sp>
+        <p:nvSpPr>
+          <p:cNvPr id="9" name="Text 7"/>
+          <p:cNvSpPr/>
+          <p:nvPr/>
+        </p:nvSpPr>
+        <p:spPr>
+          <a:xfrm>
+            <a:off x="6080760" y="1325880"/>
+            <a:ext cx="4572000" cy="365760"/>
           </a:xfrm>
           <a:prstGeom prst="rect">
             <a:avLst/>
@@ -3255,7 +3172,7 @@
           <a:ln/>
         </p:spPr>
         <p:txBody>
-          <a:bodyPr wrap="square" lIns="0" tIns="0" rIns="0" bIns="0" rtlCol="0" anchor="ctr"/>
+          <a:bodyPr wrap="square" rtlCol="0" anchor="ctr"/>
           <a:lstStyle/>
           <a:p>
             <a:pPr indent="0" marL="0">
@@ -3264,13 +3181,13 @@
             <a:r>
               <a:rPr lang="en-US" sz="1500" b="1" dirty="0">
                 <a:solidFill>
-                  <a:srgbClr val="1B2A4A"/>
+                  <a:srgbClr val="E9C46A"/>
                 </a:solidFill>
                 <a:latin typeface="Georgia" pitchFamily="34" charset="0"/>
                 <a:ea typeface="Georgia" pitchFamily="34" charset="-122"/>
                 <a:cs typeface="Georgia" pitchFamily="34" charset="-120"/>
               </a:rPr>
-              <a:t>Good Hypothesis</a:t>
+              <a:t>❌ Bad Hypothesis</a:t>
             </a:r>
             <a:endParaRPr lang="en-US" sz="1500" dirty="0"/>
           </a:p>
@@ -3278,14 +3195,14 @@
       </p:sp>
       <p:sp>
         <p:nvSpPr>
-          <p:cNvPr id="9" name="Text 7"/>
-          <p:cNvSpPr/>
-          <p:nvPr/>
-        </p:nvSpPr>
-        <p:spPr>
-          <a:xfrm>
-            <a:off x="777240" y="1691640"/>
-            <a:ext cx="3383280" cy="2651760"/>
+          <p:cNvPr id="10" name="Text 8"/>
+          <p:cNvSpPr/>
+          <p:nvPr/>
+        </p:nvSpPr>
+        <p:spPr>
+          <a:xfrm>
+            <a:off x="6080760" y="1783080"/>
+            <a:ext cx="4572000" cy="2651760"/>
           </a:xfrm>
           <a:prstGeom prst="rect">
             <a:avLst/>
@@ -3297,278 +3214,90 @@
           <a:bodyPr wrap="square" rtlCol="0" anchor="t"/>
           <a:lstStyle/>
           <a:p>
-            <a:pPr marL="342900" indent="-342900">
+            <a:pPr>
+              <a:lnSpc>
+                <a:spcPct val="140000"/>
+              </a:lnSpc>
               <a:spcAft>
-                <a:spcPts val="600"/>
+                <a:spcPts val="400"/>
               </a:spcAft>
-              <a:buSzPct val="100000"/>
-              <a:buChar char="•"/>
             </a:pPr>
             <a:r>
               <a:rPr lang="en-US" sz="1300" dirty="0">
                 <a:solidFill>
                   <a:srgbClr val="3D3A36"/>
                 </a:solidFill>
-                <a:latin typeface="Calibri" pitchFamily="34" charset="0"/>
-                <a:ea typeface="Calibri" pitchFamily="34" charset="-122"/>
-                <a:cs typeface="Calibri" pitchFamily="34" charset="-120"/>
-              </a:rPr>
-              <a:t>Specific and testable</a:t>
+                <a:latin typeface="Arial" pitchFamily="34" charset="0"/>
+                <a:ea typeface="Arial" pitchFamily="34" charset="-122"/>
+                <a:cs typeface="Arial" pitchFamily="34" charset="-120"/>
+              </a:rPr>
+              <a:t>Too vague or not testable.</a:t>
             </a:r>
             <a:endParaRPr lang="en-US" sz="1300" dirty="0"/>
           </a:p>
           <a:p>
-            <a:pPr marL="342900" indent="-342900">
+            <a:pPr>
+              <a:lnSpc>
+                <a:spcPct val="140000"/>
+              </a:lnSpc>
               <a:spcAft>
-                <a:spcPts val="600"/>
+                <a:spcPts val="400"/>
               </a:spcAft>
-              <a:buSzPct val="100000"/>
-              <a:buChar char="•"/>
             </a:pPr>
             <a:r>
               <a:rPr lang="en-US" sz="1300" dirty="0">
                 <a:solidFill>
                   <a:srgbClr val="3D3A36"/>
                 </a:solidFill>
-                <a:latin typeface="Calibri" pitchFamily="34" charset="0"/>
-                <a:ea typeface="Calibri" pitchFamily="34" charset="-122"/>
-                <a:cs typeface="Calibri" pitchFamily="34" charset="-120"/>
-              </a:rPr>
-              <a:t>'If I add more fertiliser, the plant will grow taller'</a:t>
+                <a:latin typeface="Arial" pitchFamily="34" charset="0"/>
+                <a:ea typeface="Arial" pitchFamily="34" charset="-122"/>
+                <a:cs typeface="Arial" pitchFamily="34" charset="-120"/>
+              </a:rPr>
+              <a:t>'Plants are cool.'</a:t>
             </a:r>
             <a:endParaRPr lang="en-US" sz="1300" dirty="0"/>
           </a:p>
           <a:p>
-            <a:pPr marL="342900" indent="-342900">
+            <a:pPr>
+              <a:lnSpc>
+                <a:spcPct val="140000"/>
+              </a:lnSpc>
               <a:spcAft>
-                <a:spcPts val="600"/>
+                <a:spcPts val="400"/>
               </a:spcAft>
-              <a:buSzPct val="100000"/>
-              <a:buChar char="•"/>
             </a:pPr>
             <a:r>
               <a:rPr lang="en-US" sz="1300" dirty="0">
                 <a:solidFill>
                   <a:srgbClr val="3D3A36"/>
                 </a:solidFill>
-                <a:latin typeface="Calibri" pitchFamily="34" charset="0"/>
-                <a:ea typeface="Calibri" pitchFamily="34" charset="-122"/>
-                <a:cs typeface="Calibri" pitchFamily="34" charset="-120"/>
-              </a:rPr>
-              <a:t>States WHAT you will change and WHAT you will measure</a:t>
+                <a:latin typeface="Arial" pitchFamily="34" charset="0"/>
+                <a:ea typeface="Arial" pitchFamily="34" charset="-122"/>
+                <a:cs typeface="Arial" pitchFamily="34" charset="-120"/>
+              </a:rPr>
+              <a:t>Does not mention variables.</a:t>
             </a:r>
             <a:endParaRPr lang="en-US" sz="1300" dirty="0"/>
           </a:p>
           <a:p>
-            <a:pPr marL="342900" indent="-342900">
+            <a:pPr>
+              <a:lnSpc>
+                <a:spcPct val="140000"/>
+              </a:lnSpc>
               <a:spcAft>
-                <a:spcPts val="600"/>
+                <a:spcPts val="400"/>
               </a:spcAft>
-              <a:buSzPct val="100000"/>
-              <a:buChar char="•"/>
             </a:pPr>
             <a:r>
               <a:rPr lang="en-US" sz="1300" dirty="0">
                 <a:solidFill>
                   <a:srgbClr val="3D3A36"/>
                 </a:solidFill>
-                <a:latin typeface="Calibri" pitchFamily="34" charset="0"/>
-                <a:ea typeface="Calibri" pitchFamily="34" charset="-122"/>
-                <a:cs typeface="Calibri" pitchFamily="34" charset="-120"/>
-              </a:rPr>
-              <a:t>Can be proven right OR wrong</a:t>
-            </a:r>
-            <a:endParaRPr lang="en-US" sz="1300" dirty="0"/>
-          </a:p>
-        </p:txBody>
-      </p:sp>
-      <p:sp>
-        <p:nvSpPr>
-          <p:cNvPr id="10" name="Shape 8"/>
-          <p:cNvSpPr/>
-          <p:nvPr/>
-        </p:nvSpPr>
-        <p:spPr>
-          <a:xfrm>
-            <a:off x="4754880" y="1051560"/>
-            <a:ext cx="3840480" cy="3474720"/>
-          </a:xfrm>
-          <a:prstGeom prst="rect">
-            <a:avLst/>
-          </a:prstGeom>
-          <a:solidFill>
-            <a:srgbClr val="FFFFFF"/>
-          </a:solidFill>
-          <a:ln/>
-          <a:effectLst>
-            <a:outerShdw sx="100000" sy="100000" kx="0" ky="0" algn="bl" rotWithShape="0" blurRad="50800" dist="25400" dir="8100000">
-              <a:srgbClr val="000000">
-                <a:alpha val="10000"/>
-              </a:srgbClr>
-            </a:outerShdw>
-          </a:effectLst>
-        </p:spPr>
-      </p:sp>
-      <p:sp>
-        <p:nvSpPr>
-          <p:cNvPr id="11" name="Shape 9"/>
-          <p:cNvSpPr/>
-          <p:nvPr/>
-        </p:nvSpPr>
-        <p:spPr>
-          <a:xfrm>
-            <a:off x="4754880" y="1051560"/>
-            <a:ext cx="3840480" cy="54864"/>
-          </a:xfrm>
-          <a:prstGeom prst="rect">
-            <a:avLst/>
-          </a:prstGeom>
-          <a:solidFill>
-            <a:srgbClr val="E9C46A"/>
-          </a:solidFill>
-          <a:ln/>
-        </p:spPr>
-      </p:sp>
-      <p:sp>
-        <p:nvSpPr>
-          <p:cNvPr id="12" name="Text 10"/>
-          <p:cNvSpPr/>
-          <p:nvPr/>
-        </p:nvSpPr>
-        <p:spPr>
-          <a:xfrm>
-            <a:off x="4983480" y="1188720"/>
-            <a:ext cx="3383280" cy="457200"/>
-          </a:xfrm>
-          <a:prstGeom prst="rect">
-            <a:avLst/>
-          </a:prstGeom>
-          <a:noFill/>
-          <a:ln/>
-        </p:spPr>
-        <p:txBody>
-          <a:bodyPr wrap="square" lIns="0" tIns="0" rIns="0" bIns="0" rtlCol="0" anchor="ctr"/>
-          <a:lstStyle/>
-          <a:p>
-            <a:pPr indent="0" marL="0">
-              <a:buNone/>
-            </a:pPr>
-            <a:r>
-              <a:rPr lang="en-US" sz="1500" b="1" dirty="0">
-                <a:solidFill>
-                  <a:srgbClr val="1B2A4A"/>
-                </a:solidFill>
-                <a:latin typeface="Georgia" pitchFamily="34" charset="0"/>
-                <a:ea typeface="Georgia" pitchFamily="34" charset="-122"/>
-                <a:cs typeface="Georgia" pitchFamily="34" charset="-120"/>
-              </a:rPr>
-              <a:t>Bad Hypothesis</a:t>
-            </a:r>
-            <a:endParaRPr lang="en-US" sz="1500" dirty="0"/>
-          </a:p>
-        </p:txBody>
-      </p:sp>
-      <p:sp>
-        <p:nvSpPr>
-          <p:cNvPr id="13" name="Text 11"/>
-          <p:cNvSpPr/>
-          <p:nvPr/>
-        </p:nvSpPr>
-        <p:spPr>
-          <a:xfrm>
-            <a:off x="4983480" y="1691640"/>
-            <a:ext cx="3383280" cy="2651760"/>
-          </a:xfrm>
-          <a:prstGeom prst="rect">
-            <a:avLst/>
-          </a:prstGeom>
-          <a:noFill/>
-          <a:ln/>
-        </p:spPr>
-        <p:txBody>
-          <a:bodyPr wrap="square" rtlCol="0" anchor="t"/>
-          <a:lstStyle/>
-          <a:p>
-            <a:pPr marL="342900" indent="-342900">
-              <a:spcAft>
-                <a:spcPts val="600"/>
-              </a:spcAft>
-              <a:buSzPct val="100000"/>
-              <a:buChar char="•"/>
-            </a:pPr>
-            <a:r>
-              <a:rPr lang="en-US" sz="1300" dirty="0">
-                <a:solidFill>
-                  <a:srgbClr val="3D3A36"/>
-                </a:solidFill>
-                <a:latin typeface="Calibri" pitchFamily="34" charset="0"/>
-                <a:ea typeface="Calibri" pitchFamily="34" charset="-122"/>
-                <a:cs typeface="Calibri" pitchFamily="34" charset="-120"/>
-              </a:rPr>
-              <a:t>Too vague or impossible to test</a:t>
-            </a:r>
-            <a:endParaRPr lang="en-US" sz="1300" dirty="0"/>
-          </a:p>
-          <a:p>
-            <a:pPr marL="342900" indent="-342900">
-              <a:spcAft>
-                <a:spcPts val="600"/>
-              </a:spcAft>
-              <a:buSzPct val="100000"/>
-              <a:buChar char="•"/>
-            </a:pPr>
-            <a:r>
-              <a:rPr lang="en-US" sz="1300" dirty="0">
-                <a:solidFill>
-                  <a:srgbClr val="3D3A36"/>
-                </a:solidFill>
-                <a:latin typeface="Calibri" pitchFamily="34" charset="0"/>
-                <a:ea typeface="Calibri" pitchFamily="34" charset="-122"/>
-                <a:cs typeface="Calibri" pitchFamily="34" charset="-120"/>
-              </a:rPr>
-              <a:t>'Plants are nice'</a:t>
-            </a:r>
-            <a:endParaRPr lang="en-US" sz="1300" dirty="0"/>
-          </a:p>
-          <a:p>
-            <a:pPr marL="342900" indent="-342900">
-              <a:spcAft>
-                <a:spcPts val="600"/>
-              </a:spcAft>
-              <a:buSzPct val="100000"/>
-              <a:buChar char="•"/>
-            </a:pPr>
-            <a:r>
-              <a:rPr lang="en-US" sz="1300" dirty="0">
-                <a:solidFill>
-                  <a:srgbClr val="3D3A36"/>
-                </a:solidFill>
-                <a:latin typeface="Calibri" pitchFamily="34" charset="0"/>
-                <a:ea typeface="Calibri" pitchFamily="34" charset="-122"/>
-                <a:cs typeface="Calibri" pitchFamily="34" charset="-120"/>
-              </a:rPr>
-              <a:t>Does not say what will change or be measured</a:t>
-            </a:r>
-            <a:endParaRPr lang="en-US" sz="1300" dirty="0"/>
-          </a:p>
-          <a:p>
-            <a:pPr marL="342900" indent="-342900">
-              <a:spcAft>
-                <a:spcPts val="600"/>
-              </a:spcAft>
-              <a:buSzPct val="100000"/>
-              <a:buChar char="•"/>
-            </a:pPr>
-            <a:r>
-              <a:rPr lang="en-US" sz="1300" dirty="0">
-                <a:solidFill>
-                  <a:srgbClr val="3D3A36"/>
-                </a:solidFill>
-                <a:latin typeface="Calibri" pitchFamily="34" charset="0"/>
-                <a:ea typeface="Calibri" pitchFamily="34" charset="-122"/>
-                <a:cs typeface="Calibri" pitchFamily="34" charset="-120"/>
-              </a:rPr>
-              <a:t>Cannot be tested with an experiment</a:t>
+                <a:latin typeface="Arial" pitchFamily="34" charset="0"/>
+                <a:ea typeface="Arial" pitchFamily="34" charset="-122"/>
+                <a:cs typeface="Arial" pitchFamily="34" charset="-120"/>
+              </a:rPr>
+              <a:t>Just a guess with no reasoning.</a:t>
             </a:r>
             <a:endParaRPr lang="en-US" sz="1300" dirty="0"/>
           </a:p>
@@ -3615,47 +3344,7 @@
         <p:spPr>
           <a:xfrm>
             <a:off x="0" y="0"/>
-            <a:ext cx="9144000" cy="822960"/>
-          </a:xfrm>
-          <a:prstGeom prst="rect">
-            <a:avLst/>
-          </a:prstGeom>
-          <a:solidFill>
-            <a:srgbClr val="FFFFFF"/>
-          </a:solidFill>
-          <a:ln/>
-        </p:spPr>
-      </p:sp>
-      <p:sp>
-        <p:nvSpPr>
-          <p:cNvPr id="3" name="Shape 1"/>
-          <p:cNvSpPr/>
-          <p:nvPr/>
-        </p:nvSpPr>
-        <p:spPr>
-          <a:xfrm>
-            <a:off x="0" y="804672"/>
-            <a:ext cx="9144000" cy="27432"/>
-          </a:xfrm>
-          <a:prstGeom prst="rect">
-            <a:avLst/>
-          </a:prstGeom>
-          <a:solidFill>
-            <a:srgbClr val="E5E2DC"/>
-          </a:solidFill>
-          <a:ln/>
-        </p:spPr>
-      </p:sp>
-      <p:sp>
-        <p:nvSpPr>
-          <p:cNvPr id="4" name="Shape 2"/>
-          <p:cNvSpPr/>
-          <p:nvPr/>
-        </p:nvSpPr>
-        <p:spPr>
-          <a:xfrm>
-            <a:off x="548640" y="201168"/>
-            <a:ext cx="54864" cy="420624"/>
+            <a:ext cx="73152" cy="5148072"/>
           </a:xfrm>
           <a:prstGeom prst="rect">
             <a:avLst/>
@@ -3668,14 +3357,14 @@
       </p:sp>
       <p:sp>
         <p:nvSpPr>
-          <p:cNvPr id="5" name="Text 3"/>
-          <p:cNvSpPr/>
-          <p:nvPr/>
-        </p:nvSpPr>
-        <p:spPr>
-          <a:xfrm>
-            <a:off x="777240" y="137160"/>
-            <a:ext cx="7772400" cy="548640"/>
+          <p:cNvPr id="3" name="Text 1"/>
+          <p:cNvSpPr/>
+          <p:nvPr/>
+        </p:nvSpPr>
+        <p:spPr>
+          <a:xfrm>
+            <a:off x="548640" y="274320"/>
+            <a:ext cx="9144000" cy="640080"/>
           </a:xfrm>
           <a:prstGeom prst="rect">
             <a:avLst/>
@@ -3684,14 +3373,14 @@
           <a:ln/>
         </p:spPr>
         <p:txBody>
-          <a:bodyPr wrap="square" lIns="0" tIns="0" rIns="0" bIns="0" rtlCol="0" anchor="ctr"/>
+          <a:bodyPr wrap="square" rtlCol="0" anchor="ctr"/>
           <a:lstStyle/>
           <a:p>
             <a:pPr indent="0" marL="0">
               <a:buNone/>
             </a:pPr>
             <a:r>
-              <a:rPr lang="en-US" sz="2000" b="1" dirty="0">
+              <a:rPr lang="en-US" sz="2400" b="1" dirty="0">
                 <a:solidFill>
                   <a:srgbClr val="1B2A4A"/>
                 </a:solidFill>
@@ -3699,22 +3388,42 @@
                 <a:ea typeface="Georgia" pitchFamily="34" charset="-122"/>
                 <a:cs typeface="Georgia" pitchFamily="34" charset="-120"/>
               </a:rPr>
-              <a:t>Writing a Method</a:t>
-            </a:r>
-            <a:endParaRPr lang="en-US" sz="2000" dirty="0"/>
-          </a:p>
-        </p:txBody>
-      </p:sp>
-      <p:sp>
-        <p:nvSpPr>
-          <p:cNvPr id="6" name="Text 4"/>
-          <p:cNvSpPr/>
-          <p:nvPr/>
-        </p:nvSpPr>
-        <p:spPr>
-          <a:xfrm>
-            <a:off x="731520" y="1051560"/>
-            <a:ext cx="7680960" cy="3108960"/>
+              <a:t>Writing a Strong Method</a:t>
+            </a:r>
+            <a:endParaRPr lang="en-US" sz="2400" dirty="0"/>
+          </a:p>
+        </p:txBody>
+      </p:sp>
+      <p:sp>
+        <p:nvSpPr>
+          <p:cNvPr id="4" name="Shape 2"/>
+          <p:cNvSpPr/>
+          <p:nvPr/>
+        </p:nvSpPr>
+        <p:spPr>
+          <a:xfrm>
+            <a:off x="548640" y="960120"/>
+            <a:ext cx="2286000" cy="36576"/>
+          </a:xfrm>
+          <a:prstGeom prst="rect">
+            <a:avLst/>
+          </a:prstGeom>
+          <a:solidFill>
+            <a:srgbClr val="2A9D8F"/>
+          </a:solidFill>
+          <a:ln/>
+        </p:spPr>
+      </p:sp>
+      <p:sp>
+        <p:nvSpPr>
+          <p:cNvPr id="5" name="Text 3"/>
+          <p:cNvSpPr/>
+          <p:nvPr/>
+        </p:nvSpPr>
+        <p:spPr>
+          <a:xfrm>
+            <a:off x="548640" y="1188720"/>
+            <a:ext cx="10058400" cy="3474720"/>
           </a:xfrm>
           <a:prstGeom prst="rect">
             <a:avLst/>
@@ -3726,210 +3435,136 @@
           <a:bodyPr wrap="square" rtlCol="0" anchor="t"/>
           <a:lstStyle/>
           <a:p>
-            <a:pPr marL="342900" indent="-342900">
+            <a:pPr>
+              <a:lnSpc>
+                <a:spcPct val="150000"/>
+              </a:lnSpc>
               <a:spcAft>
-                <a:spcPts val="800"/>
+                <a:spcPts val="600"/>
               </a:spcAft>
-              <a:buSzPct val="100000"/>
-              <a:buChar char="•"/>
             </a:pPr>
             <a:r>
               <a:rPr lang="en-US" sz="1500" dirty="0">
                 <a:solidFill>
                   <a:srgbClr val="3D3A36"/>
                 </a:solidFill>
-                <a:latin typeface="Calibri" pitchFamily="34" charset="0"/>
-                <a:ea typeface="Calibri" pitchFamily="34" charset="-122"/>
-                <a:cs typeface="Calibri" pitchFamily="34" charset="-120"/>
-              </a:rPr>
-              <a:t>Write numbered steps that someone else could follow.</a:t>
+                <a:latin typeface="Arial" pitchFamily="34" charset="0"/>
+                <a:ea typeface="Arial" pitchFamily="34" charset="-122"/>
+                <a:cs typeface="Arial" pitchFamily="34" charset="-120"/>
+              </a:rPr>
+              <a:t>Write numbered steps that someone else could follow exactly.</a:t>
             </a:r>
             <a:endParaRPr lang="en-US" sz="1500" dirty="0"/>
           </a:p>
           <a:p>
-            <a:pPr marL="342900" indent="-342900">
+            <a:pPr>
+              <a:lnSpc>
+                <a:spcPct val="150000"/>
+              </a:lnSpc>
               <a:spcAft>
-                <a:spcPts val="800"/>
+                <a:spcPts val="600"/>
               </a:spcAft>
-              <a:buSzPct val="100000"/>
-              <a:buChar char="•"/>
             </a:pPr>
             <a:r>
               <a:rPr lang="en-US" sz="1500" dirty="0">
                 <a:solidFill>
                   <a:srgbClr val="3D3A36"/>
                 </a:solidFill>
-                <a:latin typeface="Calibri" pitchFamily="34" charset="0"/>
-                <a:ea typeface="Calibri" pitchFamily="34" charset="-122"/>
-                <a:cs typeface="Calibri" pitchFamily="34" charset="-120"/>
-              </a:rPr>
-              <a:t>Include equipment needed and quantities.</a:t>
+                <a:latin typeface="Arial" pitchFamily="34" charset="0"/>
+                <a:ea typeface="Arial" pitchFamily="34" charset="-122"/>
+                <a:cs typeface="Arial" pitchFamily="34" charset="-120"/>
+              </a:rPr>
+              <a:t>List ALL equipment needed, with quantities.</a:t>
             </a:r>
             <a:endParaRPr lang="en-US" sz="1500" dirty="0"/>
           </a:p>
           <a:p>
-            <a:pPr marL="342900" indent="-342900">
+            <a:pPr>
+              <a:lnSpc>
+                <a:spcPct val="150000"/>
+              </a:lnSpc>
               <a:spcAft>
-                <a:spcPts val="800"/>
+                <a:spcPts val="600"/>
               </a:spcAft>
-              <a:buSzPct val="100000"/>
-              <a:buChar char="•"/>
             </a:pPr>
             <a:r>
               <a:rPr lang="en-US" sz="1500" dirty="0">
                 <a:solidFill>
                   <a:srgbClr val="3D3A36"/>
                 </a:solidFill>
-                <a:latin typeface="Calibri" pitchFamily="34" charset="0"/>
-                <a:ea typeface="Calibri" pitchFamily="34" charset="-122"/>
-                <a:cs typeface="Calibri" pitchFamily="34" charset="-120"/>
-              </a:rPr>
-              <a:t>State what you will change (independent variable).</a:t>
+                <a:latin typeface="Arial" pitchFamily="34" charset="0"/>
+                <a:ea typeface="Arial" pitchFamily="34" charset="-122"/>
+                <a:cs typeface="Arial" pitchFamily="34" charset="-120"/>
+              </a:rPr>
+              <a:t>State what you will CHANGE (independent variable).</a:t>
             </a:r>
             <a:endParaRPr lang="en-US" sz="1500" dirty="0"/>
           </a:p>
           <a:p>
-            <a:pPr marL="342900" indent="-342900">
+            <a:pPr>
+              <a:lnSpc>
+                <a:spcPct val="150000"/>
+              </a:lnSpc>
               <a:spcAft>
-                <a:spcPts val="800"/>
+                <a:spcPts val="600"/>
               </a:spcAft>
-              <a:buSzPct val="100000"/>
-              <a:buChar char="•"/>
             </a:pPr>
             <a:r>
               <a:rPr lang="en-US" sz="1500" dirty="0">
                 <a:solidFill>
                   <a:srgbClr val="3D3A36"/>
                 </a:solidFill>
-                <a:latin typeface="Calibri" pitchFamily="34" charset="0"/>
-                <a:ea typeface="Calibri" pitchFamily="34" charset="-122"/>
-                <a:cs typeface="Calibri" pitchFamily="34" charset="-120"/>
-              </a:rPr>
-              <a:t>State what you will measure (dependent variable).</a:t>
+                <a:latin typeface="Arial" pitchFamily="34" charset="0"/>
+                <a:ea typeface="Arial" pitchFamily="34" charset="-122"/>
+                <a:cs typeface="Arial" pitchFamily="34" charset="-120"/>
+              </a:rPr>
+              <a:t>State what you will MEASURE (dependent variable).</a:t>
             </a:r>
             <a:endParaRPr lang="en-US" sz="1500" dirty="0"/>
           </a:p>
           <a:p>
-            <a:pPr marL="342900" indent="-342900">
+            <a:pPr>
+              <a:lnSpc>
+                <a:spcPct val="150000"/>
+              </a:lnSpc>
               <a:spcAft>
-                <a:spcPts val="800"/>
+                <a:spcPts val="600"/>
               </a:spcAft>
-              <a:buSzPct val="100000"/>
-              <a:buChar char="•"/>
             </a:pPr>
             <a:r>
               <a:rPr lang="en-US" sz="1500" dirty="0">
                 <a:solidFill>
                   <a:srgbClr val="3D3A36"/>
                 </a:solidFill>
-                <a:latin typeface="Calibri" pitchFamily="34" charset="0"/>
-                <a:ea typeface="Calibri" pitchFamily="34" charset="-122"/>
-                <a:cs typeface="Calibri" pitchFamily="34" charset="-120"/>
-              </a:rPr>
-              <a:t>State what you will keep the same (controlled variables).</a:t>
+                <a:latin typeface="Arial" pitchFamily="34" charset="0"/>
+                <a:ea typeface="Arial" pitchFamily="34" charset="-122"/>
+                <a:cs typeface="Arial" pitchFamily="34" charset="-120"/>
+              </a:rPr>
+              <a:t>State what you will KEEP THE SAME (controlled variables).</a:t>
             </a:r>
             <a:endParaRPr lang="en-US" sz="1500" dirty="0"/>
           </a:p>
           <a:p>
-            <a:pPr marL="342900" indent="-342900">
+            <a:pPr>
+              <a:lnSpc>
+                <a:spcPct val="150000"/>
+              </a:lnSpc>
               <a:spcAft>
-                <a:spcPts val="800"/>
+                <a:spcPts val="600"/>
               </a:spcAft>
-              <a:buSzPct val="100000"/>
-              <a:buChar char="•"/>
             </a:pPr>
             <a:r>
               <a:rPr lang="en-US" sz="1500" dirty="0">
                 <a:solidFill>
                   <a:srgbClr val="3D3A36"/>
                 </a:solidFill>
-                <a:latin typeface="Calibri" pitchFamily="34" charset="0"/>
-                <a:ea typeface="Calibri" pitchFamily="34" charset="-122"/>
-                <a:cs typeface="Calibri" pitchFamily="34" charset="-120"/>
-              </a:rPr>
-              <a:t>Include how many times you will repeat the experiment.</a:t>
+                <a:latin typeface="Arial" pitchFamily="34" charset="0"/>
+                <a:ea typeface="Arial" pitchFamily="34" charset="-122"/>
+                <a:cs typeface="Arial" pitchFamily="34" charset="-120"/>
+              </a:rPr>
+              <a:t>Include how many times you will repeat (at least 3 times).</a:t>
             </a:r>
             <a:endParaRPr lang="en-US" sz="1500" dirty="0"/>
-          </a:p>
-        </p:txBody>
-      </p:sp>
-      <p:sp>
-        <p:nvSpPr>
-          <p:cNvPr id="7" name="Shape 5"/>
-          <p:cNvSpPr/>
-          <p:nvPr/>
-        </p:nvSpPr>
-        <p:spPr>
-          <a:xfrm>
-            <a:off x="731520" y="4206240"/>
-            <a:ext cx="7680960" cy="640080"/>
-          </a:xfrm>
-          <a:prstGeom prst="rect">
-            <a:avLst/>
-          </a:prstGeom>
-          <a:solidFill>
-            <a:srgbClr val="E8F5F3"/>
-          </a:solidFill>
-          <a:ln/>
-          <a:effectLst>
-            <a:outerShdw sx="100000" sy="100000" kx="0" ky="0" algn="bl" rotWithShape="0" blurRad="50800" dist="25400" dir="8100000">
-              <a:srgbClr val="000000">
-                <a:alpha val="10000"/>
-              </a:srgbClr>
-            </a:outerShdw>
-          </a:effectLst>
-        </p:spPr>
-      </p:sp>
-      <p:sp>
-        <p:nvSpPr>
-          <p:cNvPr id="8" name="Text 6"/>
-          <p:cNvSpPr/>
-          <p:nvPr/>
-        </p:nvSpPr>
-        <p:spPr>
-          <a:xfrm>
-            <a:off x="914400" y="4251960"/>
-            <a:ext cx="7315200" cy="548640"/>
-          </a:xfrm>
-          <a:prstGeom prst="rect">
-            <a:avLst/>
-          </a:prstGeom>
-          <a:noFill/>
-          <a:ln/>
-        </p:spPr>
-        <p:txBody>
-          <a:bodyPr wrap="square" rtlCol="0" anchor="ctr"/>
-          <a:lstStyle/>
-          <a:p>
-            <a:pPr indent="0" marL="0">
-              <a:buNone/>
-            </a:pPr>
-            <a:r>
-              <a:rPr lang="en-US" sz="1200" b="1" dirty="0">
-                <a:solidFill>
-                  <a:srgbClr val="2A9D8F"/>
-                </a:solidFill>
-                <a:latin typeface="Calibri" pitchFamily="34" charset="0"/>
-                <a:ea typeface="Calibri" pitchFamily="34" charset="-122"/>
-                <a:cs typeface="Calibri" pitchFamily="34" charset="-120"/>
-              </a:rPr>
-              <a:t>Key Idea: </a:t>
-            </a:r>
-            <a:pPr indent="0" marL="0">
-              <a:buNone/>
-            </a:pPr>
-            <a:r>
-              <a:rPr lang="en-US" sz="1200" i="1" dirty="0">
-                <a:solidFill>
-                  <a:srgbClr val="3D3A36"/>
-                </a:solidFill>
-                <a:latin typeface="Calibri" pitchFamily="34" charset="0"/>
-                <a:ea typeface="Calibri" pitchFamily="34" charset="-122"/>
-                <a:cs typeface="Calibri" pitchFamily="34" charset="-120"/>
-              </a:rPr>
-              <a:t>A good method is like a recipe — anyone should be able to follow it and get the same results.</a:t>
-            </a:r>
-            <a:endParaRPr lang="en-US" sz="1200" dirty="0"/>
           </a:p>
         </p:txBody>
       </p:sp>
@@ -3974,47 +3609,7 @@
         <p:spPr>
           <a:xfrm>
             <a:off x="0" y="0"/>
-            <a:ext cx="9144000" cy="822960"/>
-          </a:xfrm>
-          <a:prstGeom prst="rect">
-            <a:avLst/>
-          </a:prstGeom>
-          <a:solidFill>
-            <a:srgbClr val="FFFFFF"/>
-          </a:solidFill>
-          <a:ln/>
-        </p:spPr>
-      </p:sp>
-      <p:sp>
-        <p:nvSpPr>
-          <p:cNvPr id="3" name="Shape 1"/>
-          <p:cNvSpPr/>
-          <p:nvPr/>
-        </p:nvSpPr>
-        <p:spPr>
-          <a:xfrm>
-            <a:off x="0" y="804672"/>
-            <a:ext cx="9144000" cy="27432"/>
-          </a:xfrm>
-          <a:prstGeom prst="rect">
-            <a:avLst/>
-          </a:prstGeom>
-          <a:solidFill>
-            <a:srgbClr val="E5E2DC"/>
-          </a:solidFill>
-          <a:ln/>
-        </p:spPr>
-      </p:sp>
-      <p:sp>
-        <p:nvSpPr>
-          <p:cNvPr id="4" name="Shape 2"/>
-          <p:cNvSpPr/>
-          <p:nvPr/>
-        </p:nvSpPr>
-        <p:spPr>
-          <a:xfrm>
-            <a:off x="548640" y="201168"/>
-            <a:ext cx="54864" cy="420624"/>
+            <a:ext cx="73152" cy="5148072"/>
           </a:xfrm>
           <a:prstGeom prst="rect">
             <a:avLst/>
@@ -4027,14 +3622,14 @@
       </p:sp>
       <p:sp>
         <p:nvSpPr>
-          <p:cNvPr id="5" name="Text 3"/>
-          <p:cNvSpPr/>
-          <p:nvPr/>
-        </p:nvSpPr>
-        <p:spPr>
-          <a:xfrm>
-            <a:off x="777240" y="137160"/>
-            <a:ext cx="7772400" cy="548640"/>
+          <p:cNvPr id="3" name="Text 1"/>
+          <p:cNvSpPr/>
+          <p:nvPr/>
+        </p:nvSpPr>
+        <p:spPr>
+          <a:xfrm>
+            <a:off x="548640" y="274320"/>
+            <a:ext cx="9144000" cy="640080"/>
           </a:xfrm>
           <a:prstGeom prst="rect">
             <a:avLst/>
@@ -4043,14 +3638,14 @@
           <a:ln/>
         </p:spPr>
         <p:txBody>
-          <a:bodyPr wrap="square" lIns="0" tIns="0" rIns="0" bIns="0" rtlCol="0" anchor="ctr"/>
+          <a:bodyPr wrap="square" rtlCol="0" anchor="ctr"/>
           <a:lstStyle/>
           <a:p>
             <a:pPr indent="0" marL="0">
               <a:buNone/>
             </a:pPr>
             <a:r>
-              <a:rPr lang="en-US" sz="2000" b="1" dirty="0">
+              <a:rPr lang="en-US" sz="2400" b="1" dirty="0">
                 <a:solidFill>
                   <a:srgbClr val="1B2A4A"/>
                 </a:solidFill>
@@ -4060,47 +3655,40 @@
               </a:rPr>
               <a:t>Why We Repeat Experiments</a:t>
             </a:r>
-            <a:endParaRPr lang="en-US" sz="2000" dirty="0"/>
-          </a:p>
-        </p:txBody>
-      </p:sp>
-      <p:sp>
-        <p:nvSpPr>
-          <p:cNvPr id="6" name="Shape 4"/>
-          <p:cNvSpPr/>
-          <p:nvPr/>
-        </p:nvSpPr>
-        <p:spPr>
-          <a:xfrm>
-            <a:off x="731520" y="1280160"/>
-            <a:ext cx="2377440" cy="2377440"/>
+            <a:endParaRPr lang="en-US" sz="2400" dirty="0"/>
+          </a:p>
+        </p:txBody>
+      </p:sp>
+      <p:sp>
+        <p:nvSpPr>
+          <p:cNvPr id="4" name="Shape 2"/>
+          <p:cNvSpPr/>
+          <p:nvPr/>
+        </p:nvSpPr>
+        <p:spPr>
+          <a:xfrm>
+            <a:off x="548640" y="960120"/>
+            <a:ext cx="2286000" cy="36576"/>
           </a:xfrm>
           <a:prstGeom prst="rect">
             <a:avLst/>
           </a:prstGeom>
           <a:solidFill>
-            <a:srgbClr val="FFFFFF"/>
+            <a:srgbClr val="2A9D8F"/>
           </a:solidFill>
           <a:ln/>
-          <a:effectLst>
-            <a:outerShdw sx="100000" sy="100000" kx="0" ky="0" algn="bl" rotWithShape="0" blurRad="50800" dist="25400" dir="8100000">
-              <a:srgbClr val="000000">
-                <a:alpha val="10000"/>
-              </a:srgbClr>
-            </a:outerShdw>
-          </a:effectLst>
-        </p:spPr>
-      </p:sp>
-      <p:sp>
-        <p:nvSpPr>
-          <p:cNvPr id="7" name="Text 5"/>
-          <p:cNvSpPr/>
-          <p:nvPr/>
-        </p:nvSpPr>
-        <p:spPr>
-          <a:xfrm>
-            <a:off x="731520" y="1463040"/>
-            <a:ext cx="2377440" cy="914400"/>
+        </p:spPr>
+      </p:sp>
+      <p:sp>
+        <p:nvSpPr>
+          <p:cNvPr id="5" name="Text 3"/>
+          <p:cNvSpPr/>
+          <p:nvPr/>
+        </p:nvSpPr>
+        <p:spPr>
+          <a:xfrm>
+            <a:off x="548640" y="1188720"/>
+            <a:ext cx="10058400" cy="3474720"/>
           </a:xfrm>
           <a:prstGeom prst="rect">
             <a:avLst/>
@@ -4109,429 +3697,139 @@
           <a:ln/>
         </p:spPr>
         <p:txBody>
-          <a:bodyPr wrap="square" rtlCol="0" anchor="ctr"/>
-          <a:lstStyle/>
-          <a:p>
-            <a:pPr algn="ctr" indent="0" marL="0">
-              <a:buNone/>
-            </a:pPr>
-            <a:r>
-              <a:rPr lang="en-US" sz="3600" b="1" dirty="0">
-                <a:solidFill>
-                  <a:srgbClr val="2A9D8F"/>
-                </a:solidFill>
-                <a:latin typeface="Georgia" pitchFamily="34" charset="0"/>
-                <a:ea typeface="Georgia" pitchFamily="34" charset="-122"/>
-                <a:cs typeface="Georgia" pitchFamily="34" charset="-120"/>
-              </a:rPr>
-              <a:t>3×</a:t>
-            </a:r>
-            <a:endParaRPr lang="en-US" sz="3600" dirty="0"/>
-          </a:p>
-        </p:txBody>
-      </p:sp>
-      <p:sp>
-        <p:nvSpPr>
-          <p:cNvPr id="8" name="Text 6"/>
-          <p:cNvSpPr/>
-          <p:nvPr/>
-        </p:nvSpPr>
-        <p:spPr>
-          <a:xfrm>
-            <a:off x="731520" y="2423160"/>
-            <a:ext cx="2377440" cy="365760"/>
-          </a:xfrm>
-          <a:prstGeom prst="rect">
-            <a:avLst/>
-          </a:prstGeom>
-          <a:noFill/>
-          <a:ln/>
-        </p:spPr>
-        <p:txBody>
-          <a:bodyPr wrap="square" rtlCol="0" anchor="ctr"/>
-          <a:lstStyle/>
-          <a:p>
-            <a:pPr algn="ctr" indent="0" marL="0">
-              <a:buNone/>
-            </a:pPr>
-            <a:r>
-              <a:rPr lang="en-US" sz="1200" b="1" dirty="0">
-                <a:solidFill>
-                  <a:srgbClr val="6B6660"/>
-                </a:solidFill>
-                <a:latin typeface="Calibri" pitchFamily="34" charset="0"/>
-                <a:ea typeface="Calibri" pitchFamily="34" charset="-122"/>
-                <a:cs typeface="Calibri" pitchFamily="34" charset="-120"/>
-              </a:rPr>
-              <a:t>MINIMUM REPEATS</a:t>
-            </a:r>
-            <a:endParaRPr lang="en-US" sz="1200" dirty="0"/>
-          </a:p>
-        </p:txBody>
-      </p:sp>
-      <p:sp>
-        <p:nvSpPr>
-          <p:cNvPr id="9" name="Text 7"/>
-          <p:cNvSpPr/>
-          <p:nvPr/>
-        </p:nvSpPr>
-        <p:spPr>
-          <a:xfrm>
-            <a:off x="822960" y="2834640"/>
-            <a:ext cx="2194560" cy="640080"/>
-          </a:xfrm>
-          <a:prstGeom prst="rect">
-            <a:avLst/>
-          </a:prstGeom>
-          <a:noFill/>
-          <a:ln/>
-        </p:spPr>
-        <p:txBody>
-          <a:bodyPr wrap="square" rtlCol="0" anchor="ctr"/>
-          <a:lstStyle/>
-          <a:p>
-            <a:pPr algn="ctr" indent="0" marL="0">
-              <a:buNone/>
-            </a:pPr>
-            <a:r>
-              <a:rPr lang="en-US" sz="1000" dirty="0">
-                <a:solidFill>
-                  <a:srgbClr val="9B9690"/>
-                </a:solidFill>
-                <a:latin typeface="Calibri" pitchFamily="34" charset="0"/>
-                <a:ea typeface="Calibri" pitchFamily="34" charset="-122"/>
-                <a:cs typeface="Calibri" pitchFamily="34" charset="-120"/>
-              </a:rPr>
-              <a:t>Most experiments need at least 3 trials to be reliable</a:t>
-            </a:r>
-            <a:endParaRPr lang="en-US" sz="1000" dirty="0"/>
-          </a:p>
-        </p:txBody>
-      </p:sp>
-      <p:sp>
-        <p:nvSpPr>
-          <p:cNvPr id="10" name="Shape 8"/>
-          <p:cNvSpPr/>
-          <p:nvPr/>
-        </p:nvSpPr>
-        <p:spPr>
-          <a:xfrm>
-            <a:off x="3383280" y="1280160"/>
-            <a:ext cx="2377440" cy="2377440"/>
-          </a:xfrm>
-          <a:prstGeom prst="rect">
-            <a:avLst/>
-          </a:prstGeom>
-          <a:solidFill>
-            <a:srgbClr val="FFFFFF"/>
-          </a:solidFill>
-          <a:ln/>
-          <a:effectLst>
-            <a:outerShdw sx="100000" sy="100000" kx="0" ky="0" algn="bl" rotWithShape="0" blurRad="50800" dist="25400" dir="8100000">
-              <a:srgbClr val="000000">
-                <a:alpha val="10000"/>
-              </a:srgbClr>
-            </a:outerShdw>
-          </a:effectLst>
-        </p:spPr>
-      </p:sp>
-      <p:sp>
-        <p:nvSpPr>
-          <p:cNvPr id="11" name="Text 9"/>
-          <p:cNvSpPr/>
-          <p:nvPr/>
-        </p:nvSpPr>
-        <p:spPr>
-          <a:xfrm>
-            <a:off x="3383280" y="1463040"/>
-            <a:ext cx="2377440" cy="914400"/>
-          </a:xfrm>
-          <a:prstGeom prst="rect">
-            <a:avLst/>
-          </a:prstGeom>
-          <a:noFill/>
-          <a:ln/>
-        </p:spPr>
-        <p:txBody>
-          <a:bodyPr wrap="square" rtlCol="0" anchor="ctr"/>
-          <a:lstStyle/>
-          <a:p>
-            <a:pPr algn="ctr" indent="0" marL="0">
-              <a:buNone/>
-            </a:pPr>
-            <a:r>
-              <a:rPr lang="en-US" sz="3600" b="1" dirty="0">
-                <a:solidFill>
-                  <a:srgbClr val="2A9D8F"/>
-                </a:solidFill>
-                <a:latin typeface="Georgia" pitchFamily="34" charset="0"/>
-                <a:ea typeface="Georgia" pitchFamily="34" charset="-122"/>
-                <a:cs typeface="Georgia" pitchFamily="34" charset="-120"/>
-              </a:rPr>
-              <a:t>Mean</a:t>
-            </a:r>
-            <a:endParaRPr lang="en-US" sz="3600" dirty="0"/>
-          </a:p>
-        </p:txBody>
-      </p:sp>
-      <p:sp>
-        <p:nvSpPr>
-          <p:cNvPr id="12" name="Text 10"/>
-          <p:cNvSpPr/>
-          <p:nvPr/>
-        </p:nvSpPr>
-        <p:spPr>
-          <a:xfrm>
-            <a:off x="3383280" y="2423160"/>
-            <a:ext cx="2377440" cy="365760"/>
-          </a:xfrm>
-          <a:prstGeom prst="rect">
-            <a:avLst/>
-          </a:prstGeom>
-          <a:noFill/>
-          <a:ln/>
-        </p:spPr>
-        <p:txBody>
-          <a:bodyPr wrap="square" rtlCol="0" anchor="ctr"/>
-          <a:lstStyle/>
-          <a:p>
-            <a:pPr algn="ctr" indent="0" marL="0">
-              <a:buNone/>
-            </a:pPr>
-            <a:r>
-              <a:rPr lang="en-US" sz="1200" b="1" dirty="0">
-                <a:solidFill>
-                  <a:srgbClr val="6B6660"/>
-                </a:solidFill>
-                <a:latin typeface="Calibri" pitchFamily="34" charset="0"/>
-                <a:ea typeface="Calibri" pitchFamily="34" charset="-122"/>
-                <a:cs typeface="Calibri" pitchFamily="34" charset="-120"/>
-              </a:rPr>
-              <a:t>AVERAGE RESULT</a:t>
-            </a:r>
-            <a:endParaRPr lang="en-US" sz="1200" dirty="0"/>
-          </a:p>
-        </p:txBody>
-      </p:sp>
-      <p:sp>
-        <p:nvSpPr>
-          <p:cNvPr id="13" name="Text 11"/>
-          <p:cNvSpPr/>
-          <p:nvPr/>
-        </p:nvSpPr>
-        <p:spPr>
-          <a:xfrm>
-            <a:off x="3474720" y="2834640"/>
-            <a:ext cx="2194560" cy="640080"/>
-          </a:xfrm>
-          <a:prstGeom prst="rect">
-            <a:avLst/>
-          </a:prstGeom>
-          <a:noFill/>
-          <a:ln/>
-        </p:spPr>
-        <p:txBody>
-          <a:bodyPr wrap="square" rtlCol="0" anchor="ctr"/>
-          <a:lstStyle/>
-          <a:p>
-            <a:pPr algn="ctr" indent="0" marL="0">
-              <a:buNone/>
-            </a:pPr>
-            <a:r>
-              <a:rPr lang="en-US" sz="1000" dirty="0">
-                <a:solidFill>
-                  <a:srgbClr val="9B9690"/>
-                </a:solidFill>
-                <a:latin typeface="Calibri" pitchFamily="34" charset="0"/>
-                <a:ea typeface="Calibri" pitchFamily="34" charset="-122"/>
-                <a:cs typeface="Calibri" pitchFamily="34" charset="-120"/>
-              </a:rPr>
-              <a:t>Add all results, divide by number of trials</a:t>
-            </a:r>
-            <a:endParaRPr lang="en-US" sz="1000" dirty="0"/>
-          </a:p>
-        </p:txBody>
-      </p:sp>
-      <p:sp>
-        <p:nvSpPr>
-          <p:cNvPr id="14" name="Shape 12"/>
-          <p:cNvSpPr/>
-          <p:nvPr/>
-        </p:nvSpPr>
-        <p:spPr>
-          <a:xfrm>
-            <a:off x="6035040" y="1280160"/>
-            <a:ext cx="2377440" cy="2377440"/>
-          </a:xfrm>
-          <a:prstGeom prst="rect">
-            <a:avLst/>
-          </a:prstGeom>
-          <a:solidFill>
-            <a:srgbClr val="FFFFFF"/>
-          </a:solidFill>
-          <a:ln/>
-          <a:effectLst>
-            <a:outerShdw sx="100000" sy="100000" kx="0" ky="0" algn="bl" rotWithShape="0" blurRad="50800" dist="25400" dir="8100000">
-              <a:srgbClr val="000000">
-                <a:alpha val="10000"/>
-              </a:srgbClr>
-            </a:outerShdw>
-          </a:effectLst>
-        </p:spPr>
-      </p:sp>
-      <p:sp>
-        <p:nvSpPr>
-          <p:cNvPr id="15" name="Text 13"/>
-          <p:cNvSpPr/>
-          <p:nvPr/>
-        </p:nvSpPr>
-        <p:spPr>
-          <a:xfrm>
-            <a:off x="6035040" y="1463040"/>
-            <a:ext cx="2377440" cy="914400"/>
-          </a:xfrm>
-          <a:prstGeom prst="rect">
-            <a:avLst/>
-          </a:prstGeom>
-          <a:noFill/>
-          <a:ln/>
-        </p:spPr>
-        <p:txBody>
-          <a:bodyPr wrap="square" rtlCol="0" anchor="ctr"/>
-          <a:lstStyle/>
-          <a:p>
-            <a:pPr algn="ctr" indent="0" marL="0">
-              <a:buNone/>
-            </a:pPr>
-            <a:r>
-              <a:rPr lang="en-US" sz="3600" b="1" dirty="0">
-                <a:solidFill>
-                  <a:srgbClr val="2A9D8F"/>
-                </a:solidFill>
-                <a:latin typeface="Georgia" pitchFamily="34" charset="0"/>
-                <a:ea typeface="Georgia" pitchFamily="34" charset="-122"/>
-                <a:cs typeface="Georgia" pitchFamily="34" charset="-120"/>
-              </a:rPr>
-              <a:t>±</a:t>
-            </a:r>
-            <a:endParaRPr lang="en-US" sz="3600" dirty="0"/>
-          </a:p>
-        </p:txBody>
-      </p:sp>
-      <p:sp>
-        <p:nvSpPr>
-          <p:cNvPr id="16" name="Text 14"/>
-          <p:cNvSpPr/>
-          <p:nvPr/>
-        </p:nvSpPr>
-        <p:spPr>
-          <a:xfrm>
-            <a:off x="6035040" y="2423160"/>
-            <a:ext cx="2377440" cy="365760"/>
-          </a:xfrm>
-          <a:prstGeom prst="rect">
-            <a:avLst/>
-          </a:prstGeom>
-          <a:noFill/>
-          <a:ln/>
-        </p:spPr>
-        <p:txBody>
-          <a:bodyPr wrap="square" rtlCol="0" anchor="ctr"/>
-          <a:lstStyle/>
-          <a:p>
-            <a:pPr algn="ctr" indent="0" marL="0">
-              <a:buNone/>
-            </a:pPr>
-            <a:r>
-              <a:rPr lang="en-US" sz="1200" b="1" dirty="0">
-                <a:solidFill>
-                  <a:srgbClr val="6B6660"/>
-                </a:solidFill>
-                <a:latin typeface="Calibri" pitchFamily="34" charset="0"/>
-                <a:ea typeface="Calibri" pitchFamily="34" charset="-122"/>
-                <a:cs typeface="Calibri" pitchFamily="34" charset="-120"/>
-              </a:rPr>
-              <a:t>ANOMALIES</a:t>
-            </a:r>
-            <a:endParaRPr lang="en-US" sz="1200" dirty="0"/>
-          </a:p>
-        </p:txBody>
-      </p:sp>
-      <p:sp>
-        <p:nvSpPr>
-          <p:cNvPr id="17" name="Text 15"/>
-          <p:cNvSpPr/>
-          <p:nvPr/>
-        </p:nvSpPr>
-        <p:spPr>
-          <a:xfrm>
-            <a:off x="6126480" y="2834640"/>
-            <a:ext cx="2194560" cy="640080"/>
-          </a:xfrm>
-          <a:prstGeom prst="rect">
-            <a:avLst/>
-          </a:prstGeom>
-          <a:noFill/>
-          <a:ln/>
-        </p:spPr>
-        <p:txBody>
-          <a:bodyPr wrap="square" rtlCol="0" anchor="ctr"/>
-          <a:lstStyle/>
-          <a:p>
-            <a:pPr algn="ctr" indent="0" marL="0">
-              <a:buNone/>
-            </a:pPr>
-            <a:r>
-              <a:rPr lang="en-US" sz="1000" dirty="0">
-                <a:solidFill>
-                  <a:srgbClr val="9B9690"/>
-                </a:solidFill>
-                <a:latin typeface="Calibri" pitchFamily="34" charset="0"/>
-                <a:ea typeface="Calibri" pitchFamily="34" charset="-122"/>
-                <a:cs typeface="Calibri" pitchFamily="34" charset="-120"/>
-              </a:rPr>
-              <a:t>Results that don't fit the pattern — circle and investigate</a:t>
-            </a:r>
-            <a:endParaRPr lang="en-US" sz="1000" dirty="0"/>
-          </a:p>
-        </p:txBody>
-      </p:sp>
-      <p:sp>
-        <p:nvSpPr>
-          <p:cNvPr id="18" name="Text 16"/>
-          <p:cNvSpPr/>
-          <p:nvPr/>
-        </p:nvSpPr>
-        <p:spPr>
-          <a:xfrm>
-            <a:off x="731520" y="4114800"/>
-            <a:ext cx="7680960" cy="457200"/>
-          </a:xfrm>
-          <a:prstGeom prst="rect">
-            <a:avLst/>
-          </a:prstGeom>
-          <a:noFill/>
-          <a:ln/>
-        </p:spPr>
-        <p:txBody>
-          <a:bodyPr wrap="square" rtlCol="0" anchor="ctr"/>
-          <a:lstStyle/>
-          <a:p>
-            <a:pPr algn="ctr" indent="0" marL="0">
-              <a:buNone/>
-            </a:pPr>
-            <a:r>
-              <a:rPr lang="en-US" sz="1200" i="1" dirty="0">
-                <a:solidFill>
-                  <a:srgbClr val="6B6660"/>
-                </a:solidFill>
-                <a:latin typeface="Calibri" pitchFamily="34" charset="0"/>
-                <a:ea typeface="Calibri" pitchFamily="34" charset="-122"/>
-                <a:cs typeface="Calibri" pitchFamily="34" charset="-120"/>
-              </a:rPr>
-              <a:t>Repeating experiments makes our results more reliable and helps us spot errors.</a:t>
-            </a:r>
-            <a:endParaRPr lang="en-US" sz="1200" dirty="0"/>
+          <a:bodyPr wrap="square" rtlCol="0" anchor="t"/>
+          <a:lstStyle/>
+          <a:p>
+            <a:pPr>
+              <a:lnSpc>
+                <a:spcPct val="150000"/>
+              </a:lnSpc>
+              <a:spcAft>
+                <a:spcPts val="600"/>
+              </a:spcAft>
+            </a:pPr>
+            <a:r>
+              <a:rPr lang="en-US" sz="1500" dirty="0">
+                <a:solidFill>
+                  <a:srgbClr val="3D3A36"/>
+                </a:solidFill>
+                <a:latin typeface="Arial" pitchFamily="34" charset="0"/>
+                <a:ea typeface="Arial" pitchFamily="34" charset="-122"/>
+                <a:cs typeface="Arial" pitchFamily="34" charset="-120"/>
+              </a:rPr>
+              <a:t>One result could be a mistake — repeating shows if it is reliable.</a:t>
+            </a:r>
+            <a:endParaRPr lang="en-US" sz="1500" dirty="0"/>
+          </a:p>
+          <a:p>
+            <a:pPr>
+              <a:lnSpc>
+                <a:spcPct val="150000"/>
+              </a:lnSpc>
+              <a:spcAft>
+                <a:spcPts val="600"/>
+              </a:spcAft>
+            </a:pPr>
+            <a:r>
+              <a:rPr lang="en-US" sz="1500" dirty="0">
+                <a:solidFill>
+                  <a:srgbClr val="3D3A36"/>
+                </a:solidFill>
+                <a:latin typeface="Arial" pitchFamily="34" charset="0"/>
+                <a:ea typeface="Arial" pitchFamily="34" charset="-122"/>
+                <a:cs typeface="Arial" pitchFamily="34" charset="-120"/>
+              </a:rPr>
+              <a:t>Most experiments need at least 3 trials.</a:t>
+            </a:r>
+            <a:endParaRPr lang="en-US" sz="1500" dirty="0"/>
+          </a:p>
+          <a:p>
+            <a:pPr>
+              <a:lnSpc>
+                <a:spcPct val="150000"/>
+              </a:lnSpc>
+              <a:spcAft>
+                <a:spcPts val="600"/>
+              </a:spcAft>
+            </a:pPr>
+            <a:r>
+              <a:rPr lang="en-US" sz="1500" dirty="0">
+                <a:solidFill>
+                  <a:srgbClr val="3D3A36"/>
+                </a:solidFill>
+                <a:latin typeface="Arial" pitchFamily="34" charset="0"/>
+                <a:ea typeface="Arial" pitchFamily="34" charset="-122"/>
+                <a:cs typeface="Arial" pitchFamily="34" charset="-120"/>
+              </a:rPr>
+              <a:t>Calculate the MEAN (average) for each condition.</a:t>
+            </a:r>
+            <a:endParaRPr lang="en-US" sz="1500" dirty="0"/>
+          </a:p>
+          <a:p>
+            <a:pPr>
+              <a:lnSpc>
+                <a:spcPct val="150000"/>
+              </a:lnSpc>
+              <a:spcAft>
+                <a:spcPts val="600"/>
+              </a:spcAft>
+            </a:pPr>
+            <a:r>
+              <a:rPr lang="en-US" sz="1500" dirty="0">
+                <a:solidFill>
+                  <a:srgbClr val="3D3A36"/>
+                </a:solidFill>
+                <a:latin typeface="Arial" pitchFamily="34" charset="0"/>
+                <a:ea typeface="Arial" pitchFamily="34" charset="-122"/>
+                <a:cs typeface="Arial" pitchFamily="34" charset="-120"/>
+              </a:rPr>
+              <a:t>Mean = sum of all values ÷ number of values.</a:t>
+            </a:r>
+            <a:endParaRPr lang="en-US" sz="1500" dirty="0"/>
+          </a:p>
+          <a:p>
+            <a:pPr>
+              <a:lnSpc>
+                <a:spcPct val="150000"/>
+              </a:lnSpc>
+              <a:spcAft>
+                <a:spcPts val="600"/>
+              </a:spcAft>
+            </a:pPr>
+            <a:r>
+              <a:rPr lang="en-US" sz="1500" dirty="0">
+                <a:solidFill>
+                  <a:srgbClr val="3D3A36"/>
+                </a:solidFill>
+                <a:latin typeface="Arial" pitchFamily="34" charset="0"/>
+                <a:ea typeface="Arial" pitchFamily="34" charset="-122"/>
+                <a:cs typeface="Arial" pitchFamily="34" charset="-120"/>
+              </a:rPr>
+              <a:t>Remove any obvious outliers (results that don't fit).</a:t>
+            </a:r>
+            <a:endParaRPr lang="en-US" sz="1500" dirty="0"/>
+          </a:p>
+          <a:p>
+            <a:pPr>
+              <a:lnSpc>
+                <a:spcPct val="150000"/>
+              </a:lnSpc>
+              <a:spcAft>
+                <a:spcPts val="600"/>
+              </a:spcAft>
+            </a:pPr>
+            <a:r>
+              <a:rPr lang="en-US" sz="1500" dirty="0">
+                <a:solidFill>
+                  <a:srgbClr val="3D3A36"/>
+                </a:solidFill>
+                <a:latin typeface="Arial" pitchFamily="34" charset="0"/>
+                <a:ea typeface="Arial" pitchFamily="34" charset="-122"/>
+                <a:cs typeface="Arial" pitchFamily="34" charset="-120"/>
+              </a:rPr>
+              <a:t>More repeats = more reliable results.</a:t>
+            </a:r>
+            <a:endParaRPr lang="en-US" sz="1500" dirty="0"/>
           </a:p>
         </p:txBody>
       </p:sp>
@@ -4576,47 +3874,7 @@
         <p:spPr>
           <a:xfrm>
             <a:off x="0" y="0"/>
-            <a:ext cx="9144000" cy="822960"/>
-          </a:xfrm>
-          <a:prstGeom prst="rect">
-            <a:avLst/>
-          </a:prstGeom>
-          <a:solidFill>
-            <a:srgbClr val="FFFFFF"/>
-          </a:solidFill>
-          <a:ln/>
-        </p:spPr>
-      </p:sp>
-      <p:sp>
-        <p:nvSpPr>
-          <p:cNvPr id="3" name="Shape 1"/>
-          <p:cNvSpPr/>
-          <p:nvPr/>
-        </p:nvSpPr>
-        <p:spPr>
-          <a:xfrm>
-            <a:off x="0" y="804672"/>
-            <a:ext cx="9144000" cy="27432"/>
-          </a:xfrm>
-          <a:prstGeom prst="rect">
-            <a:avLst/>
-          </a:prstGeom>
-          <a:solidFill>
-            <a:srgbClr val="E5E2DC"/>
-          </a:solidFill>
-          <a:ln/>
-        </p:spPr>
-      </p:sp>
-      <p:sp>
-        <p:nvSpPr>
-          <p:cNvPr id="4" name="Shape 2"/>
-          <p:cNvSpPr/>
-          <p:nvPr/>
-        </p:nvSpPr>
-        <p:spPr>
-          <a:xfrm>
-            <a:off x="548640" y="201168"/>
-            <a:ext cx="54864" cy="420624"/>
+            <a:ext cx="73152" cy="5148072"/>
           </a:xfrm>
           <a:prstGeom prst="rect">
             <a:avLst/>
@@ -4629,14 +3887,14 @@
       </p:sp>
       <p:sp>
         <p:nvSpPr>
-          <p:cNvPr id="5" name="Text 3"/>
-          <p:cNvSpPr/>
-          <p:nvPr/>
-        </p:nvSpPr>
-        <p:spPr>
-          <a:xfrm>
-            <a:off x="777240" y="137160"/>
-            <a:ext cx="7772400" cy="548640"/>
+          <p:cNvPr id="3" name="Text 1"/>
+          <p:cNvSpPr/>
+          <p:nvPr/>
+        </p:nvSpPr>
+        <p:spPr>
+          <a:xfrm>
+            <a:off x="548640" y="274320"/>
+            <a:ext cx="9144000" cy="640080"/>
           </a:xfrm>
           <a:prstGeom prst="rect">
             <a:avLst/>
@@ -4645,14 +3903,14 @@
           <a:ln/>
         </p:spPr>
         <p:txBody>
-          <a:bodyPr wrap="square" lIns="0" tIns="0" rIns="0" bIns="0" rtlCol="0" anchor="ctr"/>
+          <a:bodyPr wrap="square" rtlCol="0" anchor="ctr"/>
           <a:lstStyle/>
           <a:p>
             <a:pPr indent="0" marL="0">
               <a:buNone/>
             </a:pPr>
             <a:r>
-              <a:rPr lang="en-US" sz="2000" b="1" dirty="0">
+              <a:rPr lang="en-US" sz="2400" b="1" dirty="0">
                 <a:solidFill>
                   <a:srgbClr val="1B2A4A"/>
                 </a:solidFill>
@@ -4662,20 +3920,40 @@
               </a:rPr>
               <a:t>Analysing Your Results</a:t>
             </a:r>
-            <a:endParaRPr lang="en-US" sz="2000" dirty="0"/>
-          </a:p>
-        </p:txBody>
-      </p:sp>
-      <p:sp>
-        <p:nvSpPr>
-          <p:cNvPr id="6" name="Text 4"/>
-          <p:cNvSpPr/>
-          <p:nvPr/>
-        </p:nvSpPr>
-        <p:spPr>
-          <a:xfrm>
-            <a:off x="731520" y="1051560"/>
-            <a:ext cx="7680960" cy="3108960"/>
+            <a:endParaRPr lang="en-US" sz="2400" dirty="0"/>
+          </a:p>
+        </p:txBody>
+      </p:sp>
+      <p:sp>
+        <p:nvSpPr>
+          <p:cNvPr id="4" name="Shape 2"/>
+          <p:cNvSpPr/>
+          <p:nvPr/>
+        </p:nvSpPr>
+        <p:spPr>
+          <a:xfrm>
+            <a:off x="548640" y="960120"/>
+            <a:ext cx="2286000" cy="36576"/>
+          </a:xfrm>
+          <a:prstGeom prst="rect">
+            <a:avLst/>
+          </a:prstGeom>
+          <a:solidFill>
+            <a:srgbClr val="2A9D8F"/>
+          </a:solidFill>
+          <a:ln/>
+        </p:spPr>
+      </p:sp>
+      <p:sp>
+        <p:nvSpPr>
+          <p:cNvPr id="5" name="Text 3"/>
+          <p:cNvSpPr/>
+          <p:nvPr/>
+        </p:nvSpPr>
+        <p:spPr>
+          <a:xfrm>
+            <a:off x="548640" y="1188720"/>
+            <a:ext cx="10058400" cy="3474720"/>
           </a:xfrm>
           <a:prstGeom prst="rect">
             <a:avLst/>
@@ -4687,189 +3965,114 @@
           <a:bodyPr wrap="square" rtlCol="0" anchor="t"/>
           <a:lstStyle/>
           <a:p>
-            <a:pPr marL="342900" indent="-342900">
+            <a:pPr>
+              <a:lnSpc>
+                <a:spcPct val="150000"/>
+              </a:lnSpc>
               <a:spcAft>
-                <a:spcPts val="800"/>
+                <a:spcPts val="600"/>
               </a:spcAft>
-              <a:buSzPct val="100000"/>
-              <a:buChar char="•"/>
             </a:pPr>
             <a:r>
               <a:rPr lang="en-US" sz="1500" dirty="0">
                 <a:solidFill>
                   <a:srgbClr val="3D3A36"/>
                 </a:solidFill>
-                <a:latin typeface="Calibri" pitchFamily="34" charset="0"/>
-                <a:ea typeface="Calibri" pitchFamily="34" charset="-122"/>
-                <a:cs typeface="Calibri" pitchFamily="34" charset="-120"/>
+                <a:latin typeface="Arial" pitchFamily="34" charset="0"/>
+                <a:ea typeface="Arial" pitchFamily="34" charset="-122"/>
+                <a:cs typeface="Arial" pitchFamily="34" charset="-120"/>
               </a:rPr>
               <a:t>Organise data in a clear table with units.</a:t>
             </a:r>
             <a:endParaRPr lang="en-US" sz="1500" dirty="0"/>
           </a:p>
           <a:p>
-            <a:pPr marL="342900" indent="-342900">
+            <a:pPr>
+              <a:lnSpc>
+                <a:spcPct val="150000"/>
+              </a:lnSpc>
               <a:spcAft>
-                <a:spcPts val="800"/>
+                <a:spcPts val="600"/>
               </a:spcAft>
-              <a:buSzPct val="100000"/>
-              <a:buChar char="•"/>
             </a:pPr>
             <a:r>
               <a:rPr lang="en-US" sz="1500" dirty="0">
                 <a:solidFill>
                   <a:srgbClr val="3D3A36"/>
                 </a:solidFill>
-                <a:latin typeface="Calibri" pitchFamily="34" charset="0"/>
-                <a:ea typeface="Calibri" pitchFamily="34" charset="-122"/>
-                <a:cs typeface="Calibri" pitchFamily="34" charset="-120"/>
+                <a:latin typeface="Arial" pitchFamily="34" charset="0"/>
+                <a:ea typeface="Arial" pitchFamily="34" charset="-122"/>
+                <a:cs typeface="Arial" pitchFamily="34" charset="-120"/>
               </a:rPr>
               <a:t>Calculate the mean (average) for each set of results.</a:t>
             </a:r>
             <a:endParaRPr lang="en-US" sz="1500" dirty="0"/>
           </a:p>
           <a:p>
-            <a:pPr marL="342900" indent="-342900">
+            <a:pPr>
+              <a:lnSpc>
+                <a:spcPct val="150000"/>
+              </a:lnSpc>
               <a:spcAft>
-                <a:spcPts val="800"/>
+                <a:spcPts val="600"/>
               </a:spcAft>
-              <a:buSzPct val="100000"/>
-              <a:buChar char="•"/>
             </a:pPr>
             <a:r>
               <a:rPr lang="en-US" sz="1500" dirty="0">
                 <a:solidFill>
                   <a:srgbClr val="3D3A36"/>
                 </a:solidFill>
-                <a:latin typeface="Calibri" pitchFamily="34" charset="0"/>
-                <a:ea typeface="Calibri" pitchFamily="34" charset="-122"/>
-                <a:cs typeface="Calibri" pitchFamily="34" charset="-120"/>
+                <a:latin typeface="Arial" pitchFamily="34" charset="0"/>
+                <a:ea typeface="Arial" pitchFamily="34" charset="-122"/>
+                <a:cs typeface="Arial" pitchFamily="34" charset="-120"/>
               </a:rPr>
               <a:t>Draw a graph — bar chart for categories, line graph for continuous data.</a:t>
             </a:r>
             <a:endParaRPr lang="en-US" sz="1500" dirty="0"/>
           </a:p>
           <a:p>
-            <a:pPr marL="342900" indent="-342900">
+            <a:pPr>
+              <a:lnSpc>
+                <a:spcPct val="150000"/>
+              </a:lnSpc>
               <a:spcAft>
-                <a:spcPts val="800"/>
+                <a:spcPts val="600"/>
               </a:spcAft>
-              <a:buSzPct val="100000"/>
-              <a:buChar char="•"/>
             </a:pPr>
             <a:r>
               <a:rPr lang="en-US" sz="1500" dirty="0">
                 <a:solidFill>
                   <a:srgbClr val="3D3A36"/>
                 </a:solidFill>
-                <a:latin typeface="Calibri" pitchFamily="34" charset="0"/>
-                <a:ea typeface="Calibri" pitchFamily="34" charset="-122"/>
-                <a:cs typeface="Calibri" pitchFamily="34" charset="-120"/>
+                <a:latin typeface="Arial" pitchFamily="34" charset="0"/>
+                <a:ea typeface="Arial" pitchFamily="34" charset="-122"/>
+                <a:cs typeface="Arial" pitchFamily="34" charset="-120"/>
               </a:rPr>
               <a:t>Look for patterns or trends in your graph.</a:t>
             </a:r>
             <a:endParaRPr lang="en-US" sz="1500" dirty="0"/>
           </a:p>
           <a:p>
-            <a:pPr marL="342900" indent="-342900">
+            <a:pPr>
+              <a:lnSpc>
+                <a:spcPct val="150000"/>
+              </a:lnSpc>
               <a:spcAft>
-                <a:spcPts val="800"/>
+                <a:spcPts val="600"/>
               </a:spcAft>
-              <a:buSzPct val="100000"/>
-              <a:buChar char="•"/>
             </a:pPr>
             <a:r>
               <a:rPr lang="en-US" sz="1500" dirty="0">
                 <a:solidFill>
                   <a:srgbClr val="3D3A36"/>
                 </a:solidFill>
-                <a:latin typeface="Calibri" pitchFamily="34" charset="0"/>
-                <a:ea typeface="Calibri" pitchFamily="34" charset="-122"/>
-                <a:cs typeface="Calibri" pitchFamily="34" charset="-120"/>
-              </a:rPr>
-              <a:t>Identify any anomalies (results that don't fit).</a:t>
+                <a:latin typeface="Arial" pitchFamily="34" charset="0"/>
+                <a:ea typeface="Arial" pitchFamily="34" charset="-122"/>
+                <a:cs typeface="Arial" pitchFamily="34" charset="-120"/>
+              </a:rPr>
+              <a:t>Does the data support or contradict your hypothesis?</a:t>
             </a:r>
             <a:endParaRPr lang="en-US" sz="1500" dirty="0"/>
-          </a:p>
-        </p:txBody>
-      </p:sp>
-      <p:sp>
-        <p:nvSpPr>
-          <p:cNvPr id="7" name="Shape 5"/>
-          <p:cNvSpPr/>
-          <p:nvPr/>
-        </p:nvSpPr>
-        <p:spPr>
-          <a:xfrm>
-            <a:off x="731520" y="4206240"/>
-            <a:ext cx="7680960" cy="640080"/>
-          </a:xfrm>
-          <a:prstGeom prst="rect">
-            <a:avLst/>
-          </a:prstGeom>
-          <a:solidFill>
-            <a:srgbClr val="E8F5F3"/>
-          </a:solidFill>
-          <a:ln/>
-          <a:effectLst>
-            <a:outerShdw sx="100000" sy="100000" kx="0" ky="0" algn="bl" rotWithShape="0" blurRad="50800" dist="25400" dir="8100000">
-              <a:srgbClr val="000000">
-                <a:alpha val="10000"/>
-              </a:srgbClr>
-            </a:outerShdw>
-          </a:effectLst>
-        </p:spPr>
-      </p:sp>
-      <p:sp>
-        <p:nvSpPr>
-          <p:cNvPr id="8" name="Text 6"/>
-          <p:cNvSpPr/>
-          <p:nvPr/>
-        </p:nvSpPr>
-        <p:spPr>
-          <a:xfrm>
-            <a:off x="914400" y="4251960"/>
-            <a:ext cx="7315200" cy="548640"/>
-          </a:xfrm>
-          <a:prstGeom prst="rect">
-            <a:avLst/>
-          </a:prstGeom>
-          <a:noFill/>
-          <a:ln/>
-        </p:spPr>
-        <p:txBody>
-          <a:bodyPr wrap="square" rtlCol="0" anchor="ctr"/>
-          <a:lstStyle/>
-          <a:p>
-            <a:pPr indent="0" marL="0">
-              <a:buNone/>
-            </a:pPr>
-            <a:r>
-              <a:rPr lang="en-US" sz="1200" b="1" dirty="0">
-                <a:solidFill>
-                  <a:srgbClr val="2A9D8F"/>
-                </a:solidFill>
-                <a:latin typeface="Calibri" pitchFamily="34" charset="0"/>
-                <a:ea typeface="Calibri" pitchFamily="34" charset="-122"/>
-                <a:cs typeface="Calibri" pitchFamily="34" charset="-120"/>
-              </a:rPr>
-              <a:t>Key Idea: </a:t>
-            </a:r>
-            <a:pPr indent="0" marL="0">
-              <a:buNone/>
-            </a:pPr>
-            <a:r>
-              <a:rPr lang="en-US" sz="1200" i="1" dirty="0">
-                <a:solidFill>
-                  <a:srgbClr val="3D3A36"/>
-                </a:solidFill>
-                <a:latin typeface="Calibri" pitchFamily="34" charset="0"/>
-                <a:ea typeface="Calibri" pitchFamily="34" charset="-122"/>
-                <a:cs typeface="Calibri" pitchFamily="34" charset="-120"/>
-              </a:rPr>
-              <a:t>Patterns in data help us answer our original question.</a:t>
-            </a:r>
-            <a:endParaRPr lang="en-US" sz="1200" dirty="0"/>
           </a:p>
         </p:txBody>
       </p:sp>
@@ -4914,47 +4117,7 @@
         <p:spPr>
           <a:xfrm>
             <a:off x="0" y="0"/>
-            <a:ext cx="9144000" cy="822960"/>
-          </a:xfrm>
-          <a:prstGeom prst="rect">
-            <a:avLst/>
-          </a:prstGeom>
-          <a:solidFill>
-            <a:srgbClr val="FFFFFF"/>
-          </a:solidFill>
-          <a:ln/>
-        </p:spPr>
-      </p:sp>
-      <p:sp>
-        <p:nvSpPr>
-          <p:cNvPr id="3" name="Shape 1"/>
-          <p:cNvSpPr/>
-          <p:nvPr/>
-        </p:nvSpPr>
-        <p:spPr>
-          <a:xfrm>
-            <a:off x="0" y="804672"/>
-            <a:ext cx="9144000" cy="27432"/>
-          </a:xfrm>
-          <a:prstGeom prst="rect">
-            <a:avLst/>
-          </a:prstGeom>
-          <a:solidFill>
-            <a:srgbClr val="E5E2DC"/>
-          </a:solidFill>
-          <a:ln/>
-        </p:spPr>
-      </p:sp>
-      <p:sp>
-        <p:nvSpPr>
-          <p:cNvPr id="4" name="Shape 2"/>
-          <p:cNvSpPr/>
-          <p:nvPr/>
-        </p:nvSpPr>
-        <p:spPr>
-          <a:xfrm>
-            <a:off x="548640" y="201168"/>
-            <a:ext cx="54864" cy="420624"/>
+            <a:ext cx="73152" cy="5148072"/>
           </a:xfrm>
           <a:prstGeom prst="rect">
             <a:avLst/>
@@ -4967,14 +4130,14 @@
       </p:sp>
       <p:sp>
         <p:nvSpPr>
-          <p:cNvPr id="5" name="Text 3"/>
-          <p:cNvSpPr/>
-          <p:nvPr/>
-        </p:nvSpPr>
-        <p:spPr>
-          <a:xfrm>
-            <a:off x="777240" y="137160"/>
-            <a:ext cx="7772400" cy="548640"/>
+          <p:cNvPr id="3" name="Text 1"/>
+          <p:cNvSpPr/>
+          <p:nvPr/>
+        </p:nvSpPr>
+        <p:spPr>
+          <a:xfrm>
+            <a:off x="548640" y="274320"/>
+            <a:ext cx="9144000" cy="640080"/>
           </a:xfrm>
           <a:prstGeom prst="rect">
             <a:avLst/>
@@ -4983,14 +4146,14 @@
           <a:ln/>
         </p:spPr>
         <p:txBody>
-          <a:bodyPr wrap="square" lIns="0" tIns="0" rIns="0" bIns="0" rtlCol="0" anchor="ctr"/>
+          <a:bodyPr wrap="square" rtlCol="0" anchor="ctr"/>
           <a:lstStyle/>
           <a:p>
             <a:pPr indent="0" marL="0">
               <a:buNone/>
             </a:pPr>
             <a:r>
-              <a:rPr lang="en-US" sz="2000" b="1" dirty="0">
+              <a:rPr lang="en-US" sz="2400" b="1" dirty="0">
                 <a:solidFill>
                   <a:srgbClr val="1B2A4A"/>
                 </a:solidFill>
@@ -5000,40 +4163,40 @@
               </a:rPr>
               <a:t>Check Your Understanding</a:t>
             </a:r>
-            <a:endParaRPr lang="en-US" sz="2000" dirty="0"/>
-          </a:p>
-        </p:txBody>
-      </p:sp>
-      <p:sp>
-        <p:nvSpPr>
-          <p:cNvPr id="6" name="Shape 4"/>
-          <p:cNvSpPr/>
-          <p:nvPr/>
-        </p:nvSpPr>
-        <p:spPr>
-          <a:xfrm>
-            <a:off x="731520" y="1051560"/>
-            <a:ext cx="7680960" cy="438912"/>
+            <a:endParaRPr lang="en-US" sz="2400" dirty="0"/>
+          </a:p>
+        </p:txBody>
+      </p:sp>
+      <p:sp>
+        <p:nvSpPr>
+          <p:cNvPr id="4" name="Shape 2"/>
+          <p:cNvSpPr/>
+          <p:nvPr/>
+        </p:nvSpPr>
+        <p:spPr>
+          <a:xfrm>
+            <a:off x="548640" y="960120"/>
+            <a:ext cx="2286000" cy="36576"/>
           </a:xfrm>
           <a:prstGeom prst="rect">
             <a:avLst/>
           </a:prstGeom>
           <a:solidFill>
-            <a:srgbClr val="FFFFFF"/>
+            <a:srgbClr val="2A9D8F"/>
           </a:solidFill>
           <a:ln/>
         </p:spPr>
       </p:sp>
       <p:sp>
         <p:nvSpPr>
-          <p:cNvPr id="7" name="Text 5"/>
-          <p:cNvSpPr/>
-          <p:nvPr/>
-        </p:nvSpPr>
-        <p:spPr>
-          <a:xfrm>
-            <a:off x="868680" y="1051560"/>
-            <a:ext cx="320040" cy="438912"/>
+          <p:cNvPr id="5" name="Text 3"/>
+          <p:cNvSpPr/>
+          <p:nvPr/>
+        </p:nvSpPr>
+        <p:spPr>
+          <a:xfrm>
+            <a:off x="548640" y="1188720"/>
+            <a:ext cx="365760" cy="457200"/>
           </a:xfrm>
           <a:prstGeom prst="rect">
             <a:avLst/>
@@ -5049,12 +4212,57 @@
               <a:buNone/>
             </a:pPr>
             <a:r>
+              <a:rPr lang="en-US" sz="1600" dirty="0">
+                <a:solidFill>
+                  <a:srgbClr val="2A9D8F"/>
+                </a:solidFill>
+                <a:latin typeface="Arial" pitchFamily="34" charset="0"/>
+                <a:ea typeface="Arial" pitchFamily="34" charset="-122"/>
+                <a:cs typeface="Arial" pitchFamily="34" charset="-120"/>
+              </a:rPr>
+              <a:t>☐</a:t>
+            </a:r>
+            <a:endParaRPr lang="en-US" sz="1600" dirty="0"/>
+          </a:p>
+        </p:txBody>
+      </p:sp>
+      <p:sp>
+        <p:nvSpPr>
+          <p:cNvPr id="6" name="Text 4"/>
+          <p:cNvSpPr/>
+          <p:nvPr/>
+        </p:nvSpPr>
+        <p:spPr>
+          <a:xfrm>
+            <a:off x="1005840" y="1188720"/>
+            <a:ext cx="9601200" cy="457200"/>
+          </a:xfrm>
+          <a:prstGeom prst="rect">
+            <a:avLst/>
+          </a:prstGeom>
+          <a:noFill/>
+          <a:ln/>
+        </p:spPr>
+        <p:txBody>
+          <a:bodyPr wrap="square" rtlCol="0" anchor="ctr"/>
+          <a:lstStyle/>
+          <a:p>
+            <a:pPr indent="0" marL="0">
+              <a:lnSpc>
+                <a:spcPct val="130000"/>
+              </a:lnSpc>
+              <a:buNone/>
+            </a:pPr>
+            <a:r>
               <a:rPr lang="en-US" sz="1400" dirty="0">
                 <a:solidFill>
-                  <a:srgbClr val="2A9D8F"/>
-                </a:solidFill>
-              </a:rPr>
-              <a:t>☐</a:t>
+                  <a:srgbClr val="3D3A36"/>
+                </a:solidFill>
+                <a:latin typeface="Arial" pitchFamily="34" charset="0"/>
+                <a:ea typeface="Arial" pitchFamily="34" charset="-122"/>
+                <a:cs typeface="Arial" pitchFamily="34" charset="-120"/>
+              </a:rPr>
+              <a:t>I can list the steps of the scientific method in order.</a:t>
             </a:r>
             <a:endParaRPr lang="en-US" sz="1400" dirty="0"/>
           </a:p>
@@ -5062,14 +4270,14 @@
       </p:sp>
       <p:sp>
         <p:nvSpPr>
-          <p:cNvPr id="8" name="Text 6"/>
-          <p:cNvSpPr/>
-          <p:nvPr/>
-        </p:nvSpPr>
-        <p:spPr>
-          <a:xfrm>
-            <a:off x="1234440" y="1051560"/>
-            <a:ext cx="6949440" cy="438912"/>
+          <p:cNvPr id="7" name="Text 5"/>
+          <p:cNvSpPr/>
+          <p:nvPr/>
+        </p:nvSpPr>
+        <p:spPr>
+          <a:xfrm>
+            <a:off x="548640" y="1783080"/>
+            <a:ext cx="365760" cy="457200"/>
           </a:xfrm>
           <a:prstGeom prst="rect">
             <a:avLst/>
@@ -5085,50 +4293,72 @@
               <a:buNone/>
             </a:pPr>
             <a:r>
-              <a:rPr lang="en-US" sz="1300" dirty="0">
+              <a:rPr lang="en-US" sz="1600" dirty="0">
+                <a:solidFill>
+                  <a:srgbClr val="2A9D8F"/>
+                </a:solidFill>
+                <a:latin typeface="Arial" pitchFamily="34" charset="0"/>
+                <a:ea typeface="Arial" pitchFamily="34" charset="-122"/>
+                <a:cs typeface="Arial" pitchFamily="34" charset="-120"/>
+              </a:rPr>
+              <a:t>☐</a:t>
+            </a:r>
+            <a:endParaRPr lang="en-US" sz="1600" dirty="0"/>
+          </a:p>
+        </p:txBody>
+      </p:sp>
+      <p:sp>
+        <p:nvSpPr>
+          <p:cNvPr id="8" name="Text 6"/>
+          <p:cNvSpPr/>
+          <p:nvPr/>
+        </p:nvSpPr>
+        <p:spPr>
+          <a:xfrm>
+            <a:off x="1005840" y="1783080"/>
+            <a:ext cx="9601200" cy="457200"/>
+          </a:xfrm>
+          <a:prstGeom prst="rect">
+            <a:avLst/>
+          </a:prstGeom>
+          <a:noFill/>
+          <a:ln/>
+        </p:spPr>
+        <p:txBody>
+          <a:bodyPr wrap="square" rtlCol="0" anchor="ctr"/>
+          <a:lstStyle/>
+          <a:p>
+            <a:pPr indent="0" marL="0">
+              <a:lnSpc>
+                <a:spcPct val="130000"/>
+              </a:lnSpc>
+              <a:buNone/>
+            </a:pPr>
+            <a:r>
+              <a:rPr lang="en-US" sz="1400" dirty="0">
                 <a:solidFill>
                   <a:srgbClr val="3D3A36"/>
                 </a:solidFill>
-                <a:latin typeface="Calibri" pitchFamily="34" charset="0"/>
-                <a:ea typeface="Calibri" pitchFamily="34" charset="-122"/>
-                <a:cs typeface="Calibri" pitchFamily="34" charset="-120"/>
-              </a:rPr>
-              <a:t>I can list the steps of the scientific method</a:t>
-            </a:r>
-            <a:endParaRPr lang="en-US" sz="1300" dirty="0"/>
-          </a:p>
-        </p:txBody>
-      </p:sp>
-      <p:sp>
-        <p:nvSpPr>
-          <p:cNvPr id="9" name="Shape 7"/>
-          <p:cNvSpPr/>
-          <p:nvPr/>
-        </p:nvSpPr>
-        <p:spPr>
-          <a:xfrm>
-            <a:off x="731520" y="1554480"/>
-            <a:ext cx="7680960" cy="438912"/>
-          </a:xfrm>
-          <a:prstGeom prst="rect">
-            <a:avLst/>
-          </a:prstGeom>
-          <a:solidFill>
-            <a:srgbClr val="F8F6F3"/>
-          </a:solidFill>
-          <a:ln/>
-        </p:spPr>
-      </p:sp>
-      <p:sp>
-        <p:nvSpPr>
-          <p:cNvPr id="10" name="Text 8"/>
-          <p:cNvSpPr/>
-          <p:nvPr/>
-        </p:nvSpPr>
-        <p:spPr>
-          <a:xfrm>
-            <a:off x="868680" y="1554480"/>
-            <a:ext cx="320040" cy="438912"/>
+                <a:latin typeface="Arial" pitchFamily="34" charset="0"/>
+                <a:ea typeface="Arial" pitchFamily="34" charset="-122"/>
+                <a:cs typeface="Arial" pitchFamily="34" charset="-120"/>
+              </a:rPr>
+              <a:t>I can write a testable hypothesis with a reason.</a:t>
+            </a:r>
+            <a:endParaRPr lang="en-US" sz="1400" dirty="0"/>
+          </a:p>
+        </p:txBody>
+      </p:sp>
+      <p:sp>
+        <p:nvSpPr>
+          <p:cNvPr id="9" name="Text 7"/>
+          <p:cNvSpPr/>
+          <p:nvPr/>
+        </p:nvSpPr>
+        <p:spPr>
+          <a:xfrm>
+            <a:off x="548640" y="2377440"/>
+            <a:ext cx="365760" cy="457200"/>
           </a:xfrm>
           <a:prstGeom prst="rect">
             <a:avLst/>
@@ -5144,12 +4374,57 @@
               <a:buNone/>
             </a:pPr>
             <a:r>
+              <a:rPr lang="en-US" sz="1600" dirty="0">
+                <a:solidFill>
+                  <a:srgbClr val="2A9D8F"/>
+                </a:solidFill>
+                <a:latin typeface="Arial" pitchFamily="34" charset="0"/>
+                <a:ea typeface="Arial" pitchFamily="34" charset="-122"/>
+                <a:cs typeface="Arial" pitchFamily="34" charset="-120"/>
+              </a:rPr>
+              <a:t>☐</a:t>
+            </a:r>
+            <a:endParaRPr lang="en-US" sz="1600" dirty="0"/>
+          </a:p>
+        </p:txBody>
+      </p:sp>
+      <p:sp>
+        <p:nvSpPr>
+          <p:cNvPr id="10" name="Text 8"/>
+          <p:cNvSpPr/>
+          <p:nvPr/>
+        </p:nvSpPr>
+        <p:spPr>
+          <a:xfrm>
+            <a:off x="1005840" y="2377440"/>
+            <a:ext cx="9601200" cy="457200"/>
+          </a:xfrm>
+          <a:prstGeom prst="rect">
+            <a:avLst/>
+          </a:prstGeom>
+          <a:noFill/>
+          <a:ln/>
+        </p:spPr>
+        <p:txBody>
+          <a:bodyPr wrap="square" rtlCol="0" anchor="ctr"/>
+          <a:lstStyle/>
+          <a:p>
+            <a:pPr indent="0" marL="0">
+              <a:lnSpc>
+                <a:spcPct val="130000"/>
+              </a:lnSpc>
+              <a:buNone/>
+            </a:pPr>
+            <a:r>
               <a:rPr lang="en-US" sz="1400" dirty="0">
                 <a:solidFill>
-                  <a:srgbClr val="2A9D8F"/>
-                </a:solidFill>
-              </a:rPr>
-              <a:t>☐</a:t>
+                  <a:srgbClr val="3D3A36"/>
+                </a:solidFill>
+                <a:latin typeface="Arial" pitchFamily="34" charset="0"/>
+                <a:ea typeface="Arial" pitchFamily="34" charset="-122"/>
+                <a:cs typeface="Arial" pitchFamily="34" charset="-120"/>
+              </a:rPr>
+              <a:t>I can explain why repeating experiments is important.</a:t>
             </a:r>
             <a:endParaRPr lang="en-US" sz="1400" dirty="0"/>
           </a:p>
@@ -5163,8 +4438,8 @@
         </p:nvSpPr>
         <p:spPr>
           <a:xfrm>
-            <a:off x="1234440" y="1554480"/>
-            <a:ext cx="6949440" cy="438912"/>
+            <a:off x="548640" y="2971800"/>
+            <a:ext cx="365760" cy="457200"/>
           </a:xfrm>
           <a:prstGeom prst="rect">
             <a:avLst/>
@@ -5180,39 +4455,61 @@
               <a:buNone/>
             </a:pPr>
             <a:r>
-              <a:rPr lang="en-US" sz="1300" dirty="0">
+              <a:rPr lang="en-US" sz="1600" dirty="0">
+                <a:solidFill>
+                  <a:srgbClr val="2A9D8F"/>
+                </a:solidFill>
+                <a:latin typeface="Arial" pitchFamily="34" charset="0"/>
+                <a:ea typeface="Arial" pitchFamily="34" charset="-122"/>
+                <a:cs typeface="Arial" pitchFamily="34" charset="-120"/>
+              </a:rPr>
+              <a:t>☐</a:t>
+            </a:r>
+            <a:endParaRPr lang="en-US" sz="1600" dirty="0"/>
+          </a:p>
+        </p:txBody>
+      </p:sp>
+      <p:sp>
+        <p:nvSpPr>
+          <p:cNvPr id="12" name="Text 10"/>
+          <p:cNvSpPr/>
+          <p:nvPr/>
+        </p:nvSpPr>
+        <p:spPr>
+          <a:xfrm>
+            <a:off x="1005840" y="2971800"/>
+            <a:ext cx="9601200" cy="457200"/>
+          </a:xfrm>
+          <a:prstGeom prst="rect">
+            <a:avLst/>
+          </a:prstGeom>
+          <a:noFill/>
+          <a:ln/>
+        </p:spPr>
+        <p:txBody>
+          <a:bodyPr wrap="square" rtlCol="0" anchor="ctr"/>
+          <a:lstStyle/>
+          <a:p>
+            <a:pPr indent="0" marL="0">
+              <a:lnSpc>
+                <a:spcPct val="130000"/>
+              </a:lnSpc>
+              <a:buNone/>
+            </a:pPr>
+            <a:r>
+              <a:rPr lang="en-US" sz="1400" dirty="0">
                 <a:solidFill>
                   <a:srgbClr val="3D3A36"/>
                 </a:solidFill>
-                <a:latin typeface="Calibri" pitchFamily="34" charset="0"/>
-                <a:ea typeface="Calibri" pitchFamily="34" charset="-122"/>
-                <a:cs typeface="Calibri" pitchFamily="34" charset="-120"/>
-              </a:rPr>
-              <a:t>I can write a testable hypothesis</a:t>
-            </a:r>
-            <a:endParaRPr lang="en-US" sz="1300" dirty="0"/>
-          </a:p>
-        </p:txBody>
-      </p:sp>
-      <p:sp>
-        <p:nvSpPr>
-          <p:cNvPr id="12" name="Shape 10"/>
-          <p:cNvSpPr/>
-          <p:nvPr/>
-        </p:nvSpPr>
-        <p:spPr>
-          <a:xfrm>
-            <a:off x="731520" y="2057400"/>
-            <a:ext cx="7680960" cy="438912"/>
-          </a:xfrm>
-          <a:prstGeom prst="rect">
-            <a:avLst/>
-          </a:prstGeom>
-          <a:solidFill>
-            <a:srgbClr val="FFFFFF"/>
-          </a:solidFill>
-          <a:ln/>
-        </p:spPr>
+                <a:latin typeface="Arial" pitchFamily="34" charset="0"/>
+                <a:ea typeface="Arial" pitchFamily="34" charset="-122"/>
+                <a:cs typeface="Arial" pitchFamily="34" charset="-120"/>
+              </a:rPr>
+              <a:t>I know how to calculate the mean of a set of results.</a:t>
+            </a:r>
+            <a:endParaRPr lang="en-US" sz="1400" dirty="0"/>
+          </a:p>
+        </p:txBody>
       </p:sp>
       <p:sp>
         <p:nvSpPr>
@@ -5222,8 +4519,8 @@
         </p:nvSpPr>
         <p:spPr>
           <a:xfrm>
-            <a:off x="868680" y="2057400"/>
-            <a:ext cx="320040" cy="438912"/>
+            <a:off x="548640" y="3566160"/>
+            <a:ext cx="365760" cy="457200"/>
           </a:xfrm>
           <a:prstGeom prst="rect">
             <a:avLst/>
@@ -5239,323 +4536,59 @@
               <a:buNone/>
             </a:pPr>
             <a:r>
+              <a:rPr lang="en-US" sz="1600" dirty="0">
+                <a:solidFill>
+                  <a:srgbClr val="2A9D8F"/>
+                </a:solidFill>
+                <a:latin typeface="Arial" pitchFamily="34" charset="0"/>
+                <a:ea typeface="Arial" pitchFamily="34" charset="-122"/>
+                <a:cs typeface="Arial" pitchFamily="34" charset="-120"/>
+              </a:rPr>
+              <a:t>☐</a:t>
+            </a:r>
+            <a:endParaRPr lang="en-US" sz="1600" dirty="0"/>
+          </a:p>
+        </p:txBody>
+      </p:sp>
+      <p:sp>
+        <p:nvSpPr>
+          <p:cNvPr id="14" name="Text 12"/>
+          <p:cNvSpPr/>
+          <p:nvPr/>
+        </p:nvSpPr>
+        <p:spPr>
+          <a:xfrm>
+            <a:off x="1005840" y="3566160"/>
+            <a:ext cx="9601200" cy="457200"/>
+          </a:xfrm>
+          <a:prstGeom prst="rect">
+            <a:avLst/>
+          </a:prstGeom>
+          <a:noFill/>
+          <a:ln/>
+        </p:spPr>
+        <p:txBody>
+          <a:bodyPr wrap="square" rtlCol="0" anchor="ctr"/>
+          <a:lstStyle/>
+          <a:p>
+            <a:pPr indent="0" marL="0">
+              <a:lnSpc>
+                <a:spcPct val="130000"/>
+              </a:lnSpc>
+              <a:buNone/>
+            </a:pPr>
+            <a:r>
               <a:rPr lang="en-US" sz="1400" dirty="0">
                 <a:solidFill>
-                  <a:srgbClr val="2A9D8F"/>
-                </a:solidFill>
-              </a:rPr>
-              <a:t>☐</a:t>
+                  <a:srgbClr val="3D3A36"/>
+                </a:solidFill>
+                <a:latin typeface="Arial" pitchFamily="34" charset="0"/>
+                <a:ea typeface="Arial" pitchFamily="34" charset="-122"/>
+                <a:cs typeface="Arial" pitchFamily="34" charset="-120"/>
+              </a:rPr>
+              <a:t>I can choose the right type of graph for my data.</a:t>
             </a:r>
             <a:endParaRPr lang="en-US" sz="1400" dirty="0"/>
-          </a:p>
-        </p:txBody>
-      </p:sp>
-      <p:sp>
-        <p:nvSpPr>
-          <p:cNvPr id="14" name="Text 12"/>
-          <p:cNvSpPr/>
-          <p:nvPr/>
-        </p:nvSpPr>
-        <p:spPr>
-          <a:xfrm>
-            <a:off x="1234440" y="2057400"/>
-            <a:ext cx="6949440" cy="438912"/>
-          </a:xfrm>
-          <a:prstGeom prst="rect">
-            <a:avLst/>
-          </a:prstGeom>
-          <a:noFill/>
-          <a:ln/>
-        </p:spPr>
-        <p:txBody>
-          <a:bodyPr wrap="square" rtlCol="0" anchor="ctr"/>
-          <a:lstStyle/>
-          <a:p>
-            <a:pPr indent="0" marL="0">
-              <a:buNone/>
-            </a:pPr>
-            <a:r>
-              <a:rPr lang="en-US" sz="1300" dirty="0">
-                <a:solidFill>
-                  <a:srgbClr val="3D3A36"/>
-                </a:solidFill>
-                <a:latin typeface="Calibri" pitchFamily="34" charset="0"/>
-                <a:ea typeface="Calibri" pitchFamily="34" charset="-122"/>
-                <a:cs typeface="Calibri" pitchFamily="34" charset="-120"/>
-              </a:rPr>
-              <a:t>I can identify variables in an experiment</a:t>
-            </a:r>
-            <a:endParaRPr lang="en-US" sz="1300" dirty="0"/>
-          </a:p>
-        </p:txBody>
-      </p:sp>
-      <p:sp>
-        <p:nvSpPr>
-          <p:cNvPr id="15" name="Shape 13"/>
-          <p:cNvSpPr/>
-          <p:nvPr/>
-        </p:nvSpPr>
-        <p:spPr>
-          <a:xfrm>
-            <a:off x="731520" y="2560320"/>
-            <a:ext cx="7680960" cy="438912"/>
-          </a:xfrm>
-          <a:prstGeom prst="rect">
-            <a:avLst/>
-          </a:prstGeom>
-          <a:solidFill>
-            <a:srgbClr val="F8F6F3"/>
-          </a:solidFill>
-          <a:ln/>
-        </p:spPr>
-      </p:sp>
-      <p:sp>
-        <p:nvSpPr>
-          <p:cNvPr id="16" name="Text 14"/>
-          <p:cNvSpPr/>
-          <p:nvPr/>
-        </p:nvSpPr>
-        <p:spPr>
-          <a:xfrm>
-            <a:off x="868680" y="2560320"/>
-            <a:ext cx="320040" cy="438912"/>
-          </a:xfrm>
-          <a:prstGeom prst="rect">
-            <a:avLst/>
-          </a:prstGeom>
-          <a:noFill/>
-          <a:ln/>
-        </p:spPr>
-        <p:txBody>
-          <a:bodyPr wrap="square" rtlCol="0" anchor="ctr"/>
-          <a:lstStyle/>
-          <a:p>
-            <a:pPr indent="0" marL="0">
-              <a:buNone/>
-            </a:pPr>
-            <a:r>
-              <a:rPr lang="en-US" sz="1400" dirty="0">
-                <a:solidFill>
-                  <a:srgbClr val="2A9D8F"/>
-                </a:solidFill>
-              </a:rPr>
-              <a:t>☐</a:t>
-            </a:r>
-            <a:endParaRPr lang="en-US" sz="1400" dirty="0"/>
-          </a:p>
-        </p:txBody>
-      </p:sp>
-      <p:sp>
-        <p:nvSpPr>
-          <p:cNvPr id="17" name="Text 15"/>
-          <p:cNvSpPr/>
-          <p:nvPr/>
-        </p:nvSpPr>
-        <p:spPr>
-          <a:xfrm>
-            <a:off x="1234440" y="2560320"/>
-            <a:ext cx="6949440" cy="438912"/>
-          </a:xfrm>
-          <a:prstGeom prst="rect">
-            <a:avLst/>
-          </a:prstGeom>
-          <a:noFill/>
-          <a:ln/>
-        </p:spPr>
-        <p:txBody>
-          <a:bodyPr wrap="square" rtlCol="0" anchor="ctr"/>
-          <a:lstStyle/>
-          <a:p>
-            <a:pPr indent="0" marL="0">
-              <a:buNone/>
-            </a:pPr>
-            <a:r>
-              <a:rPr lang="en-US" sz="1300" dirty="0">
-                <a:solidFill>
-                  <a:srgbClr val="3D3A36"/>
-                </a:solidFill>
-                <a:latin typeface="Calibri" pitchFamily="34" charset="0"/>
-                <a:ea typeface="Calibri" pitchFamily="34" charset="-122"/>
-                <a:cs typeface="Calibri" pitchFamily="34" charset="-120"/>
-              </a:rPr>
-              <a:t>I know why we repeat experiments</a:t>
-            </a:r>
-            <a:endParaRPr lang="en-US" sz="1300" dirty="0"/>
-          </a:p>
-        </p:txBody>
-      </p:sp>
-      <p:sp>
-        <p:nvSpPr>
-          <p:cNvPr id="18" name="Shape 16"/>
-          <p:cNvSpPr/>
-          <p:nvPr/>
-        </p:nvSpPr>
-        <p:spPr>
-          <a:xfrm>
-            <a:off x="731520" y="3063240"/>
-            <a:ext cx="7680960" cy="438912"/>
-          </a:xfrm>
-          <a:prstGeom prst="rect">
-            <a:avLst/>
-          </a:prstGeom>
-          <a:solidFill>
-            <a:srgbClr val="FFFFFF"/>
-          </a:solidFill>
-          <a:ln/>
-        </p:spPr>
-      </p:sp>
-      <p:sp>
-        <p:nvSpPr>
-          <p:cNvPr id="19" name="Text 17"/>
-          <p:cNvSpPr/>
-          <p:nvPr/>
-        </p:nvSpPr>
-        <p:spPr>
-          <a:xfrm>
-            <a:off x="868680" y="3063240"/>
-            <a:ext cx="320040" cy="438912"/>
-          </a:xfrm>
-          <a:prstGeom prst="rect">
-            <a:avLst/>
-          </a:prstGeom>
-          <a:noFill/>
-          <a:ln/>
-        </p:spPr>
-        <p:txBody>
-          <a:bodyPr wrap="square" rtlCol="0" anchor="ctr"/>
-          <a:lstStyle/>
-          <a:p>
-            <a:pPr indent="0" marL="0">
-              <a:buNone/>
-            </a:pPr>
-            <a:r>
-              <a:rPr lang="en-US" sz="1400" dirty="0">
-                <a:solidFill>
-                  <a:srgbClr val="2A9D8F"/>
-                </a:solidFill>
-              </a:rPr>
-              <a:t>☐</a:t>
-            </a:r>
-            <a:endParaRPr lang="en-US" sz="1400" dirty="0"/>
-          </a:p>
-        </p:txBody>
-      </p:sp>
-      <p:sp>
-        <p:nvSpPr>
-          <p:cNvPr id="20" name="Text 18"/>
-          <p:cNvSpPr/>
-          <p:nvPr/>
-        </p:nvSpPr>
-        <p:spPr>
-          <a:xfrm>
-            <a:off x="1234440" y="3063240"/>
-            <a:ext cx="6949440" cy="438912"/>
-          </a:xfrm>
-          <a:prstGeom prst="rect">
-            <a:avLst/>
-          </a:prstGeom>
-          <a:noFill/>
-          <a:ln/>
-        </p:spPr>
-        <p:txBody>
-          <a:bodyPr wrap="square" rtlCol="0" anchor="ctr"/>
-          <a:lstStyle/>
-          <a:p>
-            <a:pPr indent="0" marL="0">
-              <a:buNone/>
-            </a:pPr>
-            <a:r>
-              <a:rPr lang="en-US" sz="1300" dirty="0">
-                <a:solidFill>
-                  <a:srgbClr val="3D3A36"/>
-                </a:solidFill>
-                <a:latin typeface="Calibri" pitchFamily="34" charset="0"/>
-                <a:ea typeface="Calibri" pitchFamily="34" charset="-122"/>
-                <a:cs typeface="Calibri" pitchFamily="34" charset="-120"/>
-              </a:rPr>
-              <a:t>I can draw a conclusion from results</a:t>
-            </a:r>
-            <a:endParaRPr lang="en-US" sz="1300" dirty="0"/>
-          </a:p>
-        </p:txBody>
-      </p:sp>
-      <p:sp>
-        <p:nvSpPr>
-          <p:cNvPr id="21" name="Shape 19"/>
-          <p:cNvSpPr/>
-          <p:nvPr/>
-        </p:nvSpPr>
-        <p:spPr>
-          <a:xfrm>
-            <a:off x="731520" y="3749040"/>
-            <a:ext cx="7680960" cy="594360"/>
-          </a:xfrm>
-          <a:prstGeom prst="rect">
-            <a:avLst/>
-          </a:prstGeom>
-          <a:solidFill>
-            <a:srgbClr val="E8F5F3"/>
-          </a:solidFill>
-          <a:ln/>
-          <a:effectLst>
-            <a:outerShdw sx="100000" sy="100000" kx="0" ky="0" algn="bl" rotWithShape="0" blurRad="50800" dist="25400" dir="8100000">
-              <a:srgbClr val="000000">
-                <a:alpha val="10000"/>
-              </a:srgbClr>
-            </a:outerShdw>
-          </a:effectLst>
-        </p:spPr>
-      </p:sp>
-      <p:sp>
-        <p:nvSpPr>
-          <p:cNvPr id="22" name="Text 20"/>
-          <p:cNvSpPr/>
-          <p:nvPr/>
-        </p:nvSpPr>
-        <p:spPr>
-          <a:xfrm>
-            <a:off x="914400" y="3749040"/>
-            <a:ext cx="7315200" cy="594360"/>
-          </a:xfrm>
-          <a:prstGeom prst="rect">
-            <a:avLst/>
-          </a:prstGeom>
-          <a:noFill/>
-          <a:ln/>
-        </p:spPr>
-        <p:txBody>
-          <a:bodyPr wrap="square" rtlCol="0" anchor="ctr"/>
-          <a:lstStyle/>
-          <a:p>
-            <a:pPr indent="0" marL="0">
-              <a:buNone/>
-            </a:pPr>
-            <a:r>
-              <a:rPr lang="en-US" sz="1200" b="1" dirty="0">
-                <a:solidFill>
-                  <a:srgbClr val="2A9D8F"/>
-                </a:solidFill>
-                <a:latin typeface="Calibri" pitchFamily="34" charset="0"/>
-                <a:ea typeface="Calibri" pitchFamily="34" charset="-122"/>
-                <a:cs typeface="Calibri" pitchFamily="34" charset="-120"/>
-              </a:rPr>
-              <a:t>Key Idea: </a:t>
-            </a:r>
-            <a:pPr indent="0" marL="0">
-              <a:buNone/>
-            </a:pPr>
-            <a:r>
-              <a:rPr lang="en-US" sz="1200" i="1" dirty="0">
-                <a:solidFill>
-                  <a:srgbClr val="3D3A36"/>
-                </a:solidFill>
-                <a:latin typeface="Calibri" pitchFamily="34" charset="0"/>
-                <a:ea typeface="Calibri" pitchFamily="34" charset="-122"/>
-                <a:cs typeface="Calibri" pitchFamily="34" charset="-120"/>
-              </a:rPr>
-              <a:t>Science is about asking questions and finding answers through careful investigation.</a:t>
-            </a:r>
-            <a:endParaRPr lang="en-US" sz="1200" dirty="0"/>
           </a:p>
         </p:txBody>
       </p:sp>
@@ -5570,6 +4603,13 @@
 <file path=ppt/slides/slide9.xml><?xml version="1.0" encoding="utf-8"?>
 <p:sld xmlns:a="http://schemas.openxmlformats.org/drawingml/2006/main" xmlns:r="http://schemas.openxmlformats.org/officeDocument/2006/relationships" xmlns:p="http://schemas.openxmlformats.org/presentationml/2006/main">
   <p:cSld name="Slide 9">
+    <p:bg>
+      <p:bgPr>
+        <a:solidFill>
+          <a:srgbClr val="111D35"/>
+        </a:solidFill>
+      </p:bgPr>
+    </p:bg>
     <p:spTree>
       <p:nvGrpSpPr>
         <p:cNvPr id="1" name=""/>
@@ -5586,76 +4626,14 @@
       </p:grpSpPr>
       <p:sp>
         <p:nvSpPr>
-          <p:cNvPr id="2" name="Shape 0"/>
-          <p:cNvSpPr/>
-          <p:nvPr/>
-        </p:nvSpPr>
-        <p:spPr>
-          <a:xfrm>
-            <a:off x="0" y="0"/>
-            <a:ext cx="9144000" cy="5143500"/>
-          </a:xfrm>
-          <a:prstGeom prst="rect">
-            <a:avLst/>
-          </a:prstGeom>
-          <a:solidFill>
-            <a:srgbClr val="1B2A4A"/>
-          </a:solidFill>
-          <a:ln/>
-        </p:spPr>
-      </p:sp>
-      <p:sp>
-        <p:nvSpPr>
-          <p:cNvPr id="3" name="Shape 1"/>
-          <p:cNvSpPr/>
-          <p:nvPr/>
-        </p:nvSpPr>
-        <p:spPr>
-          <a:xfrm>
-            <a:off x="0" y="4777740"/>
-            <a:ext cx="9144000" cy="365760"/>
-          </a:xfrm>
-          <a:prstGeom prst="rect">
-            <a:avLst/>
-          </a:prstGeom>
-          <a:solidFill>
-            <a:srgbClr val="2A9D8F"/>
-          </a:solidFill>
-          <a:ln/>
-        </p:spPr>
-      </p:sp>
-      <p:sp>
-        <p:nvSpPr>
-          <p:cNvPr id="4" name="Shape 2"/>
-          <p:cNvSpPr/>
-          <p:nvPr/>
-        </p:nvSpPr>
-        <p:spPr>
-          <a:xfrm>
-            <a:off x="-914400" y="-914400"/>
-            <a:ext cx="3657600" cy="3657600"/>
-          </a:xfrm>
-          <a:prstGeom prst="ellipse">
-            <a:avLst/>
-          </a:prstGeom>
-          <a:solidFill>
-            <a:srgbClr val="2A9D8F">
-              <a:alpha val="10000"/>
-            </a:srgbClr>
-          </a:solidFill>
-          <a:ln/>
-        </p:spPr>
-      </p:sp>
-      <p:sp>
-        <p:nvSpPr>
-          <p:cNvPr id="5" name="Text 3"/>
-          <p:cNvSpPr/>
-          <p:nvPr/>
-        </p:nvSpPr>
-        <p:spPr>
-          <a:xfrm>
-            <a:off x="731520" y="1463040"/>
-            <a:ext cx="7680960" cy="822960"/>
+          <p:cNvPr id="2" name="Text 0"/>
+          <p:cNvSpPr/>
+          <p:nvPr/>
+        </p:nvSpPr>
+        <p:spPr>
+          <a:xfrm>
+            <a:off x="731520" y="1371600"/>
+            <a:ext cx="9144000" cy="914400"/>
           </a:xfrm>
           <a:prstGeom prst="rect">
             <a:avLst/>
@@ -5667,11 +4645,11 @@
           <a:bodyPr wrap="square" rtlCol="0" anchor="ctr"/>
           <a:lstStyle/>
           <a:p>
-            <a:pPr algn="ctr" indent="0" marL="0">
+            <a:pPr indent="0" marL="0">
               <a:buNone/>
             </a:pPr>
             <a:r>
-              <a:rPr lang="en-US" sz="3400" b="1" dirty="0">
+              <a:rPr lang="en-US" sz="3200" b="1" dirty="0">
                 <a:solidFill>
                   <a:srgbClr val="FFFFFF"/>
                 </a:solidFill>
@@ -5681,20 +4659,20 @@
               </a:rPr>
               <a:t>Review &amp; Practise</a:t>
             </a:r>
-            <a:endParaRPr lang="en-US" sz="3400" dirty="0"/>
-          </a:p>
-        </p:txBody>
-      </p:sp>
-      <p:sp>
-        <p:nvSpPr>
-          <p:cNvPr id="6" name="Text 4"/>
-          <p:cNvSpPr/>
-          <p:nvPr/>
-        </p:nvSpPr>
-        <p:spPr>
-          <a:xfrm>
-            <a:off x="731520" y="2468880"/>
-            <a:ext cx="7680960" cy="457200"/>
+            <a:endParaRPr lang="en-US" sz="3200" dirty="0"/>
+          </a:p>
+        </p:txBody>
+      </p:sp>
+      <p:sp>
+        <p:nvSpPr>
+          <p:cNvPr id="3" name="Text 1"/>
+          <p:cNvSpPr/>
+          <p:nvPr/>
+        </p:nvSpPr>
+        <p:spPr>
+          <a:xfrm>
+            <a:off x="731520" y="2377440"/>
+            <a:ext cx="7315200" cy="548640"/>
           </a:xfrm>
           <a:prstGeom prst="rect">
             <a:avLst/>
@@ -5706,60 +4684,62 @@
           <a:bodyPr wrap="square" rtlCol="0" anchor="ctr"/>
           <a:lstStyle/>
           <a:p>
-            <a:pPr algn="ctr" indent="0" marL="0">
+            <a:pPr indent="0" marL="0">
               <a:buNone/>
             </a:pPr>
             <a:r>
-              <a:rPr lang="en-US" sz="1800" dirty="0">
-                <a:solidFill>
-                  <a:srgbClr val="2A9D8F"/>
-                </a:solidFill>
-                <a:latin typeface="Calibri" pitchFamily="34" charset="0"/>
-                <a:ea typeface="Calibri" pitchFamily="34" charset="-122"/>
-                <a:cs typeface="Calibri" pitchFamily="34" charset="-120"/>
+              <a:rPr lang="en-US" sz="1500" dirty="0">
+                <a:solidFill>
+                  <a:srgbClr val="FFFFFF">
+                    <a:alpha val="60000"/>
+                  </a:srgbClr>
+                </a:solidFill>
+                <a:latin typeface="Arial" pitchFamily="34" charset="0"/>
+                <a:ea typeface="Arial" pitchFamily="34" charset="-122"/>
+                <a:cs typeface="Arial" pitchFamily="34" charset="-120"/>
+              </a:rPr>
+              <a:t>Use the Self-Quiz, Review Games, and Practice Builder to test yourself.</a:t>
+            </a:r>
+            <a:endParaRPr lang="en-US" sz="1500" dirty="0"/>
+          </a:p>
+        </p:txBody>
+      </p:sp>
+      <p:sp>
+        <p:nvSpPr>
+          <p:cNvPr id="4" name="Text 2"/>
+          <p:cNvSpPr/>
+          <p:nvPr/>
+        </p:nvSpPr>
+        <p:spPr>
+          <a:xfrm>
+            <a:off x="731520" y="3291840"/>
+            <a:ext cx="3657600" cy="457200"/>
+          </a:xfrm>
+          <a:prstGeom prst="rect">
+            <a:avLst/>
+          </a:prstGeom>
+          <a:noFill/>
+          <a:ln/>
+        </p:spPr>
+        <p:txBody>
+          <a:bodyPr wrap="square" rtlCol="0" anchor="ctr"/>
+          <a:lstStyle/>
+          <a:p>
+            <a:pPr indent="0" marL="0">
+              <a:buNone/>
+            </a:pPr>
+            <a:r>
+              <a:rPr lang="en-US" sz="1800" b="1" dirty="0">
+                <a:solidFill>
+                  <a:srgbClr val="E9C46A"/>
+                </a:solidFill>
+                <a:latin typeface="Georgia" pitchFamily="34" charset="0"/>
+                <a:ea typeface="Georgia" pitchFamily="34" charset="-122"/>
+                <a:cs typeface="Georgia" pitchFamily="34" charset="-120"/>
               </a:rPr>
               <a:t>mrzocchi.com</a:t>
             </a:r>
             <a:endParaRPr lang="en-US" sz="1800" dirty="0"/>
-          </a:p>
-        </p:txBody>
-      </p:sp>
-      <p:sp>
-        <p:nvSpPr>
-          <p:cNvPr id="7" name="Text 5"/>
-          <p:cNvSpPr/>
-          <p:nvPr/>
-        </p:nvSpPr>
-        <p:spPr>
-          <a:xfrm>
-            <a:off x="731520" y="3108960"/>
-            <a:ext cx="7680960" cy="457200"/>
-          </a:xfrm>
-          <a:prstGeom prst="rect">
-            <a:avLst/>
-          </a:prstGeom>
-          <a:noFill/>
-          <a:ln/>
-        </p:spPr>
-        <p:txBody>
-          <a:bodyPr wrap="square" rtlCol="0" anchor="ctr"/>
-          <a:lstStyle/>
-          <a:p>
-            <a:pPr algn="ctr" indent="0" marL="0">
-              <a:buNone/>
-            </a:pPr>
-            <a:r>
-              <a:rPr lang="en-US" sz="1300" dirty="0">
-                <a:solidFill>
-                  <a:srgbClr val="9B9690"/>
-                </a:solidFill>
-                <a:latin typeface="Calibri" pitchFamily="34" charset="0"/>
-                <a:ea typeface="Calibri" pitchFamily="34" charset="-122"/>
-                <a:cs typeface="Calibri" pitchFamily="34" charset="-120"/>
-              </a:rPr>
-              <a:t>Use the Self-Quiz, Review Games, and Practice Builder to test yourself.</a:t>
-            </a:r>
-            <a:endParaRPr lang="en-US" sz="1300" dirty="0"/>
           </a:p>
         </p:txBody>
       </p:sp>
